--- a/ppts_output_v3/04_消费税风险指引.pptx
+++ b/ppts_output_v3/04_消费税风险指引.pptx
@@ -3310,7 +3310,7 @@
           <a:p>
             <a:pPr algn="l">
               <a:lnSpc>
-                <a:spcPts val="1820"/>
+                <a:spcPts val="2080"/>
               </a:lnSpc>
               <a:spcBef>
                 <a:spcPts val="0"/>
@@ -3320,7 +3320,7 @@
               </a:spcAft>
             </a:pPr>
             <a:r>
-              <a:rPr sz="1400" b="1">
+              <a:rPr sz="1600" b="1">
                 <a:solidFill>
                   <a:srgbClr val="1B3A5C"/>
                 </a:solidFill>
@@ -3332,7 +3332,7 @@
           <a:p>
             <a:pPr algn="l">
               <a:lnSpc>
-                <a:spcPts val="1820"/>
+                <a:spcPts val="2080"/>
               </a:lnSpc>
               <a:spcBef>
                 <a:spcPts val="800"/>
@@ -3342,7 +3342,7 @@
               </a:spcAft>
             </a:pPr>
             <a:r>
-              <a:rPr sz="1400" b="1">
+              <a:rPr sz="1600" b="1">
                 <a:solidFill>
                   <a:srgbClr val="333333"/>
                 </a:solidFill>
@@ -3354,17 +3354,17 @@
           <a:p>
             <a:pPr algn="l">
               <a:lnSpc>
-                <a:spcPts val="1430"/>
-              </a:lnSpc>
-              <a:spcBef>
-                <a:spcPts val="200"/>
-              </a:spcBef>
-              <a:spcAft>
-                <a:spcPts val="200"/>
-              </a:spcAft>
-            </a:pPr>
-            <a:r>
-              <a:rPr sz="1100" b="0">
+                <a:spcPts val="1820"/>
+              </a:lnSpc>
+              <a:spcBef>
+                <a:spcPts val="200"/>
+              </a:spcBef>
+              <a:spcAft>
+                <a:spcPts val="200"/>
+              </a:spcAft>
+            </a:pPr>
+            <a:r>
+              <a:rPr sz="1400" b="0">
                 <a:solidFill>
                   <a:srgbClr val="000000"/>
                 </a:solidFill>
@@ -3376,7 +3376,7 @@
           <a:p>
             <a:pPr algn="l">
               <a:lnSpc>
-                <a:spcPts val="1820"/>
+                <a:spcPts val="2080"/>
               </a:lnSpc>
               <a:spcBef>
                 <a:spcPts val="800"/>
@@ -3386,7 +3386,7 @@
               </a:spcAft>
             </a:pPr>
             <a:r>
-              <a:rPr sz="1400" b="1">
+              <a:rPr sz="1600" b="1">
                 <a:solidFill>
                   <a:srgbClr val="1B5C9E"/>
                 </a:solidFill>
@@ -3398,17 +3398,17 @@
           <a:p>
             <a:pPr algn="l">
               <a:lnSpc>
-                <a:spcPts val="1430"/>
-              </a:lnSpc>
-              <a:spcBef>
-                <a:spcPts val="200"/>
-              </a:spcBef>
-              <a:spcAft>
-                <a:spcPts val="200"/>
-              </a:spcAft>
-            </a:pPr>
-            <a:r>
-              <a:rPr sz="1100" b="0">
+                <a:spcPts val="1820"/>
+              </a:lnSpc>
+              <a:spcBef>
+                <a:spcPts val="200"/>
+              </a:spcBef>
+              <a:spcAft>
+                <a:spcPts val="200"/>
+              </a:spcAft>
+            </a:pPr>
+            <a:r>
+              <a:rPr sz="1400" b="0">
                 <a:solidFill>
                   <a:srgbClr val="000000"/>
                 </a:solidFill>
@@ -3420,17 +3420,17 @@
           <a:p>
             <a:pPr algn="l">
               <a:lnSpc>
-                <a:spcPts val="1430"/>
-              </a:lnSpc>
-              <a:spcBef>
-                <a:spcPts val="200"/>
-              </a:spcBef>
-              <a:spcAft>
-                <a:spcPts val="200"/>
-              </a:spcAft>
-            </a:pPr>
-            <a:r>
-              <a:rPr sz="1100" b="0">
+                <a:spcPts val="1820"/>
+              </a:lnSpc>
+              <a:spcBef>
+                <a:spcPts val="200"/>
+              </a:spcBef>
+              <a:spcAft>
+                <a:spcPts val="200"/>
+              </a:spcAft>
+            </a:pPr>
+            <a:r>
+              <a:rPr sz="1400" b="0">
                 <a:solidFill>
                   <a:srgbClr val="000000"/>
                 </a:solidFill>
@@ -3442,17 +3442,17 @@
           <a:p>
             <a:pPr algn="l">
               <a:lnSpc>
-                <a:spcPts val="1430"/>
-              </a:lnSpc>
-              <a:spcBef>
-                <a:spcPts val="200"/>
-              </a:spcBef>
-              <a:spcAft>
-                <a:spcPts val="200"/>
-              </a:spcAft>
-            </a:pPr>
-            <a:r>
-              <a:rPr sz="1100" b="0">
+                <a:spcPts val="1820"/>
+              </a:lnSpc>
+              <a:spcBef>
+                <a:spcPts val="200"/>
+              </a:spcBef>
+              <a:spcAft>
+                <a:spcPts val="200"/>
+              </a:spcAft>
+            </a:pPr>
+            <a:r>
+              <a:rPr sz="1400" b="0">
                 <a:solidFill>
                   <a:srgbClr val="000000"/>
                 </a:solidFill>
@@ -3464,7 +3464,7 @@
           <a:p>
             <a:pPr algn="l">
               <a:lnSpc>
-                <a:spcPts val="1820"/>
+                <a:spcPts val="2080"/>
               </a:lnSpc>
               <a:spcBef>
                 <a:spcPts val="800"/>
@@ -3474,7 +3474,7 @@
               </a:spcAft>
             </a:pPr>
             <a:r>
-              <a:rPr sz="1400" b="1">
+              <a:rPr sz="1600" b="1">
                 <a:solidFill>
                   <a:srgbClr val="CC3333"/>
                 </a:solidFill>
@@ -3486,17 +3486,17 @@
           <a:p>
             <a:pPr algn="l">
               <a:lnSpc>
-                <a:spcPts val="1430"/>
-              </a:lnSpc>
-              <a:spcBef>
-                <a:spcPts val="200"/>
-              </a:spcBef>
-              <a:spcAft>
-                <a:spcPts val="200"/>
-              </a:spcAft>
-            </a:pPr>
-            <a:r>
-              <a:rPr sz="1100" b="0">
+                <a:spcPts val="1820"/>
+              </a:lnSpc>
+              <a:spcBef>
+                <a:spcPts val="200"/>
+              </a:spcBef>
+              <a:spcAft>
+                <a:spcPts val="200"/>
+              </a:spcAft>
+            </a:pPr>
+            <a:r>
+              <a:rPr sz="1400" b="0">
                 <a:solidFill>
                   <a:srgbClr val="000000"/>
                 </a:solidFill>
@@ -3508,7 +3508,7 @@
           <a:p>
             <a:pPr algn="l">
               <a:lnSpc>
-                <a:spcPts val="1820"/>
+                <a:spcPts val="2080"/>
               </a:lnSpc>
               <a:spcBef>
                 <a:spcPts val="800"/>
@@ -3518,7 +3518,7 @@
               </a:spcAft>
             </a:pPr>
             <a:r>
-              <a:rPr sz="1400" b="1">
+              <a:rPr sz="1600" b="1">
                 <a:solidFill>
                   <a:srgbClr val="008040"/>
                 </a:solidFill>
@@ -3530,17 +3530,17 @@
           <a:p>
             <a:pPr algn="l">
               <a:lnSpc>
-                <a:spcPts val="1430"/>
-              </a:lnSpc>
-              <a:spcBef>
-                <a:spcPts val="200"/>
-              </a:spcBef>
-              <a:spcAft>
-                <a:spcPts val="200"/>
-              </a:spcAft>
-            </a:pPr>
-            <a:r>
-              <a:rPr sz="1100" b="0">
+                <a:spcPts val="1820"/>
+              </a:lnSpc>
+              <a:spcBef>
+                <a:spcPts val="200"/>
+              </a:spcBef>
+              <a:spcAft>
+                <a:spcPts val="200"/>
+              </a:spcAft>
+            </a:pPr>
+            <a:r>
+              <a:rPr sz="1400" b="0">
                 <a:solidFill>
                   <a:srgbClr val="000000"/>
                 </a:solidFill>
@@ -3645,7 +3645,7 @@
           <a:p>
             <a:pPr algn="l">
               <a:lnSpc>
-                <a:spcPts val="1820"/>
+                <a:spcPts val="2080"/>
               </a:lnSpc>
               <a:spcBef>
                 <a:spcPts val="0"/>
@@ -3655,7 +3655,7 @@
               </a:spcAft>
             </a:pPr>
             <a:r>
-              <a:rPr sz="1400" b="1">
+              <a:rPr sz="1600" b="1">
                 <a:solidFill>
                   <a:srgbClr val="1B3A5C"/>
                 </a:solidFill>
@@ -3667,7 +3667,7 @@
           <a:p>
             <a:pPr algn="l">
               <a:lnSpc>
-                <a:spcPts val="1820"/>
+                <a:spcPts val="2080"/>
               </a:lnSpc>
               <a:spcBef>
                 <a:spcPts val="800"/>
@@ -3677,7 +3677,7 @@
               </a:spcAft>
             </a:pPr>
             <a:r>
-              <a:rPr sz="1400" b="1">
+              <a:rPr sz="1600" b="1">
                 <a:solidFill>
                   <a:srgbClr val="333333"/>
                 </a:solidFill>
@@ -3689,17 +3689,17 @@
           <a:p>
             <a:pPr algn="l">
               <a:lnSpc>
-                <a:spcPts val="1430"/>
-              </a:lnSpc>
-              <a:spcBef>
-                <a:spcPts val="200"/>
-              </a:spcBef>
-              <a:spcAft>
-                <a:spcPts val="200"/>
-              </a:spcAft>
-            </a:pPr>
-            <a:r>
-              <a:rPr sz="1100" b="0">
+                <a:spcPts val="1820"/>
+              </a:lnSpc>
+              <a:spcBef>
+                <a:spcPts val="200"/>
+              </a:spcBef>
+              <a:spcAft>
+                <a:spcPts val="200"/>
+              </a:spcAft>
+            </a:pPr>
+            <a:r>
+              <a:rPr sz="1400" b="0">
                 <a:solidFill>
                   <a:srgbClr val="000000"/>
                 </a:solidFill>
@@ -3711,7 +3711,7 @@
           <a:p>
             <a:pPr algn="l">
               <a:lnSpc>
-                <a:spcPts val="1820"/>
+                <a:spcPts val="2080"/>
               </a:lnSpc>
               <a:spcBef>
                 <a:spcPts val="800"/>
@@ -3721,7 +3721,7 @@
               </a:spcAft>
             </a:pPr>
             <a:r>
-              <a:rPr sz="1400" b="1">
+              <a:rPr sz="1600" b="1">
                 <a:solidFill>
                   <a:srgbClr val="1B5C9E"/>
                 </a:solidFill>
@@ -3733,17 +3733,17 @@
           <a:p>
             <a:pPr algn="l">
               <a:lnSpc>
-                <a:spcPts val="1430"/>
-              </a:lnSpc>
-              <a:spcBef>
-                <a:spcPts val="200"/>
-              </a:spcBef>
-              <a:spcAft>
-                <a:spcPts val="200"/>
-              </a:spcAft>
-            </a:pPr>
-            <a:r>
-              <a:rPr sz="1100" b="0">
+                <a:spcPts val="1820"/>
+              </a:lnSpc>
+              <a:spcBef>
+                <a:spcPts val="200"/>
+              </a:spcBef>
+              <a:spcAft>
+                <a:spcPts val="200"/>
+              </a:spcAft>
+            </a:pPr>
+            <a:r>
+              <a:rPr sz="1400" b="0">
                 <a:solidFill>
                   <a:srgbClr val="000000"/>
                 </a:solidFill>
@@ -3755,7 +3755,7 @@
           <a:p>
             <a:pPr algn="l">
               <a:lnSpc>
-                <a:spcPts val="1820"/>
+                <a:spcPts val="2080"/>
               </a:lnSpc>
               <a:spcBef>
                 <a:spcPts val="800"/>
@@ -3765,7 +3765,7 @@
               </a:spcAft>
             </a:pPr>
             <a:r>
-              <a:rPr sz="1400" b="1">
+              <a:rPr sz="1600" b="1">
                 <a:solidFill>
                   <a:srgbClr val="CC3333"/>
                 </a:solidFill>
@@ -3777,17 +3777,17 @@
           <a:p>
             <a:pPr algn="l">
               <a:lnSpc>
-                <a:spcPts val="1430"/>
-              </a:lnSpc>
-              <a:spcBef>
-                <a:spcPts val="200"/>
-              </a:spcBef>
-              <a:spcAft>
-                <a:spcPts val="200"/>
-              </a:spcAft>
-            </a:pPr>
-            <a:r>
-              <a:rPr sz="1100" b="0">
+                <a:spcPts val="1820"/>
+              </a:lnSpc>
+              <a:spcBef>
+                <a:spcPts val="200"/>
+              </a:spcBef>
+              <a:spcAft>
+                <a:spcPts val="200"/>
+              </a:spcAft>
+            </a:pPr>
+            <a:r>
+              <a:rPr sz="1400" b="0">
                 <a:solidFill>
                   <a:srgbClr val="000000"/>
                 </a:solidFill>
@@ -3799,7 +3799,7 @@
           <a:p>
             <a:pPr algn="l">
               <a:lnSpc>
-                <a:spcPts val="1820"/>
+                <a:spcPts val="2080"/>
               </a:lnSpc>
               <a:spcBef>
                 <a:spcPts val="800"/>
@@ -3809,7 +3809,7 @@
               </a:spcAft>
             </a:pPr>
             <a:r>
-              <a:rPr sz="1400" b="1">
+              <a:rPr sz="1600" b="1">
                 <a:solidFill>
                   <a:srgbClr val="008040"/>
                 </a:solidFill>
@@ -3821,17 +3821,17 @@
           <a:p>
             <a:pPr algn="l">
               <a:lnSpc>
-                <a:spcPts val="1430"/>
-              </a:lnSpc>
-              <a:spcBef>
-                <a:spcPts val="200"/>
-              </a:spcBef>
-              <a:spcAft>
-                <a:spcPts val="200"/>
-              </a:spcAft>
-            </a:pPr>
-            <a:r>
-              <a:rPr sz="1100" b="0">
+                <a:spcPts val="1820"/>
+              </a:lnSpc>
+              <a:spcBef>
+                <a:spcPts val="200"/>
+              </a:spcBef>
+              <a:spcAft>
+                <a:spcPts val="200"/>
+              </a:spcAft>
+            </a:pPr>
+            <a:r>
+              <a:rPr sz="1400" b="0">
                 <a:solidFill>
                   <a:srgbClr val="000000"/>
                 </a:solidFill>
@@ -3936,7 +3936,7 @@
           <a:p>
             <a:pPr algn="l">
               <a:lnSpc>
-                <a:spcPts val="1820"/>
+                <a:spcPts val="2080"/>
               </a:lnSpc>
               <a:spcBef>
                 <a:spcPts val="0"/>
@@ -3946,7 +3946,7 @@
               </a:spcAft>
             </a:pPr>
             <a:r>
-              <a:rPr sz="1400" b="1">
+              <a:rPr sz="1600" b="1">
                 <a:solidFill>
                   <a:srgbClr val="1B3A5C"/>
                 </a:solidFill>
@@ -3958,7 +3958,7 @@
           <a:p>
             <a:pPr algn="l">
               <a:lnSpc>
-                <a:spcPts val="1820"/>
+                <a:spcPts val="2080"/>
               </a:lnSpc>
               <a:spcBef>
                 <a:spcPts val="800"/>
@@ -3968,7 +3968,7 @@
               </a:spcAft>
             </a:pPr>
             <a:r>
-              <a:rPr sz="1400" b="1">
+              <a:rPr sz="1600" b="1">
                 <a:solidFill>
                   <a:srgbClr val="333333"/>
                 </a:solidFill>
@@ -3980,17 +3980,17 @@
           <a:p>
             <a:pPr algn="l">
               <a:lnSpc>
-                <a:spcPts val="1430"/>
-              </a:lnSpc>
-              <a:spcBef>
-                <a:spcPts val="200"/>
-              </a:spcBef>
-              <a:spcAft>
-                <a:spcPts val="200"/>
-              </a:spcAft>
-            </a:pPr>
-            <a:r>
-              <a:rPr sz="1100" b="0">
+                <a:spcPts val="1820"/>
+              </a:lnSpc>
+              <a:spcBef>
+                <a:spcPts val="200"/>
+              </a:spcBef>
+              <a:spcAft>
+                <a:spcPts val="200"/>
+              </a:spcAft>
+            </a:pPr>
+            <a:r>
+              <a:rPr sz="1400" b="0">
                 <a:solidFill>
                   <a:srgbClr val="000000"/>
                 </a:solidFill>
@@ -4002,7 +4002,7 @@
           <a:p>
             <a:pPr algn="l">
               <a:lnSpc>
-                <a:spcPts val="1820"/>
+                <a:spcPts val="2080"/>
               </a:lnSpc>
               <a:spcBef>
                 <a:spcPts val="800"/>
@@ -4012,7 +4012,7 @@
               </a:spcAft>
             </a:pPr>
             <a:r>
-              <a:rPr sz="1400" b="1">
+              <a:rPr sz="1600" b="1">
                 <a:solidFill>
                   <a:srgbClr val="1B5C9E"/>
                 </a:solidFill>
@@ -4024,17 +4024,17 @@
           <a:p>
             <a:pPr algn="l">
               <a:lnSpc>
-                <a:spcPts val="1430"/>
-              </a:lnSpc>
-              <a:spcBef>
-                <a:spcPts val="200"/>
-              </a:spcBef>
-              <a:spcAft>
-                <a:spcPts val="200"/>
-              </a:spcAft>
-            </a:pPr>
-            <a:r>
-              <a:rPr sz="1100" b="0">
+                <a:spcPts val="1820"/>
+              </a:lnSpc>
+              <a:spcBef>
+                <a:spcPts val="200"/>
+              </a:spcBef>
+              <a:spcAft>
+                <a:spcPts val="200"/>
+              </a:spcAft>
+            </a:pPr>
+            <a:r>
+              <a:rPr sz="1400" b="0">
                 <a:solidFill>
                   <a:srgbClr val="000000"/>
                 </a:solidFill>
@@ -4046,17 +4046,17 @@
           <a:p>
             <a:pPr algn="l">
               <a:lnSpc>
-                <a:spcPts val="1430"/>
-              </a:lnSpc>
-              <a:spcBef>
-                <a:spcPts val="200"/>
-              </a:spcBef>
-              <a:spcAft>
-                <a:spcPts val="200"/>
-              </a:spcAft>
-            </a:pPr>
-            <a:r>
-              <a:rPr sz="1100" b="0">
+                <a:spcPts val="1820"/>
+              </a:lnSpc>
+              <a:spcBef>
+                <a:spcPts val="200"/>
+              </a:spcBef>
+              <a:spcAft>
+                <a:spcPts val="200"/>
+              </a:spcAft>
+            </a:pPr>
+            <a:r>
+              <a:rPr sz="1400" b="0">
                 <a:solidFill>
                   <a:srgbClr val="000000"/>
                 </a:solidFill>
@@ -4068,7 +4068,7 @@
           <a:p>
             <a:pPr algn="l">
               <a:lnSpc>
-                <a:spcPts val="1820"/>
+                <a:spcPts val="2080"/>
               </a:lnSpc>
               <a:spcBef>
                 <a:spcPts val="800"/>
@@ -4078,7 +4078,7 @@
               </a:spcAft>
             </a:pPr>
             <a:r>
-              <a:rPr sz="1400" b="1">
+              <a:rPr sz="1600" b="1">
                 <a:solidFill>
                   <a:srgbClr val="CC3333"/>
                 </a:solidFill>
@@ -4090,17 +4090,17 @@
           <a:p>
             <a:pPr algn="l">
               <a:lnSpc>
-                <a:spcPts val="1430"/>
-              </a:lnSpc>
-              <a:spcBef>
-                <a:spcPts val="200"/>
-              </a:spcBef>
-              <a:spcAft>
-                <a:spcPts val="200"/>
-              </a:spcAft>
-            </a:pPr>
-            <a:r>
-              <a:rPr sz="1100" b="0">
+                <a:spcPts val="1820"/>
+              </a:lnSpc>
+              <a:spcBef>
+                <a:spcPts val="200"/>
+              </a:spcBef>
+              <a:spcAft>
+                <a:spcPts val="200"/>
+              </a:spcAft>
+            </a:pPr>
+            <a:r>
+              <a:rPr sz="1400" b="0">
                 <a:solidFill>
                   <a:srgbClr val="000000"/>
                 </a:solidFill>
@@ -4112,7 +4112,7 @@
           <a:p>
             <a:pPr algn="l">
               <a:lnSpc>
-                <a:spcPts val="1820"/>
+                <a:spcPts val="2080"/>
               </a:lnSpc>
               <a:spcBef>
                 <a:spcPts val="800"/>
@@ -4122,7 +4122,7 @@
               </a:spcAft>
             </a:pPr>
             <a:r>
-              <a:rPr sz="1400" b="1">
+              <a:rPr sz="1600" b="1">
                 <a:solidFill>
                   <a:srgbClr val="008040"/>
                 </a:solidFill>
@@ -4134,17 +4134,17 @@
           <a:p>
             <a:pPr algn="l">
               <a:lnSpc>
-                <a:spcPts val="1430"/>
-              </a:lnSpc>
-              <a:spcBef>
-                <a:spcPts val="200"/>
-              </a:spcBef>
-              <a:spcAft>
-                <a:spcPts val="200"/>
-              </a:spcAft>
-            </a:pPr>
-            <a:r>
-              <a:rPr sz="1100" b="0">
+                <a:spcPts val="1820"/>
+              </a:lnSpc>
+              <a:spcBef>
+                <a:spcPts val="200"/>
+              </a:spcBef>
+              <a:spcAft>
+                <a:spcPts val="200"/>
+              </a:spcAft>
+            </a:pPr>
+            <a:r>
+              <a:rPr sz="1400" b="0">
                 <a:solidFill>
                   <a:srgbClr val="000000"/>
                 </a:solidFill>
@@ -4249,7 +4249,7 @@
           <a:p>
             <a:pPr algn="l">
               <a:lnSpc>
-                <a:spcPts val="1820"/>
+                <a:spcPts val="2080"/>
               </a:lnSpc>
               <a:spcBef>
                 <a:spcPts val="0"/>
@@ -4259,7 +4259,7 @@
               </a:spcAft>
             </a:pPr>
             <a:r>
-              <a:rPr sz="1400" b="1">
+              <a:rPr sz="1600" b="1">
                 <a:solidFill>
                   <a:srgbClr val="1B3A5C"/>
                 </a:solidFill>
@@ -4271,7 +4271,7 @@
           <a:p>
             <a:pPr algn="l">
               <a:lnSpc>
-                <a:spcPts val="1820"/>
+                <a:spcPts val="2080"/>
               </a:lnSpc>
               <a:spcBef>
                 <a:spcPts val="800"/>
@@ -4281,7 +4281,7 @@
               </a:spcAft>
             </a:pPr>
             <a:r>
-              <a:rPr sz="1400" b="1">
+              <a:rPr sz="1600" b="1">
                 <a:solidFill>
                   <a:srgbClr val="333333"/>
                 </a:solidFill>
@@ -4293,17 +4293,17 @@
           <a:p>
             <a:pPr algn="l">
               <a:lnSpc>
-                <a:spcPts val="1430"/>
-              </a:lnSpc>
-              <a:spcBef>
-                <a:spcPts val="200"/>
-              </a:spcBef>
-              <a:spcAft>
-                <a:spcPts val="200"/>
-              </a:spcAft>
-            </a:pPr>
-            <a:r>
-              <a:rPr sz="1100" b="0">
+                <a:spcPts val="1820"/>
+              </a:lnSpc>
+              <a:spcBef>
+                <a:spcPts val="200"/>
+              </a:spcBef>
+              <a:spcAft>
+                <a:spcPts val="200"/>
+              </a:spcAft>
+            </a:pPr>
+            <a:r>
+              <a:rPr sz="1400" b="0">
                 <a:solidFill>
                   <a:srgbClr val="000000"/>
                 </a:solidFill>
@@ -4315,7 +4315,7 @@
           <a:p>
             <a:pPr algn="l">
               <a:lnSpc>
-                <a:spcPts val="1820"/>
+                <a:spcPts val="2080"/>
               </a:lnSpc>
               <a:spcBef>
                 <a:spcPts val="800"/>
@@ -4325,7 +4325,7 @@
               </a:spcAft>
             </a:pPr>
             <a:r>
-              <a:rPr sz="1400" b="1">
+              <a:rPr sz="1600" b="1">
                 <a:solidFill>
                   <a:srgbClr val="1B5C9E"/>
                 </a:solidFill>
@@ -4337,17 +4337,17 @@
           <a:p>
             <a:pPr algn="l">
               <a:lnSpc>
-                <a:spcPts val="1430"/>
-              </a:lnSpc>
-              <a:spcBef>
-                <a:spcPts val="200"/>
-              </a:spcBef>
-              <a:spcAft>
-                <a:spcPts val="200"/>
-              </a:spcAft>
-            </a:pPr>
-            <a:r>
-              <a:rPr sz="1100" b="0">
+                <a:spcPts val="1820"/>
+              </a:lnSpc>
+              <a:spcBef>
+                <a:spcPts val="200"/>
+              </a:spcBef>
+              <a:spcAft>
+                <a:spcPts val="200"/>
+              </a:spcAft>
+            </a:pPr>
+            <a:r>
+              <a:rPr sz="1400" b="0">
                 <a:solidFill>
                   <a:srgbClr val="000000"/>
                 </a:solidFill>
@@ -4359,7 +4359,7 @@
           <a:p>
             <a:pPr algn="l">
               <a:lnSpc>
-                <a:spcPts val="1820"/>
+                <a:spcPts val="2080"/>
               </a:lnSpc>
               <a:spcBef>
                 <a:spcPts val="800"/>
@@ -4369,7 +4369,7 @@
               </a:spcAft>
             </a:pPr>
             <a:r>
-              <a:rPr sz="1400" b="1">
+              <a:rPr sz="1600" b="1">
                 <a:solidFill>
                   <a:srgbClr val="CC3333"/>
                 </a:solidFill>
@@ -4381,17 +4381,17 @@
           <a:p>
             <a:pPr algn="l">
               <a:lnSpc>
-                <a:spcPts val="1430"/>
-              </a:lnSpc>
-              <a:spcBef>
-                <a:spcPts val="200"/>
-              </a:spcBef>
-              <a:spcAft>
-                <a:spcPts val="200"/>
-              </a:spcAft>
-            </a:pPr>
-            <a:r>
-              <a:rPr sz="1100" b="0">
+                <a:spcPts val="1820"/>
+              </a:lnSpc>
+              <a:spcBef>
+                <a:spcPts val="200"/>
+              </a:spcBef>
+              <a:spcAft>
+                <a:spcPts val="200"/>
+              </a:spcAft>
+            </a:pPr>
+            <a:r>
+              <a:rPr sz="1400" b="0">
                 <a:solidFill>
                   <a:srgbClr val="000000"/>
                 </a:solidFill>
@@ -4403,7 +4403,7 @@
           <a:p>
             <a:pPr algn="l">
               <a:lnSpc>
-                <a:spcPts val="1820"/>
+                <a:spcPts val="2080"/>
               </a:lnSpc>
               <a:spcBef>
                 <a:spcPts val="800"/>
@@ -4413,7 +4413,7 @@
               </a:spcAft>
             </a:pPr>
             <a:r>
-              <a:rPr sz="1400" b="1">
+              <a:rPr sz="1600" b="1">
                 <a:solidFill>
                   <a:srgbClr val="008040"/>
                 </a:solidFill>
@@ -4425,17 +4425,17 @@
           <a:p>
             <a:pPr algn="l">
               <a:lnSpc>
-                <a:spcPts val="1430"/>
-              </a:lnSpc>
-              <a:spcBef>
-                <a:spcPts val="200"/>
-              </a:spcBef>
-              <a:spcAft>
-                <a:spcPts val="200"/>
-              </a:spcAft>
-            </a:pPr>
-            <a:r>
-              <a:rPr sz="1100" b="0">
+                <a:spcPts val="1820"/>
+              </a:lnSpc>
+              <a:spcBef>
+                <a:spcPts val="200"/>
+              </a:spcBef>
+              <a:spcAft>
+                <a:spcPts val="200"/>
+              </a:spcAft>
+            </a:pPr>
+            <a:r>
+              <a:rPr sz="1400" b="0">
                 <a:solidFill>
                   <a:srgbClr val="000000"/>
                 </a:solidFill>
@@ -4540,7 +4540,7 @@
           <a:p>
             <a:pPr algn="l">
               <a:lnSpc>
-                <a:spcPts val="1820"/>
+                <a:spcPts val="2080"/>
               </a:lnSpc>
               <a:spcBef>
                 <a:spcPts val="0"/>
@@ -4550,7 +4550,7 @@
               </a:spcAft>
             </a:pPr>
             <a:r>
-              <a:rPr sz="1400" b="1">
+              <a:rPr sz="1600" b="1">
                 <a:solidFill>
                   <a:srgbClr val="1B3A5C"/>
                 </a:solidFill>
@@ -4562,7 +4562,7 @@
           <a:p>
             <a:pPr algn="l">
               <a:lnSpc>
-                <a:spcPts val="1820"/>
+                <a:spcPts val="2080"/>
               </a:lnSpc>
               <a:spcBef>
                 <a:spcPts val="800"/>
@@ -4572,7 +4572,7 @@
               </a:spcAft>
             </a:pPr>
             <a:r>
-              <a:rPr sz="1400" b="1">
+              <a:rPr sz="1600" b="1">
                 <a:solidFill>
                   <a:srgbClr val="333333"/>
                 </a:solidFill>
@@ -4584,17 +4584,17 @@
           <a:p>
             <a:pPr algn="l">
               <a:lnSpc>
-                <a:spcPts val="1430"/>
-              </a:lnSpc>
-              <a:spcBef>
-                <a:spcPts val="200"/>
-              </a:spcBef>
-              <a:spcAft>
-                <a:spcPts val="200"/>
-              </a:spcAft>
-            </a:pPr>
-            <a:r>
-              <a:rPr sz="1100" b="0">
+                <a:spcPts val="1820"/>
+              </a:lnSpc>
+              <a:spcBef>
+                <a:spcPts val="200"/>
+              </a:spcBef>
+              <a:spcAft>
+                <a:spcPts val="200"/>
+              </a:spcAft>
+            </a:pPr>
+            <a:r>
+              <a:rPr sz="1400" b="0">
                 <a:solidFill>
                   <a:srgbClr val="000000"/>
                 </a:solidFill>
@@ -4606,7 +4606,7 @@
           <a:p>
             <a:pPr algn="l">
               <a:lnSpc>
-                <a:spcPts val="1820"/>
+                <a:spcPts val="2080"/>
               </a:lnSpc>
               <a:spcBef>
                 <a:spcPts val="800"/>
@@ -4616,7 +4616,7 @@
               </a:spcAft>
             </a:pPr>
             <a:r>
-              <a:rPr sz="1400" b="1">
+              <a:rPr sz="1600" b="1">
                 <a:solidFill>
                   <a:srgbClr val="1B5C9E"/>
                 </a:solidFill>
@@ -4628,17 +4628,17 @@
           <a:p>
             <a:pPr algn="l">
               <a:lnSpc>
-                <a:spcPts val="1430"/>
-              </a:lnSpc>
-              <a:spcBef>
-                <a:spcPts val="200"/>
-              </a:spcBef>
-              <a:spcAft>
-                <a:spcPts val="200"/>
-              </a:spcAft>
-            </a:pPr>
-            <a:r>
-              <a:rPr sz="1100" b="0">
+                <a:spcPts val="1820"/>
+              </a:lnSpc>
+              <a:spcBef>
+                <a:spcPts val="200"/>
+              </a:spcBef>
+              <a:spcAft>
+                <a:spcPts val="200"/>
+              </a:spcAft>
+            </a:pPr>
+            <a:r>
+              <a:rPr sz="1400" b="0">
                 <a:solidFill>
                   <a:srgbClr val="000000"/>
                 </a:solidFill>
@@ -4650,17 +4650,17 @@
           <a:p>
             <a:pPr algn="l">
               <a:lnSpc>
-                <a:spcPts val="1430"/>
-              </a:lnSpc>
-              <a:spcBef>
-                <a:spcPts val="200"/>
-              </a:spcBef>
-              <a:spcAft>
-                <a:spcPts val="200"/>
-              </a:spcAft>
-            </a:pPr>
-            <a:r>
-              <a:rPr sz="1100" b="0">
+                <a:spcPts val="1820"/>
+              </a:lnSpc>
+              <a:spcBef>
+                <a:spcPts val="200"/>
+              </a:spcBef>
+              <a:spcAft>
+                <a:spcPts val="200"/>
+              </a:spcAft>
+            </a:pPr>
+            <a:r>
+              <a:rPr sz="1400" b="0">
                 <a:solidFill>
                   <a:srgbClr val="000000"/>
                 </a:solidFill>
@@ -4672,7 +4672,7 @@
           <a:p>
             <a:pPr algn="l">
               <a:lnSpc>
-                <a:spcPts val="1820"/>
+                <a:spcPts val="2080"/>
               </a:lnSpc>
               <a:spcBef>
                 <a:spcPts val="800"/>
@@ -4682,7 +4682,7 @@
               </a:spcAft>
             </a:pPr>
             <a:r>
-              <a:rPr sz="1400" b="1">
+              <a:rPr sz="1600" b="1">
                 <a:solidFill>
                   <a:srgbClr val="CC3333"/>
                 </a:solidFill>
@@ -4694,17 +4694,17 @@
           <a:p>
             <a:pPr algn="l">
               <a:lnSpc>
-                <a:spcPts val="1430"/>
-              </a:lnSpc>
-              <a:spcBef>
-                <a:spcPts val="200"/>
-              </a:spcBef>
-              <a:spcAft>
-                <a:spcPts val="200"/>
-              </a:spcAft>
-            </a:pPr>
-            <a:r>
-              <a:rPr sz="1100" b="0">
+                <a:spcPts val="1820"/>
+              </a:lnSpc>
+              <a:spcBef>
+                <a:spcPts val="200"/>
+              </a:spcBef>
+              <a:spcAft>
+                <a:spcPts val="200"/>
+              </a:spcAft>
+            </a:pPr>
+            <a:r>
+              <a:rPr sz="1400" b="0">
                 <a:solidFill>
                   <a:srgbClr val="000000"/>
                 </a:solidFill>
@@ -4716,7 +4716,7 @@
           <a:p>
             <a:pPr algn="l">
               <a:lnSpc>
-                <a:spcPts val="1820"/>
+                <a:spcPts val="2080"/>
               </a:lnSpc>
               <a:spcBef>
                 <a:spcPts val="800"/>
@@ -4726,7 +4726,7 @@
               </a:spcAft>
             </a:pPr>
             <a:r>
-              <a:rPr sz="1400" b="1">
+              <a:rPr sz="1600" b="1">
                 <a:solidFill>
                   <a:srgbClr val="008040"/>
                 </a:solidFill>
@@ -4738,17 +4738,17 @@
           <a:p>
             <a:pPr algn="l">
               <a:lnSpc>
-                <a:spcPts val="1430"/>
-              </a:lnSpc>
-              <a:spcBef>
-                <a:spcPts val="200"/>
-              </a:spcBef>
-              <a:spcAft>
-                <a:spcPts val="200"/>
-              </a:spcAft>
-            </a:pPr>
-            <a:r>
-              <a:rPr sz="1100" b="0">
+                <a:spcPts val="1820"/>
+              </a:lnSpc>
+              <a:spcBef>
+                <a:spcPts val="200"/>
+              </a:spcBef>
+              <a:spcAft>
+                <a:spcPts val="200"/>
+              </a:spcAft>
+            </a:pPr>
+            <a:r>
+              <a:rPr sz="1400" b="0">
                 <a:solidFill>
                   <a:srgbClr val="000000"/>
                 </a:solidFill>
@@ -4853,7 +4853,7 @@
           <a:p>
             <a:pPr algn="l">
               <a:lnSpc>
-                <a:spcPts val="1820"/>
+                <a:spcPts val="2080"/>
               </a:lnSpc>
               <a:spcBef>
                 <a:spcPts val="0"/>
@@ -4863,7 +4863,7 @@
               </a:spcAft>
             </a:pPr>
             <a:r>
-              <a:rPr sz="1400" b="1">
+              <a:rPr sz="1600" b="1">
                 <a:solidFill>
                   <a:srgbClr val="1B3A5C"/>
                 </a:solidFill>
@@ -4875,7 +4875,7 @@
           <a:p>
             <a:pPr algn="l">
               <a:lnSpc>
-                <a:spcPts val="1820"/>
+                <a:spcPts val="2080"/>
               </a:lnSpc>
               <a:spcBef>
                 <a:spcPts val="800"/>
@@ -4885,7 +4885,7 @@
               </a:spcAft>
             </a:pPr>
             <a:r>
-              <a:rPr sz="1400" b="1">
+              <a:rPr sz="1600" b="1">
                 <a:solidFill>
                   <a:srgbClr val="333333"/>
                 </a:solidFill>
@@ -4897,17 +4897,17 @@
           <a:p>
             <a:pPr algn="l">
               <a:lnSpc>
-                <a:spcPts val="1430"/>
-              </a:lnSpc>
-              <a:spcBef>
-                <a:spcPts val="200"/>
-              </a:spcBef>
-              <a:spcAft>
-                <a:spcPts val="200"/>
-              </a:spcAft>
-            </a:pPr>
-            <a:r>
-              <a:rPr sz="1100" b="0">
+                <a:spcPts val="1820"/>
+              </a:lnSpc>
+              <a:spcBef>
+                <a:spcPts val="200"/>
+              </a:spcBef>
+              <a:spcAft>
+                <a:spcPts val="200"/>
+              </a:spcAft>
+            </a:pPr>
+            <a:r>
+              <a:rPr sz="1400" b="0">
                 <a:solidFill>
                   <a:srgbClr val="000000"/>
                 </a:solidFill>
@@ -4919,7 +4919,7 @@
           <a:p>
             <a:pPr algn="l">
               <a:lnSpc>
-                <a:spcPts val="1820"/>
+                <a:spcPts val="2080"/>
               </a:lnSpc>
               <a:spcBef>
                 <a:spcPts val="800"/>
@@ -4929,7 +4929,7 @@
               </a:spcAft>
             </a:pPr>
             <a:r>
-              <a:rPr sz="1400" b="1">
+              <a:rPr sz="1600" b="1">
                 <a:solidFill>
                   <a:srgbClr val="1B5C9E"/>
                 </a:solidFill>
@@ -4941,17 +4941,17 @@
           <a:p>
             <a:pPr algn="l">
               <a:lnSpc>
-                <a:spcPts val="1430"/>
-              </a:lnSpc>
-              <a:spcBef>
-                <a:spcPts val="200"/>
-              </a:spcBef>
-              <a:spcAft>
-                <a:spcPts val="200"/>
-              </a:spcAft>
-            </a:pPr>
-            <a:r>
-              <a:rPr sz="1100" b="0">
+                <a:spcPts val="1820"/>
+              </a:lnSpc>
+              <a:spcBef>
+                <a:spcPts val="200"/>
+              </a:spcBef>
+              <a:spcAft>
+                <a:spcPts val="200"/>
+              </a:spcAft>
+            </a:pPr>
+            <a:r>
+              <a:rPr sz="1400" b="0">
                 <a:solidFill>
                   <a:srgbClr val="000000"/>
                 </a:solidFill>
@@ -4963,17 +4963,17 @@
           <a:p>
             <a:pPr algn="l">
               <a:lnSpc>
-                <a:spcPts val="1430"/>
-              </a:lnSpc>
-              <a:spcBef>
-                <a:spcPts val="200"/>
-              </a:spcBef>
-              <a:spcAft>
-                <a:spcPts val="200"/>
-              </a:spcAft>
-            </a:pPr>
-            <a:r>
-              <a:rPr sz="1100" b="0">
+                <a:spcPts val="1820"/>
+              </a:lnSpc>
+              <a:spcBef>
+                <a:spcPts val="200"/>
+              </a:spcBef>
+              <a:spcAft>
+                <a:spcPts val="200"/>
+              </a:spcAft>
+            </a:pPr>
+            <a:r>
+              <a:rPr sz="1400" b="0">
                 <a:solidFill>
                   <a:srgbClr val="000000"/>
                 </a:solidFill>
@@ -4985,17 +4985,17 @@
           <a:p>
             <a:pPr algn="l">
               <a:lnSpc>
-                <a:spcPts val="1430"/>
-              </a:lnSpc>
-              <a:spcBef>
-                <a:spcPts val="200"/>
-              </a:spcBef>
-              <a:spcAft>
-                <a:spcPts val="200"/>
-              </a:spcAft>
-            </a:pPr>
-            <a:r>
-              <a:rPr sz="1100" b="0">
+                <a:spcPts val="1820"/>
+              </a:lnSpc>
+              <a:spcBef>
+                <a:spcPts val="200"/>
+              </a:spcBef>
+              <a:spcAft>
+                <a:spcPts val="200"/>
+              </a:spcAft>
+            </a:pPr>
+            <a:r>
+              <a:rPr sz="1400" b="0">
                 <a:solidFill>
                   <a:srgbClr val="000000"/>
                 </a:solidFill>
@@ -5007,17 +5007,17 @@
           <a:p>
             <a:pPr algn="l">
               <a:lnSpc>
-                <a:spcPts val="1430"/>
-              </a:lnSpc>
-              <a:spcBef>
-                <a:spcPts val="200"/>
-              </a:spcBef>
-              <a:spcAft>
-                <a:spcPts val="200"/>
-              </a:spcAft>
-            </a:pPr>
-            <a:r>
-              <a:rPr sz="1100" b="0">
+                <a:spcPts val="1820"/>
+              </a:lnSpc>
+              <a:spcBef>
+                <a:spcPts val="200"/>
+              </a:spcBef>
+              <a:spcAft>
+                <a:spcPts val="200"/>
+              </a:spcAft>
+            </a:pPr>
+            <a:r>
+              <a:rPr sz="1400" b="0">
                 <a:solidFill>
                   <a:srgbClr val="000000"/>
                 </a:solidFill>
@@ -5029,7 +5029,7 @@
           <a:p>
             <a:pPr algn="l">
               <a:lnSpc>
-                <a:spcPts val="1820"/>
+                <a:spcPts val="2080"/>
               </a:lnSpc>
               <a:spcBef>
                 <a:spcPts val="800"/>
@@ -5039,7 +5039,7 @@
               </a:spcAft>
             </a:pPr>
             <a:r>
-              <a:rPr sz="1400" b="1">
+              <a:rPr sz="1600" b="1">
                 <a:solidFill>
                   <a:srgbClr val="CC3333"/>
                 </a:solidFill>
@@ -5051,17 +5051,17 @@
           <a:p>
             <a:pPr algn="l">
               <a:lnSpc>
-                <a:spcPts val="1430"/>
-              </a:lnSpc>
-              <a:spcBef>
-                <a:spcPts val="200"/>
-              </a:spcBef>
-              <a:spcAft>
-                <a:spcPts val="200"/>
-              </a:spcAft>
-            </a:pPr>
-            <a:r>
-              <a:rPr sz="1100" b="0">
+                <a:spcPts val="1820"/>
+              </a:lnSpc>
+              <a:spcBef>
+                <a:spcPts val="200"/>
+              </a:spcBef>
+              <a:spcAft>
+                <a:spcPts val="200"/>
+              </a:spcAft>
+            </a:pPr>
+            <a:r>
+              <a:rPr sz="1400" b="0">
                 <a:solidFill>
                   <a:srgbClr val="000000"/>
                 </a:solidFill>
@@ -5073,7 +5073,7 @@
           <a:p>
             <a:pPr algn="l">
               <a:lnSpc>
-                <a:spcPts val="1820"/>
+                <a:spcPts val="2080"/>
               </a:lnSpc>
               <a:spcBef>
                 <a:spcPts val="800"/>
@@ -5083,7 +5083,7 @@
               </a:spcAft>
             </a:pPr>
             <a:r>
-              <a:rPr sz="1400" b="1">
+              <a:rPr sz="1600" b="1">
                 <a:solidFill>
                   <a:srgbClr val="008040"/>
                 </a:solidFill>
@@ -5095,17 +5095,17 @@
           <a:p>
             <a:pPr algn="l">
               <a:lnSpc>
-                <a:spcPts val="1430"/>
-              </a:lnSpc>
-              <a:spcBef>
-                <a:spcPts val="200"/>
-              </a:spcBef>
-              <a:spcAft>
-                <a:spcPts val="200"/>
-              </a:spcAft>
-            </a:pPr>
-            <a:r>
-              <a:rPr sz="1100" b="0">
+                <a:spcPts val="1820"/>
+              </a:lnSpc>
+              <a:spcBef>
+                <a:spcPts val="200"/>
+              </a:spcBef>
+              <a:spcAft>
+                <a:spcPts val="200"/>
+              </a:spcAft>
+            </a:pPr>
+            <a:r>
+              <a:rPr sz="1400" b="0">
                 <a:solidFill>
                   <a:srgbClr val="000000"/>
                 </a:solidFill>
@@ -5210,7 +5210,7 @@
           <a:p>
             <a:pPr algn="l">
               <a:lnSpc>
-                <a:spcPts val="1820"/>
+                <a:spcPts val="2080"/>
               </a:lnSpc>
               <a:spcBef>
                 <a:spcPts val="0"/>
@@ -5220,7 +5220,7 @@
               </a:spcAft>
             </a:pPr>
             <a:r>
-              <a:rPr sz="1400" b="1">
+              <a:rPr sz="1600" b="1">
                 <a:solidFill>
                   <a:srgbClr val="1B3A5C"/>
                 </a:solidFill>
@@ -5232,7 +5232,7 @@
           <a:p>
             <a:pPr algn="l">
               <a:lnSpc>
-                <a:spcPts val="1820"/>
+                <a:spcPts val="2080"/>
               </a:lnSpc>
               <a:spcBef>
                 <a:spcPts val="800"/>
@@ -5242,7 +5242,7 @@
               </a:spcAft>
             </a:pPr>
             <a:r>
-              <a:rPr sz="1400" b="1">
+              <a:rPr sz="1600" b="1">
                 <a:solidFill>
                   <a:srgbClr val="333333"/>
                 </a:solidFill>
@@ -5254,17 +5254,17 @@
           <a:p>
             <a:pPr algn="l">
               <a:lnSpc>
-                <a:spcPts val="1430"/>
-              </a:lnSpc>
-              <a:spcBef>
-                <a:spcPts val="200"/>
-              </a:spcBef>
-              <a:spcAft>
-                <a:spcPts val="200"/>
-              </a:spcAft>
-            </a:pPr>
-            <a:r>
-              <a:rPr sz="1100" b="0">
+                <a:spcPts val="1820"/>
+              </a:lnSpc>
+              <a:spcBef>
+                <a:spcPts val="200"/>
+              </a:spcBef>
+              <a:spcAft>
+                <a:spcPts val="200"/>
+              </a:spcAft>
+            </a:pPr>
+            <a:r>
+              <a:rPr sz="1400" b="0">
                 <a:solidFill>
                   <a:srgbClr val="000000"/>
                 </a:solidFill>
@@ -5276,7 +5276,7 @@
           <a:p>
             <a:pPr algn="l">
               <a:lnSpc>
-                <a:spcPts val="1820"/>
+                <a:spcPts val="2080"/>
               </a:lnSpc>
               <a:spcBef>
                 <a:spcPts val="800"/>
@@ -5286,7 +5286,7 @@
               </a:spcAft>
             </a:pPr>
             <a:r>
-              <a:rPr sz="1400" b="1">
+              <a:rPr sz="1600" b="1">
                 <a:solidFill>
                   <a:srgbClr val="1B5C9E"/>
                 </a:solidFill>
@@ -5298,17 +5298,17 @@
           <a:p>
             <a:pPr algn="l">
               <a:lnSpc>
-                <a:spcPts val="1430"/>
-              </a:lnSpc>
-              <a:spcBef>
-                <a:spcPts val="200"/>
-              </a:spcBef>
-              <a:spcAft>
-                <a:spcPts val="200"/>
-              </a:spcAft>
-            </a:pPr>
-            <a:r>
-              <a:rPr sz="1100" b="0">
+                <a:spcPts val="1820"/>
+              </a:lnSpc>
+              <a:spcBef>
+                <a:spcPts val="200"/>
+              </a:spcBef>
+              <a:spcAft>
+                <a:spcPts val="200"/>
+              </a:spcAft>
+            </a:pPr>
+            <a:r>
+              <a:rPr sz="1400" b="0">
                 <a:solidFill>
                   <a:srgbClr val="000000"/>
                 </a:solidFill>
@@ -5320,17 +5320,17 @@
           <a:p>
             <a:pPr algn="l">
               <a:lnSpc>
-                <a:spcPts val="1430"/>
-              </a:lnSpc>
-              <a:spcBef>
-                <a:spcPts val="200"/>
-              </a:spcBef>
-              <a:spcAft>
-                <a:spcPts val="200"/>
-              </a:spcAft>
-            </a:pPr>
-            <a:r>
-              <a:rPr sz="1100" b="0">
+                <a:spcPts val="1820"/>
+              </a:lnSpc>
+              <a:spcBef>
+                <a:spcPts val="200"/>
+              </a:spcBef>
+              <a:spcAft>
+                <a:spcPts val="200"/>
+              </a:spcAft>
+            </a:pPr>
+            <a:r>
+              <a:rPr sz="1400" b="0">
                 <a:solidFill>
                   <a:srgbClr val="000000"/>
                 </a:solidFill>
@@ -5342,17 +5342,17 @@
           <a:p>
             <a:pPr algn="l">
               <a:lnSpc>
-                <a:spcPts val="1430"/>
-              </a:lnSpc>
-              <a:spcBef>
-                <a:spcPts val="200"/>
-              </a:spcBef>
-              <a:spcAft>
-                <a:spcPts val="200"/>
-              </a:spcAft>
-            </a:pPr>
-            <a:r>
-              <a:rPr sz="1100" b="0">
+                <a:spcPts val="1820"/>
+              </a:lnSpc>
+              <a:spcBef>
+                <a:spcPts val="200"/>
+              </a:spcBef>
+              <a:spcAft>
+                <a:spcPts val="200"/>
+              </a:spcAft>
+            </a:pPr>
+            <a:r>
+              <a:rPr sz="1400" b="0">
                 <a:solidFill>
                   <a:srgbClr val="000000"/>
                 </a:solidFill>
@@ -5364,7 +5364,7 @@
           <a:p>
             <a:pPr algn="l">
               <a:lnSpc>
-                <a:spcPts val="1820"/>
+                <a:spcPts val="2080"/>
               </a:lnSpc>
               <a:spcBef>
                 <a:spcPts val="800"/>
@@ -5374,7 +5374,7 @@
               </a:spcAft>
             </a:pPr>
             <a:r>
-              <a:rPr sz="1400" b="1">
+              <a:rPr sz="1600" b="1">
                 <a:solidFill>
                   <a:srgbClr val="CC3333"/>
                 </a:solidFill>
@@ -5386,17 +5386,17 @@
           <a:p>
             <a:pPr algn="l">
               <a:lnSpc>
-                <a:spcPts val="1430"/>
-              </a:lnSpc>
-              <a:spcBef>
-                <a:spcPts val="200"/>
-              </a:spcBef>
-              <a:spcAft>
-                <a:spcPts val="200"/>
-              </a:spcAft>
-            </a:pPr>
-            <a:r>
-              <a:rPr sz="1100" b="0">
+                <a:spcPts val="1820"/>
+              </a:lnSpc>
+              <a:spcBef>
+                <a:spcPts val="200"/>
+              </a:spcBef>
+              <a:spcAft>
+                <a:spcPts val="200"/>
+              </a:spcAft>
+            </a:pPr>
+            <a:r>
+              <a:rPr sz="1400" b="0">
                 <a:solidFill>
                   <a:srgbClr val="000000"/>
                 </a:solidFill>
@@ -5408,7 +5408,7 @@
           <a:p>
             <a:pPr algn="l">
               <a:lnSpc>
-                <a:spcPts val="1820"/>
+                <a:spcPts val="2080"/>
               </a:lnSpc>
               <a:spcBef>
                 <a:spcPts val="800"/>
@@ -5418,7 +5418,7 @@
               </a:spcAft>
             </a:pPr>
             <a:r>
-              <a:rPr sz="1400" b="1">
+              <a:rPr sz="1600" b="1">
                 <a:solidFill>
                   <a:srgbClr val="008040"/>
                 </a:solidFill>
@@ -5430,17 +5430,17 @@
           <a:p>
             <a:pPr algn="l">
               <a:lnSpc>
-                <a:spcPts val="1430"/>
-              </a:lnSpc>
-              <a:spcBef>
-                <a:spcPts val="200"/>
-              </a:spcBef>
-              <a:spcAft>
-                <a:spcPts val="200"/>
-              </a:spcAft>
-            </a:pPr>
-            <a:r>
-              <a:rPr sz="1100" b="0">
+                <a:spcPts val="1820"/>
+              </a:lnSpc>
+              <a:spcBef>
+                <a:spcPts val="200"/>
+              </a:spcBef>
+              <a:spcAft>
+                <a:spcPts val="200"/>
+              </a:spcAft>
+            </a:pPr>
+            <a:r>
+              <a:rPr sz="1400" b="0">
                 <a:solidFill>
                   <a:srgbClr val="000000"/>
                 </a:solidFill>
@@ -5452,17 +5452,17 @@
           <a:p>
             <a:pPr algn="l">
               <a:lnSpc>
-                <a:spcPts val="1430"/>
-              </a:lnSpc>
-              <a:spcBef>
-                <a:spcPts val="200"/>
-              </a:spcBef>
-              <a:spcAft>
-                <a:spcPts val="200"/>
-              </a:spcAft>
-            </a:pPr>
-            <a:r>
-              <a:rPr sz="1100" b="0">
+                <a:spcPts val="1820"/>
+              </a:lnSpc>
+              <a:spcBef>
+                <a:spcPts val="200"/>
+              </a:spcBef>
+              <a:spcAft>
+                <a:spcPts val="200"/>
+              </a:spcAft>
+            </a:pPr>
+            <a:r>
+              <a:rPr sz="1400" b="0">
                 <a:solidFill>
                   <a:srgbClr val="000000"/>
                 </a:solidFill>
@@ -5567,7 +5567,7 @@
           <a:p>
             <a:pPr algn="l">
               <a:lnSpc>
-                <a:spcPts val="1820"/>
+                <a:spcPts val="2080"/>
               </a:lnSpc>
               <a:spcBef>
                 <a:spcPts val="0"/>
@@ -5577,7 +5577,7 @@
               </a:spcAft>
             </a:pPr>
             <a:r>
-              <a:rPr sz="1400" b="1">
+              <a:rPr sz="1600" b="1">
                 <a:solidFill>
                   <a:srgbClr val="1B3A5C"/>
                 </a:solidFill>
@@ -5589,7 +5589,7 @@
           <a:p>
             <a:pPr algn="l">
               <a:lnSpc>
-                <a:spcPts val="1820"/>
+                <a:spcPts val="2080"/>
               </a:lnSpc>
               <a:spcBef>
                 <a:spcPts val="800"/>
@@ -5599,7 +5599,7 @@
               </a:spcAft>
             </a:pPr>
             <a:r>
-              <a:rPr sz="1400" b="1">
+              <a:rPr sz="1600" b="1">
                 <a:solidFill>
                   <a:srgbClr val="333333"/>
                 </a:solidFill>
@@ -5611,17 +5611,17 @@
           <a:p>
             <a:pPr algn="l">
               <a:lnSpc>
-                <a:spcPts val="1430"/>
-              </a:lnSpc>
-              <a:spcBef>
-                <a:spcPts val="200"/>
-              </a:spcBef>
-              <a:spcAft>
-                <a:spcPts val="200"/>
-              </a:spcAft>
-            </a:pPr>
-            <a:r>
-              <a:rPr sz="1100" b="0">
+                <a:spcPts val="1820"/>
+              </a:lnSpc>
+              <a:spcBef>
+                <a:spcPts val="200"/>
+              </a:spcBef>
+              <a:spcAft>
+                <a:spcPts val="200"/>
+              </a:spcAft>
+            </a:pPr>
+            <a:r>
+              <a:rPr sz="1400" b="0">
                 <a:solidFill>
                   <a:srgbClr val="000000"/>
                 </a:solidFill>
@@ -5633,7 +5633,7 @@
           <a:p>
             <a:pPr algn="l">
               <a:lnSpc>
-                <a:spcPts val="1820"/>
+                <a:spcPts val="2080"/>
               </a:lnSpc>
               <a:spcBef>
                 <a:spcPts val="800"/>
@@ -5643,7 +5643,7 @@
               </a:spcAft>
             </a:pPr>
             <a:r>
-              <a:rPr sz="1400" b="1">
+              <a:rPr sz="1600" b="1">
                 <a:solidFill>
                   <a:srgbClr val="1B5C9E"/>
                 </a:solidFill>
@@ -5655,17 +5655,17 @@
           <a:p>
             <a:pPr algn="l">
               <a:lnSpc>
-                <a:spcPts val="1430"/>
-              </a:lnSpc>
-              <a:spcBef>
-                <a:spcPts val="200"/>
-              </a:spcBef>
-              <a:spcAft>
-                <a:spcPts val="200"/>
-              </a:spcAft>
-            </a:pPr>
-            <a:r>
-              <a:rPr sz="1100" b="0">
+                <a:spcPts val="1820"/>
+              </a:lnSpc>
+              <a:spcBef>
+                <a:spcPts val="200"/>
+              </a:spcBef>
+              <a:spcAft>
+                <a:spcPts val="200"/>
+              </a:spcAft>
+            </a:pPr>
+            <a:r>
+              <a:rPr sz="1400" b="0">
                 <a:solidFill>
                   <a:srgbClr val="000000"/>
                 </a:solidFill>
@@ -5677,17 +5677,17 @@
           <a:p>
             <a:pPr algn="l">
               <a:lnSpc>
-                <a:spcPts val="1430"/>
-              </a:lnSpc>
-              <a:spcBef>
-                <a:spcPts val="200"/>
-              </a:spcBef>
-              <a:spcAft>
-                <a:spcPts val="200"/>
-              </a:spcAft>
-            </a:pPr>
-            <a:r>
-              <a:rPr sz="1100" b="0">
+                <a:spcPts val="1820"/>
+              </a:lnSpc>
+              <a:spcBef>
+                <a:spcPts val="200"/>
+              </a:spcBef>
+              <a:spcAft>
+                <a:spcPts val="200"/>
+              </a:spcAft>
+            </a:pPr>
+            <a:r>
+              <a:rPr sz="1400" b="0">
                 <a:solidFill>
                   <a:srgbClr val="000000"/>
                 </a:solidFill>
@@ -5699,7 +5699,7 @@
           <a:p>
             <a:pPr algn="l">
               <a:lnSpc>
-                <a:spcPts val="1820"/>
+                <a:spcPts val="2080"/>
               </a:lnSpc>
               <a:spcBef>
                 <a:spcPts val="800"/>
@@ -5709,7 +5709,7 @@
               </a:spcAft>
             </a:pPr>
             <a:r>
-              <a:rPr sz="1400" b="1">
+              <a:rPr sz="1600" b="1">
                 <a:solidFill>
                   <a:srgbClr val="CC3333"/>
                 </a:solidFill>
@@ -5721,17 +5721,17 @@
           <a:p>
             <a:pPr algn="l">
               <a:lnSpc>
-                <a:spcPts val="1430"/>
-              </a:lnSpc>
-              <a:spcBef>
-                <a:spcPts val="200"/>
-              </a:spcBef>
-              <a:spcAft>
-                <a:spcPts val="200"/>
-              </a:spcAft>
-            </a:pPr>
-            <a:r>
-              <a:rPr sz="1100" b="0">
+                <a:spcPts val="1820"/>
+              </a:lnSpc>
+              <a:spcBef>
+                <a:spcPts val="200"/>
+              </a:spcBef>
+              <a:spcAft>
+                <a:spcPts val="200"/>
+              </a:spcAft>
+            </a:pPr>
+            <a:r>
+              <a:rPr sz="1400" b="0">
                 <a:solidFill>
                   <a:srgbClr val="000000"/>
                 </a:solidFill>
@@ -5743,7 +5743,7 @@
           <a:p>
             <a:pPr algn="l">
               <a:lnSpc>
-                <a:spcPts val="1820"/>
+                <a:spcPts val="2080"/>
               </a:lnSpc>
               <a:spcBef>
                 <a:spcPts val="800"/>
@@ -5753,7 +5753,7 @@
               </a:spcAft>
             </a:pPr>
             <a:r>
-              <a:rPr sz="1400" b="1">
+              <a:rPr sz="1600" b="1">
                 <a:solidFill>
                   <a:srgbClr val="008040"/>
                 </a:solidFill>
@@ -5765,17 +5765,17 @@
           <a:p>
             <a:pPr algn="l">
               <a:lnSpc>
-                <a:spcPts val="1430"/>
-              </a:lnSpc>
-              <a:spcBef>
-                <a:spcPts val="200"/>
-              </a:spcBef>
-              <a:spcAft>
-                <a:spcPts val="200"/>
-              </a:spcAft>
-            </a:pPr>
-            <a:r>
-              <a:rPr sz="1100" b="0">
+                <a:spcPts val="1820"/>
+              </a:lnSpc>
+              <a:spcBef>
+                <a:spcPts val="200"/>
+              </a:spcBef>
+              <a:spcAft>
+                <a:spcPts val="200"/>
+              </a:spcAft>
+            </a:pPr>
+            <a:r>
+              <a:rPr sz="1400" b="0">
                 <a:solidFill>
                   <a:srgbClr val="000000"/>
                 </a:solidFill>
@@ -5880,7 +5880,7 @@
           <a:p>
             <a:pPr algn="l">
               <a:lnSpc>
-                <a:spcPts val="1820"/>
+                <a:spcPts val="2080"/>
               </a:lnSpc>
               <a:spcBef>
                 <a:spcPts val="0"/>
@@ -5890,7 +5890,7 @@
               </a:spcAft>
             </a:pPr>
             <a:r>
-              <a:rPr sz="1400" b="1">
+              <a:rPr sz="1600" b="1">
                 <a:solidFill>
                   <a:srgbClr val="1B3A5C"/>
                 </a:solidFill>
@@ -5902,7 +5902,7 @@
           <a:p>
             <a:pPr algn="l">
               <a:lnSpc>
-                <a:spcPts val="1820"/>
+                <a:spcPts val="2080"/>
               </a:lnSpc>
               <a:spcBef>
                 <a:spcPts val="800"/>
@@ -5912,7 +5912,7 @@
               </a:spcAft>
             </a:pPr>
             <a:r>
-              <a:rPr sz="1400" b="1">
+              <a:rPr sz="1600" b="1">
                 <a:solidFill>
                   <a:srgbClr val="333333"/>
                 </a:solidFill>
@@ -5924,17 +5924,17 @@
           <a:p>
             <a:pPr algn="l">
               <a:lnSpc>
-                <a:spcPts val="1430"/>
-              </a:lnSpc>
-              <a:spcBef>
-                <a:spcPts val="200"/>
-              </a:spcBef>
-              <a:spcAft>
-                <a:spcPts val="200"/>
-              </a:spcAft>
-            </a:pPr>
-            <a:r>
-              <a:rPr sz="1100" b="0">
+                <a:spcPts val="1820"/>
+              </a:lnSpc>
+              <a:spcBef>
+                <a:spcPts val="200"/>
+              </a:spcBef>
+              <a:spcAft>
+                <a:spcPts val="200"/>
+              </a:spcAft>
+            </a:pPr>
+            <a:r>
+              <a:rPr sz="1400" b="0">
                 <a:solidFill>
                   <a:srgbClr val="000000"/>
                 </a:solidFill>
@@ -5946,7 +5946,7 @@
           <a:p>
             <a:pPr algn="l">
               <a:lnSpc>
-                <a:spcPts val="1820"/>
+                <a:spcPts val="2080"/>
               </a:lnSpc>
               <a:spcBef>
                 <a:spcPts val="800"/>
@@ -5956,7 +5956,7 @@
               </a:spcAft>
             </a:pPr>
             <a:r>
-              <a:rPr sz="1400" b="1">
+              <a:rPr sz="1600" b="1">
                 <a:solidFill>
                   <a:srgbClr val="1B5C9E"/>
                 </a:solidFill>
@@ -5968,17 +5968,17 @@
           <a:p>
             <a:pPr algn="l">
               <a:lnSpc>
-                <a:spcPts val="1430"/>
-              </a:lnSpc>
-              <a:spcBef>
-                <a:spcPts val="200"/>
-              </a:spcBef>
-              <a:spcAft>
-                <a:spcPts val="200"/>
-              </a:spcAft>
-            </a:pPr>
-            <a:r>
-              <a:rPr sz="1100" b="0">
+                <a:spcPts val="1820"/>
+              </a:lnSpc>
+              <a:spcBef>
+                <a:spcPts val="200"/>
+              </a:spcBef>
+              <a:spcAft>
+                <a:spcPts val="200"/>
+              </a:spcAft>
+            </a:pPr>
+            <a:r>
+              <a:rPr sz="1400" b="0">
                 <a:solidFill>
                   <a:srgbClr val="000000"/>
                 </a:solidFill>
@@ -5990,17 +5990,17 @@
           <a:p>
             <a:pPr algn="l">
               <a:lnSpc>
-                <a:spcPts val="1430"/>
-              </a:lnSpc>
-              <a:spcBef>
-                <a:spcPts val="200"/>
-              </a:spcBef>
-              <a:spcAft>
-                <a:spcPts val="200"/>
-              </a:spcAft>
-            </a:pPr>
-            <a:r>
-              <a:rPr sz="1100" b="0">
+                <a:spcPts val="1820"/>
+              </a:lnSpc>
+              <a:spcBef>
+                <a:spcPts val="200"/>
+              </a:spcBef>
+              <a:spcAft>
+                <a:spcPts val="200"/>
+              </a:spcAft>
+            </a:pPr>
+            <a:r>
+              <a:rPr sz="1400" b="0">
                 <a:solidFill>
                   <a:srgbClr val="000000"/>
                 </a:solidFill>
@@ -6012,17 +6012,17 @@
           <a:p>
             <a:pPr algn="l">
               <a:lnSpc>
-                <a:spcPts val="1430"/>
-              </a:lnSpc>
-              <a:spcBef>
-                <a:spcPts val="200"/>
-              </a:spcBef>
-              <a:spcAft>
-                <a:spcPts val="200"/>
-              </a:spcAft>
-            </a:pPr>
-            <a:r>
-              <a:rPr sz="1100" b="0">
+                <a:spcPts val="1820"/>
+              </a:lnSpc>
+              <a:spcBef>
+                <a:spcPts val="200"/>
+              </a:spcBef>
+              <a:spcAft>
+                <a:spcPts val="200"/>
+              </a:spcAft>
+            </a:pPr>
+            <a:r>
+              <a:rPr sz="1400" b="0">
                 <a:solidFill>
                   <a:srgbClr val="000000"/>
                 </a:solidFill>
@@ -6034,7 +6034,7 @@
           <a:p>
             <a:pPr algn="l">
               <a:lnSpc>
-                <a:spcPts val="1820"/>
+                <a:spcPts val="2080"/>
               </a:lnSpc>
               <a:spcBef>
                 <a:spcPts val="800"/>
@@ -6044,7 +6044,7 @@
               </a:spcAft>
             </a:pPr>
             <a:r>
-              <a:rPr sz="1400" b="1">
+              <a:rPr sz="1600" b="1">
                 <a:solidFill>
                   <a:srgbClr val="CC3333"/>
                 </a:solidFill>
@@ -6056,17 +6056,17 @@
           <a:p>
             <a:pPr algn="l">
               <a:lnSpc>
-                <a:spcPts val="1430"/>
-              </a:lnSpc>
-              <a:spcBef>
-                <a:spcPts val="200"/>
-              </a:spcBef>
-              <a:spcAft>
-                <a:spcPts val="200"/>
-              </a:spcAft>
-            </a:pPr>
-            <a:r>
-              <a:rPr sz="1100" b="0">
+                <a:spcPts val="1820"/>
+              </a:lnSpc>
+              <a:spcBef>
+                <a:spcPts val="200"/>
+              </a:spcBef>
+              <a:spcAft>
+                <a:spcPts val="200"/>
+              </a:spcAft>
+            </a:pPr>
+            <a:r>
+              <a:rPr sz="1400" b="0">
                 <a:solidFill>
                   <a:srgbClr val="000000"/>
                 </a:solidFill>
@@ -6078,7 +6078,7 @@
           <a:p>
             <a:pPr algn="l">
               <a:lnSpc>
-                <a:spcPts val="1820"/>
+                <a:spcPts val="2080"/>
               </a:lnSpc>
               <a:spcBef>
                 <a:spcPts val="800"/>
@@ -6088,7 +6088,7 @@
               </a:spcAft>
             </a:pPr>
             <a:r>
-              <a:rPr sz="1400" b="1">
+              <a:rPr sz="1600" b="1">
                 <a:solidFill>
                   <a:srgbClr val="008040"/>
                 </a:solidFill>
@@ -6100,17 +6100,17 @@
           <a:p>
             <a:pPr algn="l">
               <a:lnSpc>
-                <a:spcPts val="1430"/>
-              </a:lnSpc>
-              <a:spcBef>
-                <a:spcPts val="200"/>
-              </a:spcBef>
-              <a:spcAft>
-                <a:spcPts val="200"/>
-              </a:spcAft>
-            </a:pPr>
-            <a:r>
-              <a:rPr sz="1100" b="0">
+                <a:spcPts val="1820"/>
+              </a:lnSpc>
+              <a:spcBef>
+                <a:spcPts val="200"/>
+              </a:spcBef>
+              <a:spcAft>
+                <a:spcPts val="200"/>
+              </a:spcAft>
+            </a:pPr>
+            <a:r>
+              <a:rPr sz="1400" b="0">
                 <a:solidFill>
                   <a:srgbClr val="000000"/>
                 </a:solidFill>
@@ -6122,17 +6122,17 @@
           <a:p>
             <a:pPr algn="l">
               <a:lnSpc>
-                <a:spcPts val="1430"/>
-              </a:lnSpc>
-              <a:spcBef>
-                <a:spcPts val="200"/>
-              </a:spcBef>
-              <a:spcAft>
-                <a:spcPts val="200"/>
-              </a:spcAft>
-            </a:pPr>
-            <a:r>
-              <a:rPr sz="1100" b="0">
+                <a:spcPts val="1820"/>
+              </a:lnSpc>
+              <a:spcBef>
+                <a:spcPts val="200"/>
+              </a:spcBef>
+              <a:spcAft>
+                <a:spcPts val="200"/>
+              </a:spcAft>
+            </a:pPr>
+            <a:r>
+              <a:rPr sz="1400" b="0">
                 <a:solidFill>
                   <a:srgbClr val="000000"/>
                 </a:solidFill>
@@ -6237,7 +6237,7 @@
           <a:p>
             <a:pPr algn="l">
               <a:lnSpc>
-                <a:spcPts val="1820"/>
+                <a:spcPts val="2080"/>
               </a:lnSpc>
               <a:spcBef>
                 <a:spcPts val="0"/>
@@ -6247,7 +6247,7 @@
               </a:spcAft>
             </a:pPr>
             <a:r>
-              <a:rPr sz="1400" b="1">
+              <a:rPr sz="1600" b="1">
                 <a:solidFill>
                   <a:srgbClr val="1B3A5C"/>
                 </a:solidFill>
@@ -6259,7 +6259,7 @@
           <a:p>
             <a:pPr algn="l">
               <a:lnSpc>
-                <a:spcPts val="1820"/>
+                <a:spcPts val="2080"/>
               </a:lnSpc>
               <a:spcBef>
                 <a:spcPts val="800"/>
@@ -6269,7 +6269,7 @@
               </a:spcAft>
             </a:pPr>
             <a:r>
-              <a:rPr sz="1400" b="1">
+              <a:rPr sz="1600" b="1">
                 <a:solidFill>
                   <a:srgbClr val="333333"/>
                 </a:solidFill>
@@ -6281,17 +6281,17 @@
           <a:p>
             <a:pPr algn="l">
               <a:lnSpc>
-                <a:spcPts val="1430"/>
-              </a:lnSpc>
-              <a:spcBef>
-                <a:spcPts val="200"/>
-              </a:spcBef>
-              <a:spcAft>
-                <a:spcPts val="200"/>
-              </a:spcAft>
-            </a:pPr>
-            <a:r>
-              <a:rPr sz="1100" b="0">
+                <a:spcPts val="1820"/>
+              </a:lnSpc>
+              <a:spcBef>
+                <a:spcPts val="200"/>
+              </a:spcBef>
+              <a:spcAft>
+                <a:spcPts val="200"/>
+              </a:spcAft>
+            </a:pPr>
+            <a:r>
+              <a:rPr sz="1400" b="0">
                 <a:solidFill>
                   <a:srgbClr val="000000"/>
                 </a:solidFill>
@@ -6303,7 +6303,7 @@
           <a:p>
             <a:pPr algn="l">
               <a:lnSpc>
-                <a:spcPts val="1820"/>
+                <a:spcPts val="2080"/>
               </a:lnSpc>
               <a:spcBef>
                 <a:spcPts val="800"/>
@@ -6313,7 +6313,7 @@
               </a:spcAft>
             </a:pPr>
             <a:r>
-              <a:rPr sz="1400" b="1">
+              <a:rPr sz="1600" b="1">
                 <a:solidFill>
                   <a:srgbClr val="1B5C9E"/>
                 </a:solidFill>
@@ -6325,17 +6325,17 @@
           <a:p>
             <a:pPr algn="l">
               <a:lnSpc>
-                <a:spcPts val="1430"/>
-              </a:lnSpc>
-              <a:spcBef>
-                <a:spcPts val="200"/>
-              </a:spcBef>
-              <a:spcAft>
-                <a:spcPts val="200"/>
-              </a:spcAft>
-            </a:pPr>
-            <a:r>
-              <a:rPr sz="1100" b="0">
+                <a:spcPts val="1820"/>
+              </a:lnSpc>
+              <a:spcBef>
+                <a:spcPts val="200"/>
+              </a:spcBef>
+              <a:spcAft>
+                <a:spcPts val="200"/>
+              </a:spcAft>
+            </a:pPr>
+            <a:r>
+              <a:rPr sz="1400" b="0">
                 <a:solidFill>
                   <a:srgbClr val="000000"/>
                 </a:solidFill>
@@ -6347,17 +6347,17 @@
           <a:p>
             <a:pPr algn="l">
               <a:lnSpc>
-                <a:spcPts val="1430"/>
-              </a:lnSpc>
-              <a:spcBef>
-                <a:spcPts val="200"/>
-              </a:spcBef>
-              <a:spcAft>
-                <a:spcPts val="200"/>
-              </a:spcAft>
-            </a:pPr>
-            <a:r>
-              <a:rPr sz="1100" b="0">
+                <a:spcPts val="1820"/>
+              </a:lnSpc>
+              <a:spcBef>
+                <a:spcPts val="200"/>
+              </a:spcBef>
+              <a:spcAft>
+                <a:spcPts val="200"/>
+              </a:spcAft>
+            </a:pPr>
+            <a:r>
+              <a:rPr sz="1400" b="0">
                 <a:solidFill>
                   <a:srgbClr val="000000"/>
                 </a:solidFill>
@@ -6369,17 +6369,17 @@
           <a:p>
             <a:pPr algn="l">
               <a:lnSpc>
-                <a:spcPts val="1430"/>
-              </a:lnSpc>
-              <a:spcBef>
-                <a:spcPts val="200"/>
-              </a:spcBef>
-              <a:spcAft>
-                <a:spcPts val="200"/>
-              </a:spcAft>
-            </a:pPr>
-            <a:r>
-              <a:rPr sz="1100" b="0">
+                <a:spcPts val="1820"/>
+              </a:lnSpc>
+              <a:spcBef>
+                <a:spcPts val="200"/>
+              </a:spcBef>
+              <a:spcAft>
+                <a:spcPts val="200"/>
+              </a:spcAft>
+            </a:pPr>
+            <a:r>
+              <a:rPr sz="1400" b="0">
                 <a:solidFill>
                   <a:srgbClr val="000000"/>
                 </a:solidFill>
@@ -6391,17 +6391,17 @@
           <a:p>
             <a:pPr algn="l">
               <a:lnSpc>
-                <a:spcPts val="1430"/>
-              </a:lnSpc>
-              <a:spcBef>
-                <a:spcPts val="200"/>
-              </a:spcBef>
-              <a:spcAft>
-                <a:spcPts val="200"/>
-              </a:spcAft>
-            </a:pPr>
-            <a:r>
-              <a:rPr sz="1100" b="0">
+                <a:spcPts val="1820"/>
+              </a:lnSpc>
+              <a:spcBef>
+                <a:spcPts val="200"/>
+              </a:spcBef>
+              <a:spcAft>
+                <a:spcPts val="200"/>
+              </a:spcAft>
+            </a:pPr>
+            <a:r>
+              <a:rPr sz="1400" b="0">
                 <a:solidFill>
                   <a:srgbClr val="000000"/>
                 </a:solidFill>
@@ -6413,7 +6413,7 @@
           <a:p>
             <a:pPr algn="l">
               <a:lnSpc>
-                <a:spcPts val="1820"/>
+                <a:spcPts val="2080"/>
               </a:lnSpc>
               <a:spcBef>
                 <a:spcPts val="800"/>
@@ -6423,7 +6423,7 @@
               </a:spcAft>
             </a:pPr>
             <a:r>
-              <a:rPr sz="1400" b="1">
+              <a:rPr sz="1600" b="1">
                 <a:solidFill>
                   <a:srgbClr val="CC3333"/>
                 </a:solidFill>
@@ -6435,17 +6435,17 @@
           <a:p>
             <a:pPr algn="l">
               <a:lnSpc>
-                <a:spcPts val="1430"/>
-              </a:lnSpc>
-              <a:spcBef>
-                <a:spcPts val="200"/>
-              </a:spcBef>
-              <a:spcAft>
-                <a:spcPts val="200"/>
-              </a:spcAft>
-            </a:pPr>
-            <a:r>
-              <a:rPr sz="1100" b="0">
+                <a:spcPts val="1820"/>
+              </a:lnSpc>
+              <a:spcBef>
+                <a:spcPts val="200"/>
+              </a:spcBef>
+              <a:spcAft>
+                <a:spcPts val="200"/>
+              </a:spcAft>
+            </a:pPr>
+            <a:r>
+              <a:rPr sz="1400" b="0">
                 <a:solidFill>
                   <a:srgbClr val="000000"/>
                 </a:solidFill>
@@ -6457,7 +6457,7 @@
           <a:p>
             <a:pPr algn="l">
               <a:lnSpc>
-                <a:spcPts val="1820"/>
+                <a:spcPts val="2080"/>
               </a:lnSpc>
               <a:spcBef>
                 <a:spcPts val="800"/>
@@ -6467,7 +6467,7 @@
               </a:spcAft>
             </a:pPr>
             <a:r>
-              <a:rPr sz="1400" b="1">
+              <a:rPr sz="1600" b="1">
                 <a:solidFill>
                   <a:srgbClr val="008040"/>
                 </a:solidFill>
@@ -6479,17 +6479,17 @@
           <a:p>
             <a:pPr algn="l">
               <a:lnSpc>
-                <a:spcPts val="1430"/>
-              </a:lnSpc>
-              <a:spcBef>
-                <a:spcPts val="200"/>
-              </a:spcBef>
-              <a:spcAft>
-                <a:spcPts val="200"/>
-              </a:spcAft>
-            </a:pPr>
-            <a:r>
-              <a:rPr sz="1100" b="0">
+                <a:spcPts val="1820"/>
+              </a:lnSpc>
+              <a:spcBef>
+                <a:spcPts val="200"/>
+              </a:spcBef>
+              <a:spcAft>
+                <a:spcPts val="200"/>
+              </a:spcAft>
+            </a:pPr>
+            <a:r>
+              <a:rPr sz="1400" b="0">
                 <a:solidFill>
                   <a:srgbClr val="000000"/>
                 </a:solidFill>
@@ -6594,7 +6594,7 @@
           <a:p>
             <a:pPr algn="l">
               <a:lnSpc>
-                <a:spcPts val="1820"/>
+                <a:spcPts val="2080"/>
               </a:lnSpc>
               <a:spcBef>
                 <a:spcPts val="0"/>
@@ -6604,7 +6604,7 @@
               </a:spcAft>
             </a:pPr>
             <a:r>
-              <a:rPr sz="1400" b="1">
+              <a:rPr sz="1600" b="1">
                 <a:solidFill>
                   <a:srgbClr val="1B3A5C"/>
                 </a:solidFill>
@@ -6616,7 +6616,7 @@
           <a:p>
             <a:pPr algn="l">
               <a:lnSpc>
-                <a:spcPts val="1820"/>
+                <a:spcPts val="2080"/>
               </a:lnSpc>
               <a:spcBef>
                 <a:spcPts val="800"/>
@@ -6626,7 +6626,7 @@
               </a:spcAft>
             </a:pPr>
             <a:r>
-              <a:rPr sz="1400" b="1">
+              <a:rPr sz="1600" b="1">
                 <a:solidFill>
                   <a:srgbClr val="333333"/>
                 </a:solidFill>
@@ -6638,17 +6638,17 @@
           <a:p>
             <a:pPr algn="l">
               <a:lnSpc>
-                <a:spcPts val="1430"/>
-              </a:lnSpc>
-              <a:spcBef>
-                <a:spcPts val="200"/>
-              </a:spcBef>
-              <a:spcAft>
-                <a:spcPts val="200"/>
-              </a:spcAft>
-            </a:pPr>
-            <a:r>
-              <a:rPr sz="1100" b="0">
+                <a:spcPts val="1820"/>
+              </a:lnSpc>
+              <a:spcBef>
+                <a:spcPts val="200"/>
+              </a:spcBef>
+              <a:spcAft>
+                <a:spcPts val="200"/>
+              </a:spcAft>
+            </a:pPr>
+            <a:r>
+              <a:rPr sz="1400" b="0">
                 <a:solidFill>
                   <a:srgbClr val="000000"/>
                 </a:solidFill>
@@ -6660,7 +6660,7 @@
           <a:p>
             <a:pPr algn="l">
               <a:lnSpc>
-                <a:spcPts val="1820"/>
+                <a:spcPts val="2080"/>
               </a:lnSpc>
               <a:spcBef>
                 <a:spcPts val="800"/>
@@ -6670,7 +6670,7 @@
               </a:spcAft>
             </a:pPr>
             <a:r>
-              <a:rPr sz="1400" b="1">
+              <a:rPr sz="1600" b="1">
                 <a:solidFill>
                   <a:srgbClr val="1B5C9E"/>
                 </a:solidFill>
@@ -6682,17 +6682,17 @@
           <a:p>
             <a:pPr algn="l">
               <a:lnSpc>
-                <a:spcPts val="1430"/>
-              </a:lnSpc>
-              <a:spcBef>
-                <a:spcPts val="200"/>
-              </a:spcBef>
-              <a:spcAft>
-                <a:spcPts val="200"/>
-              </a:spcAft>
-            </a:pPr>
-            <a:r>
-              <a:rPr sz="1100" b="0">
+                <a:spcPts val="1820"/>
+              </a:lnSpc>
+              <a:spcBef>
+                <a:spcPts val="200"/>
+              </a:spcBef>
+              <a:spcAft>
+                <a:spcPts val="200"/>
+              </a:spcAft>
+            </a:pPr>
+            <a:r>
+              <a:rPr sz="1400" b="0">
                 <a:solidFill>
                   <a:srgbClr val="000000"/>
                 </a:solidFill>
@@ -6704,17 +6704,17 @@
           <a:p>
             <a:pPr algn="l">
               <a:lnSpc>
-                <a:spcPts val="1430"/>
-              </a:lnSpc>
-              <a:spcBef>
-                <a:spcPts val="200"/>
-              </a:spcBef>
-              <a:spcAft>
-                <a:spcPts val="200"/>
-              </a:spcAft>
-            </a:pPr>
-            <a:r>
-              <a:rPr sz="1100" b="0">
+                <a:spcPts val="1820"/>
+              </a:lnSpc>
+              <a:spcBef>
+                <a:spcPts val="200"/>
+              </a:spcBef>
+              <a:spcAft>
+                <a:spcPts val="200"/>
+              </a:spcAft>
+            </a:pPr>
+            <a:r>
+              <a:rPr sz="1400" b="0">
                 <a:solidFill>
                   <a:srgbClr val="000000"/>
                 </a:solidFill>
@@ -6726,17 +6726,17 @@
           <a:p>
             <a:pPr algn="l">
               <a:lnSpc>
-                <a:spcPts val="1430"/>
-              </a:lnSpc>
-              <a:spcBef>
-                <a:spcPts val="200"/>
-              </a:spcBef>
-              <a:spcAft>
-                <a:spcPts val="200"/>
-              </a:spcAft>
-            </a:pPr>
-            <a:r>
-              <a:rPr sz="1100" b="0">
+                <a:spcPts val="1820"/>
+              </a:lnSpc>
+              <a:spcBef>
+                <a:spcPts val="200"/>
+              </a:spcBef>
+              <a:spcAft>
+                <a:spcPts val="200"/>
+              </a:spcAft>
+            </a:pPr>
+            <a:r>
+              <a:rPr sz="1400" b="0">
                 <a:solidFill>
                   <a:srgbClr val="000000"/>
                 </a:solidFill>
@@ -6748,17 +6748,17 @@
           <a:p>
             <a:pPr algn="l">
               <a:lnSpc>
-                <a:spcPts val="1430"/>
-              </a:lnSpc>
-              <a:spcBef>
-                <a:spcPts val="200"/>
-              </a:spcBef>
-              <a:spcAft>
-                <a:spcPts val="200"/>
-              </a:spcAft>
-            </a:pPr>
-            <a:r>
-              <a:rPr sz="1100" b="0">
+                <a:spcPts val="1820"/>
+              </a:lnSpc>
+              <a:spcBef>
+                <a:spcPts val="200"/>
+              </a:spcBef>
+              <a:spcAft>
+                <a:spcPts val="200"/>
+              </a:spcAft>
+            </a:pPr>
+            <a:r>
+              <a:rPr sz="1400" b="0">
                 <a:solidFill>
                   <a:srgbClr val="000000"/>
                 </a:solidFill>
@@ -6770,7 +6770,7 @@
           <a:p>
             <a:pPr algn="l">
               <a:lnSpc>
-                <a:spcPts val="1820"/>
+                <a:spcPts val="2080"/>
               </a:lnSpc>
               <a:spcBef>
                 <a:spcPts val="800"/>
@@ -6780,7 +6780,7 @@
               </a:spcAft>
             </a:pPr>
             <a:r>
-              <a:rPr sz="1400" b="1">
+              <a:rPr sz="1600" b="1">
                 <a:solidFill>
                   <a:srgbClr val="CC3333"/>
                 </a:solidFill>
@@ -6792,17 +6792,17 @@
           <a:p>
             <a:pPr algn="l">
               <a:lnSpc>
-                <a:spcPts val="1430"/>
-              </a:lnSpc>
-              <a:spcBef>
-                <a:spcPts val="200"/>
-              </a:spcBef>
-              <a:spcAft>
-                <a:spcPts val="200"/>
-              </a:spcAft>
-            </a:pPr>
-            <a:r>
-              <a:rPr sz="1100" b="0">
+                <a:spcPts val="1820"/>
+              </a:lnSpc>
+              <a:spcBef>
+                <a:spcPts val="200"/>
+              </a:spcBef>
+              <a:spcAft>
+                <a:spcPts val="200"/>
+              </a:spcAft>
+            </a:pPr>
+            <a:r>
+              <a:rPr sz="1400" b="0">
                 <a:solidFill>
                   <a:srgbClr val="000000"/>
                 </a:solidFill>
@@ -6814,7 +6814,7 @@
           <a:p>
             <a:pPr algn="l">
               <a:lnSpc>
-                <a:spcPts val="1820"/>
+                <a:spcPts val="2080"/>
               </a:lnSpc>
               <a:spcBef>
                 <a:spcPts val="800"/>
@@ -6824,7 +6824,7 @@
               </a:spcAft>
             </a:pPr>
             <a:r>
-              <a:rPr sz="1400" b="1">
+              <a:rPr sz="1600" b="1">
                 <a:solidFill>
                   <a:srgbClr val="008040"/>
                 </a:solidFill>
@@ -6836,17 +6836,17 @@
           <a:p>
             <a:pPr algn="l">
               <a:lnSpc>
-                <a:spcPts val="1430"/>
-              </a:lnSpc>
-              <a:spcBef>
-                <a:spcPts val="200"/>
-              </a:spcBef>
-              <a:spcAft>
-                <a:spcPts val="200"/>
-              </a:spcAft>
-            </a:pPr>
-            <a:r>
-              <a:rPr sz="1100" b="0">
+                <a:spcPts val="1820"/>
+              </a:lnSpc>
+              <a:spcBef>
+                <a:spcPts val="200"/>
+              </a:spcBef>
+              <a:spcAft>
+                <a:spcPts val="200"/>
+              </a:spcAft>
+            </a:pPr>
+            <a:r>
+              <a:rPr sz="1400" b="0">
                 <a:solidFill>
                   <a:srgbClr val="000000"/>
                 </a:solidFill>
@@ -6951,7 +6951,7 @@
           <a:p>
             <a:pPr algn="l">
               <a:lnSpc>
-                <a:spcPts val="1820"/>
+                <a:spcPts val="2080"/>
               </a:lnSpc>
               <a:spcBef>
                 <a:spcPts val="0"/>
@@ -6961,7 +6961,7 @@
               </a:spcAft>
             </a:pPr>
             <a:r>
-              <a:rPr sz="1400" b="1">
+              <a:rPr sz="1600" b="1">
                 <a:solidFill>
                   <a:srgbClr val="1B3A5C"/>
                 </a:solidFill>
@@ -6973,7 +6973,7 @@
           <a:p>
             <a:pPr algn="l">
               <a:lnSpc>
-                <a:spcPts val="1820"/>
+                <a:spcPts val="2080"/>
               </a:lnSpc>
               <a:spcBef>
                 <a:spcPts val="800"/>
@@ -6983,7 +6983,7 @@
               </a:spcAft>
             </a:pPr>
             <a:r>
-              <a:rPr sz="1400" b="1">
+              <a:rPr sz="1600" b="1">
                 <a:solidFill>
                   <a:srgbClr val="333333"/>
                 </a:solidFill>
@@ -6995,17 +6995,17 @@
           <a:p>
             <a:pPr algn="l">
               <a:lnSpc>
-                <a:spcPts val="1430"/>
-              </a:lnSpc>
-              <a:spcBef>
-                <a:spcPts val="200"/>
-              </a:spcBef>
-              <a:spcAft>
-                <a:spcPts val="200"/>
-              </a:spcAft>
-            </a:pPr>
-            <a:r>
-              <a:rPr sz="1100" b="0">
+                <a:spcPts val="1820"/>
+              </a:lnSpc>
+              <a:spcBef>
+                <a:spcPts val="200"/>
+              </a:spcBef>
+              <a:spcAft>
+                <a:spcPts val="200"/>
+              </a:spcAft>
+            </a:pPr>
+            <a:r>
+              <a:rPr sz="1400" b="0">
                 <a:solidFill>
                   <a:srgbClr val="000000"/>
                 </a:solidFill>
@@ -7017,7 +7017,7 @@
           <a:p>
             <a:pPr algn="l">
               <a:lnSpc>
-                <a:spcPts val="1820"/>
+                <a:spcPts val="2080"/>
               </a:lnSpc>
               <a:spcBef>
                 <a:spcPts val="800"/>
@@ -7027,7 +7027,7 @@
               </a:spcAft>
             </a:pPr>
             <a:r>
-              <a:rPr sz="1400" b="1">
+              <a:rPr sz="1600" b="1">
                 <a:solidFill>
                   <a:srgbClr val="1B5C9E"/>
                 </a:solidFill>
@@ -7039,17 +7039,17 @@
           <a:p>
             <a:pPr algn="l">
               <a:lnSpc>
-                <a:spcPts val="1430"/>
-              </a:lnSpc>
-              <a:spcBef>
-                <a:spcPts val="200"/>
-              </a:spcBef>
-              <a:spcAft>
-                <a:spcPts val="200"/>
-              </a:spcAft>
-            </a:pPr>
-            <a:r>
-              <a:rPr sz="1100" b="0">
+                <a:spcPts val="1820"/>
+              </a:lnSpc>
+              <a:spcBef>
+                <a:spcPts val="200"/>
+              </a:spcBef>
+              <a:spcAft>
+                <a:spcPts val="200"/>
+              </a:spcAft>
+            </a:pPr>
+            <a:r>
+              <a:rPr sz="1400" b="0">
                 <a:solidFill>
                   <a:srgbClr val="000000"/>
                 </a:solidFill>
@@ -7061,17 +7061,17 @@
           <a:p>
             <a:pPr algn="l">
               <a:lnSpc>
-                <a:spcPts val="1430"/>
-              </a:lnSpc>
-              <a:spcBef>
-                <a:spcPts val="200"/>
-              </a:spcBef>
-              <a:spcAft>
-                <a:spcPts val="200"/>
-              </a:spcAft>
-            </a:pPr>
-            <a:r>
-              <a:rPr sz="1100" b="0">
+                <a:spcPts val="1820"/>
+              </a:lnSpc>
+              <a:spcBef>
+                <a:spcPts val="200"/>
+              </a:spcBef>
+              <a:spcAft>
+                <a:spcPts val="200"/>
+              </a:spcAft>
+            </a:pPr>
+            <a:r>
+              <a:rPr sz="1400" b="0">
                 <a:solidFill>
                   <a:srgbClr val="000000"/>
                 </a:solidFill>
@@ -7083,17 +7083,17 @@
           <a:p>
             <a:pPr algn="l">
               <a:lnSpc>
-                <a:spcPts val="1430"/>
-              </a:lnSpc>
-              <a:spcBef>
-                <a:spcPts val="200"/>
-              </a:spcBef>
-              <a:spcAft>
-                <a:spcPts val="200"/>
-              </a:spcAft>
-            </a:pPr>
-            <a:r>
-              <a:rPr sz="1100" b="0">
+                <a:spcPts val="1820"/>
+              </a:lnSpc>
+              <a:spcBef>
+                <a:spcPts val="200"/>
+              </a:spcBef>
+              <a:spcAft>
+                <a:spcPts val="200"/>
+              </a:spcAft>
+            </a:pPr>
+            <a:r>
+              <a:rPr sz="1400" b="0">
                 <a:solidFill>
                   <a:srgbClr val="000000"/>
                 </a:solidFill>
@@ -7105,17 +7105,17 @@
           <a:p>
             <a:pPr algn="l">
               <a:lnSpc>
-                <a:spcPts val="1430"/>
-              </a:lnSpc>
-              <a:spcBef>
-                <a:spcPts val="200"/>
-              </a:spcBef>
-              <a:spcAft>
-                <a:spcPts val="200"/>
-              </a:spcAft>
-            </a:pPr>
-            <a:r>
-              <a:rPr sz="1100" b="0">
+                <a:spcPts val="1820"/>
+              </a:lnSpc>
+              <a:spcBef>
+                <a:spcPts val="200"/>
+              </a:spcBef>
+              <a:spcAft>
+                <a:spcPts val="200"/>
+              </a:spcAft>
+            </a:pPr>
+            <a:r>
+              <a:rPr sz="1400" b="0">
                 <a:solidFill>
                   <a:srgbClr val="000000"/>
                 </a:solidFill>
@@ -7127,7 +7127,7 @@
           <a:p>
             <a:pPr algn="l">
               <a:lnSpc>
-                <a:spcPts val="1820"/>
+                <a:spcPts val="2080"/>
               </a:lnSpc>
               <a:spcBef>
                 <a:spcPts val="800"/>
@@ -7137,7 +7137,7 @@
               </a:spcAft>
             </a:pPr>
             <a:r>
-              <a:rPr sz="1400" b="1">
+              <a:rPr sz="1600" b="1">
                 <a:solidFill>
                   <a:srgbClr val="CC3333"/>
                 </a:solidFill>
@@ -7149,17 +7149,17 @@
           <a:p>
             <a:pPr algn="l">
               <a:lnSpc>
-                <a:spcPts val="1430"/>
-              </a:lnSpc>
-              <a:spcBef>
-                <a:spcPts val="200"/>
-              </a:spcBef>
-              <a:spcAft>
-                <a:spcPts val="200"/>
-              </a:spcAft>
-            </a:pPr>
-            <a:r>
-              <a:rPr sz="1100" b="0">
+                <a:spcPts val="1820"/>
+              </a:lnSpc>
+              <a:spcBef>
+                <a:spcPts val="200"/>
+              </a:spcBef>
+              <a:spcAft>
+                <a:spcPts val="200"/>
+              </a:spcAft>
+            </a:pPr>
+            <a:r>
+              <a:rPr sz="1400" b="0">
                 <a:solidFill>
                   <a:srgbClr val="000000"/>
                 </a:solidFill>
@@ -7171,7 +7171,7 @@
           <a:p>
             <a:pPr algn="l">
               <a:lnSpc>
-                <a:spcPts val="1820"/>
+                <a:spcPts val="2080"/>
               </a:lnSpc>
               <a:spcBef>
                 <a:spcPts val="800"/>
@@ -7181,7 +7181,7 @@
               </a:spcAft>
             </a:pPr>
             <a:r>
-              <a:rPr sz="1400" b="1">
+              <a:rPr sz="1600" b="1">
                 <a:solidFill>
                   <a:srgbClr val="008040"/>
                 </a:solidFill>
@@ -7193,17 +7193,17 @@
           <a:p>
             <a:pPr algn="l">
               <a:lnSpc>
-                <a:spcPts val="1430"/>
-              </a:lnSpc>
-              <a:spcBef>
-                <a:spcPts val="200"/>
-              </a:spcBef>
-              <a:spcAft>
-                <a:spcPts val="200"/>
-              </a:spcAft>
-            </a:pPr>
-            <a:r>
-              <a:rPr sz="1100" b="0">
+                <a:spcPts val="1820"/>
+              </a:lnSpc>
+              <a:spcBef>
+                <a:spcPts val="200"/>
+              </a:spcBef>
+              <a:spcAft>
+                <a:spcPts val="200"/>
+              </a:spcAft>
+            </a:pPr>
+            <a:r>
+              <a:rPr sz="1400" b="0">
                 <a:solidFill>
                   <a:srgbClr val="000000"/>
                 </a:solidFill>
@@ -7308,7 +7308,7 @@
           <a:p>
             <a:pPr algn="l">
               <a:lnSpc>
-                <a:spcPts val="1820"/>
+                <a:spcPts val="2080"/>
               </a:lnSpc>
               <a:spcBef>
                 <a:spcPts val="0"/>
@@ -7318,7 +7318,7 @@
               </a:spcAft>
             </a:pPr>
             <a:r>
-              <a:rPr sz="1400" b="1">
+              <a:rPr sz="1600" b="1">
                 <a:solidFill>
                   <a:srgbClr val="1B3A5C"/>
                 </a:solidFill>
@@ -7330,7 +7330,7 @@
           <a:p>
             <a:pPr algn="l">
               <a:lnSpc>
-                <a:spcPts val="1820"/>
+                <a:spcPts val="2080"/>
               </a:lnSpc>
               <a:spcBef>
                 <a:spcPts val="800"/>
@@ -7340,7 +7340,7 @@
               </a:spcAft>
             </a:pPr>
             <a:r>
-              <a:rPr sz="1400" b="1">
+              <a:rPr sz="1600" b="1">
                 <a:solidFill>
                   <a:srgbClr val="333333"/>
                 </a:solidFill>
@@ -7352,17 +7352,17 @@
           <a:p>
             <a:pPr algn="l">
               <a:lnSpc>
-                <a:spcPts val="1430"/>
-              </a:lnSpc>
-              <a:spcBef>
-                <a:spcPts val="200"/>
-              </a:spcBef>
-              <a:spcAft>
-                <a:spcPts val="200"/>
-              </a:spcAft>
-            </a:pPr>
-            <a:r>
-              <a:rPr sz="1100" b="0">
+                <a:spcPts val="1820"/>
+              </a:lnSpc>
+              <a:spcBef>
+                <a:spcPts val="200"/>
+              </a:spcBef>
+              <a:spcAft>
+                <a:spcPts val="200"/>
+              </a:spcAft>
+            </a:pPr>
+            <a:r>
+              <a:rPr sz="1400" b="0">
                 <a:solidFill>
                   <a:srgbClr val="000000"/>
                 </a:solidFill>
@@ -7374,7 +7374,7 @@
           <a:p>
             <a:pPr algn="l">
               <a:lnSpc>
-                <a:spcPts val="1820"/>
+                <a:spcPts val="2080"/>
               </a:lnSpc>
               <a:spcBef>
                 <a:spcPts val="800"/>
@@ -7384,7 +7384,7 @@
               </a:spcAft>
             </a:pPr>
             <a:r>
-              <a:rPr sz="1400" b="1">
+              <a:rPr sz="1600" b="1">
                 <a:solidFill>
                   <a:srgbClr val="1B5C9E"/>
                 </a:solidFill>
@@ -7396,17 +7396,17 @@
           <a:p>
             <a:pPr algn="l">
               <a:lnSpc>
-                <a:spcPts val="1430"/>
-              </a:lnSpc>
-              <a:spcBef>
-                <a:spcPts val="200"/>
-              </a:spcBef>
-              <a:spcAft>
-                <a:spcPts val="200"/>
-              </a:spcAft>
-            </a:pPr>
-            <a:r>
-              <a:rPr sz="1100" b="0">
+                <a:spcPts val="1820"/>
+              </a:lnSpc>
+              <a:spcBef>
+                <a:spcPts val="200"/>
+              </a:spcBef>
+              <a:spcAft>
+                <a:spcPts val="200"/>
+              </a:spcAft>
+            </a:pPr>
+            <a:r>
+              <a:rPr sz="1400" b="0">
                 <a:solidFill>
                   <a:srgbClr val="000000"/>
                 </a:solidFill>
@@ -7418,17 +7418,17 @@
           <a:p>
             <a:pPr algn="l">
               <a:lnSpc>
-                <a:spcPts val="1430"/>
-              </a:lnSpc>
-              <a:spcBef>
-                <a:spcPts val="200"/>
-              </a:spcBef>
-              <a:spcAft>
-                <a:spcPts val="200"/>
-              </a:spcAft>
-            </a:pPr>
-            <a:r>
-              <a:rPr sz="1100" b="0">
+                <a:spcPts val="1820"/>
+              </a:lnSpc>
+              <a:spcBef>
+                <a:spcPts val="200"/>
+              </a:spcBef>
+              <a:spcAft>
+                <a:spcPts val="200"/>
+              </a:spcAft>
+            </a:pPr>
+            <a:r>
+              <a:rPr sz="1400" b="0">
                 <a:solidFill>
                   <a:srgbClr val="000000"/>
                 </a:solidFill>
@@ -7440,17 +7440,17 @@
           <a:p>
             <a:pPr algn="l">
               <a:lnSpc>
-                <a:spcPts val="1430"/>
-              </a:lnSpc>
-              <a:spcBef>
-                <a:spcPts val="200"/>
-              </a:spcBef>
-              <a:spcAft>
-                <a:spcPts val="200"/>
-              </a:spcAft>
-            </a:pPr>
-            <a:r>
-              <a:rPr sz="1100" b="0">
+                <a:spcPts val="1820"/>
+              </a:lnSpc>
+              <a:spcBef>
+                <a:spcPts val="200"/>
+              </a:spcBef>
+              <a:spcAft>
+                <a:spcPts val="200"/>
+              </a:spcAft>
+            </a:pPr>
+            <a:r>
+              <a:rPr sz="1400" b="0">
                 <a:solidFill>
                   <a:srgbClr val="000000"/>
                 </a:solidFill>
@@ -7462,17 +7462,17 @@
           <a:p>
             <a:pPr algn="l">
               <a:lnSpc>
-                <a:spcPts val="1430"/>
-              </a:lnSpc>
-              <a:spcBef>
-                <a:spcPts val="200"/>
-              </a:spcBef>
-              <a:spcAft>
-                <a:spcPts val="200"/>
-              </a:spcAft>
-            </a:pPr>
-            <a:r>
-              <a:rPr sz="1100" b="0">
+                <a:spcPts val="1820"/>
+              </a:lnSpc>
+              <a:spcBef>
+                <a:spcPts val="200"/>
+              </a:spcBef>
+              <a:spcAft>
+                <a:spcPts val="200"/>
+              </a:spcAft>
+            </a:pPr>
+            <a:r>
+              <a:rPr sz="1400" b="0">
                 <a:solidFill>
                   <a:srgbClr val="000000"/>
                 </a:solidFill>
@@ -7484,7 +7484,7 @@
           <a:p>
             <a:pPr algn="l">
               <a:lnSpc>
-                <a:spcPts val="1820"/>
+                <a:spcPts val="2080"/>
               </a:lnSpc>
               <a:spcBef>
                 <a:spcPts val="800"/>
@@ -7494,7 +7494,7 @@
               </a:spcAft>
             </a:pPr>
             <a:r>
-              <a:rPr sz="1400" b="1">
+              <a:rPr sz="1600" b="1">
                 <a:solidFill>
                   <a:srgbClr val="CC3333"/>
                 </a:solidFill>
@@ -7506,17 +7506,17 @@
           <a:p>
             <a:pPr algn="l">
               <a:lnSpc>
-                <a:spcPts val="1430"/>
-              </a:lnSpc>
-              <a:spcBef>
-                <a:spcPts val="200"/>
-              </a:spcBef>
-              <a:spcAft>
-                <a:spcPts val="200"/>
-              </a:spcAft>
-            </a:pPr>
-            <a:r>
-              <a:rPr sz="1100" b="0">
+                <a:spcPts val="1820"/>
+              </a:lnSpc>
+              <a:spcBef>
+                <a:spcPts val="200"/>
+              </a:spcBef>
+              <a:spcAft>
+                <a:spcPts val="200"/>
+              </a:spcAft>
+            </a:pPr>
+            <a:r>
+              <a:rPr sz="1400" b="0">
                 <a:solidFill>
                   <a:srgbClr val="000000"/>
                 </a:solidFill>
@@ -7528,7 +7528,7 @@
           <a:p>
             <a:pPr algn="l">
               <a:lnSpc>
-                <a:spcPts val="1820"/>
+                <a:spcPts val="2080"/>
               </a:lnSpc>
               <a:spcBef>
                 <a:spcPts val="800"/>
@@ -7538,7 +7538,7 @@
               </a:spcAft>
             </a:pPr>
             <a:r>
-              <a:rPr sz="1400" b="1">
+              <a:rPr sz="1600" b="1">
                 <a:solidFill>
                   <a:srgbClr val="008040"/>
                 </a:solidFill>
@@ -7550,17 +7550,17 @@
           <a:p>
             <a:pPr algn="l">
               <a:lnSpc>
-                <a:spcPts val="1430"/>
-              </a:lnSpc>
-              <a:spcBef>
-                <a:spcPts val="200"/>
-              </a:spcBef>
-              <a:spcAft>
-                <a:spcPts val="200"/>
-              </a:spcAft>
-            </a:pPr>
-            <a:r>
-              <a:rPr sz="1100" b="0">
+                <a:spcPts val="1820"/>
+              </a:lnSpc>
+              <a:spcBef>
+                <a:spcPts val="200"/>
+              </a:spcBef>
+              <a:spcAft>
+                <a:spcPts val="200"/>
+              </a:spcAft>
+            </a:pPr>
+            <a:r>
+              <a:rPr sz="1400" b="0">
                 <a:solidFill>
                   <a:srgbClr val="000000"/>
                 </a:solidFill>
@@ -7665,7 +7665,7 @@
           <a:p>
             <a:pPr algn="l">
               <a:lnSpc>
-                <a:spcPts val="1820"/>
+                <a:spcPts val="2080"/>
               </a:lnSpc>
               <a:spcBef>
                 <a:spcPts val="0"/>
@@ -7675,7 +7675,7 @@
               </a:spcAft>
             </a:pPr>
             <a:r>
-              <a:rPr sz="1400" b="1">
+              <a:rPr sz="1600" b="1">
                 <a:solidFill>
                   <a:srgbClr val="1B3A5C"/>
                 </a:solidFill>
@@ -7687,7 +7687,7 @@
           <a:p>
             <a:pPr algn="l">
               <a:lnSpc>
-                <a:spcPts val="1820"/>
+                <a:spcPts val="2080"/>
               </a:lnSpc>
               <a:spcBef>
                 <a:spcPts val="800"/>
@@ -7697,7 +7697,7 @@
               </a:spcAft>
             </a:pPr>
             <a:r>
-              <a:rPr sz="1400" b="1">
+              <a:rPr sz="1600" b="1">
                 <a:solidFill>
                   <a:srgbClr val="333333"/>
                 </a:solidFill>
@@ -7709,17 +7709,17 @@
           <a:p>
             <a:pPr algn="l">
               <a:lnSpc>
-                <a:spcPts val="1430"/>
-              </a:lnSpc>
-              <a:spcBef>
-                <a:spcPts val="200"/>
-              </a:spcBef>
-              <a:spcAft>
-                <a:spcPts val="200"/>
-              </a:spcAft>
-            </a:pPr>
-            <a:r>
-              <a:rPr sz="1100" b="0">
+                <a:spcPts val="1820"/>
+              </a:lnSpc>
+              <a:spcBef>
+                <a:spcPts val="200"/>
+              </a:spcBef>
+              <a:spcAft>
+                <a:spcPts val="200"/>
+              </a:spcAft>
+            </a:pPr>
+            <a:r>
+              <a:rPr sz="1400" b="0">
                 <a:solidFill>
                   <a:srgbClr val="000000"/>
                 </a:solidFill>
@@ -7731,7 +7731,7 @@
           <a:p>
             <a:pPr algn="l">
               <a:lnSpc>
-                <a:spcPts val="1820"/>
+                <a:spcPts val="2080"/>
               </a:lnSpc>
               <a:spcBef>
                 <a:spcPts val="800"/>
@@ -7741,7 +7741,7 @@
               </a:spcAft>
             </a:pPr>
             <a:r>
-              <a:rPr sz="1400" b="1">
+              <a:rPr sz="1600" b="1">
                 <a:solidFill>
                   <a:srgbClr val="1B5C9E"/>
                 </a:solidFill>
@@ -7753,17 +7753,17 @@
           <a:p>
             <a:pPr algn="l">
               <a:lnSpc>
-                <a:spcPts val="1430"/>
-              </a:lnSpc>
-              <a:spcBef>
-                <a:spcPts val="200"/>
-              </a:spcBef>
-              <a:spcAft>
-                <a:spcPts val="200"/>
-              </a:spcAft>
-            </a:pPr>
-            <a:r>
-              <a:rPr sz="1100" b="0">
+                <a:spcPts val="1820"/>
+              </a:lnSpc>
+              <a:spcBef>
+                <a:spcPts val="200"/>
+              </a:spcBef>
+              <a:spcAft>
+                <a:spcPts val="200"/>
+              </a:spcAft>
+            </a:pPr>
+            <a:r>
+              <a:rPr sz="1400" b="0">
                 <a:solidFill>
                   <a:srgbClr val="000000"/>
                 </a:solidFill>
@@ -7775,17 +7775,17 @@
           <a:p>
             <a:pPr algn="l">
               <a:lnSpc>
-                <a:spcPts val="1430"/>
-              </a:lnSpc>
-              <a:spcBef>
-                <a:spcPts val="200"/>
-              </a:spcBef>
-              <a:spcAft>
-                <a:spcPts val="200"/>
-              </a:spcAft>
-            </a:pPr>
-            <a:r>
-              <a:rPr sz="1100" b="0">
+                <a:spcPts val="1820"/>
+              </a:lnSpc>
+              <a:spcBef>
+                <a:spcPts val="200"/>
+              </a:spcBef>
+              <a:spcAft>
+                <a:spcPts val="200"/>
+              </a:spcAft>
+            </a:pPr>
+            <a:r>
+              <a:rPr sz="1400" b="0">
                 <a:solidFill>
                   <a:srgbClr val="000000"/>
                 </a:solidFill>
@@ -7797,17 +7797,17 @@
           <a:p>
             <a:pPr algn="l">
               <a:lnSpc>
-                <a:spcPts val="1430"/>
-              </a:lnSpc>
-              <a:spcBef>
-                <a:spcPts val="200"/>
-              </a:spcBef>
-              <a:spcAft>
-                <a:spcPts val="200"/>
-              </a:spcAft>
-            </a:pPr>
-            <a:r>
-              <a:rPr sz="1100" b="0">
+                <a:spcPts val="1820"/>
+              </a:lnSpc>
+              <a:spcBef>
+                <a:spcPts val="200"/>
+              </a:spcBef>
+              <a:spcAft>
+                <a:spcPts val="200"/>
+              </a:spcAft>
+            </a:pPr>
+            <a:r>
+              <a:rPr sz="1400" b="0">
                 <a:solidFill>
                   <a:srgbClr val="000000"/>
                 </a:solidFill>
@@ -7819,7 +7819,7 @@
           <a:p>
             <a:pPr algn="l">
               <a:lnSpc>
-                <a:spcPts val="1820"/>
+                <a:spcPts val="2080"/>
               </a:lnSpc>
               <a:spcBef>
                 <a:spcPts val="800"/>
@@ -7829,7 +7829,7 @@
               </a:spcAft>
             </a:pPr>
             <a:r>
-              <a:rPr sz="1400" b="1">
+              <a:rPr sz="1600" b="1">
                 <a:solidFill>
                   <a:srgbClr val="CC3333"/>
                 </a:solidFill>
@@ -7841,17 +7841,17 @@
           <a:p>
             <a:pPr algn="l">
               <a:lnSpc>
-                <a:spcPts val="1430"/>
-              </a:lnSpc>
-              <a:spcBef>
-                <a:spcPts val="200"/>
-              </a:spcBef>
-              <a:spcAft>
-                <a:spcPts val="200"/>
-              </a:spcAft>
-            </a:pPr>
-            <a:r>
-              <a:rPr sz="1100" b="0">
+                <a:spcPts val="1820"/>
+              </a:lnSpc>
+              <a:spcBef>
+                <a:spcPts val="200"/>
+              </a:spcBef>
+              <a:spcAft>
+                <a:spcPts val="200"/>
+              </a:spcAft>
+            </a:pPr>
+            <a:r>
+              <a:rPr sz="1400" b="0">
                 <a:solidFill>
                   <a:srgbClr val="000000"/>
                 </a:solidFill>
@@ -7863,7 +7863,7 @@
           <a:p>
             <a:pPr algn="l">
               <a:lnSpc>
-                <a:spcPts val="1820"/>
+                <a:spcPts val="2080"/>
               </a:lnSpc>
               <a:spcBef>
                 <a:spcPts val="800"/>
@@ -7873,7 +7873,7 @@
               </a:spcAft>
             </a:pPr>
             <a:r>
-              <a:rPr sz="1400" b="1">
+              <a:rPr sz="1600" b="1">
                 <a:solidFill>
                   <a:srgbClr val="008040"/>
                 </a:solidFill>
@@ -7885,17 +7885,17 @@
           <a:p>
             <a:pPr algn="l">
               <a:lnSpc>
-                <a:spcPts val="1430"/>
-              </a:lnSpc>
-              <a:spcBef>
-                <a:spcPts val="200"/>
-              </a:spcBef>
-              <a:spcAft>
-                <a:spcPts val="200"/>
-              </a:spcAft>
-            </a:pPr>
-            <a:r>
-              <a:rPr sz="1100" b="0">
+                <a:spcPts val="1820"/>
+              </a:lnSpc>
+              <a:spcBef>
+                <a:spcPts val="200"/>
+              </a:spcBef>
+              <a:spcAft>
+                <a:spcPts val="200"/>
+              </a:spcAft>
+            </a:pPr>
+            <a:r>
+              <a:rPr sz="1400" b="0">
                 <a:solidFill>
                   <a:srgbClr val="000000"/>
                 </a:solidFill>
@@ -8000,7 +8000,7 @@
           <a:p>
             <a:pPr algn="l">
               <a:lnSpc>
-                <a:spcPts val="1820"/>
+                <a:spcPts val="2080"/>
               </a:lnSpc>
               <a:spcBef>
                 <a:spcPts val="0"/>
@@ -8010,7 +8010,7 @@
               </a:spcAft>
             </a:pPr>
             <a:r>
-              <a:rPr sz="1400" b="1">
+              <a:rPr sz="1600" b="1">
                 <a:solidFill>
                   <a:srgbClr val="1B3A5C"/>
                 </a:solidFill>
@@ -8022,7 +8022,7 @@
           <a:p>
             <a:pPr algn="l">
               <a:lnSpc>
-                <a:spcPts val="1820"/>
+                <a:spcPts val="2080"/>
               </a:lnSpc>
               <a:spcBef>
                 <a:spcPts val="800"/>
@@ -8032,7 +8032,7 @@
               </a:spcAft>
             </a:pPr>
             <a:r>
-              <a:rPr sz="1400" b="1">
+              <a:rPr sz="1600" b="1">
                 <a:solidFill>
                   <a:srgbClr val="333333"/>
                 </a:solidFill>
@@ -8044,17 +8044,17 @@
           <a:p>
             <a:pPr algn="l">
               <a:lnSpc>
-                <a:spcPts val="1430"/>
-              </a:lnSpc>
-              <a:spcBef>
-                <a:spcPts val="200"/>
-              </a:spcBef>
-              <a:spcAft>
-                <a:spcPts val="200"/>
-              </a:spcAft>
-            </a:pPr>
-            <a:r>
-              <a:rPr sz="1100" b="0">
+                <a:spcPts val="1820"/>
+              </a:lnSpc>
+              <a:spcBef>
+                <a:spcPts val="200"/>
+              </a:spcBef>
+              <a:spcAft>
+                <a:spcPts val="200"/>
+              </a:spcAft>
+            </a:pPr>
+            <a:r>
+              <a:rPr sz="1400" b="0">
                 <a:solidFill>
                   <a:srgbClr val="000000"/>
                 </a:solidFill>
@@ -8066,7 +8066,7 @@
           <a:p>
             <a:pPr algn="l">
               <a:lnSpc>
-                <a:spcPts val="1820"/>
+                <a:spcPts val="2080"/>
               </a:lnSpc>
               <a:spcBef>
                 <a:spcPts val="800"/>
@@ -8076,7 +8076,7 @@
               </a:spcAft>
             </a:pPr>
             <a:r>
-              <a:rPr sz="1400" b="1">
+              <a:rPr sz="1600" b="1">
                 <a:solidFill>
                   <a:srgbClr val="1B5C9E"/>
                 </a:solidFill>
@@ -8088,17 +8088,17 @@
           <a:p>
             <a:pPr algn="l">
               <a:lnSpc>
-                <a:spcPts val="1430"/>
-              </a:lnSpc>
-              <a:spcBef>
-                <a:spcPts val="200"/>
-              </a:spcBef>
-              <a:spcAft>
-                <a:spcPts val="200"/>
-              </a:spcAft>
-            </a:pPr>
-            <a:r>
-              <a:rPr sz="1100" b="0">
+                <a:spcPts val="1820"/>
+              </a:lnSpc>
+              <a:spcBef>
+                <a:spcPts val="200"/>
+              </a:spcBef>
+              <a:spcAft>
+                <a:spcPts val="200"/>
+              </a:spcAft>
+            </a:pPr>
+            <a:r>
+              <a:rPr sz="1400" b="0">
                 <a:solidFill>
                   <a:srgbClr val="000000"/>
                 </a:solidFill>
@@ -8110,17 +8110,17 @@
           <a:p>
             <a:pPr algn="l">
               <a:lnSpc>
-                <a:spcPts val="1430"/>
-              </a:lnSpc>
-              <a:spcBef>
-                <a:spcPts val="200"/>
-              </a:spcBef>
-              <a:spcAft>
-                <a:spcPts val="200"/>
-              </a:spcAft>
-            </a:pPr>
-            <a:r>
-              <a:rPr sz="1100" b="0">
+                <a:spcPts val="1820"/>
+              </a:lnSpc>
+              <a:spcBef>
+                <a:spcPts val="200"/>
+              </a:spcBef>
+              <a:spcAft>
+                <a:spcPts val="200"/>
+              </a:spcAft>
+            </a:pPr>
+            <a:r>
+              <a:rPr sz="1400" b="0">
                 <a:solidFill>
                   <a:srgbClr val="000000"/>
                 </a:solidFill>
@@ -8132,17 +8132,17 @@
           <a:p>
             <a:pPr algn="l">
               <a:lnSpc>
-                <a:spcPts val="1430"/>
-              </a:lnSpc>
-              <a:spcBef>
-                <a:spcPts val="200"/>
-              </a:spcBef>
-              <a:spcAft>
-                <a:spcPts val="200"/>
-              </a:spcAft>
-            </a:pPr>
-            <a:r>
-              <a:rPr sz="1100" b="0">
+                <a:spcPts val="1820"/>
+              </a:lnSpc>
+              <a:spcBef>
+                <a:spcPts val="200"/>
+              </a:spcBef>
+              <a:spcAft>
+                <a:spcPts val="200"/>
+              </a:spcAft>
+            </a:pPr>
+            <a:r>
+              <a:rPr sz="1400" b="0">
                 <a:solidFill>
                   <a:srgbClr val="000000"/>
                 </a:solidFill>
@@ -8154,17 +8154,17 @@
           <a:p>
             <a:pPr algn="l">
               <a:lnSpc>
-                <a:spcPts val="1430"/>
-              </a:lnSpc>
-              <a:spcBef>
-                <a:spcPts val="200"/>
-              </a:spcBef>
-              <a:spcAft>
-                <a:spcPts val="200"/>
-              </a:spcAft>
-            </a:pPr>
-            <a:r>
-              <a:rPr sz="1100" b="0">
+                <a:spcPts val="1820"/>
+              </a:lnSpc>
+              <a:spcBef>
+                <a:spcPts val="200"/>
+              </a:spcBef>
+              <a:spcAft>
+                <a:spcPts val="200"/>
+              </a:spcAft>
+            </a:pPr>
+            <a:r>
+              <a:rPr sz="1400" b="0">
                 <a:solidFill>
                   <a:srgbClr val="000000"/>
                 </a:solidFill>
@@ -8176,7 +8176,7 @@
           <a:p>
             <a:pPr algn="l">
               <a:lnSpc>
-                <a:spcPts val="1820"/>
+                <a:spcPts val="2080"/>
               </a:lnSpc>
               <a:spcBef>
                 <a:spcPts val="800"/>
@@ -8186,7 +8186,7 @@
               </a:spcAft>
             </a:pPr>
             <a:r>
-              <a:rPr sz="1400" b="1">
+              <a:rPr sz="1600" b="1">
                 <a:solidFill>
                   <a:srgbClr val="CC3333"/>
                 </a:solidFill>
@@ -8198,17 +8198,17 @@
           <a:p>
             <a:pPr algn="l">
               <a:lnSpc>
-                <a:spcPts val="1430"/>
-              </a:lnSpc>
-              <a:spcBef>
-                <a:spcPts val="200"/>
-              </a:spcBef>
-              <a:spcAft>
-                <a:spcPts val="200"/>
-              </a:spcAft>
-            </a:pPr>
-            <a:r>
-              <a:rPr sz="1100" b="0">
+                <a:spcPts val="1820"/>
+              </a:lnSpc>
+              <a:spcBef>
+                <a:spcPts val="200"/>
+              </a:spcBef>
+              <a:spcAft>
+                <a:spcPts val="200"/>
+              </a:spcAft>
+            </a:pPr>
+            <a:r>
+              <a:rPr sz="1400" b="0">
                 <a:solidFill>
                   <a:srgbClr val="000000"/>
                 </a:solidFill>
@@ -8220,7 +8220,7 @@
           <a:p>
             <a:pPr algn="l">
               <a:lnSpc>
-                <a:spcPts val="1820"/>
+                <a:spcPts val="2080"/>
               </a:lnSpc>
               <a:spcBef>
                 <a:spcPts val="800"/>
@@ -8230,7 +8230,7 @@
               </a:spcAft>
             </a:pPr>
             <a:r>
-              <a:rPr sz="1400" b="1">
+              <a:rPr sz="1600" b="1">
                 <a:solidFill>
                   <a:srgbClr val="008040"/>
                 </a:solidFill>
@@ -8242,17 +8242,17 @@
           <a:p>
             <a:pPr algn="l">
               <a:lnSpc>
-                <a:spcPts val="1430"/>
-              </a:lnSpc>
-              <a:spcBef>
-                <a:spcPts val="200"/>
-              </a:spcBef>
-              <a:spcAft>
-                <a:spcPts val="200"/>
-              </a:spcAft>
-            </a:pPr>
-            <a:r>
-              <a:rPr sz="1100" b="0">
+                <a:spcPts val="1820"/>
+              </a:lnSpc>
+              <a:spcBef>
+                <a:spcPts val="200"/>
+              </a:spcBef>
+              <a:spcAft>
+                <a:spcPts val="200"/>
+              </a:spcAft>
+            </a:pPr>
+            <a:r>
+              <a:rPr sz="1400" b="0">
                 <a:solidFill>
                   <a:srgbClr val="000000"/>
                 </a:solidFill>

--- a/ppts_output_v3/04_消费税风险指引.pptx
+++ b/ppts_output_v3/04_消费税风险指引.pptx
@@ -5449,28 +5449,6 @@
               <a:t>同时在生产白酒和其他酒的企业可查看生产产品品类及销售情况，结合消费税纳税申报情况，确认各品类酒已按规定税率缴纳消费税。</a:t>
             </a:r>
           </a:p>
-          <a:p>
-            <a:pPr algn="l">
-              <a:lnSpc>
-                <a:spcPts val="1820"/>
-              </a:lnSpc>
-              <a:spcBef>
-                <a:spcPts val="200"/>
-              </a:spcBef>
-              <a:spcAft>
-                <a:spcPts val="200"/>
-              </a:spcAft>
-            </a:pPr>
-            <a:r>
-              <a:rPr sz="1400" b="0">
-                <a:solidFill>
-                  <a:srgbClr val="000000"/>
-                </a:solidFill>
-                <a:latin typeface="Microsoft YaHei"/>
-              </a:rPr>
-              <a:t>227</a:t>
-            </a:r>
-          </a:p>
         </p:txBody>
       </p:sp>
     </p:spTree>
@@ -6117,28 +6095,6 @@
                 <a:latin typeface="Microsoft YaHei"/>
               </a:rPr>
               <a:t>企业销售应税消费品采取预收货款结算方式的，为发出应税消费品的当天，企业应及时按纳税义务发生时间确认收入并计提消费税。</a:t>
-            </a:r>
-          </a:p>
-          <a:p>
-            <a:pPr algn="l">
-              <a:lnSpc>
-                <a:spcPts val="1820"/>
-              </a:lnSpc>
-              <a:spcBef>
-                <a:spcPts val="200"/>
-              </a:spcBef>
-              <a:spcAft>
-                <a:spcPts val="200"/>
-              </a:spcAft>
-            </a:pPr>
-            <a:r>
-              <a:rPr sz="1400" b="0">
-                <a:solidFill>
-                  <a:srgbClr val="000000"/>
-                </a:solidFill>
-                <a:latin typeface="Microsoft YaHei"/>
-              </a:rPr>
-              <a:t>211</a:t>
             </a:r>
           </a:p>
         </p:txBody>

--- a/ppts_output_v3/04_消费税风险指引.pptx
+++ b/ppts_output_v3/04_消费税风险指引.pptx
@@ -3414,7 +3414,7 @@
                 </a:solidFill>
                 <a:latin typeface="Microsoft YaHei"/>
               </a:rPr>
-              <a:t>根据《中华人民共和国消费税暂行条例》（国务院令2008年第539 号）第六条规定：</a:t>
+              <a:t>根据《中华人民共和国消费税暂行条例》（国务院令2008年第539号）第六条规定：</a:t>
             </a:r>
           </a:p>
           <a:p>
@@ -3458,7 +3458,7 @@
                 </a:solidFill>
                 <a:latin typeface="Microsoft YaHei"/>
               </a:rPr>
-              <a:t>根据《中华人民共和国消费税暂行条例实施细则》（财政部国家税务总局令第 51 号）第十四条规定：条例第六条所称价外费用，是指价外向购买方收取的手续费、补贴、基金、集资费、返还利润、奖励费、违约金、滞纳金、延期付款利息、赔偿金、代收款项、代垫款项、包装费、包装物租金、储备费、优质费、运输装卸费以及其他各种性质的价外收费。但下列项目不包括在内：（一）同时符合以下条件的代垫运输费用：1.承运部门的运输费用发票开具给购买方的；2.纳税人将该项发票转交给购买方的。（二）同时符合以下条件代为收取的政府性基金或者行政事业性收费：1.由国务院或者财政部批准设立的政府性基金，由国务院或者省级人民政府及其财政、价格主管部门批准设立的行政事业性收费；2.收取时开具省级以上财政部门印制的财政票据；3.所收款项全额上缴财政。</a:t>
+              <a:t>根据《中华人民共和国消费税暂行条例实施细则》（财政部国家税务总局令第51号）第十四条规定：条例第六条所称价外费用，是指价外向购买方收取的手续费、补贴、基金、集资费、返还利润、奖励费、违约金、滞纳金、延期付款利息、赔偿金、代收款项、代垫款项、包装费、包装物租金、储备费、优质费、运输装卸费以及其他各种性质的价外收费。但下列项目不包括在内：（一）同时符合以下条件的代垫运输费用：1.承运部门的运输费用发票开具给购买方的；2.纳税人将该项发票转交给购买方的。（二）同时符合以下条件代为收取的政府性基金或者行政事业性收费：1.由国务院或者财政部批准设立的政府性基金，由国务院或者省级人民政府及其财政、价格主管部门批准设立的行政事业性收费；2.收取时开具省级以上财政部门印制的财政票据；3.所收款项全额上缴财政。</a:t>
             </a:r>
           </a:p>
           <a:p>
@@ -3749,7 +3749,7 @@
                 </a:solidFill>
                 <a:latin typeface="Microsoft YaHei"/>
               </a:rPr>
-              <a:t>根据《中华人民共和国消费税暂行条例实施细则》（财政部国家税务总局令第 51 号）第十三条规定：应税消费品连同包装物销售的，无论包装物是否单独计价以及在会计上如何核算，均应并入应税消费品的销售额中缴纳消费税。如果包装物不作价随同产品销售，而是收取押金，此项押金则不应并入应税消费品的销售额中征税。但对因逾期未收回的包装物不再退还的或者已收取的时间超过 12 个月的押金，应并入应税消费品的销售额，按照应税消费品的适用税率缴纳消费税。对既作价随同应税消费品销售，又另外收取押金的包装物的押金，凡纳税人在规定的期限内没有退还的，均应并入应税消费品的销售额，按照应税消费品的适用税率缴纳消费税。</a:t>
+              <a:t>根据《中华人民共和国消费税暂行条例实施细则》（财政部国家税务总局令第51号）第十三条规定：应税消费品连同包装物销售的，无论包装物是否单独计价以及在会计上如何核算，均应并入应税消费品的销售额中缴纳消费税。如果包装物不作价随同产品销售，而是收取押金，此项押金则不应并入应税消费品的销售额中征税。但对因逾期未收回的包装物不再退还的或者已收取的时间超过12个月的押金，应并入应税消费品的销售额，按照应税消费品的适用税率缴纳消费税。对既作价随同应税消费品销售，又另外收取押金的包装物的押金，凡纳税人在规定的期限内没有退还的，均应并入应税消费品的销售额，按照应税消费品的适用税率缴纳消费税。</a:t>
             </a:r>
           </a:p>
           <a:p>
@@ -3837,7 +3837,7 @@
                 </a:solidFill>
                 <a:latin typeface="Microsoft YaHei"/>
               </a:rPr>
-              <a:t>应税消费品连同包装物销售的，无论包装物是否单独计价以及在会计上如何核算，均应并入应税消费品的销售额中缴纳消费税。如果包装物不作价随同产品销售，而是收取押金，此项押金则不应并入应税消费品的销售额中征税。但对因逾期未收回的包装物不再退还的或者已收取的时间超过 12 个月的押金，应并入应税消费品的销售额，按照应税消费品的适用税率缴纳消费税。对既作价随同应税消费品销售，又另外收取押金的包装物的押金，凡纳税人在规定的期限内没有退还的，均应并入应税消费品的销售额，按照应税消费品的适用税率缴纳消费税。</a:t>
+              <a:t>应税消费品连同包装物销售的，无论包装物是否单独计价以及在会计上如何核算，均应并入应税消费品的销售额中缴纳消费税。如果包装物不作价随同产品销售，而是收取押金，此项押金则不应并入应税消费品的销售额中征税。但对因逾期未收回的包装物不再退还的或者已收取的时间超过12个月的押金，应并入应税消费品的销售额，按照应税消费品的适用税率缴纳消费税。对既作价随同应税消费品销售，又另外收取押金的包装物的押金，凡纳税人在规定的期限内没有退还的，均应并入应税消费品的销售额，按照应税消费品的适用税率缴纳消费税。</a:t>
             </a:r>
           </a:p>
         </p:txBody>
@@ -3996,7 +3996,7 @@
                 </a:solidFill>
                 <a:latin typeface="Microsoft YaHei"/>
               </a:rPr>
-              <a:t>企业销售应税消费品如果以外币结算的，其销售额的人民币折合率可以选择销售额发生的当天或者当月1 日的人民币汇率中间价。纳税人应在事先确定采用何种折合率，确定后1 年内不得变更。企业往往为了降低税负在一年内随意变更折合率，存在风险。</a:t>
+              <a:t>企业销售应税消费品如果以外币结算的，其销售额的人民币折合率可以选择销售额发生的当天或者当月1日的人民币汇率中间价。纳税人应在事先确定采用何种折合率，确定后1年内不得变更。企业往往为了降低税负在一年内随意变更折合率，存在风险。</a:t>
             </a:r>
           </a:p>
           <a:p>
@@ -4040,29 +4040,29 @@
                 </a:solidFill>
                 <a:latin typeface="Microsoft YaHei"/>
               </a:rPr>
-              <a:t>根据《中华人民共和国消费税暂行条例实施细则》（财政部国家税务总局令第 51 号）第十一条：</a:t>
-            </a:r>
-          </a:p>
-          <a:p>
-            <a:pPr algn="l">
-              <a:lnSpc>
-                <a:spcPts val="1820"/>
-              </a:lnSpc>
-              <a:spcBef>
-                <a:spcPts val="200"/>
-              </a:spcBef>
-              <a:spcAft>
-                <a:spcPts val="200"/>
-              </a:spcAft>
-            </a:pPr>
-            <a:r>
-              <a:rPr sz="1400" b="0">
-                <a:solidFill>
-                  <a:srgbClr val="000000"/>
-                </a:solidFill>
-                <a:latin typeface="Microsoft YaHei"/>
-              </a:rPr>
-              <a:t>纳税人销售的应税消费品，以人民币以外的货币结算销售额的，其销售额的人民币折合率可以选择销售额发生的当天或者当月1日的人民币汇率中间价。纳税人应在事先确定采用何种折合率，确定后1 年内不得变更。</a:t>
+              <a:t>根据《中华人民共和国消费税暂行条例实施细则》（财政部国家税务总局令第51号）第十一条：</a:t>
+            </a:r>
+          </a:p>
+          <a:p>
+            <a:pPr algn="l">
+              <a:lnSpc>
+                <a:spcPts val="1820"/>
+              </a:lnSpc>
+              <a:spcBef>
+                <a:spcPts val="200"/>
+              </a:spcBef>
+              <a:spcAft>
+                <a:spcPts val="200"/>
+              </a:spcAft>
+            </a:pPr>
+            <a:r>
+              <a:rPr sz="1400" b="0">
+                <a:solidFill>
+                  <a:srgbClr val="000000"/>
+                </a:solidFill>
+                <a:latin typeface="Microsoft YaHei"/>
+              </a:rPr>
+              <a:t>纳税人销售的应税消费品，以人民币以外的货币结算销售额的，其销售额的人民币折合率可以选择销售额发生的当天或者当月1日的人民币汇率中间价。纳税人应在事先确定采用何种折合率，确定后1年内不得变更。</a:t>
             </a:r>
           </a:p>
           <a:p>
@@ -4150,7 +4150,7 @@
                 </a:solidFill>
                 <a:latin typeface="Microsoft YaHei"/>
               </a:rPr>
-              <a:t>企业销售应税消费品如果以外币结算的，其销售额的人民币折合率可以选择销售额发生的当天或者当月1 日的人民币汇率中间价。企业应在事先确定采用何种折合率，确定后1 年内不得变更。</a:t>
+              <a:t>企业销售应税消费品如果以外币结算的，其销售额的人民币折合率可以选择销售额发生的当天或者当月1日的人民币汇率中间价。企业应在事先确定采用何种折合率，确定后1年内不得变更。</a:t>
             </a:r>
           </a:p>
         </p:txBody>
@@ -4353,7 +4353,7 @@
                 </a:solidFill>
                 <a:latin typeface="Microsoft YaHei"/>
               </a:rPr>
-              <a:t>根据《财政部 国家税务总局关于&lt;中华人民共和国消费税暂行条例实施细则&gt;有关条款解释的通知》（财法〔2012〕8 号）：《中华人民共和国消费税暂行条例实施细则》（财政部令第51号）第七条第二款规定，“委托加工的应税消费品直接出售的，不再缴纳消费税”。现将这一规定的含义解释如下：委托方将收回的应税消费品，以不高于受托方的计税价格出售的，为直接出售，不再缴纳消费税；委托方以高于受托方的计税价格出售的，不属于直接出售，需按照规定申报缴纳消费税，在计税时准予扣除受托方已代收代缴的消费税。</a:t>
+              <a:t>根据《财政部 国家税务总局关于&lt;中华人民共和国消费税暂行条例实施细则&gt;有关条款解释的通知》（财法〔2012〕8号）：《中华人民共和国消费税暂行条例实施细则》（财政部令第51号）第七条第二款规定，“委托加工的应税消费品直接出售的，不再缴纳消费税”。现将这一规定的含义解释如下：委托方将收回的应税消费品，以不高于受托方的计税价格出售的，为直接出售，不再缴纳消费税；委托方以高于受托方的计税价格出售的，不属于直接出售，需按照规定申报缴纳消费税，在计税时准予扣除受托方已代收代缴的消费税。</a:t>
             </a:r>
           </a:p>
           <a:p>
@@ -4644,7 +4644,7 @@
                 </a:solidFill>
                 <a:latin typeface="Microsoft YaHei"/>
               </a:rPr>
-              <a:t>根据《中华人民共和国消费税暂行条例实施细则》（财政部令第51 号）第七条规定：</a:t>
+              <a:t>根据《中华人民共和国消费税暂行条例实施细则》（财政部令第51号）第七条规定：</a:t>
             </a:r>
           </a:p>
           <a:p>
@@ -5270,7 +5270,7 @@
                 </a:solidFill>
                 <a:latin typeface="Microsoft YaHei"/>
               </a:rPr>
-              <a:t>酒类消费税适用税率按原料划分为不同税率，粮食白酒和其他酒存在差异，《中华人民共和国消费税暂行条例》规定白酒税率从价20%加从量 0.5 元/500 克（或者 500 毫升），其他酒税率从价10%。可能存在将粮食白酒混用为其他酒适用消费税税率的风险。</a:t>
+              <a:t>酒类消费税适用税率按原料划分为不同税率，粮食白酒和其他酒存在差异，《中华人民共和国消费税暂行条例》规定白酒税率从价20%加从量0.5元/500克（或者500毫升），其他酒税率从价10%。可能存在将粮食白酒混用为其他酒适用消费税税率的风险。</a:t>
             </a:r>
           </a:p>
           <a:p>
@@ -5314,51 +5314,51 @@
                 </a:solidFill>
                 <a:latin typeface="Microsoft YaHei"/>
               </a:rPr>
-              <a:t>根据《中华人民共和国消费税暂行条例》附件“消费税税目税率表”;《国家税务总局关于配制酒消费税适用税率问题的公告》（国家税务总局公告 2011 年第 53 号） 第二条的规定：二、配制酒消费税适用税率（一）以蒸馏酒或食用酒精为酒基，同时符合以下条件的配制酒，按消费税税目税率表“其他酒”10%适用税率征收消费税。1.具有国家相关部门批准的国食健字或卫食健字文号；2.酒精度低于 38 度（含）。</a:t>
-            </a:r>
-          </a:p>
-          <a:p>
-            <a:pPr algn="l">
-              <a:lnSpc>
-                <a:spcPts val="1820"/>
-              </a:lnSpc>
-              <a:spcBef>
-                <a:spcPts val="200"/>
-              </a:spcBef>
-              <a:spcAft>
-                <a:spcPts val="200"/>
-              </a:spcAft>
-            </a:pPr>
-            <a:r>
-              <a:rPr sz="1400" b="0">
-                <a:solidFill>
-                  <a:srgbClr val="000000"/>
-                </a:solidFill>
-                <a:latin typeface="Microsoft YaHei"/>
-              </a:rPr>
-              <a:t>（二）以发酵酒为酒基，酒精度低于20 度（含）的配制酒，按消费税税目税率表“其他酒”10%适用税率征收消费税。（三）其他配制酒，按消费税税目税率表“白酒”适用税率征收消费税。</a:t>
-            </a:r>
-          </a:p>
-          <a:p>
-            <a:pPr algn="l">
-              <a:lnSpc>
-                <a:spcPts val="1820"/>
-              </a:lnSpc>
-              <a:spcBef>
-                <a:spcPts val="200"/>
-              </a:spcBef>
-              <a:spcAft>
-                <a:spcPts val="200"/>
-              </a:spcAft>
-            </a:pPr>
-            <a:r>
-              <a:rPr sz="1400" b="0">
-                <a:solidFill>
-                  <a:srgbClr val="000000"/>
-                </a:solidFill>
-                <a:latin typeface="Microsoft YaHei"/>
-              </a:rPr>
-              <a:t>上述蒸馏酒或食用酒精为酒基是指酒基中蒸馏酒或食用酒精的比重超过 80%（含）；发酵酒为酒基是指酒基中发酵酒的比重超过80%（含）。。</a:t>
+              <a:t>根据《中华人民共和国消费税暂行条例》附件“消费税税目税率表”;《国家税务总局关于配制酒消费税适用税率问题的公告》（国家税务总局公告2011年第53号）第二条的规定：二、配制酒消费税适用税率（一）以蒸馏酒或食用酒精为酒基，同时符合以下条件的配制酒，按消费税税目税率表“其他酒”10%适用税率征收消费税。1.具有国家相关部门批准的国食健字或卫食健字文号；2.酒精度低于38度（含）。</a:t>
+            </a:r>
+          </a:p>
+          <a:p>
+            <a:pPr algn="l">
+              <a:lnSpc>
+                <a:spcPts val="1820"/>
+              </a:lnSpc>
+              <a:spcBef>
+                <a:spcPts val="200"/>
+              </a:spcBef>
+              <a:spcAft>
+                <a:spcPts val="200"/>
+              </a:spcAft>
+            </a:pPr>
+            <a:r>
+              <a:rPr sz="1400" b="0">
+                <a:solidFill>
+                  <a:srgbClr val="000000"/>
+                </a:solidFill>
+                <a:latin typeface="Microsoft YaHei"/>
+              </a:rPr>
+              <a:t>（二）以发酵酒为酒基，酒精度低于20度（含）的配制酒，按消费税税目税率表“其他酒”10%适用税率征收消费税。（三）其他配制酒，按消费税税目税率表“白酒”适用税率征收消费税。</a:t>
+            </a:r>
+          </a:p>
+          <a:p>
+            <a:pPr algn="l">
+              <a:lnSpc>
+                <a:spcPts val="1820"/>
+              </a:lnSpc>
+              <a:spcBef>
+                <a:spcPts val="200"/>
+              </a:spcBef>
+              <a:spcAft>
+                <a:spcPts val="200"/>
+              </a:spcAft>
+            </a:pPr>
+            <a:r>
+              <a:rPr sz="1400" b="0">
+                <a:solidFill>
+                  <a:srgbClr val="000000"/>
+                </a:solidFill>
+                <a:latin typeface="Microsoft YaHei"/>
+              </a:rPr>
+              <a:t>上述蒸馏酒或食用酒精为酒基是指酒基中蒸馏酒或食用酒精的比重超过80%（含）；发酵酒为酒基是指酒基中发酵酒的比重超过80%（含）。。</a:t>
             </a:r>
           </a:p>
           <a:p>
@@ -5649,7 +5649,7 @@
                 </a:solidFill>
                 <a:latin typeface="Microsoft YaHei"/>
               </a:rPr>
-              <a:t>按照《中华人民共和国消费税暂行条例》（中华人民共和国国务院令第 539 号）第三条规定：</a:t>
+              <a:t>按照《中华人民共和国消费税暂行条例》（中华人民共和国国务院令第539号）第三条规定：</a:t>
             </a:r>
           </a:p>
           <a:p>
@@ -5962,7 +5962,7 @@
                 </a:solidFill>
                 <a:latin typeface="Microsoft YaHei"/>
               </a:rPr>
-              <a:t>根据《中华人民共和国消费税暂行条例实施细则》（财政部国家税务总局令第 51 号）第八条规定：</a:t>
+              <a:t>根据《中华人民共和国消费税暂行条例实施细则》（财政部国家税务总局令第51号）第八条规定：</a:t>
             </a:r>
           </a:p>
           <a:p>
@@ -6297,7 +6297,7 @@
                 </a:solidFill>
                 <a:latin typeface="Microsoft YaHei"/>
               </a:rPr>
-              <a:t>根据《中华人民共和国消费税暂行条例》（国务院令2008年第539 号） 第四条规定：</a:t>
+              <a:t>根据《中华人民共和国消费税暂行条例》（国务院令2008年第539号）第四条规定：</a:t>
             </a:r>
           </a:p>
           <a:p>
@@ -6341,7 +6341,7 @@
                 </a:solidFill>
                 <a:latin typeface="Microsoft YaHei"/>
               </a:rPr>
-              <a:t>根据《中华人民共和国消费税暂行条例实施细则》（财政部国家税务总局令第 51 号）第六条规定：</a:t>
+              <a:t>根据《中华人民共和国消费税暂行条例实施细则》（财政部国家税务总局令第51号）第六条规定：</a:t>
             </a:r>
           </a:p>
           <a:p>
@@ -6654,7 +6654,7 @@
                 </a:solidFill>
                 <a:latin typeface="Microsoft YaHei"/>
               </a:rPr>
-              <a:t>根据《中华人民共和国消费税暂行条例》（国务院令2008年第539 号） 第四条规定：</a:t>
+              <a:t>根据《中华人民共和国消费税暂行条例》（国务院令2008年第539号）第四条规定：</a:t>
             </a:r>
           </a:p>
           <a:p>
@@ -6698,7 +6698,7 @@
                 </a:solidFill>
                 <a:latin typeface="Microsoft YaHei"/>
               </a:rPr>
-              <a:t>根据《中华人民共和国消费税暂行条例实施细则》（财政部国家税务总局令第 51 号）第六条规定：</a:t>
+              <a:t>根据《中华人民共和国消费税暂行条例实施细则》（财政部国家税务总局令第51号）第六条规定：</a:t>
             </a:r>
           </a:p>
           <a:p>
@@ -7011,7 +7011,7 @@
                 </a:solidFill>
                 <a:latin typeface="Microsoft YaHei"/>
               </a:rPr>
-              <a:t>根据《中华人民共和国消费税暂行条例》（国务院令2008年第539 号）第四条规定：</a:t>
+              <a:t>根据《中华人民共和国消费税暂行条例》（国务院令2008年第539号）第四条规定：</a:t>
             </a:r>
           </a:p>
           <a:p>
@@ -7055,7 +7055,7 @@
                 </a:solidFill>
                 <a:latin typeface="Microsoft YaHei"/>
               </a:rPr>
-              <a:t>根据《中华人民共和国消费税暂行条例实施细则》（财政部国家税务总局令第 51 号）第六条规定：</a:t>
+              <a:t>根据《中华人民共和国消费税暂行条例实施细则》（财政部国家税务总局令第51号）第六条规定：</a:t>
             </a:r>
           </a:p>
           <a:p>
@@ -7368,7 +7368,7 @@
                 </a:solidFill>
                 <a:latin typeface="Microsoft YaHei"/>
               </a:rPr>
-              <a:t>根据《中华人民共和国消费税暂行条例》（国务院令2008年第539 号） 第四条规定：</a:t>
+              <a:t>根据《中华人民共和国消费税暂行条例》（国务院令2008年第539号）第四条规定：</a:t>
             </a:r>
           </a:p>
           <a:p>
@@ -7412,7 +7412,7 @@
                 </a:solidFill>
                 <a:latin typeface="Microsoft YaHei"/>
               </a:rPr>
-              <a:t>根据《中华人民共和国消费税暂行条例实施细则》（财政部国家税务总局令第 51 号）第六条规定：</a:t>
+              <a:t>根据《中华人民共和国消费税暂行条例实施细则》（财政部国家税务总局令第51号）第六条规定：</a:t>
             </a:r>
           </a:p>
           <a:p>
@@ -7725,7 +7725,7 @@
                 </a:solidFill>
                 <a:latin typeface="Microsoft YaHei"/>
               </a:rPr>
-              <a:t>根据《中华人民共和国消费税暂行条例》（国务院令2008年第539 号）第四条规定：</a:t>
+              <a:t>根据《中华人民共和国消费税暂行条例》（国务院令2008年第539号）第四条规定：</a:t>
             </a:r>
           </a:p>
           <a:p>
@@ -7769,7 +7769,7 @@
                 </a:solidFill>
                 <a:latin typeface="Microsoft YaHei"/>
               </a:rPr>
-              <a:t>根据《中华人民共和国消费税暂行条例实施细则》（财政部国家税务总局令第 51 号）第六条规定：条例第四条第一款所称用于其他方面，是指纳税人将自产自用应税消费品用于生产非应税消费品、在建工程、管理部门、非生产机构、提供劳务、馈赠、赞助、集资、广告、样品、职工福利、奖励等方面。</a:t>
+              <a:t>根据《中华人民共和国消费税暂行条例实施细则》（财政部国家税务总局令第51号）第六条规定：条例第四条第一款所称用于其他方面，是指纳税人将自产自用应税消费品用于生产非应税消费品、在建工程、管理部门、非生产机构、提供劳务、馈赠、赞助、集资、广告、样品、职工福利、奖励等方面。</a:t>
             </a:r>
           </a:p>
           <a:p>
@@ -8060,7 +8060,7 @@
                 </a:solidFill>
                 <a:latin typeface="Microsoft YaHei"/>
               </a:rPr>
-              <a:t>根据《中华人民共和国消费税暂行条例》（国务院令2008年第539 号） 第四条规定：</a:t>
+              <a:t>根据《中华人民共和国消费税暂行条例》（国务院令2008年第539号）第四条规定：</a:t>
             </a:r>
           </a:p>
           <a:p>
@@ -8104,7 +8104,7 @@
                 </a:solidFill>
                 <a:latin typeface="Microsoft YaHei"/>
               </a:rPr>
-              <a:t>根据《中华人民共和国消费税暂行条例实施细则》（财政部国家税务总局令第 51 号）第六条规定：</a:t>
+              <a:t>根据《中华人民共和国消费税暂行条例实施细则》（财政部国家税务总局令第51号）第六条规定：</a:t>
             </a:r>
           </a:p>
           <a:p>

--- a/ppts_output_v3/04_消费税风险指引.pptx
+++ b/ppts_output_v3/04_消费税风险指引.pptx
@@ -3306,11 +3306,10 @@
             <a:spAutoFit/>
           </a:bodyPr>
           <a:lstStyle/>
-          <a:p/>
-          <a:p>
-            <a:pPr algn="l">
-              <a:lnSpc>
-                <a:spcPts val="2080"/>
+          <a:p>
+            <a:pPr algn="l">
+              <a:lnSpc>
+                <a:spcPct val="125000"/>
               </a:lnSpc>
               <a:spcBef>
                 <a:spcPts val="0"/>
@@ -3332,7 +3331,7 @@
           <a:p>
             <a:pPr algn="l">
               <a:lnSpc>
-                <a:spcPts val="2080"/>
+                <a:spcPct val="125000"/>
               </a:lnSpc>
               <a:spcBef>
                 <a:spcPts val="800"/>
@@ -3354,7 +3353,7 @@
           <a:p>
             <a:pPr algn="l">
               <a:lnSpc>
-                <a:spcPts val="1820"/>
+                <a:spcPct val="125000"/>
               </a:lnSpc>
               <a:spcBef>
                 <a:spcPts val="200"/>
@@ -3376,7 +3375,7 @@
           <a:p>
             <a:pPr algn="l">
               <a:lnSpc>
-                <a:spcPts val="2080"/>
+                <a:spcPct val="125000"/>
               </a:lnSpc>
               <a:spcBef>
                 <a:spcPts val="800"/>
@@ -3398,7 +3397,7 @@
           <a:p>
             <a:pPr algn="l">
               <a:lnSpc>
-                <a:spcPts val="1820"/>
+                <a:spcPct val="125000"/>
               </a:lnSpc>
               <a:spcBef>
                 <a:spcPts val="200"/>
@@ -3420,7 +3419,7 @@
           <a:p>
             <a:pPr algn="l">
               <a:lnSpc>
-                <a:spcPts val="1820"/>
+                <a:spcPct val="125000"/>
               </a:lnSpc>
               <a:spcBef>
                 <a:spcPts val="200"/>
@@ -3442,7 +3441,7 @@
           <a:p>
             <a:pPr algn="l">
               <a:lnSpc>
-                <a:spcPts val="1820"/>
+                <a:spcPct val="125000"/>
               </a:lnSpc>
               <a:spcBef>
                 <a:spcPts val="200"/>
@@ -3464,7 +3463,7 @@
           <a:p>
             <a:pPr algn="l">
               <a:lnSpc>
-                <a:spcPts val="2080"/>
+                <a:spcPct val="125000"/>
               </a:lnSpc>
               <a:spcBef>
                 <a:spcPts val="800"/>
@@ -3486,7 +3485,7 @@
           <a:p>
             <a:pPr algn="l">
               <a:lnSpc>
-                <a:spcPts val="1820"/>
+                <a:spcPct val="125000"/>
               </a:lnSpc>
               <a:spcBef>
                 <a:spcPts val="200"/>
@@ -3508,7 +3507,7 @@
           <a:p>
             <a:pPr algn="l">
               <a:lnSpc>
-                <a:spcPts val="2080"/>
+                <a:spcPct val="125000"/>
               </a:lnSpc>
               <a:spcBef>
                 <a:spcPts val="800"/>
@@ -3530,7 +3529,7 @@
           <a:p>
             <a:pPr algn="l">
               <a:lnSpc>
-                <a:spcPts val="1820"/>
+                <a:spcPct val="125000"/>
               </a:lnSpc>
               <a:spcBef>
                 <a:spcPts val="200"/>
@@ -3641,11 +3640,10 @@
             <a:spAutoFit/>
           </a:bodyPr>
           <a:lstStyle/>
-          <a:p/>
-          <a:p>
-            <a:pPr algn="l">
-              <a:lnSpc>
-                <a:spcPts val="2080"/>
+          <a:p>
+            <a:pPr algn="l">
+              <a:lnSpc>
+                <a:spcPct val="125000"/>
               </a:lnSpc>
               <a:spcBef>
                 <a:spcPts val="0"/>
@@ -3667,7 +3665,7 @@
           <a:p>
             <a:pPr algn="l">
               <a:lnSpc>
-                <a:spcPts val="2080"/>
+                <a:spcPct val="125000"/>
               </a:lnSpc>
               <a:spcBef>
                 <a:spcPts val="800"/>
@@ -3689,7 +3687,7 @@
           <a:p>
             <a:pPr algn="l">
               <a:lnSpc>
-                <a:spcPts val="1820"/>
+                <a:spcPct val="125000"/>
               </a:lnSpc>
               <a:spcBef>
                 <a:spcPts val="200"/>
@@ -3711,7 +3709,7 @@
           <a:p>
             <a:pPr algn="l">
               <a:lnSpc>
-                <a:spcPts val="2080"/>
+                <a:spcPct val="125000"/>
               </a:lnSpc>
               <a:spcBef>
                 <a:spcPts val="800"/>
@@ -3733,7 +3731,7 @@
           <a:p>
             <a:pPr algn="l">
               <a:lnSpc>
-                <a:spcPts val="1820"/>
+                <a:spcPct val="125000"/>
               </a:lnSpc>
               <a:spcBef>
                 <a:spcPts val="200"/>
@@ -3755,7 +3753,7 @@
           <a:p>
             <a:pPr algn="l">
               <a:lnSpc>
-                <a:spcPts val="2080"/>
+                <a:spcPct val="125000"/>
               </a:lnSpc>
               <a:spcBef>
                 <a:spcPts val="800"/>
@@ -3777,7 +3775,7 @@
           <a:p>
             <a:pPr algn="l">
               <a:lnSpc>
-                <a:spcPts val="1820"/>
+                <a:spcPct val="125000"/>
               </a:lnSpc>
               <a:spcBef>
                 <a:spcPts val="200"/>
@@ -3799,7 +3797,7 @@
           <a:p>
             <a:pPr algn="l">
               <a:lnSpc>
-                <a:spcPts val="2080"/>
+                <a:spcPct val="125000"/>
               </a:lnSpc>
               <a:spcBef>
                 <a:spcPts val="800"/>
@@ -3821,7 +3819,7 @@
           <a:p>
             <a:pPr algn="l">
               <a:lnSpc>
-                <a:spcPts val="1820"/>
+                <a:spcPct val="125000"/>
               </a:lnSpc>
               <a:spcBef>
                 <a:spcPts val="200"/>
@@ -3932,11 +3930,10 @@
             <a:spAutoFit/>
           </a:bodyPr>
           <a:lstStyle/>
-          <a:p/>
-          <a:p>
-            <a:pPr algn="l">
-              <a:lnSpc>
-                <a:spcPts val="2080"/>
+          <a:p>
+            <a:pPr algn="l">
+              <a:lnSpc>
+                <a:spcPct val="125000"/>
               </a:lnSpc>
               <a:spcBef>
                 <a:spcPts val="0"/>
@@ -3958,7 +3955,7 @@
           <a:p>
             <a:pPr algn="l">
               <a:lnSpc>
-                <a:spcPts val="2080"/>
+                <a:spcPct val="125000"/>
               </a:lnSpc>
               <a:spcBef>
                 <a:spcPts val="800"/>
@@ -3980,7 +3977,7 @@
           <a:p>
             <a:pPr algn="l">
               <a:lnSpc>
-                <a:spcPts val="1820"/>
+                <a:spcPct val="125000"/>
               </a:lnSpc>
               <a:spcBef>
                 <a:spcPts val="200"/>
@@ -4002,7 +3999,7 @@
           <a:p>
             <a:pPr algn="l">
               <a:lnSpc>
-                <a:spcPts val="2080"/>
+                <a:spcPct val="125000"/>
               </a:lnSpc>
               <a:spcBef>
                 <a:spcPts val="800"/>
@@ -4024,7 +4021,7 @@
           <a:p>
             <a:pPr algn="l">
               <a:lnSpc>
-                <a:spcPts val="1820"/>
+                <a:spcPct val="125000"/>
               </a:lnSpc>
               <a:spcBef>
                 <a:spcPts val="200"/>
@@ -4046,7 +4043,7 @@
           <a:p>
             <a:pPr algn="l">
               <a:lnSpc>
-                <a:spcPts val="1820"/>
+                <a:spcPct val="125000"/>
               </a:lnSpc>
               <a:spcBef>
                 <a:spcPts val="200"/>
@@ -4068,7 +4065,7 @@
           <a:p>
             <a:pPr algn="l">
               <a:lnSpc>
-                <a:spcPts val="2080"/>
+                <a:spcPct val="125000"/>
               </a:lnSpc>
               <a:spcBef>
                 <a:spcPts val="800"/>
@@ -4090,7 +4087,7 @@
           <a:p>
             <a:pPr algn="l">
               <a:lnSpc>
-                <a:spcPts val="1820"/>
+                <a:spcPct val="125000"/>
               </a:lnSpc>
               <a:spcBef>
                 <a:spcPts val="200"/>
@@ -4112,7 +4109,7 @@
           <a:p>
             <a:pPr algn="l">
               <a:lnSpc>
-                <a:spcPts val="2080"/>
+                <a:spcPct val="125000"/>
               </a:lnSpc>
               <a:spcBef>
                 <a:spcPts val="800"/>
@@ -4134,7 +4131,7 @@
           <a:p>
             <a:pPr algn="l">
               <a:lnSpc>
-                <a:spcPts val="1820"/>
+                <a:spcPct val="125000"/>
               </a:lnSpc>
               <a:spcBef>
                 <a:spcPts val="200"/>
@@ -4245,11 +4242,10 @@
             <a:spAutoFit/>
           </a:bodyPr>
           <a:lstStyle/>
-          <a:p/>
-          <a:p>
-            <a:pPr algn="l">
-              <a:lnSpc>
-                <a:spcPts val="2080"/>
+          <a:p>
+            <a:pPr algn="l">
+              <a:lnSpc>
+                <a:spcPct val="125000"/>
               </a:lnSpc>
               <a:spcBef>
                 <a:spcPts val="0"/>
@@ -4271,7 +4267,7 @@
           <a:p>
             <a:pPr algn="l">
               <a:lnSpc>
-                <a:spcPts val="2080"/>
+                <a:spcPct val="125000"/>
               </a:lnSpc>
               <a:spcBef>
                 <a:spcPts val="800"/>
@@ -4293,7 +4289,7 @@
           <a:p>
             <a:pPr algn="l">
               <a:lnSpc>
-                <a:spcPts val="1820"/>
+                <a:spcPct val="125000"/>
               </a:lnSpc>
               <a:spcBef>
                 <a:spcPts val="200"/>
@@ -4315,7 +4311,7 @@
           <a:p>
             <a:pPr algn="l">
               <a:lnSpc>
-                <a:spcPts val="2080"/>
+                <a:spcPct val="125000"/>
               </a:lnSpc>
               <a:spcBef>
                 <a:spcPts val="800"/>
@@ -4337,7 +4333,7 @@
           <a:p>
             <a:pPr algn="l">
               <a:lnSpc>
-                <a:spcPts val="1820"/>
+                <a:spcPct val="125000"/>
               </a:lnSpc>
               <a:spcBef>
                 <a:spcPts val="200"/>
@@ -4359,7 +4355,7 @@
           <a:p>
             <a:pPr algn="l">
               <a:lnSpc>
-                <a:spcPts val="2080"/>
+                <a:spcPct val="125000"/>
               </a:lnSpc>
               <a:spcBef>
                 <a:spcPts val="800"/>
@@ -4381,7 +4377,7 @@
           <a:p>
             <a:pPr algn="l">
               <a:lnSpc>
-                <a:spcPts val="1820"/>
+                <a:spcPct val="125000"/>
               </a:lnSpc>
               <a:spcBef>
                 <a:spcPts val="200"/>
@@ -4403,7 +4399,7 @@
           <a:p>
             <a:pPr algn="l">
               <a:lnSpc>
-                <a:spcPts val="2080"/>
+                <a:spcPct val="125000"/>
               </a:lnSpc>
               <a:spcBef>
                 <a:spcPts val="800"/>
@@ -4425,7 +4421,7 @@
           <a:p>
             <a:pPr algn="l">
               <a:lnSpc>
-                <a:spcPts val="1820"/>
+                <a:spcPct val="125000"/>
               </a:lnSpc>
               <a:spcBef>
                 <a:spcPts val="200"/>
@@ -4536,11 +4532,10 @@
             <a:spAutoFit/>
           </a:bodyPr>
           <a:lstStyle/>
-          <a:p/>
-          <a:p>
-            <a:pPr algn="l">
-              <a:lnSpc>
-                <a:spcPts val="2080"/>
+          <a:p>
+            <a:pPr algn="l">
+              <a:lnSpc>
+                <a:spcPct val="125000"/>
               </a:lnSpc>
               <a:spcBef>
                 <a:spcPts val="0"/>
@@ -4562,7 +4557,7 @@
           <a:p>
             <a:pPr algn="l">
               <a:lnSpc>
-                <a:spcPts val="2080"/>
+                <a:spcPct val="125000"/>
               </a:lnSpc>
               <a:spcBef>
                 <a:spcPts val="800"/>
@@ -4584,7 +4579,7 @@
           <a:p>
             <a:pPr algn="l">
               <a:lnSpc>
-                <a:spcPts val="1820"/>
+                <a:spcPct val="125000"/>
               </a:lnSpc>
               <a:spcBef>
                 <a:spcPts val="200"/>
@@ -4606,7 +4601,7 @@
           <a:p>
             <a:pPr algn="l">
               <a:lnSpc>
-                <a:spcPts val="2080"/>
+                <a:spcPct val="125000"/>
               </a:lnSpc>
               <a:spcBef>
                 <a:spcPts val="800"/>
@@ -4628,7 +4623,7 @@
           <a:p>
             <a:pPr algn="l">
               <a:lnSpc>
-                <a:spcPts val="1820"/>
+                <a:spcPct val="125000"/>
               </a:lnSpc>
               <a:spcBef>
                 <a:spcPts val="200"/>
@@ -4650,7 +4645,7 @@
           <a:p>
             <a:pPr algn="l">
               <a:lnSpc>
-                <a:spcPts val="1820"/>
+                <a:spcPct val="125000"/>
               </a:lnSpc>
               <a:spcBef>
                 <a:spcPts val="200"/>
@@ -4672,7 +4667,7 @@
           <a:p>
             <a:pPr algn="l">
               <a:lnSpc>
-                <a:spcPts val="2080"/>
+                <a:spcPct val="125000"/>
               </a:lnSpc>
               <a:spcBef>
                 <a:spcPts val="800"/>
@@ -4694,7 +4689,7 @@
           <a:p>
             <a:pPr algn="l">
               <a:lnSpc>
-                <a:spcPts val="1820"/>
+                <a:spcPct val="125000"/>
               </a:lnSpc>
               <a:spcBef>
                 <a:spcPts val="200"/>
@@ -4716,7 +4711,7 @@
           <a:p>
             <a:pPr algn="l">
               <a:lnSpc>
-                <a:spcPts val="2080"/>
+                <a:spcPct val="125000"/>
               </a:lnSpc>
               <a:spcBef>
                 <a:spcPts val="800"/>
@@ -4738,7 +4733,7 @@
           <a:p>
             <a:pPr algn="l">
               <a:lnSpc>
-                <a:spcPts val="1820"/>
+                <a:spcPct val="125000"/>
               </a:lnSpc>
               <a:spcBef>
                 <a:spcPts val="200"/>
@@ -4849,11 +4844,10 @@
             <a:spAutoFit/>
           </a:bodyPr>
           <a:lstStyle/>
-          <a:p/>
-          <a:p>
-            <a:pPr algn="l">
-              <a:lnSpc>
-                <a:spcPts val="2080"/>
+          <a:p>
+            <a:pPr algn="l">
+              <a:lnSpc>
+                <a:spcPct val="125000"/>
               </a:lnSpc>
               <a:spcBef>
                 <a:spcPts val="0"/>
@@ -4875,7 +4869,7 @@
           <a:p>
             <a:pPr algn="l">
               <a:lnSpc>
-                <a:spcPts val="2080"/>
+                <a:spcPct val="125000"/>
               </a:lnSpc>
               <a:spcBef>
                 <a:spcPts val="800"/>
@@ -4897,7 +4891,7 @@
           <a:p>
             <a:pPr algn="l">
               <a:lnSpc>
-                <a:spcPts val="1820"/>
+                <a:spcPct val="125000"/>
               </a:lnSpc>
               <a:spcBef>
                 <a:spcPts val="200"/>
@@ -4919,7 +4913,7 @@
           <a:p>
             <a:pPr algn="l">
               <a:lnSpc>
-                <a:spcPts val="2080"/>
+                <a:spcPct val="125000"/>
               </a:lnSpc>
               <a:spcBef>
                 <a:spcPts val="800"/>
@@ -4941,7 +4935,7 @@
           <a:p>
             <a:pPr algn="l">
               <a:lnSpc>
-                <a:spcPts val="1820"/>
+                <a:spcPct val="125000"/>
               </a:lnSpc>
               <a:spcBef>
                 <a:spcPts val="200"/>
@@ -4963,7 +4957,7 @@
           <a:p>
             <a:pPr algn="l">
               <a:lnSpc>
-                <a:spcPts val="1820"/>
+                <a:spcPct val="125000"/>
               </a:lnSpc>
               <a:spcBef>
                 <a:spcPts val="200"/>
@@ -4985,7 +4979,7 @@
           <a:p>
             <a:pPr algn="l">
               <a:lnSpc>
-                <a:spcPts val="1820"/>
+                <a:spcPct val="125000"/>
               </a:lnSpc>
               <a:spcBef>
                 <a:spcPts val="200"/>
@@ -5007,7 +5001,7 @@
           <a:p>
             <a:pPr algn="l">
               <a:lnSpc>
-                <a:spcPts val="1820"/>
+                <a:spcPct val="125000"/>
               </a:lnSpc>
               <a:spcBef>
                 <a:spcPts val="200"/>
@@ -5029,7 +5023,7 @@
           <a:p>
             <a:pPr algn="l">
               <a:lnSpc>
-                <a:spcPts val="2080"/>
+                <a:spcPct val="125000"/>
               </a:lnSpc>
               <a:spcBef>
                 <a:spcPts val="800"/>
@@ -5051,7 +5045,7 @@
           <a:p>
             <a:pPr algn="l">
               <a:lnSpc>
-                <a:spcPts val="1820"/>
+                <a:spcPct val="125000"/>
               </a:lnSpc>
               <a:spcBef>
                 <a:spcPts val="200"/>
@@ -5073,7 +5067,7 @@
           <a:p>
             <a:pPr algn="l">
               <a:lnSpc>
-                <a:spcPts val="2080"/>
+                <a:spcPct val="125000"/>
               </a:lnSpc>
               <a:spcBef>
                 <a:spcPts val="800"/>
@@ -5095,7 +5089,7 @@
           <a:p>
             <a:pPr algn="l">
               <a:lnSpc>
-                <a:spcPts val="1820"/>
+                <a:spcPct val="125000"/>
               </a:lnSpc>
               <a:spcBef>
                 <a:spcPts val="200"/>
@@ -5206,11 +5200,10 @@
             <a:spAutoFit/>
           </a:bodyPr>
           <a:lstStyle/>
-          <a:p/>
-          <a:p>
-            <a:pPr algn="l">
-              <a:lnSpc>
-                <a:spcPts val="2080"/>
+          <a:p>
+            <a:pPr algn="l">
+              <a:lnSpc>
+                <a:spcPct val="125000"/>
               </a:lnSpc>
               <a:spcBef>
                 <a:spcPts val="0"/>
@@ -5232,7 +5225,7 @@
           <a:p>
             <a:pPr algn="l">
               <a:lnSpc>
-                <a:spcPts val="2080"/>
+                <a:spcPct val="125000"/>
               </a:lnSpc>
               <a:spcBef>
                 <a:spcPts val="800"/>
@@ -5254,7 +5247,7 @@
           <a:p>
             <a:pPr algn="l">
               <a:lnSpc>
-                <a:spcPts val="1820"/>
+                <a:spcPct val="125000"/>
               </a:lnSpc>
               <a:spcBef>
                 <a:spcPts val="200"/>
@@ -5276,7 +5269,7 @@
           <a:p>
             <a:pPr algn="l">
               <a:lnSpc>
-                <a:spcPts val="2080"/>
+                <a:spcPct val="125000"/>
               </a:lnSpc>
               <a:spcBef>
                 <a:spcPts val="800"/>
@@ -5298,7 +5291,7 @@
           <a:p>
             <a:pPr algn="l">
               <a:lnSpc>
-                <a:spcPts val="1820"/>
+                <a:spcPct val="125000"/>
               </a:lnSpc>
               <a:spcBef>
                 <a:spcPts val="200"/>
@@ -5320,7 +5313,7 @@
           <a:p>
             <a:pPr algn="l">
               <a:lnSpc>
-                <a:spcPts val="1820"/>
+                <a:spcPct val="125000"/>
               </a:lnSpc>
               <a:spcBef>
                 <a:spcPts val="200"/>
@@ -5342,7 +5335,7 @@
           <a:p>
             <a:pPr algn="l">
               <a:lnSpc>
-                <a:spcPts val="1820"/>
+                <a:spcPct val="125000"/>
               </a:lnSpc>
               <a:spcBef>
                 <a:spcPts val="200"/>
@@ -5364,7 +5357,7 @@
           <a:p>
             <a:pPr algn="l">
               <a:lnSpc>
-                <a:spcPts val="2080"/>
+                <a:spcPct val="125000"/>
               </a:lnSpc>
               <a:spcBef>
                 <a:spcPts val="800"/>
@@ -5386,7 +5379,7 @@
           <a:p>
             <a:pPr algn="l">
               <a:lnSpc>
-                <a:spcPts val="1820"/>
+                <a:spcPct val="125000"/>
               </a:lnSpc>
               <a:spcBef>
                 <a:spcPts val="200"/>
@@ -5408,7 +5401,7 @@
           <a:p>
             <a:pPr algn="l">
               <a:lnSpc>
-                <a:spcPts val="2080"/>
+                <a:spcPct val="125000"/>
               </a:lnSpc>
               <a:spcBef>
                 <a:spcPts val="800"/>
@@ -5430,7 +5423,7 @@
           <a:p>
             <a:pPr algn="l">
               <a:lnSpc>
-                <a:spcPts val="1820"/>
+                <a:spcPct val="125000"/>
               </a:lnSpc>
               <a:spcBef>
                 <a:spcPts val="200"/>
@@ -5541,11 +5534,10 @@
             <a:spAutoFit/>
           </a:bodyPr>
           <a:lstStyle/>
-          <a:p/>
-          <a:p>
-            <a:pPr algn="l">
-              <a:lnSpc>
-                <a:spcPts val="2080"/>
+          <a:p>
+            <a:pPr algn="l">
+              <a:lnSpc>
+                <a:spcPct val="125000"/>
               </a:lnSpc>
               <a:spcBef>
                 <a:spcPts val="0"/>
@@ -5567,7 +5559,7 @@
           <a:p>
             <a:pPr algn="l">
               <a:lnSpc>
-                <a:spcPts val="2080"/>
+                <a:spcPct val="125000"/>
               </a:lnSpc>
               <a:spcBef>
                 <a:spcPts val="800"/>
@@ -5589,7 +5581,7 @@
           <a:p>
             <a:pPr algn="l">
               <a:lnSpc>
-                <a:spcPts val="1820"/>
+                <a:spcPct val="125000"/>
               </a:lnSpc>
               <a:spcBef>
                 <a:spcPts val="200"/>
@@ -5611,7 +5603,7 @@
           <a:p>
             <a:pPr algn="l">
               <a:lnSpc>
-                <a:spcPts val="2080"/>
+                <a:spcPct val="125000"/>
               </a:lnSpc>
               <a:spcBef>
                 <a:spcPts val="800"/>
@@ -5633,7 +5625,7 @@
           <a:p>
             <a:pPr algn="l">
               <a:lnSpc>
-                <a:spcPts val="1820"/>
+                <a:spcPct val="125000"/>
               </a:lnSpc>
               <a:spcBef>
                 <a:spcPts val="200"/>
@@ -5655,7 +5647,7 @@
           <a:p>
             <a:pPr algn="l">
               <a:lnSpc>
-                <a:spcPts val="1820"/>
+                <a:spcPct val="125000"/>
               </a:lnSpc>
               <a:spcBef>
                 <a:spcPts val="200"/>
@@ -5677,7 +5669,7 @@
           <a:p>
             <a:pPr algn="l">
               <a:lnSpc>
-                <a:spcPts val="2080"/>
+                <a:spcPct val="125000"/>
               </a:lnSpc>
               <a:spcBef>
                 <a:spcPts val="800"/>
@@ -5699,7 +5691,7 @@
           <a:p>
             <a:pPr algn="l">
               <a:lnSpc>
-                <a:spcPts val="1820"/>
+                <a:spcPct val="125000"/>
               </a:lnSpc>
               <a:spcBef>
                 <a:spcPts val="200"/>
@@ -5721,7 +5713,7 @@
           <a:p>
             <a:pPr algn="l">
               <a:lnSpc>
-                <a:spcPts val="2080"/>
+                <a:spcPct val="125000"/>
               </a:lnSpc>
               <a:spcBef>
                 <a:spcPts val="800"/>
@@ -5743,7 +5735,7 @@
           <a:p>
             <a:pPr algn="l">
               <a:lnSpc>
-                <a:spcPts val="1820"/>
+                <a:spcPct val="125000"/>
               </a:lnSpc>
               <a:spcBef>
                 <a:spcPts val="200"/>
@@ -5854,11 +5846,10 @@
             <a:spAutoFit/>
           </a:bodyPr>
           <a:lstStyle/>
-          <a:p/>
-          <a:p>
-            <a:pPr algn="l">
-              <a:lnSpc>
-                <a:spcPts val="2080"/>
+          <a:p>
+            <a:pPr algn="l">
+              <a:lnSpc>
+                <a:spcPct val="125000"/>
               </a:lnSpc>
               <a:spcBef>
                 <a:spcPts val="0"/>
@@ -5880,7 +5871,7 @@
           <a:p>
             <a:pPr algn="l">
               <a:lnSpc>
-                <a:spcPts val="2080"/>
+                <a:spcPct val="125000"/>
               </a:lnSpc>
               <a:spcBef>
                 <a:spcPts val="800"/>
@@ -5902,7 +5893,7 @@
           <a:p>
             <a:pPr algn="l">
               <a:lnSpc>
-                <a:spcPts val="1820"/>
+                <a:spcPct val="125000"/>
               </a:lnSpc>
               <a:spcBef>
                 <a:spcPts val="200"/>
@@ -5924,7 +5915,7 @@
           <a:p>
             <a:pPr algn="l">
               <a:lnSpc>
-                <a:spcPts val="2080"/>
+                <a:spcPct val="125000"/>
               </a:lnSpc>
               <a:spcBef>
                 <a:spcPts val="800"/>
@@ -5946,7 +5937,7 @@
           <a:p>
             <a:pPr algn="l">
               <a:lnSpc>
-                <a:spcPts val="1820"/>
+                <a:spcPct val="125000"/>
               </a:lnSpc>
               <a:spcBef>
                 <a:spcPts val="200"/>
@@ -5968,7 +5959,7 @@
           <a:p>
             <a:pPr algn="l">
               <a:lnSpc>
-                <a:spcPts val="1820"/>
+                <a:spcPct val="125000"/>
               </a:lnSpc>
               <a:spcBef>
                 <a:spcPts val="200"/>
@@ -5990,7 +5981,7 @@
           <a:p>
             <a:pPr algn="l">
               <a:lnSpc>
-                <a:spcPts val="1820"/>
+                <a:spcPct val="125000"/>
               </a:lnSpc>
               <a:spcBef>
                 <a:spcPts val="200"/>
@@ -6012,7 +6003,7 @@
           <a:p>
             <a:pPr algn="l">
               <a:lnSpc>
-                <a:spcPts val="2080"/>
+                <a:spcPct val="125000"/>
               </a:lnSpc>
               <a:spcBef>
                 <a:spcPts val="800"/>
@@ -6034,7 +6025,7 @@
           <a:p>
             <a:pPr algn="l">
               <a:lnSpc>
-                <a:spcPts val="1820"/>
+                <a:spcPct val="125000"/>
               </a:lnSpc>
               <a:spcBef>
                 <a:spcPts val="200"/>
@@ -6056,7 +6047,7 @@
           <a:p>
             <a:pPr algn="l">
               <a:lnSpc>
-                <a:spcPts val="2080"/>
+                <a:spcPct val="125000"/>
               </a:lnSpc>
               <a:spcBef>
                 <a:spcPts val="800"/>
@@ -6078,7 +6069,7 @@
           <a:p>
             <a:pPr algn="l">
               <a:lnSpc>
-                <a:spcPts val="1820"/>
+                <a:spcPct val="125000"/>
               </a:lnSpc>
               <a:spcBef>
                 <a:spcPts val="200"/>
@@ -6189,11 +6180,10 @@
             <a:spAutoFit/>
           </a:bodyPr>
           <a:lstStyle/>
-          <a:p/>
-          <a:p>
-            <a:pPr algn="l">
-              <a:lnSpc>
-                <a:spcPts val="2080"/>
+          <a:p>
+            <a:pPr algn="l">
+              <a:lnSpc>
+                <a:spcPct val="125000"/>
               </a:lnSpc>
               <a:spcBef>
                 <a:spcPts val="0"/>
@@ -6215,7 +6205,7 @@
           <a:p>
             <a:pPr algn="l">
               <a:lnSpc>
-                <a:spcPts val="2080"/>
+                <a:spcPct val="125000"/>
               </a:lnSpc>
               <a:spcBef>
                 <a:spcPts val="800"/>
@@ -6237,7 +6227,7 @@
           <a:p>
             <a:pPr algn="l">
               <a:lnSpc>
-                <a:spcPts val="1820"/>
+                <a:spcPct val="125000"/>
               </a:lnSpc>
               <a:spcBef>
                 <a:spcPts val="200"/>
@@ -6259,7 +6249,7 @@
           <a:p>
             <a:pPr algn="l">
               <a:lnSpc>
-                <a:spcPts val="2080"/>
+                <a:spcPct val="125000"/>
               </a:lnSpc>
               <a:spcBef>
                 <a:spcPts val="800"/>
@@ -6281,7 +6271,7 @@
           <a:p>
             <a:pPr algn="l">
               <a:lnSpc>
-                <a:spcPts val="1820"/>
+                <a:spcPct val="125000"/>
               </a:lnSpc>
               <a:spcBef>
                 <a:spcPts val="200"/>
@@ -6303,7 +6293,7 @@
           <a:p>
             <a:pPr algn="l">
               <a:lnSpc>
-                <a:spcPts val="1820"/>
+                <a:spcPct val="125000"/>
               </a:lnSpc>
               <a:spcBef>
                 <a:spcPts val="200"/>
@@ -6325,7 +6315,7 @@
           <a:p>
             <a:pPr algn="l">
               <a:lnSpc>
-                <a:spcPts val="1820"/>
+                <a:spcPct val="125000"/>
               </a:lnSpc>
               <a:spcBef>
                 <a:spcPts val="200"/>
@@ -6347,7 +6337,7 @@
           <a:p>
             <a:pPr algn="l">
               <a:lnSpc>
-                <a:spcPts val="1820"/>
+                <a:spcPct val="125000"/>
               </a:lnSpc>
               <a:spcBef>
                 <a:spcPts val="200"/>
@@ -6369,7 +6359,7 @@
           <a:p>
             <a:pPr algn="l">
               <a:lnSpc>
-                <a:spcPts val="2080"/>
+                <a:spcPct val="125000"/>
               </a:lnSpc>
               <a:spcBef>
                 <a:spcPts val="800"/>
@@ -6391,7 +6381,7 @@
           <a:p>
             <a:pPr algn="l">
               <a:lnSpc>
-                <a:spcPts val="1820"/>
+                <a:spcPct val="125000"/>
               </a:lnSpc>
               <a:spcBef>
                 <a:spcPts val="200"/>
@@ -6413,7 +6403,7 @@
           <a:p>
             <a:pPr algn="l">
               <a:lnSpc>
-                <a:spcPts val="2080"/>
+                <a:spcPct val="125000"/>
               </a:lnSpc>
               <a:spcBef>
                 <a:spcPts val="800"/>
@@ -6435,7 +6425,7 @@
           <a:p>
             <a:pPr algn="l">
               <a:lnSpc>
-                <a:spcPts val="1820"/>
+                <a:spcPct val="125000"/>
               </a:lnSpc>
               <a:spcBef>
                 <a:spcPts val="200"/>
@@ -6546,11 +6536,10 @@
             <a:spAutoFit/>
           </a:bodyPr>
           <a:lstStyle/>
-          <a:p/>
-          <a:p>
-            <a:pPr algn="l">
-              <a:lnSpc>
-                <a:spcPts val="2080"/>
+          <a:p>
+            <a:pPr algn="l">
+              <a:lnSpc>
+                <a:spcPct val="125000"/>
               </a:lnSpc>
               <a:spcBef>
                 <a:spcPts val="0"/>
@@ -6572,7 +6561,7 @@
           <a:p>
             <a:pPr algn="l">
               <a:lnSpc>
-                <a:spcPts val="2080"/>
+                <a:spcPct val="125000"/>
               </a:lnSpc>
               <a:spcBef>
                 <a:spcPts val="800"/>
@@ -6594,7 +6583,7 @@
           <a:p>
             <a:pPr algn="l">
               <a:lnSpc>
-                <a:spcPts val="1820"/>
+                <a:spcPct val="125000"/>
               </a:lnSpc>
               <a:spcBef>
                 <a:spcPts val="200"/>
@@ -6616,7 +6605,7 @@
           <a:p>
             <a:pPr algn="l">
               <a:lnSpc>
-                <a:spcPts val="2080"/>
+                <a:spcPct val="125000"/>
               </a:lnSpc>
               <a:spcBef>
                 <a:spcPts val="800"/>
@@ -6638,7 +6627,7 @@
           <a:p>
             <a:pPr algn="l">
               <a:lnSpc>
-                <a:spcPts val="1820"/>
+                <a:spcPct val="125000"/>
               </a:lnSpc>
               <a:spcBef>
                 <a:spcPts val="200"/>
@@ -6660,7 +6649,7 @@
           <a:p>
             <a:pPr algn="l">
               <a:lnSpc>
-                <a:spcPts val="1820"/>
+                <a:spcPct val="125000"/>
               </a:lnSpc>
               <a:spcBef>
                 <a:spcPts val="200"/>
@@ -6682,7 +6671,7 @@
           <a:p>
             <a:pPr algn="l">
               <a:lnSpc>
-                <a:spcPts val="1820"/>
+                <a:spcPct val="125000"/>
               </a:lnSpc>
               <a:spcBef>
                 <a:spcPts val="200"/>
@@ -6704,7 +6693,7 @@
           <a:p>
             <a:pPr algn="l">
               <a:lnSpc>
-                <a:spcPts val="1820"/>
+                <a:spcPct val="125000"/>
               </a:lnSpc>
               <a:spcBef>
                 <a:spcPts val="200"/>
@@ -6726,7 +6715,7 @@
           <a:p>
             <a:pPr algn="l">
               <a:lnSpc>
-                <a:spcPts val="2080"/>
+                <a:spcPct val="125000"/>
               </a:lnSpc>
               <a:spcBef>
                 <a:spcPts val="800"/>
@@ -6748,7 +6737,7 @@
           <a:p>
             <a:pPr algn="l">
               <a:lnSpc>
-                <a:spcPts val="1820"/>
+                <a:spcPct val="125000"/>
               </a:lnSpc>
               <a:spcBef>
                 <a:spcPts val="200"/>
@@ -6770,7 +6759,7 @@
           <a:p>
             <a:pPr algn="l">
               <a:lnSpc>
-                <a:spcPts val="2080"/>
+                <a:spcPct val="125000"/>
               </a:lnSpc>
               <a:spcBef>
                 <a:spcPts val="800"/>
@@ -6792,7 +6781,7 @@
           <a:p>
             <a:pPr algn="l">
               <a:lnSpc>
-                <a:spcPts val="1820"/>
+                <a:spcPct val="125000"/>
               </a:lnSpc>
               <a:spcBef>
                 <a:spcPts val="200"/>
@@ -6903,11 +6892,10 @@
             <a:spAutoFit/>
           </a:bodyPr>
           <a:lstStyle/>
-          <a:p/>
-          <a:p>
-            <a:pPr algn="l">
-              <a:lnSpc>
-                <a:spcPts val="2080"/>
+          <a:p>
+            <a:pPr algn="l">
+              <a:lnSpc>
+                <a:spcPct val="125000"/>
               </a:lnSpc>
               <a:spcBef>
                 <a:spcPts val="0"/>
@@ -6929,7 +6917,7 @@
           <a:p>
             <a:pPr algn="l">
               <a:lnSpc>
-                <a:spcPts val="2080"/>
+                <a:spcPct val="125000"/>
               </a:lnSpc>
               <a:spcBef>
                 <a:spcPts val="800"/>
@@ -6951,7 +6939,7 @@
           <a:p>
             <a:pPr algn="l">
               <a:lnSpc>
-                <a:spcPts val="1820"/>
+                <a:spcPct val="125000"/>
               </a:lnSpc>
               <a:spcBef>
                 <a:spcPts val="200"/>
@@ -6973,7 +6961,7 @@
           <a:p>
             <a:pPr algn="l">
               <a:lnSpc>
-                <a:spcPts val="2080"/>
+                <a:spcPct val="125000"/>
               </a:lnSpc>
               <a:spcBef>
                 <a:spcPts val="800"/>
@@ -6995,7 +6983,7 @@
           <a:p>
             <a:pPr algn="l">
               <a:lnSpc>
-                <a:spcPts val="1820"/>
+                <a:spcPct val="125000"/>
               </a:lnSpc>
               <a:spcBef>
                 <a:spcPts val="200"/>
@@ -7017,7 +7005,7 @@
           <a:p>
             <a:pPr algn="l">
               <a:lnSpc>
-                <a:spcPts val="1820"/>
+                <a:spcPct val="125000"/>
               </a:lnSpc>
               <a:spcBef>
                 <a:spcPts val="200"/>
@@ -7039,7 +7027,7 @@
           <a:p>
             <a:pPr algn="l">
               <a:lnSpc>
-                <a:spcPts val="1820"/>
+                <a:spcPct val="125000"/>
               </a:lnSpc>
               <a:spcBef>
                 <a:spcPts val="200"/>
@@ -7061,7 +7049,7 @@
           <a:p>
             <a:pPr algn="l">
               <a:lnSpc>
-                <a:spcPts val="1820"/>
+                <a:spcPct val="125000"/>
               </a:lnSpc>
               <a:spcBef>
                 <a:spcPts val="200"/>
@@ -7083,7 +7071,7 @@
           <a:p>
             <a:pPr algn="l">
               <a:lnSpc>
-                <a:spcPts val="2080"/>
+                <a:spcPct val="125000"/>
               </a:lnSpc>
               <a:spcBef>
                 <a:spcPts val="800"/>
@@ -7105,7 +7093,7 @@
           <a:p>
             <a:pPr algn="l">
               <a:lnSpc>
-                <a:spcPts val="1820"/>
+                <a:spcPct val="125000"/>
               </a:lnSpc>
               <a:spcBef>
                 <a:spcPts val="200"/>
@@ -7127,7 +7115,7 @@
           <a:p>
             <a:pPr algn="l">
               <a:lnSpc>
-                <a:spcPts val="2080"/>
+                <a:spcPct val="125000"/>
               </a:lnSpc>
               <a:spcBef>
                 <a:spcPts val="800"/>
@@ -7149,7 +7137,7 @@
           <a:p>
             <a:pPr algn="l">
               <a:lnSpc>
-                <a:spcPts val="1820"/>
+                <a:spcPct val="125000"/>
               </a:lnSpc>
               <a:spcBef>
                 <a:spcPts val="200"/>
@@ -7260,11 +7248,10 @@
             <a:spAutoFit/>
           </a:bodyPr>
           <a:lstStyle/>
-          <a:p/>
-          <a:p>
-            <a:pPr algn="l">
-              <a:lnSpc>
-                <a:spcPts val="2080"/>
+          <a:p>
+            <a:pPr algn="l">
+              <a:lnSpc>
+                <a:spcPct val="125000"/>
               </a:lnSpc>
               <a:spcBef>
                 <a:spcPts val="0"/>
@@ -7286,7 +7273,7 @@
           <a:p>
             <a:pPr algn="l">
               <a:lnSpc>
-                <a:spcPts val="2080"/>
+                <a:spcPct val="125000"/>
               </a:lnSpc>
               <a:spcBef>
                 <a:spcPts val="800"/>
@@ -7308,7 +7295,7 @@
           <a:p>
             <a:pPr algn="l">
               <a:lnSpc>
-                <a:spcPts val="1820"/>
+                <a:spcPct val="125000"/>
               </a:lnSpc>
               <a:spcBef>
                 <a:spcPts val="200"/>
@@ -7330,7 +7317,7 @@
           <a:p>
             <a:pPr algn="l">
               <a:lnSpc>
-                <a:spcPts val="2080"/>
+                <a:spcPct val="125000"/>
               </a:lnSpc>
               <a:spcBef>
                 <a:spcPts val="800"/>
@@ -7352,7 +7339,7 @@
           <a:p>
             <a:pPr algn="l">
               <a:lnSpc>
-                <a:spcPts val="1820"/>
+                <a:spcPct val="125000"/>
               </a:lnSpc>
               <a:spcBef>
                 <a:spcPts val="200"/>
@@ -7374,7 +7361,7 @@
           <a:p>
             <a:pPr algn="l">
               <a:lnSpc>
-                <a:spcPts val="1820"/>
+                <a:spcPct val="125000"/>
               </a:lnSpc>
               <a:spcBef>
                 <a:spcPts val="200"/>
@@ -7396,7 +7383,7 @@
           <a:p>
             <a:pPr algn="l">
               <a:lnSpc>
-                <a:spcPts val="1820"/>
+                <a:spcPct val="125000"/>
               </a:lnSpc>
               <a:spcBef>
                 <a:spcPts val="200"/>
@@ -7418,7 +7405,7 @@
           <a:p>
             <a:pPr algn="l">
               <a:lnSpc>
-                <a:spcPts val="1820"/>
+                <a:spcPct val="125000"/>
               </a:lnSpc>
               <a:spcBef>
                 <a:spcPts val="200"/>
@@ -7440,7 +7427,7 @@
           <a:p>
             <a:pPr algn="l">
               <a:lnSpc>
-                <a:spcPts val="2080"/>
+                <a:spcPct val="125000"/>
               </a:lnSpc>
               <a:spcBef>
                 <a:spcPts val="800"/>
@@ -7462,7 +7449,7 @@
           <a:p>
             <a:pPr algn="l">
               <a:lnSpc>
-                <a:spcPts val="1820"/>
+                <a:spcPct val="125000"/>
               </a:lnSpc>
               <a:spcBef>
                 <a:spcPts val="200"/>
@@ -7484,7 +7471,7 @@
           <a:p>
             <a:pPr algn="l">
               <a:lnSpc>
-                <a:spcPts val="2080"/>
+                <a:spcPct val="125000"/>
               </a:lnSpc>
               <a:spcBef>
                 <a:spcPts val="800"/>
@@ -7506,7 +7493,7 @@
           <a:p>
             <a:pPr algn="l">
               <a:lnSpc>
-                <a:spcPts val="1820"/>
+                <a:spcPct val="125000"/>
               </a:lnSpc>
               <a:spcBef>
                 <a:spcPts val="200"/>
@@ -7617,11 +7604,10 @@
             <a:spAutoFit/>
           </a:bodyPr>
           <a:lstStyle/>
-          <a:p/>
-          <a:p>
-            <a:pPr algn="l">
-              <a:lnSpc>
-                <a:spcPts val="2080"/>
+          <a:p>
+            <a:pPr algn="l">
+              <a:lnSpc>
+                <a:spcPct val="125000"/>
               </a:lnSpc>
               <a:spcBef>
                 <a:spcPts val="0"/>
@@ -7643,7 +7629,7 @@
           <a:p>
             <a:pPr algn="l">
               <a:lnSpc>
-                <a:spcPts val="2080"/>
+                <a:spcPct val="125000"/>
               </a:lnSpc>
               <a:spcBef>
                 <a:spcPts val="800"/>
@@ -7665,7 +7651,7 @@
           <a:p>
             <a:pPr algn="l">
               <a:lnSpc>
-                <a:spcPts val="1820"/>
+                <a:spcPct val="125000"/>
               </a:lnSpc>
               <a:spcBef>
                 <a:spcPts val="200"/>
@@ -7687,7 +7673,7 @@
           <a:p>
             <a:pPr algn="l">
               <a:lnSpc>
-                <a:spcPts val="2080"/>
+                <a:spcPct val="125000"/>
               </a:lnSpc>
               <a:spcBef>
                 <a:spcPts val="800"/>
@@ -7709,7 +7695,7 @@
           <a:p>
             <a:pPr algn="l">
               <a:lnSpc>
-                <a:spcPts val="1820"/>
+                <a:spcPct val="125000"/>
               </a:lnSpc>
               <a:spcBef>
                 <a:spcPts val="200"/>
@@ -7731,7 +7717,7 @@
           <a:p>
             <a:pPr algn="l">
               <a:lnSpc>
-                <a:spcPts val="1820"/>
+                <a:spcPct val="125000"/>
               </a:lnSpc>
               <a:spcBef>
                 <a:spcPts val="200"/>
@@ -7753,7 +7739,7 @@
           <a:p>
             <a:pPr algn="l">
               <a:lnSpc>
-                <a:spcPts val="1820"/>
+                <a:spcPct val="125000"/>
               </a:lnSpc>
               <a:spcBef>
                 <a:spcPts val="200"/>
@@ -7775,7 +7761,7 @@
           <a:p>
             <a:pPr algn="l">
               <a:lnSpc>
-                <a:spcPts val="2080"/>
+                <a:spcPct val="125000"/>
               </a:lnSpc>
               <a:spcBef>
                 <a:spcPts val="800"/>
@@ -7797,7 +7783,7 @@
           <a:p>
             <a:pPr algn="l">
               <a:lnSpc>
-                <a:spcPts val="1820"/>
+                <a:spcPct val="125000"/>
               </a:lnSpc>
               <a:spcBef>
                 <a:spcPts val="200"/>
@@ -7819,7 +7805,7 @@
           <a:p>
             <a:pPr algn="l">
               <a:lnSpc>
-                <a:spcPts val="2080"/>
+                <a:spcPct val="125000"/>
               </a:lnSpc>
               <a:spcBef>
                 <a:spcPts val="800"/>
@@ -7841,7 +7827,7 @@
           <a:p>
             <a:pPr algn="l">
               <a:lnSpc>
-                <a:spcPts val="1820"/>
+                <a:spcPct val="125000"/>
               </a:lnSpc>
               <a:spcBef>
                 <a:spcPts val="200"/>
@@ -7952,11 +7938,10 @@
             <a:spAutoFit/>
           </a:bodyPr>
           <a:lstStyle/>
-          <a:p/>
-          <a:p>
-            <a:pPr algn="l">
-              <a:lnSpc>
-                <a:spcPts val="2080"/>
+          <a:p>
+            <a:pPr algn="l">
+              <a:lnSpc>
+                <a:spcPct val="125000"/>
               </a:lnSpc>
               <a:spcBef>
                 <a:spcPts val="0"/>
@@ -7978,7 +7963,7 @@
           <a:p>
             <a:pPr algn="l">
               <a:lnSpc>
-                <a:spcPts val="2080"/>
+                <a:spcPct val="125000"/>
               </a:lnSpc>
               <a:spcBef>
                 <a:spcPts val="800"/>
@@ -8000,7 +7985,7 @@
           <a:p>
             <a:pPr algn="l">
               <a:lnSpc>
-                <a:spcPts val="1820"/>
+                <a:spcPct val="125000"/>
               </a:lnSpc>
               <a:spcBef>
                 <a:spcPts val="200"/>
@@ -8022,7 +8007,7 @@
           <a:p>
             <a:pPr algn="l">
               <a:lnSpc>
-                <a:spcPts val="2080"/>
+                <a:spcPct val="125000"/>
               </a:lnSpc>
               <a:spcBef>
                 <a:spcPts val="800"/>
@@ -8044,7 +8029,7 @@
           <a:p>
             <a:pPr algn="l">
               <a:lnSpc>
-                <a:spcPts val="1820"/>
+                <a:spcPct val="125000"/>
               </a:lnSpc>
               <a:spcBef>
                 <a:spcPts val="200"/>
@@ -8066,7 +8051,7 @@
           <a:p>
             <a:pPr algn="l">
               <a:lnSpc>
-                <a:spcPts val="1820"/>
+                <a:spcPct val="125000"/>
               </a:lnSpc>
               <a:spcBef>
                 <a:spcPts val="200"/>
@@ -8088,7 +8073,7 @@
           <a:p>
             <a:pPr algn="l">
               <a:lnSpc>
-                <a:spcPts val="1820"/>
+                <a:spcPct val="125000"/>
               </a:lnSpc>
               <a:spcBef>
                 <a:spcPts val="200"/>
@@ -8110,7 +8095,7 @@
           <a:p>
             <a:pPr algn="l">
               <a:lnSpc>
-                <a:spcPts val="1820"/>
+                <a:spcPct val="125000"/>
               </a:lnSpc>
               <a:spcBef>
                 <a:spcPts val="200"/>
@@ -8132,7 +8117,7 @@
           <a:p>
             <a:pPr algn="l">
               <a:lnSpc>
-                <a:spcPts val="2080"/>
+                <a:spcPct val="125000"/>
               </a:lnSpc>
               <a:spcBef>
                 <a:spcPts val="800"/>
@@ -8154,7 +8139,7 @@
           <a:p>
             <a:pPr algn="l">
               <a:lnSpc>
-                <a:spcPts val="1820"/>
+                <a:spcPct val="125000"/>
               </a:lnSpc>
               <a:spcBef>
                 <a:spcPts val="200"/>
@@ -8176,7 +8161,7 @@
           <a:p>
             <a:pPr algn="l">
               <a:lnSpc>
-                <a:spcPts val="2080"/>
+                <a:spcPct val="125000"/>
               </a:lnSpc>
               <a:spcBef>
                 <a:spcPts val="800"/>
@@ -8198,7 +8183,7 @@
           <a:p>
             <a:pPr algn="l">
               <a:lnSpc>
-                <a:spcPts val="1820"/>
+                <a:spcPct val="125000"/>
               </a:lnSpc>
               <a:spcBef>
                 <a:spcPts val="200"/>

--- a/ppts_output_v3/04_消费税风险指引.pptx
+++ b/ppts_output_v3/04_消费税风险指引.pptx
@@ -3315,7 +3315,7 @@
                 <a:spcPts val="0"/>
               </a:spcBef>
               <a:spcAft>
-                <a:spcPts val="600"/>
+                <a:spcPts val="0"/>
               </a:spcAft>
             </a:pPr>
             <a:r>
@@ -3334,10 +3334,10 @@
                 <a:spcPct val="125000"/>
               </a:lnSpc>
               <a:spcBef>
-                <a:spcPts val="800"/>
-              </a:spcBef>
-              <a:spcAft>
-                <a:spcPts val="300"/>
+                <a:spcPts val="0"/>
+              </a:spcBef>
+              <a:spcAft>
+                <a:spcPts val="0"/>
               </a:spcAft>
             </a:pPr>
             <a:r>
@@ -3356,10 +3356,10 @@
                 <a:spcPct val="125000"/>
               </a:lnSpc>
               <a:spcBef>
-                <a:spcPts val="200"/>
-              </a:spcBef>
-              <a:spcAft>
-                <a:spcPts val="200"/>
+                <a:spcPts val="0"/>
+              </a:spcBef>
+              <a:spcAft>
+                <a:spcPts val="0"/>
               </a:spcAft>
             </a:pPr>
             <a:r>
@@ -3378,10 +3378,10 @@
                 <a:spcPct val="125000"/>
               </a:lnSpc>
               <a:spcBef>
-                <a:spcPts val="800"/>
-              </a:spcBef>
-              <a:spcAft>
-                <a:spcPts val="300"/>
+                <a:spcPts val="0"/>
+              </a:spcBef>
+              <a:spcAft>
+                <a:spcPts val="0"/>
               </a:spcAft>
             </a:pPr>
             <a:r>
@@ -3400,10 +3400,10 @@
                 <a:spcPct val="125000"/>
               </a:lnSpc>
               <a:spcBef>
-                <a:spcPts val="200"/>
-              </a:spcBef>
-              <a:spcAft>
-                <a:spcPts val="200"/>
+                <a:spcPts val="0"/>
+              </a:spcBef>
+              <a:spcAft>
+                <a:spcPts val="0"/>
               </a:spcAft>
             </a:pPr>
             <a:r>
@@ -3422,10 +3422,10 @@
                 <a:spcPct val="125000"/>
               </a:lnSpc>
               <a:spcBef>
-                <a:spcPts val="200"/>
-              </a:spcBef>
-              <a:spcAft>
-                <a:spcPts val="200"/>
+                <a:spcPts val="0"/>
+              </a:spcBef>
+              <a:spcAft>
+                <a:spcPts val="0"/>
               </a:spcAft>
             </a:pPr>
             <a:r>
@@ -3444,10 +3444,10 @@
                 <a:spcPct val="125000"/>
               </a:lnSpc>
               <a:spcBef>
-                <a:spcPts val="200"/>
-              </a:spcBef>
-              <a:spcAft>
-                <a:spcPts val="200"/>
+                <a:spcPts val="0"/>
+              </a:spcBef>
+              <a:spcAft>
+                <a:spcPts val="0"/>
               </a:spcAft>
             </a:pPr>
             <a:r>
@@ -3466,10 +3466,10 @@
                 <a:spcPct val="125000"/>
               </a:lnSpc>
               <a:spcBef>
-                <a:spcPts val="800"/>
-              </a:spcBef>
-              <a:spcAft>
-                <a:spcPts val="300"/>
+                <a:spcPts val="0"/>
+              </a:spcBef>
+              <a:spcAft>
+                <a:spcPts val="0"/>
               </a:spcAft>
             </a:pPr>
             <a:r>
@@ -3488,10 +3488,10 @@
                 <a:spcPct val="125000"/>
               </a:lnSpc>
               <a:spcBef>
-                <a:spcPts val="200"/>
-              </a:spcBef>
-              <a:spcAft>
-                <a:spcPts val="200"/>
+                <a:spcPts val="0"/>
+              </a:spcBef>
+              <a:spcAft>
+                <a:spcPts val="0"/>
               </a:spcAft>
             </a:pPr>
             <a:r>
@@ -3510,10 +3510,10 @@
                 <a:spcPct val="125000"/>
               </a:lnSpc>
               <a:spcBef>
-                <a:spcPts val="800"/>
-              </a:spcBef>
-              <a:spcAft>
-                <a:spcPts val="300"/>
+                <a:spcPts val="0"/>
+              </a:spcBef>
+              <a:spcAft>
+                <a:spcPts val="0"/>
               </a:spcAft>
             </a:pPr>
             <a:r>
@@ -3532,10 +3532,10 @@
                 <a:spcPct val="125000"/>
               </a:lnSpc>
               <a:spcBef>
-                <a:spcPts val="200"/>
-              </a:spcBef>
-              <a:spcAft>
-                <a:spcPts val="200"/>
+                <a:spcPts val="0"/>
+              </a:spcBef>
+              <a:spcAft>
+                <a:spcPts val="0"/>
               </a:spcAft>
             </a:pPr>
             <a:r>
@@ -3649,7 +3649,7 @@
                 <a:spcPts val="0"/>
               </a:spcBef>
               <a:spcAft>
-                <a:spcPts val="600"/>
+                <a:spcPts val="0"/>
               </a:spcAft>
             </a:pPr>
             <a:r>
@@ -3668,10 +3668,10 @@
                 <a:spcPct val="125000"/>
               </a:lnSpc>
               <a:spcBef>
-                <a:spcPts val="800"/>
-              </a:spcBef>
-              <a:spcAft>
-                <a:spcPts val="300"/>
+                <a:spcPts val="0"/>
+              </a:spcBef>
+              <a:spcAft>
+                <a:spcPts val="0"/>
               </a:spcAft>
             </a:pPr>
             <a:r>
@@ -3690,10 +3690,10 @@
                 <a:spcPct val="125000"/>
               </a:lnSpc>
               <a:spcBef>
-                <a:spcPts val="200"/>
-              </a:spcBef>
-              <a:spcAft>
-                <a:spcPts val="200"/>
+                <a:spcPts val="0"/>
+              </a:spcBef>
+              <a:spcAft>
+                <a:spcPts val="0"/>
               </a:spcAft>
             </a:pPr>
             <a:r>
@@ -3712,10 +3712,10 @@
                 <a:spcPct val="125000"/>
               </a:lnSpc>
               <a:spcBef>
-                <a:spcPts val="800"/>
-              </a:spcBef>
-              <a:spcAft>
-                <a:spcPts val="300"/>
+                <a:spcPts val="0"/>
+              </a:spcBef>
+              <a:spcAft>
+                <a:spcPts val="0"/>
               </a:spcAft>
             </a:pPr>
             <a:r>
@@ -3734,10 +3734,10 @@
                 <a:spcPct val="125000"/>
               </a:lnSpc>
               <a:spcBef>
-                <a:spcPts val="200"/>
-              </a:spcBef>
-              <a:spcAft>
-                <a:spcPts val="200"/>
+                <a:spcPts val="0"/>
+              </a:spcBef>
+              <a:spcAft>
+                <a:spcPts val="0"/>
               </a:spcAft>
             </a:pPr>
             <a:r>
@@ -3756,10 +3756,10 @@
                 <a:spcPct val="125000"/>
               </a:lnSpc>
               <a:spcBef>
-                <a:spcPts val="800"/>
-              </a:spcBef>
-              <a:spcAft>
-                <a:spcPts val="300"/>
+                <a:spcPts val="0"/>
+              </a:spcBef>
+              <a:spcAft>
+                <a:spcPts val="0"/>
               </a:spcAft>
             </a:pPr>
             <a:r>
@@ -3778,10 +3778,10 @@
                 <a:spcPct val="125000"/>
               </a:lnSpc>
               <a:spcBef>
-                <a:spcPts val="200"/>
-              </a:spcBef>
-              <a:spcAft>
-                <a:spcPts val="200"/>
+                <a:spcPts val="0"/>
+              </a:spcBef>
+              <a:spcAft>
+                <a:spcPts val="0"/>
               </a:spcAft>
             </a:pPr>
             <a:r>
@@ -3800,10 +3800,10 @@
                 <a:spcPct val="125000"/>
               </a:lnSpc>
               <a:spcBef>
-                <a:spcPts val="800"/>
-              </a:spcBef>
-              <a:spcAft>
-                <a:spcPts val="300"/>
+                <a:spcPts val="0"/>
+              </a:spcBef>
+              <a:spcAft>
+                <a:spcPts val="0"/>
               </a:spcAft>
             </a:pPr>
             <a:r>
@@ -3822,10 +3822,10 @@
                 <a:spcPct val="125000"/>
               </a:lnSpc>
               <a:spcBef>
-                <a:spcPts val="200"/>
-              </a:spcBef>
-              <a:spcAft>
-                <a:spcPts val="200"/>
+                <a:spcPts val="0"/>
+              </a:spcBef>
+              <a:spcAft>
+                <a:spcPts val="0"/>
               </a:spcAft>
             </a:pPr>
             <a:r>
@@ -3939,7 +3939,7 @@
                 <a:spcPts val="0"/>
               </a:spcBef>
               <a:spcAft>
-                <a:spcPts val="600"/>
+                <a:spcPts val="0"/>
               </a:spcAft>
             </a:pPr>
             <a:r>
@@ -3958,10 +3958,10 @@
                 <a:spcPct val="125000"/>
               </a:lnSpc>
               <a:spcBef>
-                <a:spcPts val="800"/>
-              </a:spcBef>
-              <a:spcAft>
-                <a:spcPts val="300"/>
+                <a:spcPts val="0"/>
+              </a:spcBef>
+              <a:spcAft>
+                <a:spcPts val="0"/>
               </a:spcAft>
             </a:pPr>
             <a:r>
@@ -3980,10 +3980,10 @@
                 <a:spcPct val="125000"/>
               </a:lnSpc>
               <a:spcBef>
-                <a:spcPts val="200"/>
-              </a:spcBef>
-              <a:spcAft>
-                <a:spcPts val="200"/>
+                <a:spcPts val="0"/>
+              </a:spcBef>
+              <a:spcAft>
+                <a:spcPts val="0"/>
               </a:spcAft>
             </a:pPr>
             <a:r>
@@ -4002,10 +4002,10 @@
                 <a:spcPct val="125000"/>
               </a:lnSpc>
               <a:spcBef>
-                <a:spcPts val="800"/>
-              </a:spcBef>
-              <a:spcAft>
-                <a:spcPts val="300"/>
+                <a:spcPts val="0"/>
+              </a:spcBef>
+              <a:spcAft>
+                <a:spcPts val="0"/>
               </a:spcAft>
             </a:pPr>
             <a:r>
@@ -4024,10 +4024,10 @@
                 <a:spcPct val="125000"/>
               </a:lnSpc>
               <a:spcBef>
-                <a:spcPts val="200"/>
-              </a:spcBef>
-              <a:spcAft>
-                <a:spcPts val="200"/>
+                <a:spcPts val="0"/>
+              </a:spcBef>
+              <a:spcAft>
+                <a:spcPts val="0"/>
               </a:spcAft>
             </a:pPr>
             <a:r>
@@ -4046,10 +4046,10 @@
                 <a:spcPct val="125000"/>
               </a:lnSpc>
               <a:spcBef>
-                <a:spcPts val="200"/>
-              </a:spcBef>
-              <a:spcAft>
-                <a:spcPts val="200"/>
+                <a:spcPts val="0"/>
+              </a:spcBef>
+              <a:spcAft>
+                <a:spcPts val="0"/>
               </a:spcAft>
             </a:pPr>
             <a:r>
@@ -4068,10 +4068,10 @@
                 <a:spcPct val="125000"/>
               </a:lnSpc>
               <a:spcBef>
-                <a:spcPts val="800"/>
-              </a:spcBef>
-              <a:spcAft>
-                <a:spcPts val="300"/>
+                <a:spcPts val="0"/>
+              </a:spcBef>
+              <a:spcAft>
+                <a:spcPts val="0"/>
               </a:spcAft>
             </a:pPr>
             <a:r>
@@ -4090,10 +4090,10 @@
                 <a:spcPct val="125000"/>
               </a:lnSpc>
               <a:spcBef>
-                <a:spcPts val="200"/>
-              </a:spcBef>
-              <a:spcAft>
-                <a:spcPts val="200"/>
+                <a:spcPts val="0"/>
+              </a:spcBef>
+              <a:spcAft>
+                <a:spcPts val="0"/>
               </a:spcAft>
             </a:pPr>
             <a:r>
@@ -4112,10 +4112,10 @@
                 <a:spcPct val="125000"/>
               </a:lnSpc>
               <a:spcBef>
-                <a:spcPts val="800"/>
-              </a:spcBef>
-              <a:spcAft>
-                <a:spcPts val="300"/>
+                <a:spcPts val="0"/>
+              </a:spcBef>
+              <a:spcAft>
+                <a:spcPts val="0"/>
               </a:spcAft>
             </a:pPr>
             <a:r>
@@ -4134,10 +4134,10 @@
                 <a:spcPct val="125000"/>
               </a:lnSpc>
               <a:spcBef>
-                <a:spcPts val="200"/>
-              </a:spcBef>
-              <a:spcAft>
-                <a:spcPts val="200"/>
+                <a:spcPts val="0"/>
+              </a:spcBef>
+              <a:spcAft>
+                <a:spcPts val="0"/>
               </a:spcAft>
             </a:pPr>
             <a:r>
@@ -4251,7 +4251,7 @@
                 <a:spcPts val="0"/>
               </a:spcBef>
               <a:spcAft>
-                <a:spcPts val="600"/>
+                <a:spcPts val="0"/>
               </a:spcAft>
             </a:pPr>
             <a:r>
@@ -4270,10 +4270,10 @@
                 <a:spcPct val="125000"/>
               </a:lnSpc>
               <a:spcBef>
-                <a:spcPts val="800"/>
-              </a:spcBef>
-              <a:spcAft>
-                <a:spcPts val="300"/>
+                <a:spcPts val="0"/>
+              </a:spcBef>
+              <a:spcAft>
+                <a:spcPts val="0"/>
               </a:spcAft>
             </a:pPr>
             <a:r>
@@ -4292,10 +4292,10 @@
                 <a:spcPct val="125000"/>
               </a:lnSpc>
               <a:spcBef>
-                <a:spcPts val="200"/>
-              </a:spcBef>
-              <a:spcAft>
-                <a:spcPts val="200"/>
+                <a:spcPts val="0"/>
+              </a:spcBef>
+              <a:spcAft>
+                <a:spcPts val="0"/>
               </a:spcAft>
             </a:pPr>
             <a:r>
@@ -4314,10 +4314,10 @@
                 <a:spcPct val="125000"/>
               </a:lnSpc>
               <a:spcBef>
-                <a:spcPts val="800"/>
-              </a:spcBef>
-              <a:spcAft>
-                <a:spcPts val="300"/>
+                <a:spcPts val="0"/>
+              </a:spcBef>
+              <a:spcAft>
+                <a:spcPts val="0"/>
               </a:spcAft>
             </a:pPr>
             <a:r>
@@ -4336,10 +4336,10 @@
                 <a:spcPct val="125000"/>
               </a:lnSpc>
               <a:spcBef>
-                <a:spcPts val="200"/>
-              </a:spcBef>
-              <a:spcAft>
-                <a:spcPts val="200"/>
+                <a:spcPts val="0"/>
+              </a:spcBef>
+              <a:spcAft>
+                <a:spcPts val="0"/>
               </a:spcAft>
             </a:pPr>
             <a:r>
@@ -4358,10 +4358,10 @@
                 <a:spcPct val="125000"/>
               </a:lnSpc>
               <a:spcBef>
-                <a:spcPts val="800"/>
-              </a:spcBef>
-              <a:spcAft>
-                <a:spcPts val="300"/>
+                <a:spcPts val="0"/>
+              </a:spcBef>
+              <a:spcAft>
+                <a:spcPts val="0"/>
               </a:spcAft>
             </a:pPr>
             <a:r>
@@ -4380,10 +4380,10 @@
                 <a:spcPct val="125000"/>
               </a:lnSpc>
               <a:spcBef>
-                <a:spcPts val="200"/>
-              </a:spcBef>
-              <a:spcAft>
-                <a:spcPts val="200"/>
+                <a:spcPts val="0"/>
+              </a:spcBef>
+              <a:spcAft>
+                <a:spcPts val="0"/>
               </a:spcAft>
             </a:pPr>
             <a:r>
@@ -4402,10 +4402,10 @@
                 <a:spcPct val="125000"/>
               </a:lnSpc>
               <a:spcBef>
-                <a:spcPts val="800"/>
-              </a:spcBef>
-              <a:spcAft>
-                <a:spcPts val="300"/>
+                <a:spcPts val="0"/>
+              </a:spcBef>
+              <a:spcAft>
+                <a:spcPts val="0"/>
               </a:spcAft>
             </a:pPr>
             <a:r>
@@ -4424,10 +4424,10 @@
                 <a:spcPct val="125000"/>
               </a:lnSpc>
               <a:spcBef>
-                <a:spcPts val="200"/>
-              </a:spcBef>
-              <a:spcAft>
-                <a:spcPts val="200"/>
+                <a:spcPts val="0"/>
+              </a:spcBef>
+              <a:spcAft>
+                <a:spcPts val="0"/>
               </a:spcAft>
             </a:pPr>
             <a:r>
@@ -4541,7 +4541,7 @@
                 <a:spcPts val="0"/>
               </a:spcBef>
               <a:spcAft>
-                <a:spcPts val="600"/>
+                <a:spcPts val="0"/>
               </a:spcAft>
             </a:pPr>
             <a:r>
@@ -4560,10 +4560,10 @@
                 <a:spcPct val="125000"/>
               </a:lnSpc>
               <a:spcBef>
-                <a:spcPts val="800"/>
-              </a:spcBef>
-              <a:spcAft>
-                <a:spcPts val="300"/>
+                <a:spcPts val="0"/>
+              </a:spcBef>
+              <a:spcAft>
+                <a:spcPts val="0"/>
               </a:spcAft>
             </a:pPr>
             <a:r>
@@ -4582,10 +4582,10 @@
                 <a:spcPct val="125000"/>
               </a:lnSpc>
               <a:spcBef>
-                <a:spcPts val="200"/>
-              </a:spcBef>
-              <a:spcAft>
-                <a:spcPts val="200"/>
+                <a:spcPts val="0"/>
+              </a:spcBef>
+              <a:spcAft>
+                <a:spcPts val="0"/>
               </a:spcAft>
             </a:pPr>
             <a:r>
@@ -4604,10 +4604,10 @@
                 <a:spcPct val="125000"/>
               </a:lnSpc>
               <a:spcBef>
-                <a:spcPts val="800"/>
-              </a:spcBef>
-              <a:spcAft>
-                <a:spcPts val="300"/>
+                <a:spcPts val="0"/>
+              </a:spcBef>
+              <a:spcAft>
+                <a:spcPts val="0"/>
               </a:spcAft>
             </a:pPr>
             <a:r>
@@ -4626,10 +4626,10 @@
                 <a:spcPct val="125000"/>
               </a:lnSpc>
               <a:spcBef>
-                <a:spcPts val="200"/>
-              </a:spcBef>
-              <a:spcAft>
-                <a:spcPts val="200"/>
+                <a:spcPts val="0"/>
+              </a:spcBef>
+              <a:spcAft>
+                <a:spcPts val="0"/>
               </a:spcAft>
             </a:pPr>
             <a:r>
@@ -4648,10 +4648,10 @@
                 <a:spcPct val="125000"/>
               </a:lnSpc>
               <a:spcBef>
-                <a:spcPts val="200"/>
-              </a:spcBef>
-              <a:spcAft>
-                <a:spcPts val="200"/>
+                <a:spcPts val="0"/>
+              </a:spcBef>
+              <a:spcAft>
+                <a:spcPts val="0"/>
               </a:spcAft>
             </a:pPr>
             <a:r>
@@ -4670,10 +4670,10 @@
                 <a:spcPct val="125000"/>
               </a:lnSpc>
               <a:spcBef>
-                <a:spcPts val="800"/>
-              </a:spcBef>
-              <a:spcAft>
-                <a:spcPts val="300"/>
+                <a:spcPts val="0"/>
+              </a:spcBef>
+              <a:spcAft>
+                <a:spcPts val="0"/>
               </a:spcAft>
             </a:pPr>
             <a:r>
@@ -4692,10 +4692,10 @@
                 <a:spcPct val="125000"/>
               </a:lnSpc>
               <a:spcBef>
-                <a:spcPts val="200"/>
-              </a:spcBef>
-              <a:spcAft>
-                <a:spcPts val="200"/>
+                <a:spcPts val="0"/>
+              </a:spcBef>
+              <a:spcAft>
+                <a:spcPts val="0"/>
               </a:spcAft>
             </a:pPr>
             <a:r>
@@ -4714,10 +4714,10 @@
                 <a:spcPct val="125000"/>
               </a:lnSpc>
               <a:spcBef>
-                <a:spcPts val="800"/>
-              </a:spcBef>
-              <a:spcAft>
-                <a:spcPts val="300"/>
+                <a:spcPts val="0"/>
+              </a:spcBef>
+              <a:spcAft>
+                <a:spcPts val="0"/>
               </a:spcAft>
             </a:pPr>
             <a:r>
@@ -4736,10 +4736,10 @@
                 <a:spcPct val="125000"/>
               </a:lnSpc>
               <a:spcBef>
-                <a:spcPts val="200"/>
-              </a:spcBef>
-              <a:spcAft>
-                <a:spcPts val="200"/>
+                <a:spcPts val="0"/>
+              </a:spcBef>
+              <a:spcAft>
+                <a:spcPts val="0"/>
               </a:spcAft>
             </a:pPr>
             <a:r>
@@ -4853,7 +4853,7 @@
                 <a:spcPts val="0"/>
               </a:spcBef>
               <a:spcAft>
-                <a:spcPts val="600"/>
+                <a:spcPts val="0"/>
               </a:spcAft>
             </a:pPr>
             <a:r>
@@ -4872,10 +4872,10 @@
                 <a:spcPct val="125000"/>
               </a:lnSpc>
               <a:spcBef>
-                <a:spcPts val="800"/>
-              </a:spcBef>
-              <a:spcAft>
-                <a:spcPts val="300"/>
+                <a:spcPts val="0"/>
+              </a:spcBef>
+              <a:spcAft>
+                <a:spcPts val="0"/>
               </a:spcAft>
             </a:pPr>
             <a:r>
@@ -4894,10 +4894,10 @@
                 <a:spcPct val="125000"/>
               </a:lnSpc>
               <a:spcBef>
-                <a:spcPts val="200"/>
-              </a:spcBef>
-              <a:spcAft>
-                <a:spcPts val="200"/>
+                <a:spcPts val="0"/>
+              </a:spcBef>
+              <a:spcAft>
+                <a:spcPts val="0"/>
               </a:spcAft>
             </a:pPr>
             <a:r>
@@ -4916,10 +4916,10 @@
                 <a:spcPct val="125000"/>
               </a:lnSpc>
               <a:spcBef>
-                <a:spcPts val="800"/>
-              </a:spcBef>
-              <a:spcAft>
-                <a:spcPts val="300"/>
+                <a:spcPts val="0"/>
+              </a:spcBef>
+              <a:spcAft>
+                <a:spcPts val="0"/>
               </a:spcAft>
             </a:pPr>
             <a:r>
@@ -4938,10 +4938,10 @@
                 <a:spcPct val="125000"/>
               </a:lnSpc>
               <a:spcBef>
-                <a:spcPts val="200"/>
-              </a:spcBef>
-              <a:spcAft>
-                <a:spcPts val="200"/>
+                <a:spcPts val="0"/>
+              </a:spcBef>
+              <a:spcAft>
+                <a:spcPts val="0"/>
               </a:spcAft>
             </a:pPr>
             <a:r>
@@ -4960,10 +4960,10 @@
                 <a:spcPct val="125000"/>
               </a:lnSpc>
               <a:spcBef>
-                <a:spcPts val="200"/>
-              </a:spcBef>
-              <a:spcAft>
-                <a:spcPts val="200"/>
+                <a:spcPts val="0"/>
+              </a:spcBef>
+              <a:spcAft>
+                <a:spcPts val="0"/>
               </a:spcAft>
             </a:pPr>
             <a:r>
@@ -4982,10 +4982,10 @@
                 <a:spcPct val="125000"/>
               </a:lnSpc>
               <a:spcBef>
-                <a:spcPts val="200"/>
-              </a:spcBef>
-              <a:spcAft>
-                <a:spcPts val="200"/>
+                <a:spcPts val="0"/>
+              </a:spcBef>
+              <a:spcAft>
+                <a:spcPts val="0"/>
               </a:spcAft>
             </a:pPr>
             <a:r>
@@ -5004,10 +5004,10 @@
                 <a:spcPct val="125000"/>
               </a:lnSpc>
               <a:spcBef>
-                <a:spcPts val="200"/>
-              </a:spcBef>
-              <a:spcAft>
-                <a:spcPts val="200"/>
+                <a:spcPts val="0"/>
+              </a:spcBef>
+              <a:spcAft>
+                <a:spcPts val="0"/>
               </a:spcAft>
             </a:pPr>
             <a:r>
@@ -5026,10 +5026,10 @@
                 <a:spcPct val="125000"/>
               </a:lnSpc>
               <a:spcBef>
-                <a:spcPts val="800"/>
-              </a:spcBef>
-              <a:spcAft>
-                <a:spcPts val="300"/>
+                <a:spcPts val="0"/>
+              </a:spcBef>
+              <a:spcAft>
+                <a:spcPts val="0"/>
               </a:spcAft>
             </a:pPr>
             <a:r>
@@ -5048,10 +5048,10 @@
                 <a:spcPct val="125000"/>
               </a:lnSpc>
               <a:spcBef>
-                <a:spcPts val="200"/>
-              </a:spcBef>
-              <a:spcAft>
-                <a:spcPts val="200"/>
+                <a:spcPts val="0"/>
+              </a:spcBef>
+              <a:spcAft>
+                <a:spcPts val="0"/>
               </a:spcAft>
             </a:pPr>
             <a:r>
@@ -5070,10 +5070,10 @@
                 <a:spcPct val="125000"/>
               </a:lnSpc>
               <a:spcBef>
-                <a:spcPts val="800"/>
-              </a:spcBef>
-              <a:spcAft>
-                <a:spcPts val="300"/>
+                <a:spcPts val="0"/>
+              </a:spcBef>
+              <a:spcAft>
+                <a:spcPts val="0"/>
               </a:spcAft>
             </a:pPr>
             <a:r>
@@ -5092,10 +5092,10 @@
                 <a:spcPct val="125000"/>
               </a:lnSpc>
               <a:spcBef>
-                <a:spcPts val="200"/>
-              </a:spcBef>
-              <a:spcAft>
-                <a:spcPts val="200"/>
+                <a:spcPts val="0"/>
+              </a:spcBef>
+              <a:spcAft>
+                <a:spcPts val="0"/>
               </a:spcAft>
             </a:pPr>
             <a:r>
@@ -5209,7 +5209,7 @@
                 <a:spcPts val="0"/>
               </a:spcBef>
               <a:spcAft>
-                <a:spcPts val="600"/>
+                <a:spcPts val="0"/>
               </a:spcAft>
             </a:pPr>
             <a:r>
@@ -5228,10 +5228,10 @@
                 <a:spcPct val="125000"/>
               </a:lnSpc>
               <a:spcBef>
-                <a:spcPts val="800"/>
-              </a:spcBef>
-              <a:spcAft>
-                <a:spcPts val="300"/>
+                <a:spcPts val="0"/>
+              </a:spcBef>
+              <a:spcAft>
+                <a:spcPts val="0"/>
               </a:spcAft>
             </a:pPr>
             <a:r>
@@ -5250,10 +5250,10 @@
                 <a:spcPct val="125000"/>
               </a:lnSpc>
               <a:spcBef>
-                <a:spcPts val="200"/>
-              </a:spcBef>
-              <a:spcAft>
-                <a:spcPts val="200"/>
+                <a:spcPts val="0"/>
+              </a:spcBef>
+              <a:spcAft>
+                <a:spcPts val="0"/>
               </a:spcAft>
             </a:pPr>
             <a:r>
@@ -5272,10 +5272,10 @@
                 <a:spcPct val="125000"/>
               </a:lnSpc>
               <a:spcBef>
-                <a:spcPts val="800"/>
-              </a:spcBef>
-              <a:spcAft>
-                <a:spcPts val="300"/>
+                <a:spcPts val="0"/>
+              </a:spcBef>
+              <a:spcAft>
+                <a:spcPts val="0"/>
               </a:spcAft>
             </a:pPr>
             <a:r>
@@ -5294,10 +5294,10 @@
                 <a:spcPct val="125000"/>
               </a:lnSpc>
               <a:spcBef>
-                <a:spcPts val="200"/>
-              </a:spcBef>
-              <a:spcAft>
-                <a:spcPts val="200"/>
+                <a:spcPts val="0"/>
+              </a:spcBef>
+              <a:spcAft>
+                <a:spcPts val="0"/>
               </a:spcAft>
             </a:pPr>
             <a:r>
@@ -5316,10 +5316,10 @@
                 <a:spcPct val="125000"/>
               </a:lnSpc>
               <a:spcBef>
-                <a:spcPts val="200"/>
-              </a:spcBef>
-              <a:spcAft>
-                <a:spcPts val="200"/>
+                <a:spcPts val="0"/>
+              </a:spcBef>
+              <a:spcAft>
+                <a:spcPts val="0"/>
               </a:spcAft>
             </a:pPr>
             <a:r>
@@ -5338,10 +5338,10 @@
                 <a:spcPct val="125000"/>
               </a:lnSpc>
               <a:spcBef>
-                <a:spcPts val="200"/>
-              </a:spcBef>
-              <a:spcAft>
-                <a:spcPts val="200"/>
+                <a:spcPts val="0"/>
+              </a:spcBef>
+              <a:spcAft>
+                <a:spcPts val="0"/>
               </a:spcAft>
             </a:pPr>
             <a:r>
@@ -5360,10 +5360,10 @@
                 <a:spcPct val="125000"/>
               </a:lnSpc>
               <a:spcBef>
-                <a:spcPts val="800"/>
-              </a:spcBef>
-              <a:spcAft>
-                <a:spcPts val="300"/>
+                <a:spcPts val="0"/>
+              </a:spcBef>
+              <a:spcAft>
+                <a:spcPts val="0"/>
               </a:spcAft>
             </a:pPr>
             <a:r>
@@ -5382,10 +5382,10 @@
                 <a:spcPct val="125000"/>
               </a:lnSpc>
               <a:spcBef>
-                <a:spcPts val="200"/>
-              </a:spcBef>
-              <a:spcAft>
-                <a:spcPts val="200"/>
+                <a:spcPts val="0"/>
+              </a:spcBef>
+              <a:spcAft>
+                <a:spcPts val="0"/>
               </a:spcAft>
             </a:pPr>
             <a:r>
@@ -5404,10 +5404,10 @@
                 <a:spcPct val="125000"/>
               </a:lnSpc>
               <a:spcBef>
-                <a:spcPts val="800"/>
-              </a:spcBef>
-              <a:spcAft>
-                <a:spcPts val="300"/>
+                <a:spcPts val="0"/>
+              </a:spcBef>
+              <a:spcAft>
+                <a:spcPts val="0"/>
               </a:spcAft>
             </a:pPr>
             <a:r>
@@ -5426,10 +5426,10 @@
                 <a:spcPct val="125000"/>
               </a:lnSpc>
               <a:spcBef>
-                <a:spcPts val="200"/>
-              </a:spcBef>
-              <a:spcAft>
-                <a:spcPts val="200"/>
+                <a:spcPts val="0"/>
+              </a:spcBef>
+              <a:spcAft>
+                <a:spcPts val="0"/>
               </a:spcAft>
             </a:pPr>
             <a:r>
@@ -5543,7 +5543,7 @@
                 <a:spcPts val="0"/>
               </a:spcBef>
               <a:spcAft>
-                <a:spcPts val="600"/>
+                <a:spcPts val="0"/>
               </a:spcAft>
             </a:pPr>
             <a:r>
@@ -5562,10 +5562,10 @@
                 <a:spcPct val="125000"/>
               </a:lnSpc>
               <a:spcBef>
-                <a:spcPts val="800"/>
-              </a:spcBef>
-              <a:spcAft>
-                <a:spcPts val="300"/>
+                <a:spcPts val="0"/>
+              </a:spcBef>
+              <a:spcAft>
+                <a:spcPts val="0"/>
               </a:spcAft>
             </a:pPr>
             <a:r>
@@ -5584,10 +5584,10 @@
                 <a:spcPct val="125000"/>
               </a:lnSpc>
               <a:spcBef>
-                <a:spcPts val="200"/>
-              </a:spcBef>
-              <a:spcAft>
-                <a:spcPts val="200"/>
+                <a:spcPts val="0"/>
+              </a:spcBef>
+              <a:spcAft>
+                <a:spcPts val="0"/>
               </a:spcAft>
             </a:pPr>
             <a:r>
@@ -5606,10 +5606,10 @@
                 <a:spcPct val="125000"/>
               </a:lnSpc>
               <a:spcBef>
-                <a:spcPts val="800"/>
-              </a:spcBef>
-              <a:spcAft>
-                <a:spcPts val="300"/>
+                <a:spcPts val="0"/>
+              </a:spcBef>
+              <a:spcAft>
+                <a:spcPts val="0"/>
               </a:spcAft>
             </a:pPr>
             <a:r>
@@ -5628,10 +5628,10 @@
                 <a:spcPct val="125000"/>
               </a:lnSpc>
               <a:spcBef>
-                <a:spcPts val="200"/>
-              </a:spcBef>
-              <a:spcAft>
-                <a:spcPts val="200"/>
+                <a:spcPts val="0"/>
+              </a:spcBef>
+              <a:spcAft>
+                <a:spcPts val="0"/>
               </a:spcAft>
             </a:pPr>
             <a:r>
@@ -5650,10 +5650,10 @@
                 <a:spcPct val="125000"/>
               </a:lnSpc>
               <a:spcBef>
-                <a:spcPts val="200"/>
-              </a:spcBef>
-              <a:spcAft>
-                <a:spcPts val="200"/>
+                <a:spcPts val="0"/>
+              </a:spcBef>
+              <a:spcAft>
+                <a:spcPts val="0"/>
               </a:spcAft>
             </a:pPr>
             <a:r>
@@ -5672,10 +5672,10 @@
                 <a:spcPct val="125000"/>
               </a:lnSpc>
               <a:spcBef>
-                <a:spcPts val="800"/>
-              </a:spcBef>
-              <a:spcAft>
-                <a:spcPts val="300"/>
+                <a:spcPts val="0"/>
+              </a:spcBef>
+              <a:spcAft>
+                <a:spcPts val="0"/>
               </a:spcAft>
             </a:pPr>
             <a:r>
@@ -5694,10 +5694,10 @@
                 <a:spcPct val="125000"/>
               </a:lnSpc>
               <a:spcBef>
-                <a:spcPts val="200"/>
-              </a:spcBef>
-              <a:spcAft>
-                <a:spcPts val="200"/>
+                <a:spcPts val="0"/>
+              </a:spcBef>
+              <a:spcAft>
+                <a:spcPts val="0"/>
               </a:spcAft>
             </a:pPr>
             <a:r>
@@ -5716,10 +5716,10 @@
                 <a:spcPct val="125000"/>
               </a:lnSpc>
               <a:spcBef>
-                <a:spcPts val="800"/>
-              </a:spcBef>
-              <a:spcAft>
-                <a:spcPts val="300"/>
+                <a:spcPts val="0"/>
+              </a:spcBef>
+              <a:spcAft>
+                <a:spcPts val="0"/>
               </a:spcAft>
             </a:pPr>
             <a:r>
@@ -5738,10 +5738,10 @@
                 <a:spcPct val="125000"/>
               </a:lnSpc>
               <a:spcBef>
-                <a:spcPts val="200"/>
-              </a:spcBef>
-              <a:spcAft>
-                <a:spcPts val="200"/>
+                <a:spcPts val="0"/>
+              </a:spcBef>
+              <a:spcAft>
+                <a:spcPts val="0"/>
               </a:spcAft>
             </a:pPr>
             <a:r>
@@ -5855,7 +5855,7 @@
                 <a:spcPts val="0"/>
               </a:spcBef>
               <a:spcAft>
-                <a:spcPts val="600"/>
+                <a:spcPts val="0"/>
               </a:spcAft>
             </a:pPr>
             <a:r>
@@ -5874,10 +5874,10 @@
                 <a:spcPct val="125000"/>
               </a:lnSpc>
               <a:spcBef>
-                <a:spcPts val="800"/>
-              </a:spcBef>
-              <a:spcAft>
-                <a:spcPts val="300"/>
+                <a:spcPts val="0"/>
+              </a:spcBef>
+              <a:spcAft>
+                <a:spcPts val="0"/>
               </a:spcAft>
             </a:pPr>
             <a:r>
@@ -5896,10 +5896,10 @@
                 <a:spcPct val="125000"/>
               </a:lnSpc>
               <a:spcBef>
-                <a:spcPts val="200"/>
-              </a:spcBef>
-              <a:spcAft>
-                <a:spcPts val="200"/>
+                <a:spcPts val="0"/>
+              </a:spcBef>
+              <a:spcAft>
+                <a:spcPts val="0"/>
               </a:spcAft>
             </a:pPr>
             <a:r>
@@ -5918,10 +5918,10 @@
                 <a:spcPct val="125000"/>
               </a:lnSpc>
               <a:spcBef>
-                <a:spcPts val="800"/>
-              </a:spcBef>
-              <a:spcAft>
-                <a:spcPts val="300"/>
+                <a:spcPts val="0"/>
+              </a:spcBef>
+              <a:spcAft>
+                <a:spcPts val="0"/>
               </a:spcAft>
             </a:pPr>
             <a:r>
@@ -5940,10 +5940,10 @@
                 <a:spcPct val="125000"/>
               </a:lnSpc>
               <a:spcBef>
-                <a:spcPts val="200"/>
-              </a:spcBef>
-              <a:spcAft>
-                <a:spcPts val="200"/>
+                <a:spcPts val="0"/>
+              </a:spcBef>
+              <a:spcAft>
+                <a:spcPts val="0"/>
               </a:spcAft>
             </a:pPr>
             <a:r>
@@ -5962,10 +5962,10 @@
                 <a:spcPct val="125000"/>
               </a:lnSpc>
               <a:spcBef>
-                <a:spcPts val="200"/>
-              </a:spcBef>
-              <a:spcAft>
-                <a:spcPts val="200"/>
+                <a:spcPts val="0"/>
+              </a:spcBef>
+              <a:spcAft>
+                <a:spcPts val="0"/>
               </a:spcAft>
             </a:pPr>
             <a:r>
@@ -5984,10 +5984,10 @@
                 <a:spcPct val="125000"/>
               </a:lnSpc>
               <a:spcBef>
-                <a:spcPts val="200"/>
-              </a:spcBef>
-              <a:spcAft>
-                <a:spcPts val="200"/>
+                <a:spcPts val="0"/>
+              </a:spcBef>
+              <a:spcAft>
+                <a:spcPts val="0"/>
               </a:spcAft>
             </a:pPr>
             <a:r>
@@ -6006,10 +6006,10 @@
                 <a:spcPct val="125000"/>
               </a:lnSpc>
               <a:spcBef>
-                <a:spcPts val="800"/>
-              </a:spcBef>
-              <a:spcAft>
-                <a:spcPts val="300"/>
+                <a:spcPts val="0"/>
+              </a:spcBef>
+              <a:spcAft>
+                <a:spcPts val="0"/>
               </a:spcAft>
             </a:pPr>
             <a:r>
@@ -6028,10 +6028,10 @@
                 <a:spcPct val="125000"/>
               </a:lnSpc>
               <a:spcBef>
-                <a:spcPts val="200"/>
-              </a:spcBef>
-              <a:spcAft>
-                <a:spcPts val="200"/>
+                <a:spcPts val="0"/>
+              </a:spcBef>
+              <a:spcAft>
+                <a:spcPts val="0"/>
               </a:spcAft>
             </a:pPr>
             <a:r>
@@ -6050,10 +6050,10 @@
                 <a:spcPct val="125000"/>
               </a:lnSpc>
               <a:spcBef>
-                <a:spcPts val="800"/>
-              </a:spcBef>
-              <a:spcAft>
-                <a:spcPts val="300"/>
+                <a:spcPts val="0"/>
+              </a:spcBef>
+              <a:spcAft>
+                <a:spcPts val="0"/>
               </a:spcAft>
             </a:pPr>
             <a:r>
@@ -6072,10 +6072,10 @@
                 <a:spcPct val="125000"/>
               </a:lnSpc>
               <a:spcBef>
-                <a:spcPts val="200"/>
-              </a:spcBef>
-              <a:spcAft>
-                <a:spcPts val="200"/>
+                <a:spcPts val="0"/>
+              </a:spcBef>
+              <a:spcAft>
+                <a:spcPts val="0"/>
               </a:spcAft>
             </a:pPr>
             <a:r>
@@ -6189,7 +6189,7 @@
                 <a:spcPts val="0"/>
               </a:spcBef>
               <a:spcAft>
-                <a:spcPts val="600"/>
+                <a:spcPts val="0"/>
               </a:spcAft>
             </a:pPr>
             <a:r>
@@ -6208,10 +6208,10 @@
                 <a:spcPct val="125000"/>
               </a:lnSpc>
               <a:spcBef>
-                <a:spcPts val="800"/>
-              </a:spcBef>
-              <a:spcAft>
-                <a:spcPts val="300"/>
+                <a:spcPts val="0"/>
+              </a:spcBef>
+              <a:spcAft>
+                <a:spcPts val="0"/>
               </a:spcAft>
             </a:pPr>
             <a:r>
@@ -6230,10 +6230,10 @@
                 <a:spcPct val="125000"/>
               </a:lnSpc>
               <a:spcBef>
-                <a:spcPts val="200"/>
-              </a:spcBef>
-              <a:spcAft>
-                <a:spcPts val="200"/>
+                <a:spcPts val="0"/>
+              </a:spcBef>
+              <a:spcAft>
+                <a:spcPts val="0"/>
               </a:spcAft>
             </a:pPr>
             <a:r>
@@ -6252,10 +6252,10 @@
                 <a:spcPct val="125000"/>
               </a:lnSpc>
               <a:spcBef>
-                <a:spcPts val="800"/>
-              </a:spcBef>
-              <a:spcAft>
-                <a:spcPts val="300"/>
+                <a:spcPts val="0"/>
+              </a:spcBef>
+              <a:spcAft>
+                <a:spcPts val="0"/>
               </a:spcAft>
             </a:pPr>
             <a:r>
@@ -6274,10 +6274,10 @@
                 <a:spcPct val="125000"/>
               </a:lnSpc>
               <a:spcBef>
-                <a:spcPts val="200"/>
-              </a:spcBef>
-              <a:spcAft>
-                <a:spcPts val="200"/>
+                <a:spcPts val="0"/>
+              </a:spcBef>
+              <a:spcAft>
+                <a:spcPts val="0"/>
               </a:spcAft>
             </a:pPr>
             <a:r>
@@ -6296,10 +6296,10 @@
                 <a:spcPct val="125000"/>
               </a:lnSpc>
               <a:spcBef>
-                <a:spcPts val="200"/>
-              </a:spcBef>
-              <a:spcAft>
-                <a:spcPts val="200"/>
+                <a:spcPts val="0"/>
+              </a:spcBef>
+              <a:spcAft>
+                <a:spcPts val="0"/>
               </a:spcAft>
             </a:pPr>
             <a:r>
@@ -6318,10 +6318,10 @@
                 <a:spcPct val="125000"/>
               </a:lnSpc>
               <a:spcBef>
-                <a:spcPts val="200"/>
-              </a:spcBef>
-              <a:spcAft>
-                <a:spcPts val="200"/>
+                <a:spcPts val="0"/>
+              </a:spcBef>
+              <a:spcAft>
+                <a:spcPts val="0"/>
               </a:spcAft>
             </a:pPr>
             <a:r>
@@ -6340,10 +6340,10 @@
                 <a:spcPct val="125000"/>
               </a:lnSpc>
               <a:spcBef>
-                <a:spcPts val="200"/>
-              </a:spcBef>
-              <a:spcAft>
-                <a:spcPts val="200"/>
+                <a:spcPts val="0"/>
+              </a:spcBef>
+              <a:spcAft>
+                <a:spcPts val="0"/>
               </a:spcAft>
             </a:pPr>
             <a:r>
@@ -6362,10 +6362,10 @@
                 <a:spcPct val="125000"/>
               </a:lnSpc>
               <a:spcBef>
-                <a:spcPts val="800"/>
-              </a:spcBef>
-              <a:spcAft>
-                <a:spcPts val="300"/>
+                <a:spcPts val="0"/>
+              </a:spcBef>
+              <a:spcAft>
+                <a:spcPts val="0"/>
               </a:spcAft>
             </a:pPr>
             <a:r>
@@ -6384,10 +6384,10 @@
                 <a:spcPct val="125000"/>
               </a:lnSpc>
               <a:spcBef>
-                <a:spcPts val="200"/>
-              </a:spcBef>
-              <a:spcAft>
-                <a:spcPts val="200"/>
+                <a:spcPts val="0"/>
+              </a:spcBef>
+              <a:spcAft>
+                <a:spcPts val="0"/>
               </a:spcAft>
             </a:pPr>
             <a:r>
@@ -6406,10 +6406,10 @@
                 <a:spcPct val="125000"/>
               </a:lnSpc>
               <a:spcBef>
-                <a:spcPts val="800"/>
-              </a:spcBef>
-              <a:spcAft>
-                <a:spcPts val="300"/>
+                <a:spcPts val="0"/>
+              </a:spcBef>
+              <a:spcAft>
+                <a:spcPts val="0"/>
               </a:spcAft>
             </a:pPr>
             <a:r>
@@ -6428,10 +6428,10 @@
                 <a:spcPct val="125000"/>
               </a:lnSpc>
               <a:spcBef>
-                <a:spcPts val="200"/>
-              </a:spcBef>
-              <a:spcAft>
-                <a:spcPts val="200"/>
+                <a:spcPts val="0"/>
+              </a:spcBef>
+              <a:spcAft>
+                <a:spcPts val="0"/>
               </a:spcAft>
             </a:pPr>
             <a:r>
@@ -6545,7 +6545,7 @@
                 <a:spcPts val="0"/>
               </a:spcBef>
               <a:spcAft>
-                <a:spcPts val="600"/>
+                <a:spcPts val="0"/>
               </a:spcAft>
             </a:pPr>
             <a:r>
@@ -6564,10 +6564,10 @@
                 <a:spcPct val="125000"/>
               </a:lnSpc>
               <a:spcBef>
-                <a:spcPts val="800"/>
-              </a:spcBef>
-              <a:spcAft>
-                <a:spcPts val="300"/>
+                <a:spcPts val="0"/>
+              </a:spcBef>
+              <a:spcAft>
+                <a:spcPts val="0"/>
               </a:spcAft>
             </a:pPr>
             <a:r>
@@ -6586,10 +6586,10 @@
                 <a:spcPct val="125000"/>
               </a:lnSpc>
               <a:spcBef>
-                <a:spcPts val="200"/>
-              </a:spcBef>
-              <a:spcAft>
-                <a:spcPts val="200"/>
+                <a:spcPts val="0"/>
+              </a:spcBef>
+              <a:spcAft>
+                <a:spcPts val="0"/>
               </a:spcAft>
             </a:pPr>
             <a:r>
@@ -6608,10 +6608,10 @@
                 <a:spcPct val="125000"/>
               </a:lnSpc>
               <a:spcBef>
-                <a:spcPts val="800"/>
-              </a:spcBef>
-              <a:spcAft>
-                <a:spcPts val="300"/>
+                <a:spcPts val="0"/>
+              </a:spcBef>
+              <a:spcAft>
+                <a:spcPts val="0"/>
               </a:spcAft>
             </a:pPr>
             <a:r>
@@ -6630,10 +6630,10 @@
                 <a:spcPct val="125000"/>
               </a:lnSpc>
               <a:spcBef>
-                <a:spcPts val="200"/>
-              </a:spcBef>
-              <a:spcAft>
-                <a:spcPts val="200"/>
+                <a:spcPts val="0"/>
+              </a:spcBef>
+              <a:spcAft>
+                <a:spcPts val="0"/>
               </a:spcAft>
             </a:pPr>
             <a:r>
@@ -6652,10 +6652,10 @@
                 <a:spcPct val="125000"/>
               </a:lnSpc>
               <a:spcBef>
-                <a:spcPts val="200"/>
-              </a:spcBef>
-              <a:spcAft>
-                <a:spcPts val="200"/>
+                <a:spcPts val="0"/>
+              </a:spcBef>
+              <a:spcAft>
+                <a:spcPts val="0"/>
               </a:spcAft>
             </a:pPr>
             <a:r>
@@ -6674,10 +6674,10 @@
                 <a:spcPct val="125000"/>
               </a:lnSpc>
               <a:spcBef>
-                <a:spcPts val="200"/>
-              </a:spcBef>
-              <a:spcAft>
-                <a:spcPts val="200"/>
+                <a:spcPts val="0"/>
+              </a:spcBef>
+              <a:spcAft>
+                <a:spcPts val="0"/>
               </a:spcAft>
             </a:pPr>
             <a:r>
@@ -6696,10 +6696,10 @@
                 <a:spcPct val="125000"/>
               </a:lnSpc>
               <a:spcBef>
-                <a:spcPts val="200"/>
-              </a:spcBef>
-              <a:spcAft>
-                <a:spcPts val="200"/>
+                <a:spcPts val="0"/>
+              </a:spcBef>
+              <a:spcAft>
+                <a:spcPts val="0"/>
               </a:spcAft>
             </a:pPr>
             <a:r>
@@ -6718,10 +6718,10 @@
                 <a:spcPct val="125000"/>
               </a:lnSpc>
               <a:spcBef>
-                <a:spcPts val="800"/>
-              </a:spcBef>
-              <a:spcAft>
-                <a:spcPts val="300"/>
+                <a:spcPts val="0"/>
+              </a:spcBef>
+              <a:spcAft>
+                <a:spcPts val="0"/>
               </a:spcAft>
             </a:pPr>
             <a:r>
@@ -6740,10 +6740,10 @@
                 <a:spcPct val="125000"/>
               </a:lnSpc>
               <a:spcBef>
-                <a:spcPts val="200"/>
-              </a:spcBef>
-              <a:spcAft>
-                <a:spcPts val="200"/>
+                <a:spcPts val="0"/>
+              </a:spcBef>
+              <a:spcAft>
+                <a:spcPts val="0"/>
               </a:spcAft>
             </a:pPr>
             <a:r>
@@ -6762,10 +6762,10 @@
                 <a:spcPct val="125000"/>
               </a:lnSpc>
               <a:spcBef>
-                <a:spcPts val="800"/>
-              </a:spcBef>
-              <a:spcAft>
-                <a:spcPts val="300"/>
+                <a:spcPts val="0"/>
+              </a:spcBef>
+              <a:spcAft>
+                <a:spcPts val="0"/>
               </a:spcAft>
             </a:pPr>
             <a:r>
@@ -6784,10 +6784,10 @@
                 <a:spcPct val="125000"/>
               </a:lnSpc>
               <a:spcBef>
-                <a:spcPts val="200"/>
-              </a:spcBef>
-              <a:spcAft>
-                <a:spcPts val="200"/>
+                <a:spcPts val="0"/>
+              </a:spcBef>
+              <a:spcAft>
+                <a:spcPts val="0"/>
               </a:spcAft>
             </a:pPr>
             <a:r>
@@ -6901,7 +6901,7 @@
                 <a:spcPts val="0"/>
               </a:spcBef>
               <a:spcAft>
-                <a:spcPts val="600"/>
+                <a:spcPts val="0"/>
               </a:spcAft>
             </a:pPr>
             <a:r>
@@ -6920,10 +6920,10 @@
                 <a:spcPct val="125000"/>
               </a:lnSpc>
               <a:spcBef>
-                <a:spcPts val="800"/>
-              </a:spcBef>
-              <a:spcAft>
-                <a:spcPts val="300"/>
+                <a:spcPts val="0"/>
+              </a:spcBef>
+              <a:spcAft>
+                <a:spcPts val="0"/>
               </a:spcAft>
             </a:pPr>
             <a:r>
@@ -6942,10 +6942,10 @@
                 <a:spcPct val="125000"/>
               </a:lnSpc>
               <a:spcBef>
-                <a:spcPts val="200"/>
-              </a:spcBef>
-              <a:spcAft>
-                <a:spcPts val="200"/>
+                <a:spcPts val="0"/>
+              </a:spcBef>
+              <a:spcAft>
+                <a:spcPts val="0"/>
               </a:spcAft>
             </a:pPr>
             <a:r>
@@ -6964,10 +6964,10 @@
                 <a:spcPct val="125000"/>
               </a:lnSpc>
               <a:spcBef>
-                <a:spcPts val="800"/>
-              </a:spcBef>
-              <a:spcAft>
-                <a:spcPts val="300"/>
+                <a:spcPts val="0"/>
+              </a:spcBef>
+              <a:spcAft>
+                <a:spcPts val="0"/>
               </a:spcAft>
             </a:pPr>
             <a:r>
@@ -6986,10 +6986,10 @@
                 <a:spcPct val="125000"/>
               </a:lnSpc>
               <a:spcBef>
-                <a:spcPts val="200"/>
-              </a:spcBef>
-              <a:spcAft>
-                <a:spcPts val="200"/>
+                <a:spcPts val="0"/>
+              </a:spcBef>
+              <a:spcAft>
+                <a:spcPts val="0"/>
               </a:spcAft>
             </a:pPr>
             <a:r>
@@ -7008,10 +7008,10 @@
                 <a:spcPct val="125000"/>
               </a:lnSpc>
               <a:spcBef>
-                <a:spcPts val="200"/>
-              </a:spcBef>
-              <a:spcAft>
-                <a:spcPts val="200"/>
+                <a:spcPts val="0"/>
+              </a:spcBef>
+              <a:spcAft>
+                <a:spcPts val="0"/>
               </a:spcAft>
             </a:pPr>
             <a:r>
@@ -7030,10 +7030,10 @@
                 <a:spcPct val="125000"/>
               </a:lnSpc>
               <a:spcBef>
-                <a:spcPts val="200"/>
-              </a:spcBef>
-              <a:spcAft>
-                <a:spcPts val="200"/>
+                <a:spcPts val="0"/>
+              </a:spcBef>
+              <a:spcAft>
+                <a:spcPts val="0"/>
               </a:spcAft>
             </a:pPr>
             <a:r>
@@ -7052,10 +7052,10 @@
                 <a:spcPct val="125000"/>
               </a:lnSpc>
               <a:spcBef>
-                <a:spcPts val="200"/>
-              </a:spcBef>
-              <a:spcAft>
-                <a:spcPts val="200"/>
+                <a:spcPts val="0"/>
+              </a:spcBef>
+              <a:spcAft>
+                <a:spcPts val="0"/>
               </a:spcAft>
             </a:pPr>
             <a:r>
@@ -7074,10 +7074,10 @@
                 <a:spcPct val="125000"/>
               </a:lnSpc>
               <a:spcBef>
-                <a:spcPts val="800"/>
-              </a:spcBef>
-              <a:spcAft>
-                <a:spcPts val="300"/>
+                <a:spcPts val="0"/>
+              </a:spcBef>
+              <a:spcAft>
+                <a:spcPts val="0"/>
               </a:spcAft>
             </a:pPr>
             <a:r>
@@ -7096,10 +7096,10 @@
                 <a:spcPct val="125000"/>
               </a:lnSpc>
               <a:spcBef>
-                <a:spcPts val="200"/>
-              </a:spcBef>
-              <a:spcAft>
-                <a:spcPts val="200"/>
+                <a:spcPts val="0"/>
+              </a:spcBef>
+              <a:spcAft>
+                <a:spcPts val="0"/>
               </a:spcAft>
             </a:pPr>
             <a:r>
@@ -7118,10 +7118,10 @@
                 <a:spcPct val="125000"/>
               </a:lnSpc>
               <a:spcBef>
-                <a:spcPts val="800"/>
-              </a:spcBef>
-              <a:spcAft>
-                <a:spcPts val="300"/>
+                <a:spcPts val="0"/>
+              </a:spcBef>
+              <a:spcAft>
+                <a:spcPts val="0"/>
               </a:spcAft>
             </a:pPr>
             <a:r>
@@ -7140,10 +7140,10 @@
                 <a:spcPct val="125000"/>
               </a:lnSpc>
               <a:spcBef>
-                <a:spcPts val="200"/>
-              </a:spcBef>
-              <a:spcAft>
-                <a:spcPts val="200"/>
+                <a:spcPts val="0"/>
+              </a:spcBef>
+              <a:spcAft>
+                <a:spcPts val="0"/>
               </a:spcAft>
             </a:pPr>
             <a:r>
@@ -7257,7 +7257,7 @@
                 <a:spcPts val="0"/>
               </a:spcBef>
               <a:spcAft>
-                <a:spcPts val="600"/>
+                <a:spcPts val="0"/>
               </a:spcAft>
             </a:pPr>
             <a:r>
@@ -7276,10 +7276,10 @@
                 <a:spcPct val="125000"/>
               </a:lnSpc>
               <a:spcBef>
-                <a:spcPts val="800"/>
-              </a:spcBef>
-              <a:spcAft>
-                <a:spcPts val="300"/>
+                <a:spcPts val="0"/>
+              </a:spcBef>
+              <a:spcAft>
+                <a:spcPts val="0"/>
               </a:spcAft>
             </a:pPr>
             <a:r>
@@ -7298,10 +7298,10 @@
                 <a:spcPct val="125000"/>
               </a:lnSpc>
               <a:spcBef>
-                <a:spcPts val="200"/>
-              </a:spcBef>
-              <a:spcAft>
-                <a:spcPts val="200"/>
+                <a:spcPts val="0"/>
+              </a:spcBef>
+              <a:spcAft>
+                <a:spcPts val="0"/>
               </a:spcAft>
             </a:pPr>
             <a:r>
@@ -7320,10 +7320,10 @@
                 <a:spcPct val="125000"/>
               </a:lnSpc>
               <a:spcBef>
-                <a:spcPts val="800"/>
-              </a:spcBef>
-              <a:spcAft>
-                <a:spcPts val="300"/>
+                <a:spcPts val="0"/>
+              </a:spcBef>
+              <a:spcAft>
+                <a:spcPts val="0"/>
               </a:spcAft>
             </a:pPr>
             <a:r>
@@ -7342,10 +7342,10 @@
                 <a:spcPct val="125000"/>
               </a:lnSpc>
               <a:spcBef>
-                <a:spcPts val="200"/>
-              </a:spcBef>
-              <a:spcAft>
-                <a:spcPts val="200"/>
+                <a:spcPts val="0"/>
+              </a:spcBef>
+              <a:spcAft>
+                <a:spcPts val="0"/>
               </a:spcAft>
             </a:pPr>
             <a:r>
@@ -7364,10 +7364,10 @@
                 <a:spcPct val="125000"/>
               </a:lnSpc>
               <a:spcBef>
-                <a:spcPts val="200"/>
-              </a:spcBef>
-              <a:spcAft>
-                <a:spcPts val="200"/>
+                <a:spcPts val="0"/>
+              </a:spcBef>
+              <a:spcAft>
+                <a:spcPts val="0"/>
               </a:spcAft>
             </a:pPr>
             <a:r>
@@ -7386,10 +7386,10 @@
                 <a:spcPct val="125000"/>
               </a:lnSpc>
               <a:spcBef>
-                <a:spcPts val="200"/>
-              </a:spcBef>
-              <a:spcAft>
-                <a:spcPts val="200"/>
+                <a:spcPts val="0"/>
+              </a:spcBef>
+              <a:spcAft>
+                <a:spcPts val="0"/>
               </a:spcAft>
             </a:pPr>
             <a:r>
@@ -7408,10 +7408,10 @@
                 <a:spcPct val="125000"/>
               </a:lnSpc>
               <a:spcBef>
-                <a:spcPts val="200"/>
-              </a:spcBef>
-              <a:spcAft>
-                <a:spcPts val="200"/>
+                <a:spcPts val="0"/>
+              </a:spcBef>
+              <a:spcAft>
+                <a:spcPts val="0"/>
               </a:spcAft>
             </a:pPr>
             <a:r>
@@ -7430,10 +7430,10 @@
                 <a:spcPct val="125000"/>
               </a:lnSpc>
               <a:spcBef>
-                <a:spcPts val="800"/>
-              </a:spcBef>
-              <a:spcAft>
-                <a:spcPts val="300"/>
+                <a:spcPts val="0"/>
+              </a:spcBef>
+              <a:spcAft>
+                <a:spcPts val="0"/>
               </a:spcAft>
             </a:pPr>
             <a:r>
@@ -7452,10 +7452,10 @@
                 <a:spcPct val="125000"/>
               </a:lnSpc>
               <a:spcBef>
-                <a:spcPts val="200"/>
-              </a:spcBef>
-              <a:spcAft>
-                <a:spcPts val="200"/>
+                <a:spcPts val="0"/>
+              </a:spcBef>
+              <a:spcAft>
+                <a:spcPts val="0"/>
               </a:spcAft>
             </a:pPr>
             <a:r>
@@ -7474,10 +7474,10 @@
                 <a:spcPct val="125000"/>
               </a:lnSpc>
               <a:spcBef>
-                <a:spcPts val="800"/>
-              </a:spcBef>
-              <a:spcAft>
-                <a:spcPts val="300"/>
+                <a:spcPts val="0"/>
+              </a:spcBef>
+              <a:spcAft>
+                <a:spcPts val="0"/>
               </a:spcAft>
             </a:pPr>
             <a:r>
@@ -7496,10 +7496,10 @@
                 <a:spcPct val="125000"/>
               </a:lnSpc>
               <a:spcBef>
-                <a:spcPts val="200"/>
-              </a:spcBef>
-              <a:spcAft>
-                <a:spcPts val="200"/>
+                <a:spcPts val="0"/>
+              </a:spcBef>
+              <a:spcAft>
+                <a:spcPts val="0"/>
               </a:spcAft>
             </a:pPr>
             <a:r>
@@ -7613,7 +7613,7 @@
                 <a:spcPts val="0"/>
               </a:spcBef>
               <a:spcAft>
-                <a:spcPts val="600"/>
+                <a:spcPts val="0"/>
               </a:spcAft>
             </a:pPr>
             <a:r>
@@ -7632,10 +7632,10 @@
                 <a:spcPct val="125000"/>
               </a:lnSpc>
               <a:spcBef>
-                <a:spcPts val="800"/>
-              </a:spcBef>
-              <a:spcAft>
-                <a:spcPts val="300"/>
+                <a:spcPts val="0"/>
+              </a:spcBef>
+              <a:spcAft>
+                <a:spcPts val="0"/>
               </a:spcAft>
             </a:pPr>
             <a:r>
@@ -7654,10 +7654,10 @@
                 <a:spcPct val="125000"/>
               </a:lnSpc>
               <a:spcBef>
-                <a:spcPts val="200"/>
-              </a:spcBef>
-              <a:spcAft>
-                <a:spcPts val="200"/>
+                <a:spcPts val="0"/>
+              </a:spcBef>
+              <a:spcAft>
+                <a:spcPts val="0"/>
               </a:spcAft>
             </a:pPr>
             <a:r>
@@ -7676,10 +7676,10 @@
                 <a:spcPct val="125000"/>
               </a:lnSpc>
               <a:spcBef>
-                <a:spcPts val="800"/>
-              </a:spcBef>
-              <a:spcAft>
-                <a:spcPts val="300"/>
+                <a:spcPts val="0"/>
+              </a:spcBef>
+              <a:spcAft>
+                <a:spcPts val="0"/>
               </a:spcAft>
             </a:pPr>
             <a:r>
@@ -7698,10 +7698,10 @@
                 <a:spcPct val="125000"/>
               </a:lnSpc>
               <a:spcBef>
-                <a:spcPts val="200"/>
-              </a:spcBef>
-              <a:spcAft>
-                <a:spcPts val="200"/>
+                <a:spcPts val="0"/>
+              </a:spcBef>
+              <a:spcAft>
+                <a:spcPts val="0"/>
               </a:spcAft>
             </a:pPr>
             <a:r>
@@ -7720,10 +7720,10 @@
                 <a:spcPct val="125000"/>
               </a:lnSpc>
               <a:spcBef>
-                <a:spcPts val="200"/>
-              </a:spcBef>
-              <a:spcAft>
-                <a:spcPts val="200"/>
+                <a:spcPts val="0"/>
+              </a:spcBef>
+              <a:spcAft>
+                <a:spcPts val="0"/>
               </a:spcAft>
             </a:pPr>
             <a:r>
@@ -7742,10 +7742,10 @@
                 <a:spcPct val="125000"/>
               </a:lnSpc>
               <a:spcBef>
-                <a:spcPts val="200"/>
-              </a:spcBef>
-              <a:spcAft>
-                <a:spcPts val="200"/>
+                <a:spcPts val="0"/>
+              </a:spcBef>
+              <a:spcAft>
+                <a:spcPts val="0"/>
               </a:spcAft>
             </a:pPr>
             <a:r>
@@ -7764,10 +7764,10 @@
                 <a:spcPct val="125000"/>
               </a:lnSpc>
               <a:spcBef>
-                <a:spcPts val="800"/>
-              </a:spcBef>
-              <a:spcAft>
-                <a:spcPts val="300"/>
+                <a:spcPts val="0"/>
+              </a:spcBef>
+              <a:spcAft>
+                <a:spcPts val="0"/>
               </a:spcAft>
             </a:pPr>
             <a:r>
@@ -7786,10 +7786,10 @@
                 <a:spcPct val="125000"/>
               </a:lnSpc>
               <a:spcBef>
-                <a:spcPts val="200"/>
-              </a:spcBef>
-              <a:spcAft>
-                <a:spcPts val="200"/>
+                <a:spcPts val="0"/>
+              </a:spcBef>
+              <a:spcAft>
+                <a:spcPts val="0"/>
               </a:spcAft>
             </a:pPr>
             <a:r>
@@ -7808,10 +7808,10 @@
                 <a:spcPct val="125000"/>
               </a:lnSpc>
               <a:spcBef>
-                <a:spcPts val="800"/>
-              </a:spcBef>
-              <a:spcAft>
-                <a:spcPts val="300"/>
+                <a:spcPts val="0"/>
+              </a:spcBef>
+              <a:spcAft>
+                <a:spcPts val="0"/>
               </a:spcAft>
             </a:pPr>
             <a:r>
@@ -7830,10 +7830,10 @@
                 <a:spcPct val="125000"/>
               </a:lnSpc>
               <a:spcBef>
-                <a:spcPts val="200"/>
-              </a:spcBef>
-              <a:spcAft>
-                <a:spcPts val="200"/>
+                <a:spcPts val="0"/>
+              </a:spcBef>
+              <a:spcAft>
+                <a:spcPts val="0"/>
               </a:spcAft>
             </a:pPr>
             <a:r>
@@ -7947,7 +7947,7 @@
                 <a:spcPts val="0"/>
               </a:spcBef>
               <a:spcAft>
-                <a:spcPts val="600"/>
+                <a:spcPts val="0"/>
               </a:spcAft>
             </a:pPr>
             <a:r>
@@ -7966,10 +7966,10 @@
                 <a:spcPct val="125000"/>
               </a:lnSpc>
               <a:spcBef>
-                <a:spcPts val="800"/>
-              </a:spcBef>
-              <a:spcAft>
-                <a:spcPts val="300"/>
+                <a:spcPts val="0"/>
+              </a:spcBef>
+              <a:spcAft>
+                <a:spcPts val="0"/>
               </a:spcAft>
             </a:pPr>
             <a:r>
@@ -7988,10 +7988,10 @@
                 <a:spcPct val="125000"/>
               </a:lnSpc>
               <a:spcBef>
-                <a:spcPts val="200"/>
-              </a:spcBef>
-              <a:spcAft>
-                <a:spcPts val="200"/>
+                <a:spcPts val="0"/>
+              </a:spcBef>
+              <a:spcAft>
+                <a:spcPts val="0"/>
               </a:spcAft>
             </a:pPr>
             <a:r>
@@ -8010,10 +8010,10 @@
                 <a:spcPct val="125000"/>
               </a:lnSpc>
               <a:spcBef>
-                <a:spcPts val="800"/>
-              </a:spcBef>
-              <a:spcAft>
-                <a:spcPts val="300"/>
+                <a:spcPts val="0"/>
+              </a:spcBef>
+              <a:spcAft>
+                <a:spcPts val="0"/>
               </a:spcAft>
             </a:pPr>
             <a:r>
@@ -8032,10 +8032,10 @@
                 <a:spcPct val="125000"/>
               </a:lnSpc>
               <a:spcBef>
-                <a:spcPts val="200"/>
-              </a:spcBef>
-              <a:spcAft>
-                <a:spcPts val="200"/>
+                <a:spcPts val="0"/>
+              </a:spcBef>
+              <a:spcAft>
+                <a:spcPts val="0"/>
               </a:spcAft>
             </a:pPr>
             <a:r>
@@ -8054,10 +8054,10 @@
                 <a:spcPct val="125000"/>
               </a:lnSpc>
               <a:spcBef>
-                <a:spcPts val="200"/>
-              </a:spcBef>
-              <a:spcAft>
-                <a:spcPts val="200"/>
+                <a:spcPts val="0"/>
+              </a:spcBef>
+              <a:spcAft>
+                <a:spcPts val="0"/>
               </a:spcAft>
             </a:pPr>
             <a:r>
@@ -8076,10 +8076,10 @@
                 <a:spcPct val="125000"/>
               </a:lnSpc>
               <a:spcBef>
-                <a:spcPts val="200"/>
-              </a:spcBef>
-              <a:spcAft>
-                <a:spcPts val="200"/>
+                <a:spcPts val="0"/>
+              </a:spcBef>
+              <a:spcAft>
+                <a:spcPts val="0"/>
               </a:spcAft>
             </a:pPr>
             <a:r>
@@ -8098,10 +8098,10 @@
                 <a:spcPct val="125000"/>
               </a:lnSpc>
               <a:spcBef>
-                <a:spcPts val="200"/>
-              </a:spcBef>
-              <a:spcAft>
-                <a:spcPts val="200"/>
+                <a:spcPts val="0"/>
+              </a:spcBef>
+              <a:spcAft>
+                <a:spcPts val="0"/>
               </a:spcAft>
             </a:pPr>
             <a:r>
@@ -8120,10 +8120,10 @@
                 <a:spcPct val="125000"/>
               </a:lnSpc>
               <a:spcBef>
-                <a:spcPts val="800"/>
-              </a:spcBef>
-              <a:spcAft>
-                <a:spcPts val="300"/>
+                <a:spcPts val="0"/>
+              </a:spcBef>
+              <a:spcAft>
+                <a:spcPts val="0"/>
               </a:spcAft>
             </a:pPr>
             <a:r>
@@ -8142,10 +8142,10 @@
                 <a:spcPct val="125000"/>
               </a:lnSpc>
               <a:spcBef>
-                <a:spcPts val="200"/>
-              </a:spcBef>
-              <a:spcAft>
-                <a:spcPts val="200"/>
+                <a:spcPts val="0"/>
+              </a:spcBef>
+              <a:spcAft>
+                <a:spcPts val="0"/>
               </a:spcAft>
             </a:pPr>
             <a:r>
@@ -8164,10 +8164,10 @@
                 <a:spcPct val="125000"/>
               </a:lnSpc>
               <a:spcBef>
-                <a:spcPts val="800"/>
-              </a:spcBef>
-              <a:spcAft>
-                <a:spcPts val="300"/>
+                <a:spcPts val="0"/>
+              </a:spcBef>
+              <a:spcAft>
+                <a:spcPts val="0"/>
               </a:spcAft>
             </a:pPr>
             <a:r>
@@ -8186,10 +8186,10 @@
                 <a:spcPct val="125000"/>
               </a:lnSpc>
               <a:spcBef>
-                <a:spcPts val="200"/>
-              </a:spcBef>
-              <a:spcAft>
-                <a:spcPts val="200"/>
+                <a:spcPts val="0"/>
+              </a:spcBef>
+              <a:spcAft>
+                <a:spcPts val="0"/>
               </a:spcAft>
             </a:pPr>
             <a:r>

--- a/ppts_output_v3/04_消费税风险指引.pptx
+++ b/ppts_output_v3/04_消费税风险指引.pptx
@@ -3273,7 +3273,7 @@
           <a:bodyPr rtlCol="0" anchor="ctr" wrap="square" lIns="365760"/>
           <a:lstStyle/>
           <a:p>
-            <a:pPr algn="l"/>
+            <a:pPr algn="just"/>
             <a:r>
               <a:rPr sz="1500" b="1">
                 <a:solidFill>
@@ -3307,7 +3307,7 @@
           </a:bodyPr>
           <a:lstStyle/>
           <a:p>
-            <a:pPr algn="l">
+            <a:pPr algn="just">
               <a:lnSpc>
                 <a:spcPct val="125000"/>
               </a:lnSpc>
@@ -3329,7 +3329,7 @@
             </a:r>
           </a:p>
           <a:p>
-            <a:pPr algn="l">
+            <a:pPr algn="just">
               <a:lnSpc>
                 <a:spcPct val="125000"/>
               </a:lnSpc>
@@ -3351,7 +3351,7 @@
             </a:r>
           </a:p>
           <a:p>
-            <a:pPr algn="l">
+            <a:pPr algn="just">
               <a:lnSpc>
                 <a:spcPct val="125000"/>
               </a:lnSpc>
@@ -3373,7 +3373,7 @@
             </a:r>
           </a:p>
           <a:p>
-            <a:pPr algn="l">
+            <a:pPr algn="just">
               <a:lnSpc>
                 <a:spcPct val="125000"/>
               </a:lnSpc>
@@ -3395,7 +3395,7 @@
             </a:r>
           </a:p>
           <a:p>
-            <a:pPr algn="l">
+            <a:pPr algn="just">
               <a:lnSpc>
                 <a:spcPct val="125000"/>
               </a:lnSpc>
@@ -3417,7 +3417,7 @@
             </a:r>
           </a:p>
           <a:p>
-            <a:pPr algn="l">
+            <a:pPr algn="just">
               <a:lnSpc>
                 <a:spcPct val="125000"/>
               </a:lnSpc>
@@ -3439,7 +3439,7 @@
             </a:r>
           </a:p>
           <a:p>
-            <a:pPr algn="l">
+            <a:pPr algn="just">
               <a:lnSpc>
                 <a:spcPct val="125000"/>
               </a:lnSpc>
@@ -3461,7 +3461,7 @@
             </a:r>
           </a:p>
           <a:p>
-            <a:pPr algn="l">
+            <a:pPr algn="just">
               <a:lnSpc>
                 <a:spcPct val="125000"/>
               </a:lnSpc>
@@ -3483,7 +3483,7 @@
             </a:r>
           </a:p>
           <a:p>
-            <a:pPr algn="l">
+            <a:pPr algn="just">
               <a:lnSpc>
                 <a:spcPct val="125000"/>
               </a:lnSpc>
@@ -3505,7 +3505,7 @@
             </a:r>
           </a:p>
           <a:p>
-            <a:pPr algn="l">
+            <a:pPr algn="just">
               <a:lnSpc>
                 <a:spcPct val="125000"/>
               </a:lnSpc>
@@ -3527,7 +3527,7 @@
             </a:r>
           </a:p>
           <a:p>
-            <a:pPr algn="l">
+            <a:pPr algn="just">
               <a:lnSpc>
                 <a:spcPct val="125000"/>
               </a:lnSpc>
@@ -3607,7 +3607,7 @@
           <a:bodyPr rtlCol="0" anchor="ctr" wrap="square" lIns="365760"/>
           <a:lstStyle/>
           <a:p>
-            <a:pPr algn="l"/>
+            <a:pPr algn="just"/>
             <a:r>
               <a:rPr sz="1500" b="1">
                 <a:solidFill>
@@ -3641,7 +3641,7 @@
           </a:bodyPr>
           <a:lstStyle/>
           <a:p>
-            <a:pPr algn="l">
+            <a:pPr algn="just">
               <a:lnSpc>
                 <a:spcPct val="125000"/>
               </a:lnSpc>
@@ -3663,7 +3663,7 @@
             </a:r>
           </a:p>
           <a:p>
-            <a:pPr algn="l">
+            <a:pPr algn="just">
               <a:lnSpc>
                 <a:spcPct val="125000"/>
               </a:lnSpc>
@@ -3685,7 +3685,7 @@
             </a:r>
           </a:p>
           <a:p>
-            <a:pPr algn="l">
+            <a:pPr algn="just">
               <a:lnSpc>
                 <a:spcPct val="125000"/>
               </a:lnSpc>
@@ -3707,7 +3707,7 @@
             </a:r>
           </a:p>
           <a:p>
-            <a:pPr algn="l">
+            <a:pPr algn="just">
               <a:lnSpc>
                 <a:spcPct val="125000"/>
               </a:lnSpc>
@@ -3729,7 +3729,7 @@
             </a:r>
           </a:p>
           <a:p>
-            <a:pPr algn="l">
+            <a:pPr algn="just">
               <a:lnSpc>
                 <a:spcPct val="125000"/>
               </a:lnSpc>
@@ -3751,7 +3751,7 @@
             </a:r>
           </a:p>
           <a:p>
-            <a:pPr algn="l">
+            <a:pPr algn="just">
               <a:lnSpc>
                 <a:spcPct val="125000"/>
               </a:lnSpc>
@@ -3773,7 +3773,7 @@
             </a:r>
           </a:p>
           <a:p>
-            <a:pPr algn="l">
+            <a:pPr algn="just">
               <a:lnSpc>
                 <a:spcPct val="125000"/>
               </a:lnSpc>
@@ -3795,7 +3795,7 @@
             </a:r>
           </a:p>
           <a:p>
-            <a:pPr algn="l">
+            <a:pPr algn="just">
               <a:lnSpc>
                 <a:spcPct val="125000"/>
               </a:lnSpc>
@@ -3817,7 +3817,7 @@
             </a:r>
           </a:p>
           <a:p>
-            <a:pPr algn="l">
+            <a:pPr algn="just">
               <a:lnSpc>
                 <a:spcPct val="125000"/>
               </a:lnSpc>
@@ -3897,7 +3897,7 @@
           <a:bodyPr rtlCol="0" anchor="ctr" wrap="square" lIns="365760"/>
           <a:lstStyle/>
           <a:p>
-            <a:pPr algn="l"/>
+            <a:pPr algn="just"/>
             <a:r>
               <a:rPr sz="1500" b="1">
                 <a:solidFill>
@@ -3931,7 +3931,7 @@
           </a:bodyPr>
           <a:lstStyle/>
           <a:p>
-            <a:pPr algn="l">
+            <a:pPr algn="just">
               <a:lnSpc>
                 <a:spcPct val="125000"/>
               </a:lnSpc>
@@ -3953,7 +3953,7 @@
             </a:r>
           </a:p>
           <a:p>
-            <a:pPr algn="l">
+            <a:pPr algn="just">
               <a:lnSpc>
                 <a:spcPct val="125000"/>
               </a:lnSpc>
@@ -3975,7 +3975,7 @@
             </a:r>
           </a:p>
           <a:p>
-            <a:pPr algn="l">
+            <a:pPr algn="just">
               <a:lnSpc>
                 <a:spcPct val="125000"/>
               </a:lnSpc>
@@ -3997,7 +3997,7 @@
             </a:r>
           </a:p>
           <a:p>
-            <a:pPr algn="l">
+            <a:pPr algn="just">
               <a:lnSpc>
                 <a:spcPct val="125000"/>
               </a:lnSpc>
@@ -4019,7 +4019,7 @@
             </a:r>
           </a:p>
           <a:p>
-            <a:pPr algn="l">
+            <a:pPr algn="just">
               <a:lnSpc>
                 <a:spcPct val="125000"/>
               </a:lnSpc>
@@ -4041,7 +4041,7 @@
             </a:r>
           </a:p>
           <a:p>
-            <a:pPr algn="l">
+            <a:pPr algn="just">
               <a:lnSpc>
                 <a:spcPct val="125000"/>
               </a:lnSpc>
@@ -4063,7 +4063,7 @@
             </a:r>
           </a:p>
           <a:p>
-            <a:pPr algn="l">
+            <a:pPr algn="just">
               <a:lnSpc>
                 <a:spcPct val="125000"/>
               </a:lnSpc>
@@ -4085,7 +4085,7 @@
             </a:r>
           </a:p>
           <a:p>
-            <a:pPr algn="l">
+            <a:pPr algn="just">
               <a:lnSpc>
                 <a:spcPct val="125000"/>
               </a:lnSpc>
@@ -4107,7 +4107,7 @@
             </a:r>
           </a:p>
           <a:p>
-            <a:pPr algn="l">
+            <a:pPr algn="just">
               <a:lnSpc>
                 <a:spcPct val="125000"/>
               </a:lnSpc>
@@ -4129,7 +4129,7 @@
             </a:r>
           </a:p>
           <a:p>
-            <a:pPr algn="l">
+            <a:pPr algn="just">
               <a:lnSpc>
                 <a:spcPct val="125000"/>
               </a:lnSpc>
@@ -4209,7 +4209,7 @@
           <a:bodyPr rtlCol="0" anchor="ctr" wrap="square" lIns="365760"/>
           <a:lstStyle/>
           <a:p>
-            <a:pPr algn="l"/>
+            <a:pPr algn="just"/>
             <a:r>
               <a:rPr sz="1500" b="1">
                 <a:solidFill>
@@ -4243,7 +4243,7 @@
           </a:bodyPr>
           <a:lstStyle/>
           <a:p>
-            <a:pPr algn="l">
+            <a:pPr algn="just">
               <a:lnSpc>
                 <a:spcPct val="125000"/>
               </a:lnSpc>
@@ -4265,7 +4265,7 @@
             </a:r>
           </a:p>
           <a:p>
-            <a:pPr algn="l">
+            <a:pPr algn="just">
               <a:lnSpc>
                 <a:spcPct val="125000"/>
               </a:lnSpc>
@@ -4287,7 +4287,7 @@
             </a:r>
           </a:p>
           <a:p>
-            <a:pPr algn="l">
+            <a:pPr algn="just">
               <a:lnSpc>
                 <a:spcPct val="125000"/>
               </a:lnSpc>
@@ -4309,7 +4309,7 @@
             </a:r>
           </a:p>
           <a:p>
-            <a:pPr algn="l">
+            <a:pPr algn="just">
               <a:lnSpc>
                 <a:spcPct val="125000"/>
               </a:lnSpc>
@@ -4331,7 +4331,7 @@
             </a:r>
           </a:p>
           <a:p>
-            <a:pPr algn="l">
+            <a:pPr algn="just">
               <a:lnSpc>
                 <a:spcPct val="125000"/>
               </a:lnSpc>
@@ -4353,7 +4353,7 @@
             </a:r>
           </a:p>
           <a:p>
-            <a:pPr algn="l">
+            <a:pPr algn="just">
               <a:lnSpc>
                 <a:spcPct val="125000"/>
               </a:lnSpc>
@@ -4375,7 +4375,7 @@
             </a:r>
           </a:p>
           <a:p>
-            <a:pPr algn="l">
+            <a:pPr algn="just">
               <a:lnSpc>
                 <a:spcPct val="125000"/>
               </a:lnSpc>
@@ -4397,7 +4397,7 @@
             </a:r>
           </a:p>
           <a:p>
-            <a:pPr algn="l">
+            <a:pPr algn="just">
               <a:lnSpc>
                 <a:spcPct val="125000"/>
               </a:lnSpc>
@@ -4419,7 +4419,7 @@
             </a:r>
           </a:p>
           <a:p>
-            <a:pPr algn="l">
+            <a:pPr algn="just">
               <a:lnSpc>
                 <a:spcPct val="125000"/>
               </a:lnSpc>
@@ -4499,7 +4499,7 @@
           <a:bodyPr rtlCol="0" anchor="ctr" wrap="square" lIns="365760"/>
           <a:lstStyle/>
           <a:p>
-            <a:pPr algn="l"/>
+            <a:pPr algn="just"/>
             <a:r>
               <a:rPr sz="1500" b="1">
                 <a:solidFill>
@@ -4533,7 +4533,7 @@
           </a:bodyPr>
           <a:lstStyle/>
           <a:p>
-            <a:pPr algn="l">
+            <a:pPr algn="just">
               <a:lnSpc>
                 <a:spcPct val="125000"/>
               </a:lnSpc>
@@ -4555,7 +4555,7 @@
             </a:r>
           </a:p>
           <a:p>
-            <a:pPr algn="l">
+            <a:pPr algn="just">
               <a:lnSpc>
                 <a:spcPct val="125000"/>
               </a:lnSpc>
@@ -4577,7 +4577,7 @@
             </a:r>
           </a:p>
           <a:p>
-            <a:pPr algn="l">
+            <a:pPr algn="just">
               <a:lnSpc>
                 <a:spcPct val="125000"/>
               </a:lnSpc>
@@ -4599,7 +4599,7 @@
             </a:r>
           </a:p>
           <a:p>
-            <a:pPr algn="l">
+            <a:pPr algn="just">
               <a:lnSpc>
                 <a:spcPct val="125000"/>
               </a:lnSpc>
@@ -4621,7 +4621,7 @@
             </a:r>
           </a:p>
           <a:p>
-            <a:pPr algn="l">
+            <a:pPr algn="just">
               <a:lnSpc>
                 <a:spcPct val="125000"/>
               </a:lnSpc>
@@ -4643,7 +4643,7 @@
             </a:r>
           </a:p>
           <a:p>
-            <a:pPr algn="l">
+            <a:pPr algn="just">
               <a:lnSpc>
                 <a:spcPct val="125000"/>
               </a:lnSpc>
@@ -4665,7 +4665,7 @@
             </a:r>
           </a:p>
           <a:p>
-            <a:pPr algn="l">
+            <a:pPr algn="just">
               <a:lnSpc>
                 <a:spcPct val="125000"/>
               </a:lnSpc>
@@ -4687,7 +4687,7 @@
             </a:r>
           </a:p>
           <a:p>
-            <a:pPr algn="l">
+            <a:pPr algn="just">
               <a:lnSpc>
                 <a:spcPct val="125000"/>
               </a:lnSpc>
@@ -4709,7 +4709,7 @@
             </a:r>
           </a:p>
           <a:p>
-            <a:pPr algn="l">
+            <a:pPr algn="just">
               <a:lnSpc>
                 <a:spcPct val="125000"/>
               </a:lnSpc>
@@ -4731,7 +4731,7 @@
             </a:r>
           </a:p>
           <a:p>
-            <a:pPr algn="l">
+            <a:pPr algn="just">
               <a:lnSpc>
                 <a:spcPct val="125000"/>
               </a:lnSpc>
@@ -4811,7 +4811,7 @@
           <a:bodyPr rtlCol="0" anchor="ctr" wrap="square" lIns="365760"/>
           <a:lstStyle/>
           <a:p>
-            <a:pPr algn="l"/>
+            <a:pPr algn="just"/>
             <a:r>
               <a:rPr sz="1500" b="1">
                 <a:solidFill>
@@ -4845,7 +4845,7 @@
           </a:bodyPr>
           <a:lstStyle/>
           <a:p>
-            <a:pPr algn="l">
+            <a:pPr algn="just">
               <a:lnSpc>
                 <a:spcPct val="125000"/>
               </a:lnSpc>
@@ -4867,7 +4867,7 @@
             </a:r>
           </a:p>
           <a:p>
-            <a:pPr algn="l">
+            <a:pPr algn="just">
               <a:lnSpc>
                 <a:spcPct val="125000"/>
               </a:lnSpc>
@@ -4889,7 +4889,7 @@
             </a:r>
           </a:p>
           <a:p>
-            <a:pPr algn="l">
+            <a:pPr algn="just">
               <a:lnSpc>
                 <a:spcPct val="125000"/>
               </a:lnSpc>
@@ -4911,7 +4911,7 @@
             </a:r>
           </a:p>
           <a:p>
-            <a:pPr algn="l">
+            <a:pPr algn="just">
               <a:lnSpc>
                 <a:spcPct val="125000"/>
               </a:lnSpc>
@@ -4933,7 +4933,7 @@
             </a:r>
           </a:p>
           <a:p>
-            <a:pPr algn="l">
+            <a:pPr algn="just">
               <a:lnSpc>
                 <a:spcPct val="125000"/>
               </a:lnSpc>
@@ -4955,7 +4955,7 @@
             </a:r>
           </a:p>
           <a:p>
-            <a:pPr algn="l">
+            <a:pPr algn="just">
               <a:lnSpc>
                 <a:spcPct val="125000"/>
               </a:lnSpc>
@@ -4977,7 +4977,7 @@
             </a:r>
           </a:p>
           <a:p>
-            <a:pPr algn="l">
+            <a:pPr algn="just">
               <a:lnSpc>
                 <a:spcPct val="125000"/>
               </a:lnSpc>
@@ -4999,7 +4999,7 @@
             </a:r>
           </a:p>
           <a:p>
-            <a:pPr algn="l">
+            <a:pPr algn="just">
               <a:lnSpc>
                 <a:spcPct val="125000"/>
               </a:lnSpc>
@@ -5021,7 +5021,7 @@
             </a:r>
           </a:p>
           <a:p>
-            <a:pPr algn="l">
+            <a:pPr algn="just">
               <a:lnSpc>
                 <a:spcPct val="125000"/>
               </a:lnSpc>
@@ -5043,7 +5043,7 @@
             </a:r>
           </a:p>
           <a:p>
-            <a:pPr algn="l">
+            <a:pPr algn="just">
               <a:lnSpc>
                 <a:spcPct val="125000"/>
               </a:lnSpc>
@@ -5065,7 +5065,7 @@
             </a:r>
           </a:p>
           <a:p>
-            <a:pPr algn="l">
+            <a:pPr algn="just">
               <a:lnSpc>
                 <a:spcPct val="125000"/>
               </a:lnSpc>
@@ -5087,7 +5087,7 @@
             </a:r>
           </a:p>
           <a:p>
-            <a:pPr algn="l">
+            <a:pPr algn="just">
               <a:lnSpc>
                 <a:spcPct val="125000"/>
               </a:lnSpc>
@@ -5167,7 +5167,7 @@
           <a:bodyPr rtlCol="0" anchor="ctr" wrap="square" lIns="365760"/>
           <a:lstStyle/>
           <a:p>
-            <a:pPr algn="l"/>
+            <a:pPr algn="just"/>
             <a:r>
               <a:rPr sz="1500" b="1">
                 <a:solidFill>
@@ -5201,7 +5201,7 @@
           </a:bodyPr>
           <a:lstStyle/>
           <a:p>
-            <a:pPr algn="l">
+            <a:pPr algn="just">
               <a:lnSpc>
                 <a:spcPct val="125000"/>
               </a:lnSpc>
@@ -5223,7 +5223,7 @@
             </a:r>
           </a:p>
           <a:p>
-            <a:pPr algn="l">
+            <a:pPr algn="just">
               <a:lnSpc>
                 <a:spcPct val="125000"/>
               </a:lnSpc>
@@ -5245,7 +5245,7 @@
             </a:r>
           </a:p>
           <a:p>
-            <a:pPr algn="l">
+            <a:pPr algn="just">
               <a:lnSpc>
                 <a:spcPct val="125000"/>
               </a:lnSpc>
@@ -5267,7 +5267,7 @@
             </a:r>
           </a:p>
           <a:p>
-            <a:pPr algn="l">
+            <a:pPr algn="just">
               <a:lnSpc>
                 <a:spcPct val="125000"/>
               </a:lnSpc>
@@ -5289,7 +5289,7 @@
             </a:r>
           </a:p>
           <a:p>
-            <a:pPr algn="l">
+            <a:pPr algn="just">
               <a:lnSpc>
                 <a:spcPct val="125000"/>
               </a:lnSpc>
@@ -5311,7 +5311,7 @@
             </a:r>
           </a:p>
           <a:p>
-            <a:pPr algn="l">
+            <a:pPr algn="just">
               <a:lnSpc>
                 <a:spcPct val="125000"/>
               </a:lnSpc>
@@ -5333,7 +5333,7 @@
             </a:r>
           </a:p>
           <a:p>
-            <a:pPr algn="l">
+            <a:pPr algn="just">
               <a:lnSpc>
                 <a:spcPct val="125000"/>
               </a:lnSpc>
@@ -5355,7 +5355,7 @@
             </a:r>
           </a:p>
           <a:p>
-            <a:pPr algn="l">
+            <a:pPr algn="just">
               <a:lnSpc>
                 <a:spcPct val="125000"/>
               </a:lnSpc>
@@ -5377,7 +5377,7 @@
             </a:r>
           </a:p>
           <a:p>
-            <a:pPr algn="l">
+            <a:pPr algn="just">
               <a:lnSpc>
                 <a:spcPct val="125000"/>
               </a:lnSpc>
@@ -5399,7 +5399,7 @@
             </a:r>
           </a:p>
           <a:p>
-            <a:pPr algn="l">
+            <a:pPr algn="just">
               <a:lnSpc>
                 <a:spcPct val="125000"/>
               </a:lnSpc>
@@ -5421,7 +5421,7 @@
             </a:r>
           </a:p>
           <a:p>
-            <a:pPr algn="l">
+            <a:pPr algn="just">
               <a:lnSpc>
                 <a:spcPct val="125000"/>
               </a:lnSpc>
@@ -5501,7 +5501,7 @@
           <a:bodyPr rtlCol="0" anchor="ctr" wrap="square" lIns="365760"/>
           <a:lstStyle/>
           <a:p>
-            <a:pPr algn="l"/>
+            <a:pPr algn="just"/>
             <a:r>
               <a:rPr sz="1500" b="1">
                 <a:solidFill>
@@ -5535,7 +5535,7 @@
           </a:bodyPr>
           <a:lstStyle/>
           <a:p>
-            <a:pPr algn="l">
+            <a:pPr algn="just">
               <a:lnSpc>
                 <a:spcPct val="125000"/>
               </a:lnSpc>
@@ -5557,7 +5557,7 @@
             </a:r>
           </a:p>
           <a:p>
-            <a:pPr algn="l">
+            <a:pPr algn="just">
               <a:lnSpc>
                 <a:spcPct val="125000"/>
               </a:lnSpc>
@@ -5579,7 +5579,7 @@
             </a:r>
           </a:p>
           <a:p>
-            <a:pPr algn="l">
+            <a:pPr algn="just">
               <a:lnSpc>
                 <a:spcPct val="125000"/>
               </a:lnSpc>
@@ -5601,7 +5601,7 @@
             </a:r>
           </a:p>
           <a:p>
-            <a:pPr algn="l">
+            <a:pPr algn="just">
               <a:lnSpc>
                 <a:spcPct val="125000"/>
               </a:lnSpc>
@@ -5623,7 +5623,7 @@
             </a:r>
           </a:p>
           <a:p>
-            <a:pPr algn="l">
+            <a:pPr algn="just">
               <a:lnSpc>
                 <a:spcPct val="125000"/>
               </a:lnSpc>
@@ -5645,7 +5645,7 @@
             </a:r>
           </a:p>
           <a:p>
-            <a:pPr algn="l">
+            <a:pPr algn="just">
               <a:lnSpc>
                 <a:spcPct val="125000"/>
               </a:lnSpc>
@@ -5667,7 +5667,7 @@
             </a:r>
           </a:p>
           <a:p>
-            <a:pPr algn="l">
+            <a:pPr algn="just">
               <a:lnSpc>
                 <a:spcPct val="125000"/>
               </a:lnSpc>
@@ -5689,7 +5689,7 @@
             </a:r>
           </a:p>
           <a:p>
-            <a:pPr algn="l">
+            <a:pPr algn="just">
               <a:lnSpc>
                 <a:spcPct val="125000"/>
               </a:lnSpc>
@@ -5711,7 +5711,7 @@
             </a:r>
           </a:p>
           <a:p>
-            <a:pPr algn="l">
+            <a:pPr algn="just">
               <a:lnSpc>
                 <a:spcPct val="125000"/>
               </a:lnSpc>
@@ -5733,7 +5733,7 @@
             </a:r>
           </a:p>
           <a:p>
-            <a:pPr algn="l">
+            <a:pPr algn="just">
               <a:lnSpc>
                 <a:spcPct val="125000"/>
               </a:lnSpc>
@@ -5813,7 +5813,7 @@
           <a:bodyPr rtlCol="0" anchor="ctr" wrap="square" lIns="365760"/>
           <a:lstStyle/>
           <a:p>
-            <a:pPr algn="l"/>
+            <a:pPr algn="just"/>
             <a:r>
               <a:rPr sz="1500" b="1">
                 <a:solidFill>
@@ -5847,7 +5847,7 @@
           </a:bodyPr>
           <a:lstStyle/>
           <a:p>
-            <a:pPr algn="l">
+            <a:pPr algn="just">
               <a:lnSpc>
                 <a:spcPct val="125000"/>
               </a:lnSpc>
@@ -5869,7 +5869,7 @@
             </a:r>
           </a:p>
           <a:p>
-            <a:pPr algn="l">
+            <a:pPr algn="just">
               <a:lnSpc>
                 <a:spcPct val="125000"/>
               </a:lnSpc>
@@ -5891,7 +5891,7 @@
             </a:r>
           </a:p>
           <a:p>
-            <a:pPr algn="l">
+            <a:pPr algn="just">
               <a:lnSpc>
                 <a:spcPct val="125000"/>
               </a:lnSpc>
@@ -5913,7 +5913,7 @@
             </a:r>
           </a:p>
           <a:p>
-            <a:pPr algn="l">
+            <a:pPr algn="just">
               <a:lnSpc>
                 <a:spcPct val="125000"/>
               </a:lnSpc>
@@ -5935,7 +5935,7 @@
             </a:r>
           </a:p>
           <a:p>
-            <a:pPr algn="l">
+            <a:pPr algn="just">
               <a:lnSpc>
                 <a:spcPct val="125000"/>
               </a:lnSpc>
@@ -5957,7 +5957,7 @@
             </a:r>
           </a:p>
           <a:p>
-            <a:pPr algn="l">
+            <a:pPr algn="just">
               <a:lnSpc>
                 <a:spcPct val="125000"/>
               </a:lnSpc>
@@ -5979,7 +5979,7 @@
             </a:r>
           </a:p>
           <a:p>
-            <a:pPr algn="l">
+            <a:pPr algn="just">
               <a:lnSpc>
                 <a:spcPct val="125000"/>
               </a:lnSpc>
@@ -6001,7 +6001,7 @@
             </a:r>
           </a:p>
           <a:p>
-            <a:pPr algn="l">
+            <a:pPr algn="just">
               <a:lnSpc>
                 <a:spcPct val="125000"/>
               </a:lnSpc>
@@ -6023,7 +6023,7 @@
             </a:r>
           </a:p>
           <a:p>
-            <a:pPr algn="l">
+            <a:pPr algn="just">
               <a:lnSpc>
                 <a:spcPct val="125000"/>
               </a:lnSpc>
@@ -6045,7 +6045,7 @@
             </a:r>
           </a:p>
           <a:p>
-            <a:pPr algn="l">
+            <a:pPr algn="just">
               <a:lnSpc>
                 <a:spcPct val="125000"/>
               </a:lnSpc>
@@ -6067,7 +6067,7 @@
             </a:r>
           </a:p>
           <a:p>
-            <a:pPr algn="l">
+            <a:pPr algn="just">
               <a:lnSpc>
                 <a:spcPct val="125000"/>
               </a:lnSpc>
@@ -6147,7 +6147,7 @@
           <a:bodyPr rtlCol="0" anchor="ctr" wrap="square" lIns="365760"/>
           <a:lstStyle/>
           <a:p>
-            <a:pPr algn="l"/>
+            <a:pPr algn="just"/>
             <a:r>
               <a:rPr sz="1500" b="1">
                 <a:solidFill>
@@ -6181,7 +6181,7 @@
           </a:bodyPr>
           <a:lstStyle/>
           <a:p>
-            <a:pPr algn="l">
+            <a:pPr algn="just">
               <a:lnSpc>
                 <a:spcPct val="125000"/>
               </a:lnSpc>
@@ -6203,7 +6203,7 @@
             </a:r>
           </a:p>
           <a:p>
-            <a:pPr algn="l">
+            <a:pPr algn="just">
               <a:lnSpc>
                 <a:spcPct val="125000"/>
               </a:lnSpc>
@@ -6225,7 +6225,7 @@
             </a:r>
           </a:p>
           <a:p>
-            <a:pPr algn="l">
+            <a:pPr algn="just">
               <a:lnSpc>
                 <a:spcPct val="125000"/>
               </a:lnSpc>
@@ -6247,7 +6247,7 @@
             </a:r>
           </a:p>
           <a:p>
-            <a:pPr algn="l">
+            <a:pPr algn="just">
               <a:lnSpc>
                 <a:spcPct val="125000"/>
               </a:lnSpc>
@@ -6269,7 +6269,7 @@
             </a:r>
           </a:p>
           <a:p>
-            <a:pPr algn="l">
+            <a:pPr algn="just">
               <a:lnSpc>
                 <a:spcPct val="125000"/>
               </a:lnSpc>
@@ -6291,7 +6291,7 @@
             </a:r>
           </a:p>
           <a:p>
-            <a:pPr algn="l">
+            <a:pPr algn="just">
               <a:lnSpc>
                 <a:spcPct val="125000"/>
               </a:lnSpc>
@@ -6313,7 +6313,7 @@
             </a:r>
           </a:p>
           <a:p>
-            <a:pPr algn="l">
+            <a:pPr algn="just">
               <a:lnSpc>
                 <a:spcPct val="125000"/>
               </a:lnSpc>
@@ -6335,7 +6335,7 @@
             </a:r>
           </a:p>
           <a:p>
-            <a:pPr algn="l">
+            <a:pPr algn="just">
               <a:lnSpc>
                 <a:spcPct val="125000"/>
               </a:lnSpc>
@@ -6357,7 +6357,7 @@
             </a:r>
           </a:p>
           <a:p>
-            <a:pPr algn="l">
+            <a:pPr algn="just">
               <a:lnSpc>
                 <a:spcPct val="125000"/>
               </a:lnSpc>
@@ -6379,7 +6379,7 @@
             </a:r>
           </a:p>
           <a:p>
-            <a:pPr algn="l">
+            <a:pPr algn="just">
               <a:lnSpc>
                 <a:spcPct val="125000"/>
               </a:lnSpc>
@@ -6401,7 +6401,7 @@
             </a:r>
           </a:p>
           <a:p>
-            <a:pPr algn="l">
+            <a:pPr algn="just">
               <a:lnSpc>
                 <a:spcPct val="125000"/>
               </a:lnSpc>
@@ -6423,7 +6423,7 @@
             </a:r>
           </a:p>
           <a:p>
-            <a:pPr algn="l">
+            <a:pPr algn="just">
               <a:lnSpc>
                 <a:spcPct val="125000"/>
               </a:lnSpc>
@@ -6503,7 +6503,7 @@
           <a:bodyPr rtlCol="0" anchor="ctr" wrap="square" lIns="365760"/>
           <a:lstStyle/>
           <a:p>
-            <a:pPr algn="l"/>
+            <a:pPr algn="just"/>
             <a:r>
               <a:rPr sz="1500" b="1">
                 <a:solidFill>
@@ -6537,7 +6537,7 @@
           </a:bodyPr>
           <a:lstStyle/>
           <a:p>
-            <a:pPr algn="l">
+            <a:pPr algn="just">
               <a:lnSpc>
                 <a:spcPct val="125000"/>
               </a:lnSpc>
@@ -6559,7 +6559,7 @@
             </a:r>
           </a:p>
           <a:p>
-            <a:pPr algn="l">
+            <a:pPr algn="just">
               <a:lnSpc>
                 <a:spcPct val="125000"/>
               </a:lnSpc>
@@ -6581,7 +6581,7 @@
             </a:r>
           </a:p>
           <a:p>
-            <a:pPr algn="l">
+            <a:pPr algn="just">
               <a:lnSpc>
                 <a:spcPct val="125000"/>
               </a:lnSpc>
@@ -6603,7 +6603,7 @@
             </a:r>
           </a:p>
           <a:p>
-            <a:pPr algn="l">
+            <a:pPr algn="just">
               <a:lnSpc>
                 <a:spcPct val="125000"/>
               </a:lnSpc>
@@ -6625,7 +6625,7 @@
             </a:r>
           </a:p>
           <a:p>
-            <a:pPr algn="l">
+            <a:pPr algn="just">
               <a:lnSpc>
                 <a:spcPct val="125000"/>
               </a:lnSpc>
@@ -6647,7 +6647,7 @@
             </a:r>
           </a:p>
           <a:p>
-            <a:pPr algn="l">
+            <a:pPr algn="just">
               <a:lnSpc>
                 <a:spcPct val="125000"/>
               </a:lnSpc>
@@ -6669,7 +6669,7 @@
             </a:r>
           </a:p>
           <a:p>
-            <a:pPr algn="l">
+            <a:pPr algn="just">
               <a:lnSpc>
                 <a:spcPct val="125000"/>
               </a:lnSpc>
@@ -6691,7 +6691,7 @@
             </a:r>
           </a:p>
           <a:p>
-            <a:pPr algn="l">
+            <a:pPr algn="just">
               <a:lnSpc>
                 <a:spcPct val="125000"/>
               </a:lnSpc>
@@ -6713,7 +6713,7 @@
             </a:r>
           </a:p>
           <a:p>
-            <a:pPr algn="l">
+            <a:pPr algn="just">
               <a:lnSpc>
                 <a:spcPct val="125000"/>
               </a:lnSpc>
@@ -6735,7 +6735,7 @@
             </a:r>
           </a:p>
           <a:p>
-            <a:pPr algn="l">
+            <a:pPr algn="just">
               <a:lnSpc>
                 <a:spcPct val="125000"/>
               </a:lnSpc>
@@ -6757,7 +6757,7 @@
             </a:r>
           </a:p>
           <a:p>
-            <a:pPr algn="l">
+            <a:pPr algn="just">
               <a:lnSpc>
                 <a:spcPct val="125000"/>
               </a:lnSpc>
@@ -6779,7 +6779,7 @@
             </a:r>
           </a:p>
           <a:p>
-            <a:pPr algn="l">
+            <a:pPr algn="just">
               <a:lnSpc>
                 <a:spcPct val="125000"/>
               </a:lnSpc>
@@ -6859,7 +6859,7 @@
           <a:bodyPr rtlCol="0" anchor="ctr" wrap="square" lIns="365760"/>
           <a:lstStyle/>
           <a:p>
-            <a:pPr algn="l"/>
+            <a:pPr algn="just"/>
             <a:r>
               <a:rPr sz="1500" b="1">
                 <a:solidFill>
@@ -6893,7 +6893,7 @@
           </a:bodyPr>
           <a:lstStyle/>
           <a:p>
-            <a:pPr algn="l">
+            <a:pPr algn="just">
               <a:lnSpc>
                 <a:spcPct val="125000"/>
               </a:lnSpc>
@@ -6915,7 +6915,7 @@
             </a:r>
           </a:p>
           <a:p>
-            <a:pPr algn="l">
+            <a:pPr algn="just">
               <a:lnSpc>
                 <a:spcPct val="125000"/>
               </a:lnSpc>
@@ -6937,7 +6937,7 @@
             </a:r>
           </a:p>
           <a:p>
-            <a:pPr algn="l">
+            <a:pPr algn="just">
               <a:lnSpc>
                 <a:spcPct val="125000"/>
               </a:lnSpc>
@@ -6959,7 +6959,7 @@
             </a:r>
           </a:p>
           <a:p>
-            <a:pPr algn="l">
+            <a:pPr algn="just">
               <a:lnSpc>
                 <a:spcPct val="125000"/>
               </a:lnSpc>
@@ -6981,7 +6981,7 @@
             </a:r>
           </a:p>
           <a:p>
-            <a:pPr algn="l">
+            <a:pPr algn="just">
               <a:lnSpc>
                 <a:spcPct val="125000"/>
               </a:lnSpc>
@@ -7003,7 +7003,7 @@
             </a:r>
           </a:p>
           <a:p>
-            <a:pPr algn="l">
+            <a:pPr algn="just">
               <a:lnSpc>
                 <a:spcPct val="125000"/>
               </a:lnSpc>
@@ -7025,7 +7025,7 @@
             </a:r>
           </a:p>
           <a:p>
-            <a:pPr algn="l">
+            <a:pPr algn="just">
               <a:lnSpc>
                 <a:spcPct val="125000"/>
               </a:lnSpc>
@@ -7047,7 +7047,7 @@
             </a:r>
           </a:p>
           <a:p>
-            <a:pPr algn="l">
+            <a:pPr algn="just">
               <a:lnSpc>
                 <a:spcPct val="125000"/>
               </a:lnSpc>
@@ -7069,7 +7069,7 @@
             </a:r>
           </a:p>
           <a:p>
-            <a:pPr algn="l">
+            <a:pPr algn="just">
               <a:lnSpc>
                 <a:spcPct val="125000"/>
               </a:lnSpc>
@@ -7091,7 +7091,7 @@
             </a:r>
           </a:p>
           <a:p>
-            <a:pPr algn="l">
+            <a:pPr algn="just">
               <a:lnSpc>
                 <a:spcPct val="125000"/>
               </a:lnSpc>
@@ -7113,7 +7113,7 @@
             </a:r>
           </a:p>
           <a:p>
-            <a:pPr algn="l">
+            <a:pPr algn="just">
               <a:lnSpc>
                 <a:spcPct val="125000"/>
               </a:lnSpc>
@@ -7135,7 +7135,7 @@
             </a:r>
           </a:p>
           <a:p>
-            <a:pPr algn="l">
+            <a:pPr algn="just">
               <a:lnSpc>
                 <a:spcPct val="125000"/>
               </a:lnSpc>
@@ -7215,7 +7215,7 @@
           <a:bodyPr rtlCol="0" anchor="ctr" wrap="square" lIns="365760"/>
           <a:lstStyle/>
           <a:p>
-            <a:pPr algn="l"/>
+            <a:pPr algn="just"/>
             <a:r>
               <a:rPr sz="1500" b="1">
                 <a:solidFill>
@@ -7249,7 +7249,7 @@
           </a:bodyPr>
           <a:lstStyle/>
           <a:p>
-            <a:pPr algn="l">
+            <a:pPr algn="just">
               <a:lnSpc>
                 <a:spcPct val="125000"/>
               </a:lnSpc>
@@ -7271,7 +7271,7 @@
             </a:r>
           </a:p>
           <a:p>
-            <a:pPr algn="l">
+            <a:pPr algn="just">
               <a:lnSpc>
                 <a:spcPct val="125000"/>
               </a:lnSpc>
@@ -7293,7 +7293,7 @@
             </a:r>
           </a:p>
           <a:p>
-            <a:pPr algn="l">
+            <a:pPr algn="just">
               <a:lnSpc>
                 <a:spcPct val="125000"/>
               </a:lnSpc>
@@ -7315,7 +7315,7 @@
             </a:r>
           </a:p>
           <a:p>
-            <a:pPr algn="l">
+            <a:pPr algn="just">
               <a:lnSpc>
                 <a:spcPct val="125000"/>
               </a:lnSpc>
@@ -7337,7 +7337,7 @@
             </a:r>
           </a:p>
           <a:p>
-            <a:pPr algn="l">
+            <a:pPr algn="just">
               <a:lnSpc>
                 <a:spcPct val="125000"/>
               </a:lnSpc>
@@ -7359,7 +7359,7 @@
             </a:r>
           </a:p>
           <a:p>
-            <a:pPr algn="l">
+            <a:pPr algn="just">
               <a:lnSpc>
                 <a:spcPct val="125000"/>
               </a:lnSpc>
@@ -7381,7 +7381,7 @@
             </a:r>
           </a:p>
           <a:p>
-            <a:pPr algn="l">
+            <a:pPr algn="just">
               <a:lnSpc>
                 <a:spcPct val="125000"/>
               </a:lnSpc>
@@ -7403,7 +7403,7 @@
             </a:r>
           </a:p>
           <a:p>
-            <a:pPr algn="l">
+            <a:pPr algn="just">
               <a:lnSpc>
                 <a:spcPct val="125000"/>
               </a:lnSpc>
@@ -7425,7 +7425,7 @@
             </a:r>
           </a:p>
           <a:p>
-            <a:pPr algn="l">
+            <a:pPr algn="just">
               <a:lnSpc>
                 <a:spcPct val="125000"/>
               </a:lnSpc>
@@ -7447,7 +7447,7 @@
             </a:r>
           </a:p>
           <a:p>
-            <a:pPr algn="l">
+            <a:pPr algn="just">
               <a:lnSpc>
                 <a:spcPct val="125000"/>
               </a:lnSpc>
@@ -7469,7 +7469,7 @@
             </a:r>
           </a:p>
           <a:p>
-            <a:pPr algn="l">
+            <a:pPr algn="just">
               <a:lnSpc>
                 <a:spcPct val="125000"/>
               </a:lnSpc>
@@ -7491,7 +7491,7 @@
             </a:r>
           </a:p>
           <a:p>
-            <a:pPr algn="l">
+            <a:pPr algn="just">
               <a:lnSpc>
                 <a:spcPct val="125000"/>
               </a:lnSpc>
@@ -7571,7 +7571,7 @@
           <a:bodyPr rtlCol="0" anchor="ctr" wrap="square" lIns="365760"/>
           <a:lstStyle/>
           <a:p>
-            <a:pPr algn="l"/>
+            <a:pPr algn="just"/>
             <a:r>
               <a:rPr sz="1500" b="1">
                 <a:solidFill>
@@ -7605,7 +7605,7 @@
           </a:bodyPr>
           <a:lstStyle/>
           <a:p>
-            <a:pPr algn="l">
+            <a:pPr algn="just">
               <a:lnSpc>
                 <a:spcPct val="125000"/>
               </a:lnSpc>
@@ -7627,7 +7627,7 @@
             </a:r>
           </a:p>
           <a:p>
-            <a:pPr algn="l">
+            <a:pPr algn="just">
               <a:lnSpc>
                 <a:spcPct val="125000"/>
               </a:lnSpc>
@@ -7649,7 +7649,7 @@
             </a:r>
           </a:p>
           <a:p>
-            <a:pPr algn="l">
+            <a:pPr algn="just">
               <a:lnSpc>
                 <a:spcPct val="125000"/>
               </a:lnSpc>
@@ -7671,7 +7671,7 @@
             </a:r>
           </a:p>
           <a:p>
-            <a:pPr algn="l">
+            <a:pPr algn="just">
               <a:lnSpc>
                 <a:spcPct val="125000"/>
               </a:lnSpc>
@@ -7693,7 +7693,7 @@
             </a:r>
           </a:p>
           <a:p>
-            <a:pPr algn="l">
+            <a:pPr algn="just">
               <a:lnSpc>
                 <a:spcPct val="125000"/>
               </a:lnSpc>
@@ -7715,7 +7715,7 @@
             </a:r>
           </a:p>
           <a:p>
-            <a:pPr algn="l">
+            <a:pPr algn="just">
               <a:lnSpc>
                 <a:spcPct val="125000"/>
               </a:lnSpc>
@@ -7737,7 +7737,7 @@
             </a:r>
           </a:p>
           <a:p>
-            <a:pPr algn="l">
+            <a:pPr algn="just">
               <a:lnSpc>
                 <a:spcPct val="125000"/>
               </a:lnSpc>
@@ -7759,7 +7759,7 @@
             </a:r>
           </a:p>
           <a:p>
-            <a:pPr algn="l">
+            <a:pPr algn="just">
               <a:lnSpc>
                 <a:spcPct val="125000"/>
               </a:lnSpc>
@@ -7781,7 +7781,7 @@
             </a:r>
           </a:p>
           <a:p>
-            <a:pPr algn="l">
+            <a:pPr algn="just">
               <a:lnSpc>
                 <a:spcPct val="125000"/>
               </a:lnSpc>
@@ -7803,7 +7803,7 @@
             </a:r>
           </a:p>
           <a:p>
-            <a:pPr algn="l">
+            <a:pPr algn="just">
               <a:lnSpc>
                 <a:spcPct val="125000"/>
               </a:lnSpc>
@@ -7825,7 +7825,7 @@
             </a:r>
           </a:p>
           <a:p>
-            <a:pPr algn="l">
+            <a:pPr algn="just">
               <a:lnSpc>
                 <a:spcPct val="125000"/>
               </a:lnSpc>
@@ -7905,7 +7905,7 @@
           <a:bodyPr rtlCol="0" anchor="ctr" wrap="square" lIns="365760"/>
           <a:lstStyle/>
           <a:p>
-            <a:pPr algn="l"/>
+            <a:pPr algn="just"/>
             <a:r>
               <a:rPr sz="1500" b="1">
                 <a:solidFill>
@@ -7939,7 +7939,7 @@
           </a:bodyPr>
           <a:lstStyle/>
           <a:p>
-            <a:pPr algn="l">
+            <a:pPr algn="just">
               <a:lnSpc>
                 <a:spcPct val="125000"/>
               </a:lnSpc>
@@ -7961,7 +7961,7 @@
             </a:r>
           </a:p>
           <a:p>
-            <a:pPr algn="l">
+            <a:pPr algn="just">
               <a:lnSpc>
                 <a:spcPct val="125000"/>
               </a:lnSpc>
@@ -7983,7 +7983,7 @@
             </a:r>
           </a:p>
           <a:p>
-            <a:pPr algn="l">
+            <a:pPr algn="just">
               <a:lnSpc>
                 <a:spcPct val="125000"/>
               </a:lnSpc>
@@ -8005,7 +8005,7 @@
             </a:r>
           </a:p>
           <a:p>
-            <a:pPr algn="l">
+            <a:pPr algn="just">
               <a:lnSpc>
                 <a:spcPct val="125000"/>
               </a:lnSpc>
@@ -8027,7 +8027,7 @@
             </a:r>
           </a:p>
           <a:p>
-            <a:pPr algn="l">
+            <a:pPr algn="just">
               <a:lnSpc>
                 <a:spcPct val="125000"/>
               </a:lnSpc>
@@ -8049,7 +8049,7 @@
             </a:r>
           </a:p>
           <a:p>
-            <a:pPr algn="l">
+            <a:pPr algn="just">
               <a:lnSpc>
                 <a:spcPct val="125000"/>
               </a:lnSpc>
@@ -8071,7 +8071,7 @@
             </a:r>
           </a:p>
           <a:p>
-            <a:pPr algn="l">
+            <a:pPr algn="just">
               <a:lnSpc>
                 <a:spcPct val="125000"/>
               </a:lnSpc>
@@ -8093,7 +8093,7 @@
             </a:r>
           </a:p>
           <a:p>
-            <a:pPr algn="l">
+            <a:pPr algn="just">
               <a:lnSpc>
                 <a:spcPct val="125000"/>
               </a:lnSpc>
@@ -8115,7 +8115,7 @@
             </a:r>
           </a:p>
           <a:p>
-            <a:pPr algn="l">
+            <a:pPr algn="just">
               <a:lnSpc>
                 <a:spcPct val="125000"/>
               </a:lnSpc>
@@ -8137,7 +8137,7 @@
             </a:r>
           </a:p>
           <a:p>
-            <a:pPr algn="l">
+            <a:pPr algn="just">
               <a:lnSpc>
                 <a:spcPct val="125000"/>
               </a:lnSpc>
@@ -8159,7 +8159,7 @@
             </a:r>
           </a:p>
           <a:p>
-            <a:pPr algn="l">
+            <a:pPr algn="just">
               <a:lnSpc>
                 <a:spcPct val="125000"/>
               </a:lnSpc>
@@ -8181,7 +8181,7 @@
             </a:r>
           </a:p>
           <a:p>
-            <a:pPr algn="l">
+            <a:pPr algn="just">
               <a:lnSpc>
                 <a:spcPct val="125000"/>
               </a:lnSpc>

--- a/ppts_output_v3/04_消费税风险指引.pptx
+++ b/ppts_output_v3/04_消费税风险指引.pptx
@@ -3309,7 +3309,7 @@
           <a:p>
             <a:pPr algn="just">
               <a:lnSpc>
-                <a:spcPct val="125000"/>
+                <a:spcPct val="110000"/>
               </a:lnSpc>
               <a:spcBef>
                 <a:spcPts val="0"/>
@@ -3331,7 +3331,7 @@
           <a:p>
             <a:pPr algn="just">
               <a:lnSpc>
-                <a:spcPct val="125000"/>
+                <a:spcPct val="110000"/>
               </a:lnSpc>
               <a:spcBef>
                 <a:spcPts val="0"/>
@@ -3353,7 +3353,7 @@
           <a:p>
             <a:pPr algn="just">
               <a:lnSpc>
-                <a:spcPct val="125000"/>
+                <a:spcPct val="110000"/>
               </a:lnSpc>
               <a:spcBef>
                 <a:spcPts val="0"/>
@@ -3375,7 +3375,7 @@
           <a:p>
             <a:pPr algn="just">
               <a:lnSpc>
-                <a:spcPct val="125000"/>
+                <a:spcPct val="110000"/>
               </a:lnSpc>
               <a:spcBef>
                 <a:spcPts val="0"/>
@@ -3397,7 +3397,7 @@
           <a:p>
             <a:pPr algn="just">
               <a:lnSpc>
-                <a:spcPct val="125000"/>
+                <a:spcPct val="110000"/>
               </a:lnSpc>
               <a:spcBef>
                 <a:spcPts val="0"/>
@@ -3419,7 +3419,7 @@
           <a:p>
             <a:pPr algn="just">
               <a:lnSpc>
-                <a:spcPct val="125000"/>
+                <a:spcPct val="110000"/>
               </a:lnSpc>
               <a:spcBef>
                 <a:spcPts val="0"/>
@@ -3441,7 +3441,7 @@
           <a:p>
             <a:pPr algn="just">
               <a:lnSpc>
-                <a:spcPct val="125000"/>
+                <a:spcPct val="110000"/>
               </a:lnSpc>
               <a:spcBef>
                 <a:spcPts val="0"/>
@@ -3463,7 +3463,7 @@
           <a:p>
             <a:pPr algn="just">
               <a:lnSpc>
-                <a:spcPct val="125000"/>
+                <a:spcPct val="110000"/>
               </a:lnSpc>
               <a:spcBef>
                 <a:spcPts val="0"/>
@@ -3485,7 +3485,7 @@
           <a:p>
             <a:pPr algn="just">
               <a:lnSpc>
-                <a:spcPct val="125000"/>
+                <a:spcPct val="110000"/>
               </a:lnSpc>
               <a:spcBef>
                 <a:spcPts val="0"/>
@@ -3507,7 +3507,7 @@
           <a:p>
             <a:pPr algn="just">
               <a:lnSpc>
-                <a:spcPct val="125000"/>
+                <a:spcPct val="110000"/>
               </a:lnSpc>
               <a:spcBef>
                 <a:spcPts val="0"/>
@@ -3529,7 +3529,7 @@
           <a:p>
             <a:pPr algn="just">
               <a:lnSpc>
-                <a:spcPct val="125000"/>
+                <a:spcPct val="110000"/>
               </a:lnSpc>
               <a:spcBef>
                 <a:spcPts val="0"/>
@@ -3643,7 +3643,7 @@
           <a:p>
             <a:pPr algn="just">
               <a:lnSpc>
-                <a:spcPct val="125000"/>
+                <a:spcPct val="110000"/>
               </a:lnSpc>
               <a:spcBef>
                 <a:spcPts val="0"/>
@@ -3665,7 +3665,7 @@
           <a:p>
             <a:pPr algn="just">
               <a:lnSpc>
-                <a:spcPct val="125000"/>
+                <a:spcPct val="110000"/>
               </a:lnSpc>
               <a:spcBef>
                 <a:spcPts val="0"/>
@@ -3687,7 +3687,7 @@
           <a:p>
             <a:pPr algn="just">
               <a:lnSpc>
-                <a:spcPct val="125000"/>
+                <a:spcPct val="110000"/>
               </a:lnSpc>
               <a:spcBef>
                 <a:spcPts val="0"/>
@@ -3709,7 +3709,7 @@
           <a:p>
             <a:pPr algn="just">
               <a:lnSpc>
-                <a:spcPct val="125000"/>
+                <a:spcPct val="110000"/>
               </a:lnSpc>
               <a:spcBef>
                 <a:spcPts val="0"/>
@@ -3731,7 +3731,7 @@
           <a:p>
             <a:pPr algn="just">
               <a:lnSpc>
-                <a:spcPct val="125000"/>
+                <a:spcPct val="110000"/>
               </a:lnSpc>
               <a:spcBef>
                 <a:spcPts val="0"/>
@@ -3753,7 +3753,7 @@
           <a:p>
             <a:pPr algn="just">
               <a:lnSpc>
-                <a:spcPct val="125000"/>
+                <a:spcPct val="110000"/>
               </a:lnSpc>
               <a:spcBef>
                 <a:spcPts val="0"/>
@@ -3775,7 +3775,7 @@
           <a:p>
             <a:pPr algn="just">
               <a:lnSpc>
-                <a:spcPct val="125000"/>
+                <a:spcPct val="110000"/>
               </a:lnSpc>
               <a:spcBef>
                 <a:spcPts val="0"/>
@@ -3797,7 +3797,7 @@
           <a:p>
             <a:pPr algn="just">
               <a:lnSpc>
-                <a:spcPct val="125000"/>
+                <a:spcPct val="110000"/>
               </a:lnSpc>
               <a:spcBef>
                 <a:spcPts val="0"/>
@@ -3819,7 +3819,7 @@
           <a:p>
             <a:pPr algn="just">
               <a:lnSpc>
-                <a:spcPct val="125000"/>
+                <a:spcPct val="110000"/>
               </a:lnSpc>
               <a:spcBef>
                 <a:spcPts val="0"/>
@@ -3933,7 +3933,7 @@
           <a:p>
             <a:pPr algn="just">
               <a:lnSpc>
-                <a:spcPct val="125000"/>
+                <a:spcPct val="110000"/>
               </a:lnSpc>
               <a:spcBef>
                 <a:spcPts val="0"/>
@@ -3955,7 +3955,7 @@
           <a:p>
             <a:pPr algn="just">
               <a:lnSpc>
-                <a:spcPct val="125000"/>
+                <a:spcPct val="110000"/>
               </a:lnSpc>
               <a:spcBef>
                 <a:spcPts val="0"/>
@@ -3977,7 +3977,7 @@
           <a:p>
             <a:pPr algn="just">
               <a:lnSpc>
-                <a:spcPct val="125000"/>
+                <a:spcPct val="110000"/>
               </a:lnSpc>
               <a:spcBef>
                 <a:spcPts val="0"/>
@@ -3999,7 +3999,7 @@
           <a:p>
             <a:pPr algn="just">
               <a:lnSpc>
-                <a:spcPct val="125000"/>
+                <a:spcPct val="110000"/>
               </a:lnSpc>
               <a:spcBef>
                 <a:spcPts val="0"/>
@@ -4021,7 +4021,7 @@
           <a:p>
             <a:pPr algn="just">
               <a:lnSpc>
-                <a:spcPct val="125000"/>
+                <a:spcPct val="110000"/>
               </a:lnSpc>
               <a:spcBef>
                 <a:spcPts val="0"/>
@@ -4043,7 +4043,7 @@
           <a:p>
             <a:pPr algn="just">
               <a:lnSpc>
-                <a:spcPct val="125000"/>
+                <a:spcPct val="110000"/>
               </a:lnSpc>
               <a:spcBef>
                 <a:spcPts val="0"/>
@@ -4065,7 +4065,7 @@
           <a:p>
             <a:pPr algn="just">
               <a:lnSpc>
-                <a:spcPct val="125000"/>
+                <a:spcPct val="110000"/>
               </a:lnSpc>
               <a:spcBef>
                 <a:spcPts val="0"/>
@@ -4087,7 +4087,7 @@
           <a:p>
             <a:pPr algn="just">
               <a:lnSpc>
-                <a:spcPct val="125000"/>
+                <a:spcPct val="110000"/>
               </a:lnSpc>
               <a:spcBef>
                 <a:spcPts val="0"/>
@@ -4109,7 +4109,7 @@
           <a:p>
             <a:pPr algn="just">
               <a:lnSpc>
-                <a:spcPct val="125000"/>
+                <a:spcPct val="110000"/>
               </a:lnSpc>
               <a:spcBef>
                 <a:spcPts val="0"/>
@@ -4131,7 +4131,7 @@
           <a:p>
             <a:pPr algn="just">
               <a:lnSpc>
-                <a:spcPct val="125000"/>
+                <a:spcPct val="110000"/>
               </a:lnSpc>
               <a:spcBef>
                 <a:spcPts val="0"/>
@@ -4245,7 +4245,7 @@
           <a:p>
             <a:pPr algn="just">
               <a:lnSpc>
-                <a:spcPct val="125000"/>
+                <a:spcPct val="110000"/>
               </a:lnSpc>
               <a:spcBef>
                 <a:spcPts val="0"/>
@@ -4267,7 +4267,7 @@
           <a:p>
             <a:pPr algn="just">
               <a:lnSpc>
-                <a:spcPct val="125000"/>
+                <a:spcPct val="110000"/>
               </a:lnSpc>
               <a:spcBef>
                 <a:spcPts val="0"/>
@@ -4289,7 +4289,7 @@
           <a:p>
             <a:pPr algn="just">
               <a:lnSpc>
-                <a:spcPct val="125000"/>
+                <a:spcPct val="110000"/>
               </a:lnSpc>
               <a:spcBef>
                 <a:spcPts val="0"/>
@@ -4311,7 +4311,7 @@
           <a:p>
             <a:pPr algn="just">
               <a:lnSpc>
-                <a:spcPct val="125000"/>
+                <a:spcPct val="110000"/>
               </a:lnSpc>
               <a:spcBef>
                 <a:spcPts val="0"/>
@@ -4333,7 +4333,7 @@
           <a:p>
             <a:pPr algn="just">
               <a:lnSpc>
-                <a:spcPct val="125000"/>
+                <a:spcPct val="110000"/>
               </a:lnSpc>
               <a:spcBef>
                 <a:spcPts val="0"/>
@@ -4355,7 +4355,7 @@
           <a:p>
             <a:pPr algn="just">
               <a:lnSpc>
-                <a:spcPct val="125000"/>
+                <a:spcPct val="110000"/>
               </a:lnSpc>
               <a:spcBef>
                 <a:spcPts val="0"/>
@@ -4377,7 +4377,7 @@
           <a:p>
             <a:pPr algn="just">
               <a:lnSpc>
-                <a:spcPct val="125000"/>
+                <a:spcPct val="110000"/>
               </a:lnSpc>
               <a:spcBef>
                 <a:spcPts val="0"/>
@@ -4399,7 +4399,7 @@
           <a:p>
             <a:pPr algn="just">
               <a:lnSpc>
-                <a:spcPct val="125000"/>
+                <a:spcPct val="110000"/>
               </a:lnSpc>
               <a:spcBef>
                 <a:spcPts val="0"/>
@@ -4421,7 +4421,7 @@
           <a:p>
             <a:pPr algn="just">
               <a:lnSpc>
-                <a:spcPct val="125000"/>
+                <a:spcPct val="110000"/>
               </a:lnSpc>
               <a:spcBef>
                 <a:spcPts val="0"/>
@@ -4535,7 +4535,7 @@
           <a:p>
             <a:pPr algn="just">
               <a:lnSpc>
-                <a:spcPct val="125000"/>
+                <a:spcPct val="110000"/>
               </a:lnSpc>
               <a:spcBef>
                 <a:spcPts val="0"/>
@@ -4557,7 +4557,7 @@
           <a:p>
             <a:pPr algn="just">
               <a:lnSpc>
-                <a:spcPct val="125000"/>
+                <a:spcPct val="110000"/>
               </a:lnSpc>
               <a:spcBef>
                 <a:spcPts val="0"/>
@@ -4579,7 +4579,7 @@
           <a:p>
             <a:pPr algn="just">
               <a:lnSpc>
-                <a:spcPct val="125000"/>
+                <a:spcPct val="110000"/>
               </a:lnSpc>
               <a:spcBef>
                 <a:spcPts val="0"/>
@@ -4601,7 +4601,7 @@
           <a:p>
             <a:pPr algn="just">
               <a:lnSpc>
-                <a:spcPct val="125000"/>
+                <a:spcPct val="110000"/>
               </a:lnSpc>
               <a:spcBef>
                 <a:spcPts val="0"/>
@@ -4623,7 +4623,7 @@
           <a:p>
             <a:pPr algn="just">
               <a:lnSpc>
-                <a:spcPct val="125000"/>
+                <a:spcPct val="110000"/>
               </a:lnSpc>
               <a:spcBef>
                 <a:spcPts val="0"/>
@@ -4645,7 +4645,7 @@
           <a:p>
             <a:pPr algn="just">
               <a:lnSpc>
-                <a:spcPct val="125000"/>
+                <a:spcPct val="110000"/>
               </a:lnSpc>
               <a:spcBef>
                 <a:spcPts val="0"/>
@@ -4667,7 +4667,7 @@
           <a:p>
             <a:pPr algn="just">
               <a:lnSpc>
-                <a:spcPct val="125000"/>
+                <a:spcPct val="110000"/>
               </a:lnSpc>
               <a:spcBef>
                 <a:spcPts val="0"/>
@@ -4689,7 +4689,7 @@
           <a:p>
             <a:pPr algn="just">
               <a:lnSpc>
-                <a:spcPct val="125000"/>
+                <a:spcPct val="110000"/>
               </a:lnSpc>
               <a:spcBef>
                 <a:spcPts val="0"/>
@@ -4711,7 +4711,7 @@
           <a:p>
             <a:pPr algn="just">
               <a:lnSpc>
-                <a:spcPct val="125000"/>
+                <a:spcPct val="110000"/>
               </a:lnSpc>
               <a:spcBef>
                 <a:spcPts val="0"/>
@@ -4733,7 +4733,7 @@
           <a:p>
             <a:pPr algn="just">
               <a:lnSpc>
-                <a:spcPct val="125000"/>
+                <a:spcPct val="110000"/>
               </a:lnSpc>
               <a:spcBef>
                 <a:spcPts val="0"/>
@@ -4847,7 +4847,7 @@
           <a:p>
             <a:pPr algn="just">
               <a:lnSpc>
-                <a:spcPct val="125000"/>
+                <a:spcPct val="110000"/>
               </a:lnSpc>
               <a:spcBef>
                 <a:spcPts val="0"/>
@@ -4869,7 +4869,7 @@
           <a:p>
             <a:pPr algn="just">
               <a:lnSpc>
-                <a:spcPct val="125000"/>
+                <a:spcPct val="110000"/>
               </a:lnSpc>
               <a:spcBef>
                 <a:spcPts val="0"/>
@@ -4891,7 +4891,7 @@
           <a:p>
             <a:pPr algn="just">
               <a:lnSpc>
-                <a:spcPct val="125000"/>
+                <a:spcPct val="110000"/>
               </a:lnSpc>
               <a:spcBef>
                 <a:spcPts val="0"/>
@@ -4913,7 +4913,7 @@
           <a:p>
             <a:pPr algn="just">
               <a:lnSpc>
-                <a:spcPct val="125000"/>
+                <a:spcPct val="110000"/>
               </a:lnSpc>
               <a:spcBef>
                 <a:spcPts val="0"/>
@@ -4935,7 +4935,7 @@
           <a:p>
             <a:pPr algn="just">
               <a:lnSpc>
-                <a:spcPct val="125000"/>
+                <a:spcPct val="110000"/>
               </a:lnSpc>
               <a:spcBef>
                 <a:spcPts val="0"/>
@@ -4957,7 +4957,7 @@
           <a:p>
             <a:pPr algn="just">
               <a:lnSpc>
-                <a:spcPct val="125000"/>
+                <a:spcPct val="110000"/>
               </a:lnSpc>
               <a:spcBef>
                 <a:spcPts val="0"/>
@@ -4979,7 +4979,7 @@
           <a:p>
             <a:pPr algn="just">
               <a:lnSpc>
-                <a:spcPct val="125000"/>
+                <a:spcPct val="110000"/>
               </a:lnSpc>
               <a:spcBef>
                 <a:spcPts val="0"/>
@@ -5001,7 +5001,7 @@
           <a:p>
             <a:pPr algn="just">
               <a:lnSpc>
-                <a:spcPct val="125000"/>
+                <a:spcPct val="110000"/>
               </a:lnSpc>
               <a:spcBef>
                 <a:spcPts val="0"/>
@@ -5023,7 +5023,7 @@
           <a:p>
             <a:pPr algn="just">
               <a:lnSpc>
-                <a:spcPct val="125000"/>
+                <a:spcPct val="110000"/>
               </a:lnSpc>
               <a:spcBef>
                 <a:spcPts val="0"/>
@@ -5045,7 +5045,7 @@
           <a:p>
             <a:pPr algn="just">
               <a:lnSpc>
-                <a:spcPct val="125000"/>
+                <a:spcPct val="110000"/>
               </a:lnSpc>
               <a:spcBef>
                 <a:spcPts val="0"/>
@@ -5067,7 +5067,7 @@
           <a:p>
             <a:pPr algn="just">
               <a:lnSpc>
-                <a:spcPct val="125000"/>
+                <a:spcPct val="110000"/>
               </a:lnSpc>
               <a:spcBef>
                 <a:spcPts val="0"/>
@@ -5089,7 +5089,7 @@
           <a:p>
             <a:pPr algn="just">
               <a:lnSpc>
-                <a:spcPct val="125000"/>
+                <a:spcPct val="110000"/>
               </a:lnSpc>
               <a:spcBef>
                 <a:spcPts val="0"/>
@@ -5203,7 +5203,7 @@
           <a:p>
             <a:pPr algn="just">
               <a:lnSpc>
-                <a:spcPct val="125000"/>
+                <a:spcPct val="110000"/>
               </a:lnSpc>
               <a:spcBef>
                 <a:spcPts val="0"/>
@@ -5225,7 +5225,7 @@
           <a:p>
             <a:pPr algn="just">
               <a:lnSpc>
-                <a:spcPct val="125000"/>
+                <a:spcPct val="110000"/>
               </a:lnSpc>
               <a:spcBef>
                 <a:spcPts val="0"/>
@@ -5247,7 +5247,7 @@
           <a:p>
             <a:pPr algn="just">
               <a:lnSpc>
-                <a:spcPct val="125000"/>
+                <a:spcPct val="110000"/>
               </a:lnSpc>
               <a:spcBef>
                 <a:spcPts val="0"/>
@@ -5269,7 +5269,7 @@
           <a:p>
             <a:pPr algn="just">
               <a:lnSpc>
-                <a:spcPct val="125000"/>
+                <a:spcPct val="110000"/>
               </a:lnSpc>
               <a:spcBef>
                 <a:spcPts val="0"/>
@@ -5291,7 +5291,7 @@
           <a:p>
             <a:pPr algn="just">
               <a:lnSpc>
-                <a:spcPct val="125000"/>
+                <a:spcPct val="110000"/>
               </a:lnSpc>
               <a:spcBef>
                 <a:spcPts val="0"/>
@@ -5313,7 +5313,7 @@
           <a:p>
             <a:pPr algn="just">
               <a:lnSpc>
-                <a:spcPct val="125000"/>
+                <a:spcPct val="110000"/>
               </a:lnSpc>
               <a:spcBef>
                 <a:spcPts val="0"/>
@@ -5335,7 +5335,7 @@
           <a:p>
             <a:pPr algn="just">
               <a:lnSpc>
-                <a:spcPct val="125000"/>
+                <a:spcPct val="110000"/>
               </a:lnSpc>
               <a:spcBef>
                 <a:spcPts val="0"/>
@@ -5357,7 +5357,7 @@
           <a:p>
             <a:pPr algn="just">
               <a:lnSpc>
-                <a:spcPct val="125000"/>
+                <a:spcPct val="110000"/>
               </a:lnSpc>
               <a:spcBef>
                 <a:spcPts val="0"/>
@@ -5379,7 +5379,7 @@
           <a:p>
             <a:pPr algn="just">
               <a:lnSpc>
-                <a:spcPct val="125000"/>
+                <a:spcPct val="110000"/>
               </a:lnSpc>
               <a:spcBef>
                 <a:spcPts val="0"/>
@@ -5401,7 +5401,7 @@
           <a:p>
             <a:pPr algn="just">
               <a:lnSpc>
-                <a:spcPct val="125000"/>
+                <a:spcPct val="110000"/>
               </a:lnSpc>
               <a:spcBef>
                 <a:spcPts val="0"/>
@@ -5423,7 +5423,7 @@
           <a:p>
             <a:pPr algn="just">
               <a:lnSpc>
-                <a:spcPct val="125000"/>
+                <a:spcPct val="110000"/>
               </a:lnSpc>
               <a:spcBef>
                 <a:spcPts val="0"/>
@@ -5537,7 +5537,7 @@
           <a:p>
             <a:pPr algn="just">
               <a:lnSpc>
-                <a:spcPct val="125000"/>
+                <a:spcPct val="110000"/>
               </a:lnSpc>
               <a:spcBef>
                 <a:spcPts val="0"/>
@@ -5559,7 +5559,7 @@
           <a:p>
             <a:pPr algn="just">
               <a:lnSpc>
-                <a:spcPct val="125000"/>
+                <a:spcPct val="110000"/>
               </a:lnSpc>
               <a:spcBef>
                 <a:spcPts val="0"/>
@@ -5581,7 +5581,7 @@
           <a:p>
             <a:pPr algn="just">
               <a:lnSpc>
-                <a:spcPct val="125000"/>
+                <a:spcPct val="110000"/>
               </a:lnSpc>
               <a:spcBef>
                 <a:spcPts val="0"/>
@@ -5603,7 +5603,7 @@
           <a:p>
             <a:pPr algn="just">
               <a:lnSpc>
-                <a:spcPct val="125000"/>
+                <a:spcPct val="110000"/>
               </a:lnSpc>
               <a:spcBef>
                 <a:spcPts val="0"/>
@@ -5625,7 +5625,7 @@
           <a:p>
             <a:pPr algn="just">
               <a:lnSpc>
-                <a:spcPct val="125000"/>
+                <a:spcPct val="110000"/>
               </a:lnSpc>
               <a:spcBef>
                 <a:spcPts val="0"/>
@@ -5647,7 +5647,7 @@
           <a:p>
             <a:pPr algn="just">
               <a:lnSpc>
-                <a:spcPct val="125000"/>
+                <a:spcPct val="110000"/>
               </a:lnSpc>
               <a:spcBef>
                 <a:spcPts val="0"/>
@@ -5669,7 +5669,7 @@
           <a:p>
             <a:pPr algn="just">
               <a:lnSpc>
-                <a:spcPct val="125000"/>
+                <a:spcPct val="110000"/>
               </a:lnSpc>
               <a:spcBef>
                 <a:spcPts val="0"/>
@@ -5691,7 +5691,7 @@
           <a:p>
             <a:pPr algn="just">
               <a:lnSpc>
-                <a:spcPct val="125000"/>
+                <a:spcPct val="110000"/>
               </a:lnSpc>
               <a:spcBef>
                 <a:spcPts val="0"/>
@@ -5713,7 +5713,7 @@
           <a:p>
             <a:pPr algn="just">
               <a:lnSpc>
-                <a:spcPct val="125000"/>
+                <a:spcPct val="110000"/>
               </a:lnSpc>
               <a:spcBef>
                 <a:spcPts val="0"/>
@@ -5735,7 +5735,7 @@
           <a:p>
             <a:pPr algn="just">
               <a:lnSpc>
-                <a:spcPct val="125000"/>
+                <a:spcPct val="110000"/>
               </a:lnSpc>
               <a:spcBef>
                 <a:spcPts val="0"/>
@@ -5849,7 +5849,7 @@
           <a:p>
             <a:pPr algn="just">
               <a:lnSpc>
-                <a:spcPct val="125000"/>
+                <a:spcPct val="110000"/>
               </a:lnSpc>
               <a:spcBef>
                 <a:spcPts val="0"/>
@@ -5871,7 +5871,7 @@
           <a:p>
             <a:pPr algn="just">
               <a:lnSpc>
-                <a:spcPct val="125000"/>
+                <a:spcPct val="110000"/>
               </a:lnSpc>
               <a:spcBef>
                 <a:spcPts val="0"/>
@@ -5893,7 +5893,7 @@
           <a:p>
             <a:pPr algn="just">
               <a:lnSpc>
-                <a:spcPct val="125000"/>
+                <a:spcPct val="110000"/>
               </a:lnSpc>
               <a:spcBef>
                 <a:spcPts val="0"/>
@@ -5915,7 +5915,7 @@
           <a:p>
             <a:pPr algn="just">
               <a:lnSpc>
-                <a:spcPct val="125000"/>
+                <a:spcPct val="110000"/>
               </a:lnSpc>
               <a:spcBef>
                 <a:spcPts val="0"/>
@@ -5937,7 +5937,7 @@
           <a:p>
             <a:pPr algn="just">
               <a:lnSpc>
-                <a:spcPct val="125000"/>
+                <a:spcPct val="110000"/>
               </a:lnSpc>
               <a:spcBef>
                 <a:spcPts val="0"/>
@@ -5959,7 +5959,7 @@
           <a:p>
             <a:pPr algn="just">
               <a:lnSpc>
-                <a:spcPct val="125000"/>
+                <a:spcPct val="110000"/>
               </a:lnSpc>
               <a:spcBef>
                 <a:spcPts val="0"/>
@@ -5981,7 +5981,7 @@
           <a:p>
             <a:pPr algn="just">
               <a:lnSpc>
-                <a:spcPct val="125000"/>
+                <a:spcPct val="110000"/>
               </a:lnSpc>
               <a:spcBef>
                 <a:spcPts val="0"/>
@@ -6003,7 +6003,7 @@
           <a:p>
             <a:pPr algn="just">
               <a:lnSpc>
-                <a:spcPct val="125000"/>
+                <a:spcPct val="110000"/>
               </a:lnSpc>
               <a:spcBef>
                 <a:spcPts val="0"/>
@@ -6025,7 +6025,7 @@
           <a:p>
             <a:pPr algn="just">
               <a:lnSpc>
-                <a:spcPct val="125000"/>
+                <a:spcPct val="110000"/>
               </a:lnSpc>
               <a:spcBef>
                 <a:spcPts val="0"/>
@@ -6047,7 +6047,7 @@
           <a:p>
             <a:pPr algn="just">
               <a:lnSpc>
-                <a:spcPct val="125000"/>
+                <a:spcPct val="110000"/>
               </a:lnSpc>
               <a:spcBef>
                 <a:spcPts val="0"/>
@@ -6069,7 +6069,7 @@
           <a:p>
             <a:pPr algn="just">
               <a:lnSpc>
-                <a:spcPct val="125000"/>
+                <a:spcPct val="110000"/>
               </a:lnSpc>
               <a:spcBef>
                 <a:spcPts val="0"/>
@@ -6183,7 +6183,7 @@
           <a:p>
             <a:pPr algn="just">
               <a:lnSpc>
-                <a:spcPct val="125000"/>
+                <a:spcPct val="110000"/>
               </a:lnSpc>
               <a:spcBef>
                 <a:spcPts val="0"/>
@@ -6205,7 +6205,7 @@
           <a:p>
             <a:pPr algn="just">
               <a:lnSpc>
-                <a:spcPct val="125000"/>
+                <a:spcPct val="110000"/>
               </a:lnSpc>
               <a:spcBef>
                 <a:spcPts val="0"/>
@@ -6227,7 +6227,7 @@
           <a:p>
             <a:pPr algn="just">
               <a:lnSpc>
-                <a:spcPct val="125000"/>
+                <a:spcPct val="110000"/>
               </a:lnSpc>
               <a:spcBef>
                 <a:spcPts val="0"/>
@@ -6249,7 +6249,7 @@
           <a:p>
             <a:pPr algn="just">
               <a:lnSpc>
-                <a:spcPct val="125000"/>
+                <a:spcPct val="110000"/>
               </a:lnSpc>
               <a:spcBef>
                 <a:spcPts val="0"/>
@@ -6271,7 +6271,7 @@
           <a:p>
             <a:pPr algn="just">
               <a:lnSpc>
-                <a:spcPct val="125000"/>
+                <a:spcPct val="110000"/>
               </a:lnSpc>
               <a:spcBef>
                 <a:spcPts val="0"/>
@@ -6293,7 +6293,7 @@
           <a:p>
             <a:pPr algn="just">
               <a:lnSpc>
-                <a:spcPct val="125000"/>
+                <a:spcPct val="110000"/>
               </a:lnSpc>
               <a:spcBef>
                 <a:spcPts val="0"/>
@@ -6315,7 +6315,7 @@
           <a:p>
             <a:pPr algn="just">
               <a:lnSpc>
-                <a:spcPct val="125000"/>
+                <a:spcPct val="110000"/>
               </a:lnSpc>
               <a:spcBef>
                 <a:spcPts val="0"/>
@@ -6337,7 +6337,7 @@
           <a:p>
             <a:pPr algn="just">
               <a:lnSpc>
-                <a:spcPct val="125000"/>
+                <a:spcPct val="110000"/>
               </a:lnSpc>
               <a:spcBef>
                 <a:spcPts val="0"/>
@@ -6359,7 +6359,7 @@
           <a:p>
             <a:pPr algn="just">
               <a:lnSpc>
-                <a:spcPct val="125000"/>
+                <a:spcPct val="110000"/>
               </a:lnSpc>
               <a:spcBef>
                 <a:spcPts val="0"/>
@@ -6381,7 +6381,7 @@
           <a:p>
             <a:pPr algn="just">
               <a:lnSpc>
-                <a:spcPct val="125000"/>
+                <a:spcPct val="110000"/>
               </a:lnSpc>
               <a:spcBef>
                 <a:spcPts val="0"/>
@@ -6403,7 +6403,7 @@
           <a:p>
             <a:pPr algn="just">
               <a:lnSpc>
-                <a:spcPct val="125000"/>
+                <a:spcPct val="110000"/>
               </a:lnSpc>
               <a:spcBef>
                 <a:spcPts val="0"/>
@@ -6425,7 +6425,7 @@
           <a:p>
             <a:pPr algn="just">
               <a:lnSpc>
-                <a:spcPct val="125000"/>
+                <a:spcPct val="110000"/>
               </a:lnSpc>
               <a:spcBef>
                 <a:spcPts val="0"/>
@@ -6539,7 +6539,7 @@
           <a:p>
             <a:pPr algn="just">
               <a:lnSpc>
-                <a:spcPct val="125000"/>
+                <a:spcPct val="110000"/>
               </a:lnSpc>
               <a:spcBef>
                 <a:spcPts val="0"/>
@@ -6561,7 +6561,7 @@
           <a:p>
             <a:pPr algn="just">
               <a:lnSpc>
-                <a:spcPct val="125000"/>
+                <a:spcPct val="110000"/>
               </a:lnSpc>
               <a:spcBef>
                 <a:spcPts val="0"/>
@@ -6583,7 +6583,7 @@
           <a:p>
             <a:pPr algn="just">
               <a:lnSpc>
-                <a:spcPct val="125000"/>
+                <a:spcPct val="110000"/>
               </a:lnSpc>
               <a:spcBef>
                 <a:spcPts val="0"/>
@@ -6605,7 +6605,7 @@
           <a:p>
             <a:pPr algn="just">
               <a:lnSpc>
-                <a:spcPct val="125000"/>
+                <a:spcPct val="110000"/>
               </a:lnSpc>
               <a:spcBef>
                 <a:spcPts val="0"/>
@@ -6627,7 +6627,7 @@
           <a:p>
             <a:pPr algn="just">
               <a:lnSpc>
-                <a:spcPct val="125000"/>
+                <a:spcPct val="110000"/>
               </a:lnSpc>
               <a:spcBef>
                 <a:spcPts val="0"/>
@@ -6649,7 +6649,7 @@
           <a:p>
             <a:pPr algn="just">
               <a:lnSpc>
-                <a:spcPct val="125000"/>
+                <a:spcPct val="110000"/>
               </a:lnSpc>
               <a:spcBef>
                 <a:spcPts val="0"/>
@@ -6671,7 +6671,7 @@
           <a:p>
             <a:pPr algn="just">
               <a:lnSpc>
-                <a:spcPct val="125000"/>
+                <a:spcPct val="110000"/>
               </a:lnSpc>
               <a:spcBef>
                 <a:spcPts val="0"/>
@@ -6693,7 +6693,7 @@
           <a:p>
             <a:pPr algn="just">
               <a:lnSpc>
-                <a:spcPct val="125000"/>
+                <a:spcPct val="110000"/>
               </a:lnSpc>
               <a:spcBef>
                 <a:spcPts val="0"/>
@@ -6715,7 +6715,7 @@
           <a:p>
             <a:pPr algn="just">
               <a:lnSpc>
-                <a:spcPct val="125000"/>
+                <a:spcPct val="110000"/>
               </a:lnSpc>
               <a:spcBef>
                 <a:spcPts val="0"/>
@@ -6737,7 +6737,7 @@
           <a:p>
             <a:pPr algn="just">
               <a:lnSpc>
-                <a:spcPct val="125000"/>
+                <a:spcPct val="110000"/>
               </a:lnSpc>
               <a:spcBef>
                 <a:spcPts val="0"/>
@@ -6759,7 +6759,7 @@
           <a:p>
             <a:pPr algn="just">
               <a:lnSpc>
-                <a:spcPct val="125000"/>
+                <a:spcPct val="110000"/>
               </a:lnSpc>
               <a:spcBef>
                 <a:spcPts val="0"/>
@@ -6781,7 +6781,7 @@
           <a:p>
             <a:pPr algn="just">
               <a:lnSpc>
-                <a:spcPct val="125000"/>
+                <a:spcPct val="110000"/>
               </a:lnSpc>
               <a:spcBef>
                 <a:spcPts val="0"/>
@@ -6895,7 +6895,7 @@
           <a:p>
             <a:pPr algn="just">
               <a:lnSpc>
-                <a:spcPct val="125000"/>
+                <a:spcPct val="110000"/>
               </a:lnSpc>
               <a:spcBef>
                 <a:spcPts val="0"/>
@@ -6917,7 +6917,7 @@
           <a:p>
             <a:pPr algn="just">
               <a:lnSpc>
-                <a:spcPct val="125000"/>
+                <a:spcPct val="110000"/>
               </a:lnSpc>
               <a:spcBef>
                 <a:spcPts val="0"/>
@@ -6939,7 +6939,7 @@
           <a:p>
             <a:pPr algn="just">
               <a:lnSpc>
-                <a:spcPct val="125000"/>
+                <a:spcPct val="110000"/>
               </a:lnSpc>
               <a:spcBef>
                 <a:spcPts val="0"/>
@@ -6961,7 +6961,7 @@
           <a:p>
             <a:pPr algn="just">
               <a:lnSpc>
-                <a:spcPct val="125000"/>
+                <a:spcPct val="110000"/>
               </a:lnSpc>
               <a:spcBef>
                 <a:spcPts val="0"/>
@@ -6983,7 +6983,7 @@
           <a:p>
             <a:pPr algn="just">
               <a:lnSpc>
-                <a:spcPct val="125000"/>
+                <a:spcPct val="110000"/>
               </a:lnSpc>
               <a:spcBef>
                 <a:spcPts val="0"/>
@@ -7005,7 +7005,7 @@
           <a:p>
             <a:pPr algn="just">
               <a:lnSpc>
-                <a:spcPct val="125000"/>
+                <a:spcPct val="110000"/>
               </a:lnSpc>
               <a:spcBef>
                 <a:spcPts val="0"/>
@@ -7027,7 +7027,7 @@
           <a:p>
             <a:pPr algn="just">
               <a:lnSpc>
-                <a:spcPct val="125000"/>
+                <a:spcPct val="110000"/>
               </a:lnSpc>
               <a:spcBef>
                 <a:spcPts val="0"/>
@@ -7049,7 +7049,7 @@
           <a:p>
             <a:pPr algn="just">
               <a:lnSpc>
-                <a:spcPct val="125000"/>
+                <a:spcPct val="110000"/>
               </a:lnSpc>
               <a:spcBef>
                 <a:spcPts val="0"/>
@@ -7071,7 +7071,7 @@
           <a:p>
             <a:pPr algn="just">
               <a:lnSpc>
-                <a:spcPct val="125000"/>
+                <a:spcPct val="110000"/>
               </a:lnSpc>
               <a:spcBef>
                 <a:spcPts val="0"/>
@@ -7093,7 +7093,7 @@
           <a:p>
             <a:pPr algn="just">
               <a:lnSpc>
-                <a:spcPct val="125000"/>
+                <a:spcPct val="110000"/>
               </a:lnSpc>
               <a:spcBef>
                 <a:spcPts val="0"/>
@@ -7115,7 +7115,7 @@
           <a:p>
             <a:pPr algn="just">
               <a:lnSpc>
-                <a:spcPct val="125000"/>
+                <a:spcPct val="110000"/>
               </a:lnSpc>
               <a:spcBef>
                 <a:spcPts val="0"/>
@@ -7137,7 +7137,7 @@
           <a:p>
             <a:pPr algn="just">
               <a:lnSpc>
-                <a:spcPct val="125000"/>
+                <a:spcPct val="110000"/>
               </a:lnSpc>
               <a:spcBef>
                 <a:spcPts val="0"/>
@@ -7251,7 +7251,7 @@
           <a:p>
             <a:pPr algn="just">
               <a:lnSpc>
-                <a:spcPct val="125000"/>
+                <a:spcPct val="110000"/>
               </a:lnSpc>
               <a:spcBef>
                 <a:spcPts val="0"/>
@@ -7273,7 +7273,7 @@
           <a:p>
             <a:pPr algn="just">
               <a:lnSpc>
-                <a:spcPct val="125000"/>
+                <a:spcPct val="110000"/>
               </a:lnSpc>
               <a:spcBef>
                 <a:spcPts val="0"/>
@@ -7295,7 +7295,7 @@
           <a:p>
             <a:pPr algn="just">
               <a:lnSpc>
-                <a:spcPct val="125000"/>
+                <a:spcPct val="110000"/>
               </a:lnSpc>
               <a:spcBef>
                 <a:spcPts val="0"/>
@@ -7317,7 +7317,7 @@
           <a:p>
             <a:pPr algn="just">
               <a:lnSpc>
-                <a:spcPct val="125000"/>
+                <a:spcPct val="110000"/>
               </a:lnSpc>
               <a:spcBef>
                 <a:spcPts val="0"/>
@@ -7339,7 +7339,7 @@
           <a:p>
             <a:pPr algn="just">
               <a:lnSpc>
-                <a:spcPct val="125000"/>
+                <a:spcPct val="110000"/>
               </a:lnSpc>
               <a:spcBef>
                 <a:spcPts val="0"/>
@@ -7361,7 +7361,7 @@
           <a:p>
             <a:pPr algn="just">
               <a:lnSpc>
-                <a:spcPct val="125000"/>
+                <a:spcPct val="110000"/>
               </a:lnSpc>
               <a:spcBef>
                 <a:spcPts val="0"/>
@@ -7383,7 +7383,7 @@
           <a:p>
             <a:pPr algn="just">
               <a:lnSpc>
-                <a:spcPct val="125000"/>
+                <a:spcPct val="110000"/>
               </a:lnSpc>
               <a:spcBef>
                 <a:spcPts val="0"/>
@@ -7405,7 +7405,7 @@
           <a:p>
             <a:pPr algn="just">
               <a:lnSpc>
-                <a:spcPct val="125000"/>
+                <a:spcPct val="110000"/>
               </a:lnSpc>
               <a:spcBef>
                 <a:spcPts val="0"/>
@@ -7427,7 +7427,7 @@
           <a:p>
             <a:pPr algn="just">
               <a:lnSpc>
-                <a:spcPct val="125000"/>
+                <a:spcPct val="110000"/>
               </a:lnSpc>
               <a:spcBef>
                 <a:spcPts val="0"/>
@@ -7449,7 +7449,7 @@
           <a:p>
             <a:pPr algn="just">
               <a:lnSpc>
-                <a:spcPct val="125000"/>
+                <a:spcPct val="110000"/>
               </a:lnSpc>
               <a:spcBef>
                 <a:spcPts val="0"/>
@@ -7471,7 +7471,7 @@
           <a:p>
             <a:pPr algn="just">
               <a:lnSpc>
-                <a:spcPct val="125000"/>
+                <a:spcPct val="110000"/>
               </a:lnSpc>
               <a:spcBef>
                 <a:spcPts val="0"/>
@@ -7493,7 +7493,7 @@
           <a:p>
             <a:pPr algn="just">
               <a:lnSpc>
-                <a:spcPct val="125000"/>
+                <a:spcPct val="110000"/>
               </a:lnSpc>
               <a:spcBef>
                 <a:spcPts val="0"/>
@@ -7607,7 +7607,7 @@
           <a:p>
             <a:pPr algn="just">
               <a:lnSpc>
-                <a:spcPct val="125000"/>
+                <a:spcPct val="110000"/>
               </a:lnSpc>
               <a:spcBef>
                 <a:spcPts val="0"/>
@@ -7629,7 +7629,7 @@
           <a:p>
             <a:pPr algn="just">
               <a:lnSpc>
-                <a:spcPct val="125000"/>
+                <a:spcPct val="110000"/>
               </a:lnSpc>
               <a:spcBef>
                 <a:spcPts val="0"/>
@@ -7651,7 +7651,7 @@
           <a:p>
             <a:pPr algn="just">
               <a:lnSpc>
-                <a:spcPct val="125000"/>
+                <a:spcPct val="110000"/>
               </a:lnSpc>
               <a:spcBef>
                 <a:spcPts val="0"/>
@@ -7673,7 +7673,7 @@
           <a:p>
             <a:pPr algn="just">
               <a:lnSpc>
-                <a:spcPct val="125000"/>
+                <a:spcPct val="110000"/>
               </a:lnSpc>
               <a:spcBef>
                 <a:spcPts val="0"/>
@@ -7695,7 +7695,7 @@
           <a:p>
             <a:pPr algn="just">
               <a:lnSpc>
-                <a:spcPct val="125000"/>
+                <a:spcPct val="110000"/>
               </a:lnSpc>
               <a:spcBef>
                 <a:spcPts val="0"/>
@@ -7717,7 +7717,7 @@
           <a:p>
             <a:pPr algn="just">
               <a:lnSpc>
-                <a:spcPct val="125000"/>
+                <a:spcPct val="110000"/>
               </a:lnSpc>
               <a:spcBef>
                 <a:spcPts val="0"/>
@@ -7739,7 +7739,7 @@
           <a:p>
             <a:pPr algn="just">
               <a:lnSpc>
-                <a:spcPct val="125000"/>
+                <a:spcPct val="110000"/>
               </a:lnSpc>
               <a:spcBef>
                 <a:spcPts val="0"/>
@@ -7761,7 +7761,7 @@
           <a:p>
             <a:pPr algn="just">
               <a:lnSpc>
-                <a:spcPct val="125000"/>
+                <a:spcPct val="110000"/>
               </a:lnSpc>
               <a:spcBef>
                 <a:spcPts val="0"/>
@@ -7783,7 +7783,7 @@
           <a:p>
             <a:pPr algn="just">
               <a:lnSpc>
-                <a:spcPct val="125000"/>
+                <a:spcPct val="110000"/>
               </a:lnSpc>
               <a:spcBef>
                 <a:spcPts val="0"/>
@@ -7805,7 +7805,7 @@
           <a:p>
             <a:pPr algn="just">
               <a:lnSpc>
-                <a:spcPct val="125000"/>
+                <a:spcPct val="110000"/>
               </a:lnSpc>
               <a:spcBef>
                 <a:spcPts val="0"/>
@@ -7827,7 +7827,7 @@
           <a:p>
             <a:pPr algn="just">
               <a:lnSpc>
-                <a:spcPct val="125000"/>
+                <a:spcPct val="110000"/>
               </a:lnSpc>
               <a:spcBef>
                 <a:spcPts val="0"/>
@@ -7941,7 +7941,7 @@
           <a:p>
             <a:pPr algn="just">
               <a:lnSpc>
-                <a:spcPct val="125000"/>
+                <a:spcPct val="110000"/>
               </a:lnSpc>
               <a:spcBef>
                 <a:spcPts val="0"/>
@@ -7963,7 +7963,7 @@
           <a:p>
             <a:pPr algn="just">
               <a:lnSpc>
-                <a:spcPct val="125000"/>
+                <a:spcPct val="110000"/>
               </a:lnSpc>
               <a:spcBef>
                 <a:spcPts val="0"/>
@@ -7985,7 +7985,7 @@
           <a:p>
             <a:pPr algn="just">
               <a:lnSpc>
-                <a:spcPct val="125000"/>
+                <a:spcPct val="110000"/>
               </a:lnSpc>
               <a:spcBef>
                 <a:spcPts val="0"/>
@@ -8007,7 +8007,7 @@
           <a:p>
             <a:pPr algn="just">
               <a:lnSpc>
-                <a:spcPct val="125000"/>
+                <a:spcPct val="110000"/>
               </a:lnSpc>
               <a:spcBef>
                 <a:spcPts val="0"/>
@@ -8029,7 +8029,7 @@
           <a:p>
             <a:pPr algn="just">
               <a:lnSpc>
-                <a:spcPct val="125000"/>
+                <a:spcPct val="110000"/>
               </a:lnSpc>
               <a:spcBef>
                 <a:spcPts val="0"/>
@@ -8051,7 +8051,7 @@
           <a:p>
             <a:pPr algn="just">
               <a:lnSpc>
-                <a:spcPct val="125000"/>
+                <a:spcPct val="110000"/>
               </a:lnSpc>
               <a:spcBef>
                 <a:spcPts val="0"/>
@@ -8073,7 +8073,7 @@
           <a:p>
             <a:pPr algn="just">
               <a:lnSpc>
-                <a:spcPct val="125000"/>
+                <a:spcPct val="110000"/>
               </a:lnSpc>
               <a:spcBef>
                 <a:spcPts val="0"/>
@@ -8095,7 +8095,7 @@
           <a:p>
             <a:pPr algn="just">
               <a:lnSpc>
-                <a:spcPct val="125000"/>
+                <a:spcPct val="110000"/>
               </a:lnSpc>
               <a:spcBef>
                 <a:spcPts val="0"/>
@@ -8117,7 +8117,7 @@
           <a:p>
             <a:pPr algn="just">
               <a:lnSpc>
-                <a:spcPct val="125000"/>
+                <a:spcPct val="110000"/>
               </a:lnSpc>
               <a:spcBef>
                 <a:spcPts val="0"/>
@@ -8139,7 +8139,7 @@
           <a:p>
             <a:pPr algn="just">
               <a:lnSpc>
-                <a:spcPct val="125000"/>
+                <a:spcPct val="110000"/>
               </a:lnSpc>
               <a:spcBef>
                 <a:spcPts val="0"/>
@@ -8161,7 +8161,7 @@
           <a:p>
             <a:pPr algn="just">
               <a:lnSpc>
-                <a:spcPct val="125000"/>
+                <a:spcPct val="110000"/>
               </a:lnSpc>
               <a:spcBef>
                 <a:spcPts val="0"/>
@@ -8183,7 +8183,7 @@
           <a:p>
             <a:pPr algn="just">
               <a:lnSpc>
-                <a:spcPct val="125000"/>
+                <a:spcPct val="110000"/>
               </a:lnSpc>
               <a:spcBef>
                 <a:spcPts val="0"/>

--- a/ppts_output_v3/04_消费税风险指引.pptx
+++ b/ppts_output_v3/04_消费税风险指引.pptx
@@ -3099,7 +3099,7 @@
     <p:bg>
       <p:bgPr>
         <a:solidFill>
-          <a:srgbClr val="1B3A5C"/>
+          <a:srgbClr val="2D5A3D"/>
         </a:solidFill>
         <a:effectLst/>
       </p:bgPr>
@@ -3113,13 +3113,56 @@
       <p:grpSpPr/>
       <p:sp>
         <p:nvSpPr>
-          <p:cNvPr id="2" name="TextBox 1"/>
+          <p:cNvPr id="2" name="Oval 1"/>
+          <p:cNvSpPr/>
+          <p:nvPr/>
+        </p:nvSpPr>
+        <p:spPr>
+          <a:xfrm>
+            <a:off x="3353104" y="274320"/>
+            <a:ext cx="5486400" cy="5486400"/>
+          </a:xfrm>
+          <a:prstGeom prst="ellipse">
+            <a:avLst/>
+          </a:prstGeom>
+          <a:solidFill>
+            <a:srgbClr val="699679"/>
+          </a:solidFill>
+          <a:ln>
+            <a:noFill/>
+          </a:ln>
+        </p:spPr>
+        <p:style>
+          <a:lnRef idx="1">
+            <a:schemeClr val="accent1"/>
+          </a:lnRef>
+          <a:fillRef idx="3">
+            <a:schemeClr val="accent1"/>
+          </a:fillRef>
+          <a:effectRef idx="2">
+            <a:schemeClr val="accent1"/>
+          </a:effectRef>
+          <a:fontRef idx="minor">
+            <a:schemeClr val="lt1"/>
+          </a:fontRef>
+        </p:style>
+        <p:txBody>
+          <a:bodyPr rtlCol="0" anchor="ctr"/>
+          <a:lstStyle/>
+          <a:p>
+            <a:pPr algn="ctr"/>
+          </a:p>
+        </p:txBody>
+      </p:sp>
+      <p:sp>
+        <p:nvSpPr>
+          <p:cNvPr id="3" name="TextBox 2"/>
           <p:cNvSpPr txBox="1"/>
           <p:nvPr/>
         </p:nvSpPr>
         <p:spPr>
           <a:xfrm>
-            <a:off x="731520" y="1371600"/>
+            <a:off x="731520" y="1645920"/>
             <a:ext cx="10728655" cy="2286000"/>
           </a:xfrm>
           <a:prstGeom prst="rect">
@@ -3148,14 +3191,57 @@
       </p:sp>
       <p:sp>
         <p:nvSpPr>
-          <p:cNvPr id="3" name="TextBox 2"/>
+          <p:cNvPr id="4" name="Rectangle 3"/>
+          <p:cNvSpPr/>
+          <p:nvPr/>
+        </p:nvSpPr>
+        <p:spPr>
+          <a:xfrm>
+            <a:off x="4114800" y="3749039"/>
+            <a:ext cx="3962095" cy="18288"/>
+          </a:xfrm>
+          <a:prstGeom prst="rect">
+            <a:avLst/>
+          </a:prstGeom>
+          <a:solidFill>
+            <a:srgbClr val="FFFFFF"/>
+          </a:solidFill>
+          <a:ln>
+            <a:noFill/>
+          </a:ln>
+        </p:spPr>
+        <p:style>
+          <a:lnRef idx="1">
+            <a:schemeClr val="accent1"/>
+          </a:lnRef>
+          <a:fillRef idx="3">
+            <a:schemeClr val="accent1"/>
+          </a:fillRef>
+          <a:effectRef idx="2">
+            <a:schemeClr val="accent1"/>
+          </a:effectRef>
+          <a:fontRef idx="minor">
+            <a:schemeClr val="lt1"/>
+          </a:fontRef>
+        </p:style>
+        <p:txBody>
+          <a:bodyPr rtlCol="0" anchor="ctr"/>
+          <a:lstStyle/>
+          <a:p>
+            <a:pPr algn="ctr"/>
+          </a:p>
+        </p:txBody>
+      </p:sp>
+      <p:sp>
+        <p:nvSpPr>
+          <p:cNvPr id="5" name="TextBox 4"/>
           <p:cNvSpPr txBox="1"/>
           <p:nvPr/>
         </p:nvSpPr>
         <p:spPr>
           <a:xfrm>
-            <a:off x="731520" y="3840480"/>
-            <a:ext cx="10728655" cy="731520"/>
+            <a:off x="731520" y="3931920"/>
+            <a:ext cx="10728655" cy="548640"/>
           </a:xfrm>
           <a:prstGeom prst="rect">
             <a:avLst/>
@@ -3171,7 +3257,7 @@
             <a:pPr algn="ctr">
               <a:defRPr sz="2200">
                 <a:solidFill>
-                  <a:srgbClr val="AABBCC"/>
+                  <a:srgbClr val="CCCCCC"/>
                 </a:solidFill>
               </a:defRPr>
             </a:pPr>
@@ -3183,7 +3269,7 @@
       </p:sp>
       <p:sp>
         <p:nvSpPr>
-          <p:cNvPr id="4" name="TextBox 3"/>
+          <p:cNvPr id="6" name="TextBox 5"/>
           <p:cNvSpPr txBox="1"/>
           <p:nvPr/>
         </p:nvSpPr>
@@ -3206,7 +3292,7 @@
             <a:pPr algn="ctr">
               <a:defRPr sz="1600">
                 <a:solidFill>
-                  <a:srgbClr val="8899AA"/>
+                  <a:srgbClr val="AABBCC"/>
                 </a:solidFill>
               </a:defRPr>
             </a:pPr>
@@ -3249,7 +3335,7 @@
             <a:avLst/>
           </a:prstGeom>
           <a:solidFill>
-            <a:srgbClr val="1B3A5C"/>
+            <a:srgbClr val="2D5A3D"/>
           </a:solidFill>
           <a:ln>
             <a:noFill/>
@@ -3321,7 +3407,7 @@
             <a:r>
               <a:rPr sz="1600" b="1">
                 <a:solidFill>
-                  <a:srgbClr val="1B3A5C"/>
+                  <a:srgbClr val="2D5A3D"/>
                 </a:solidFill>
                 <a:latin typeface="Microsoft YaHei"/>
               </a:rPr>
@@ -3547,6 +3633,49 @@
               </a:rPr>
               <a:t>企业销售额为销售应税消费品向购买方收取的全部价款和价外费用。价外费用，是指价外向购买方收取的手续费、补贴、基金、集资费、返还利润、奖励费、违约金、滞纳金、延期付款利息、赔偿金、代收款项、代垫款项、包装费、包装物租金、储备费、优质费、运输装卸费以及其他各种性质的价外收费（除税法规定的不包括的项目）。因此企业在计算消费税的计税基数时，应将价外费用并入销售额计提缴纳消费税。</a:t>
             </a:r>
+          </a:p>
+        </p:txBody>
+      </p:sp>
+      <p:sp>
+        <p:nvSpPr>
+          <p:cNvPr id="4" name="Rectangle 3"/>
+          <p:cNvSpPr/>
+          <p:nvPr/>
+        </p:nvSpPr>
+        <p:spPr>
+          <a:xfrm>
+            <a:off x="457200" y="6720840"/>
+            <a:ext cx="11277295" cy="27432"/>
+          </a:xfrm>
+          <a:prstGeom prst="rect">
+            <a:avLst/>
+          </a:prstGeom>
+          <a:solidFill>
+            <a:srgbClr val="2D5A3D"/>
+          </a:solidFill>
+          <a:ln>
+            <a:noFill/>
+          </a:ln>
+        </p:spPr>
+        <p:style>
+          <a:lnRef idx="1">
+            <a:schemeClr val="accent1"/>
+          </a:lnRef>
+          <a:fillRef idx="3">
+            <a:schemeClr val="accent1"/>
+          </a:fillRef>
+          <a:effectRef idx="2">
+            <a:schemeClr val="accent1"/>
+          </a:effectRef>
+          <a:fontRef idx="minor">
+            <a:schemeClr val="lt1"/>
+          </a:fontRef>
+        </p:style>
+        <p:txBody>
+          <a:bodyPr rtlCol="0" anchor="ctr"/>
+          <a:lstStyle/>
+          <a:p>
+            <a:pPr algn="ctr"/>
           </a:p>
         </p:txBody>
       </p:sp>
@@ -3583,7 +3712,7 @@
             <a:avLst/>
           </a:prstGeom>
           <a:solidFill>
-            <a:srgbClr val="1B3A5C"/>
+            <a:srgbClr val="2D5A3D"/>
           </a:solidFill>
           <a:ln>
             <a:noFill/>
@@ -3655,7 +3784,7 @@
             <a:r>
               <a:rPr sz="1600" b="1">
                 <a:solidFill>
-                  <a:srgbClr val="1B3A5C"/>
+                  <a:srgbClr val="2D5A3D"/>
                 </a:solidFill>
                 <a:latin typeface="Microsoft YaHei"/>
               </a:rPr>
@@ -3837,6 +3966,49 @@
               </a:rPr>
               <a:t>应税消费品连同包装物销售的，无论包装物是否单独计价以及在会计上如何核算，均应并入应税消费品的销售额中缴纳消费税。如果包装物不作价随同产品销售，而是收取押金，此项押金则不应并入应税消费品的销售额中征税。但对因逾期未收回的包装物不再退还的或者已收取的时间超过12个月的押金，应并入应税消费品的销售额，按照应税消费品的适用税率缴纳消费税。对既作价随同应税消费品销售，又另外收取押金的包装物的押金，凡纳税人在规定的期限内没有退还的，均应并入应税消费品的销售额，按照应税消费品的适用税率缴纳消费税。</a:t>
             </a:r>
+          </a:p>
+        </p:txBody>
+      </p:sp>
+      <p:sp>
+        <p:nvSpPr>
+          <p:cNvPr id="4" name="Rectangle 3"/>
+          <p:cNvSpPr/>
+          <p:nvPr/>
+        </p:nvSpPr>
+        <p:spPr>
+          <a:xfrm>
+            <a:off x="457200" y="6720840"/>
+            <a:ext cx="11277295" cy="27432"/>
+          </a:xfrm>
+          <a:prstGeom prst="rect">
+            <a:avLst/>
+          </a:prstGeom>
+          <a:solidFill>
+            <a:srgbClr val="2D5A3D"/>
+          </a:solidFill>
+          <a:ln>
+            <a:noFill/>
+          </a:ln>
+        </p:spPr>
+        <p:style>
+          <a:lnRef idx="1">
+            <a:schemeClr val="accent1"/>
+          </a:lnRef>
+          <a:fillRef idx="3">
+            <a:schemeClr val="accent1"/>
+          </a:fillRef>
+          <a:effectRef idx="2">
+            <a:schemeClr val="accent1"/>
+          </a:effectRef>
+          <a:fontRef idx="minor">
+            <a:schemeClr val="lt1"/>
+          </a:fontRef>
+        </p:style>
+        <p:txBody>
+          <a:bodyPr rtlCol="0" anchor="ctr"/>
+          <a:lstStyle/>
+          <a:p>
+            <a:pPr algn="ctr"/>
           </a:p>
         </p:txBody>
       </p:sp>
@@ -3873,7 +4045,7 @@
             <a:avLst/>
           </a:prstGeom>
           <a:solidFill>
-            <a:srgbClr val="1B3A5C"/>
+            <a:srgbClr val="2D5A3D"/>
           </a:solidFill>
           <a:ln>
             <a:noFill/>
@@ -3945,7 +4117,7 @@
             <a:r>
               <a:rPr sz="1600" b="1">
                 <a:solidFill>
-                  <a:srgbClr val="1B3A5C"/>
+                  <a:srgbClr val="2D5A3D"/>
                 </a:solidFill>
                 <a:latin typeface="Microsoft YaHei"/>
               </a:rPr>
@@ -4149,6 +4321,49 @@
               </a:rPr>
               <a:t>企业销售应税消费品如果以外币结算的，其销售额的人民币折合率可以选择销售额发生的当天或者当月1日的人民币汇率中间价。企业应在事先确定采用何种折合率，确定后1年内不得变更。</a:t>
             </a:r>
+          </a:p>
+        </p:txBody>
+      </p:sp>
+      <p:sp>
+        <p:nvSpPr>
+          <p:cNvPr id="4" name="Rectangle 3"/>
+          <p:cNvSpPr/>
+          <p:nvPr/>
+        </p:nvSpPr>
+        <p:spPr>
+          <a:xfrm>
+            <a:off x="457200" y="6720840"/>
+            <a:ext cx="11277295" cy="27432"/>
+          </a:xfrm>
+          <a:prstGeom prst="rect">
+            <a:avLst/>
+          </a:prstGeom>
+          <a:solidFill>
+            <a:srgbClr val="2D5A3D"/>
+          </a:solidFill>
+          <a:ln>
+            <a:noFill/>
+          </a:ln>
+        </p:spPr>
+        <p:style>
+          <a:lnRef idx="1">
+            <a:schemeClr val="accent1"/>
+          </a:lnRef>
+          <a:fillRef idx="3">
+            <a:schemeClr val="accent1"/>
+          </a:fillRef>
+          <a:effectRef idx="2">
+            <a:schemeClr val="accent1"/>
+          </a:effectRef>
+          <a:fontRef idx="minor">
+            <a:schemeClr val="lt1"/>
+          </a:fontRef>
+        </p:style>
+        <p:txBody>
+          <a:bodyPr rtlCol="0" anchor="ctr"/>
+          <a:lstStyle/>
+          <a:p>
+            <a:pPr algn="ctr"/>
           </a:p>
         </p:txBody>
       </p:sp>
@@ -4185,7 +4400,7 @@
             <a:avLst/>
           </a:prstGeom>
           <a:solidFill>
-            <a:srgbClr val="1B3A5C"/>
+            <a:srgbClr val="2D5A3D"/>
           </a:solidFill>
           <a:ln>
             <a:noFill/>
@@ -4257,7 +4472,7 @@
             <a:r>
               <a:rPr sz="1600" b="1">
                 <a:solidFill>
-                  <a:srgbClr val="1B3A5C"/>
+                  <a:srgbClr val="2D5A3D"/>
                 </a:solidFill>
                 <a:latin typeface="Microsoft YaHei"/>
               </a:rPr>
@@ -4439,6 +4654,49 @@
               </a:rPr>
               <a:t>企业应自查有无委托加工业务，委托方将收回的应税消费品，以不高于受托方的计税价格出售的，为直接出售，不再缴纳消费税；委托方以高于受托方的计税价格出售的，不属于直接出售，需按照规定申报缴纳消费税，在计税时准予扣除受托方已代收代缴的消费税。</a:t>
             </a:r>
+          </a:p>
+        </p:txBody>
+      </p:sp>
+      <p:sp>
+        <p:nvSpPr>
+          <p:cNvPr id="4" name="Rectangle 3"/>
+          <p:cNvSpPr/>
+          <p:nvPr/>
+        </p:nvSpPr>
+        <p:spPr>
+          <a:xfrm>
+            <a:off x="457200" y="6720840"/>
+            <a:ext cx="11277295" cy="27432"/>
+          </a:xfrm>
+          <a:prstGeom prst="rect">
+            <a:avLst/>
+          </a:prstGeom>
+          <a:solidFill>
+            <a:srgbClr val="2D5A3D"/>
+          </a:solidFill>
+          <a:ln>
+            <a:noFill/>
+          </a:ln>
+        </p:spPr>
+        <p:style>
+          <a:lnRef idx="1">
+            <a:schemeClr val="accent1"/>
+          </a:lnRef>
+          <a:fillRef idx="3">
+            <a:schemeClr val="accent1"/>
+          </a:fillRef>
+          <a:effectRef idx="2">
+            <a:schemeClr val="accent1"/>
+          </a:effectRef>
+          <a:fontRef idx="minor">
+            <a:schemeClr val="lt1"/>
+          </a:fontRef>
+        </p:style>
+        <p:txBody>
+          <a:bodyPr rtlCol="0" anchor="ctr"/>
+          <a:lstStyle/>
+          <a:p>
+            <a:pPr algn="ctr"/>
           </a:p>
         </p:txBody>
       </p:sp>
@@ -4475,7 +4733,7 @@
             <a:avLst/>
           </a:prstGeom>
           <a:solidFill>
-            <a:srgbClr val="1B3A5C"/>
+            <a:srgbClr val="2D5A3D"/>
           </a:solidFill>
           <a:ln>
             <a:noFill/>
@@ -4547,7 +4805,7 @@
             <a:r>
               <a:rPr sz="1600" b="1">
                 <a:solidFill>
-                  <a:srgbClr val="1B3A5C"/>
+                  <a:srgbClr val="2D5A3D"/>
                 </a:solidFill>
                 <a:latin typeface="Microsoft YaHei"/>
               </a:rPr>
@@ -4751,6 +5009,49 @@
               </a:rPr>
               <a:t>企业应核查委托加工业务合同，如果合同约定主材由受托方提供，则应在合同里明示消费税由受托方缴纳。按规定，委托方提供原材料，受托方提供辅料和加工劳务，由委托方缴纳消费税，受托方代收代缴，计税依据是受托方的同类产品售价或组成计税价格。受托方提供原材料并加工，相当于受托方销售自制应税消费品，由受托方作为纳税人缴纳消费税，计税依据为产品的售价。</a:t>
             </a:r>
+          </a:p>
+        </p:txBody>
+      </p:sp>
+      <p:sp>
+        <p:nvSpPr>
+          <p:cNvPr id="4" name="Rectangle 3"/>
+          <p:cNvSpPr/>
+          <p:nvPr/>
+        </p:nvSpPr>
+        <p:spPr>
+          <a:xfrm>
+            <a:off x="457200" y="6720840"/>
+            <a:ext cx="11277295" cy="27432"/>
+          </a:xfrm>
+          <a:prstGeom prst="rect">
+            <a:avLst/>
+          </a:prstGeom>
+          <a:solidFill>
+            <a:srgbClr val="2D5A3D"/>
+          </a:solidFill>
+          <a:ln>
+            <a:noFill/>
+          </a:ln>
+        </p:spPr>
+        <p:style>
+          <a:lnRef idx="1">
+            <a:schemeClr val="accent1"/>
+          </a:lnRef>
+          <a:fillRef idx="3">
+            <a:schemeClr val="accent1"/>
+          </a:fillRef>
+          <a:effectRef idx="2">
+            <a:schemeClr val="accent1"/>
+          </a:effectRef>
+          <a:fontRef idx="minor">
+            <a:schemeClr val="lt1"/>
+          </a:fontRef>
+        </p:style>
+        <p:txBody>
+          <a:bodyPr rtlCol="0" anchor="ctr"/>
+          <a:lstStyle/>
+          <a:p>
+            <a:pPr algn="ctr"/>
           </a:p>
         </p:txBody>
       </p:sp>
@@ -4787,7 +5088,7 @@
             <a:avLst/>
           </a:prstGeom>
           <a:solidFill>
-            <a:srgbClr val="1B3A5C"/>
+            <a:srgbClr val="2D5A3D"/>
           </a:solidFill>
           <a:ln>
             <a:noFill/>
@@ -4859,7 +5160,7 @@
             <a:r>
               <a:rPr sz="1600" b="1">
                 <a:solidFill>
-                  <a:srgbClr val="1B3A5C"/>
+                  <a:srgbClr val="2D5A3D"/>
                 </a:solidFill>
                 <a:latin typeface="Microsoft YaHei"/>
               </a:rPr>
@@ -5107,6 +5408,49 @@
               </a:rPr>
               <a:t>受托企业自查委托加工合同及“委托加工材料”“应交税费”科目明细账，结合纳税申报情况，确认是否存在受托加工应税消费品未代收代缴消费税的情况。</a:t>
             </a:r>
+          </a:p>
+        </p:txBody>
+      </p:sp>
+      <p:sp>
+        <p:nvSpPr>
+          <p:cNvPr id="4" name="Rectangle 3"/>
+          <p:cNvSpPr/>
+          <p:nvPr/>
+        </p:nvSpPr>
+        <p:spPr>
+          <a:xfrm>
+            <a:off x="457200" y="6720840"/>
+            <a:ext cx="11277295" cy="27432"/>
+          </a:xfrm>
+          <a:prstGeom prst="rect">
+            <a:avLst/>
+          </a:prstGeom>
+          <a:solidFill>
+            <a:srgbClr val="2D5A3D"/>
+          </a:solidFill>
+          <a:ln>
+            <a:noFill/>
+          </a:ln>
+        </p:spPr>
+        <p:style>
+          <a:lnRef idx="1">
+            <a:schemeClr val="accent1"/>
+          </a:lnRef>
+          <a:fillRef idx="3">
+            <a:schemeClr val="accent1"/>
+          </a:fillRef>
+          <a:effectRef idx="2">
+            <a:schemeClr val="accent1"/>
+          </a:effectRef>
+          <a:fontRef idx="minor">
+            <a:schemeClr val="lt1"/>
+          </a:fontRef>
+        </p:style>
+        <p:txBody>
+          <a:bodyPr rtlCol="0" anchor="ctr"/>
+          <a:lstStyle/>
+          <a:p>
+            <a:pPr algn="ctr"/>
           </a:p>
         </p:txBody>
       </p:sp>
@@ -5143,7 +5487,7 @@
             <a:avLst/>
           </a:prstGeom>
           <a:solidFill>
-            <a:srgbClr val="1B3A5C"/>
+            <a:srgbClr val="2D5A3D"/>
           </a:solidFill>
           <a:ln>
             <a:noFill/>
@@ -5215,7 +5559,7 @@
             <a:r>
               <a:rPr sz="1600" b="1">
                 <a:solidFill>
-                  <a:srgbClr val="1B3A5C"/>
+                  <a:srgbClr val="2D5A3D"/>
                 </a:solidFill>
                 <a:latin typeface="Microsoft YaHei"/>
               </a:rPr>
@@ -5441,6 +5785,49 @@
               </a:rPr>
               <a:t>同时在生产白酒和其他酒的企业可查看生产产品品类及销售情况，结合消费税纳税申报情况，确认各品类酒已按规定税率缴纳消费税。</a:t>
             </a:r>
+          </a:p>
+        </p:txBody>
+      </p:sp>
+      <p:sp>
+        <p:nvSpPr>
+          <p:cNvPr id="4" name="Rectangle 3"/>
+          <p:cNvSpPr/>
+          <p:nvPr/>
+        </p:nvSpPr>
+        <p:spPr>
+          <a:xfrm>
+            <a:off x="457200" y="6720840"/>
+            <a:ext cx="11277295" cy="27432"/>
+          </a:xfrm>
+          <a:prstGeom prst="rect">
+            <a:avLst/>
+          </a:prstGeom>
+          <a:solidFill>
+            <a:srgbClr val="2D5A3D"/>
+          </a:solidFill>
+          <a:ln>
+            <a:noFill/>
+          </a:ln>
+        </p:spPr>
+        <p:style>
+          <a:lnRef idx="1">
+            <a:schemeClr val="accent1"/>
+          </a:lnRef>
+          <a:fillRef idx="3">
+            <a:schemeClr val="accent1"/>
+          </a:fillRef>
+          <a:effectRef idx="2">
+            <a:schemeClr val="accent1"/>
+          </a:effectRef>
+          <a:fontRef idx="minor">
+            <a:schemeClr val="lt1"/>
+          </a:fontRef>
+        </p:style>
+        <p:txBody>
+          <a:bodyPr rtlCol="0" anchor="ctr"/>
+          <a:lstStyle/>
+          <a:p>
+            <a:pPr algn="ctr"/>
           </a:p>
         </p:txBody>
       </p:sp>
@@ -5477,7 +5864,7 @@
             <a:avLst/>
           </a:prstGeom>
           <a:solidFill>
-            <a:srgbClr val="1B3A5C"/>
+            <a:srgbClr val="2D5A3D"/>
           </a:solidFill>
           <a:ln>
             <a:noFill/>
@@ -5549,7 +5936,7 @@
             <a:r>
               <a:rPr sz="1600" b="1">
                 <a:solidFill>
-                  <a:srgbClr val="1B3A5C"/>
+                  <a:srgbClr val="2D5A3D"/>
                 </a:solidFill>
                 <a:latin typeface="Microsoft YaHei"/>
               </a:rPr>
@@ -5753,6 +6140,49 @@
               </a:rPr>
               <a:t>企业兼营不同税率的应税消费品，应当分别核算不同税率应税消费品的销售额、销售数量；未分别核算销售额、销售数量，或者将不同税率的应税消费品组成成套消费品销售的，从高适用税率。</a:t>
             </a:r>
+          </a:p>
+        </p:txBody>
+      </p:sp>
+      <p:sp>
+        <p:nvSpPr>
+          <p:cNvPr id="4" name="Rectangle 3"/>
+          <p:cNvSpPr/>
+          <p:nvPr/>
+        </p:nvSpPr>
+        <p:spPr>
+          <a:xfrm>
+            <a:off x="457200" y="6720840"/>
+            <a:ext cx="11277295" cy="27432"/>
+          </a:xfrm>
+          <a:prstGeom prst="rect">
+            <a:avLst/>
+          </a:prstGeom>
+          <a:solidFill>
+            <a:srgbClr val="2D5A3D"/>
+          </a:solidFill>
+          <a:ln>
+            <a:noFill/>
+          </a:ln>
+        </p:spPr>
+        <p:style>
+          <a:lnRef idx="1">
+            <a:schemeClr val="accent1"/>
+          </a:lnRef>
+          <a:fillRef idx="3">
+            <a:schemeClr val="accent1"/>
+          </a:fillRef>
+          <a:effectRef idx="2">
+            <a:schemeClr val="accent1"/>
+          </a:effectRef>
+          <a:fontRef idx="minor">
+            <a:schemeClr val="lt1"/>
+          </a:fontRef>
+        </p:style>
+        <p:txBody>
+          <a:bodyPr rtlCol="0" anchor="ctr"/>
+          <a:lstStyle/>
+          <a:p>
+            <a:pPr algn="ctr"/>
           </a:p>
         </p:txBody>
       </p:sp>
@@ -5789,7 +6219,7 @@
             <a:avLst/>
           </a:prstGeom>
           <a:solidFill>
-            <a:srgbClr val="1B3A5C"/>
+            <a:srgbClr val="2D5A3D"/>
           </a:solidFill>
           <a:ln>
             <a:noFill/>
@@ -5861,7 +6291,7 @@
             <a:r>
               <a:rPr sz="1600" b="1">
                 <a:solidFill>
-                  <a:srgbClr val="1B3A5C"/>
+                  <a:srgbClr val="2D5A3D"/>
                 </a:solidFill>
                 <a:latin typeface="Microsoft YaHei"/>
               </a:rPr>
@@ -6087,6 +6517,49 @@
               </a:rPr>
               <a:t>企业销售应税消费品采取预收货款结算方式的，为发出应税消费品的当天，企业应及时按纳税义务发生时间确认收入并计提消费税。</a:t>
             </a:r>
+          </a:p>
+        </p:txBody>
+      </p:sp>
+      <p:sp>
+        <p:nvSpPr>
+          <p:cNvPr id="4" name="Rectangle 3"/>
+          <p:cNvSpPr/>
+          <p:nvPr/>
+        </p:nvSpPr>
+        <p:spPr>
+          <a:xfrm>
+            <a:off x="457200" y="6720840"/>
+            <a:ext cx="11277295" cy="27432"/>
+          </a:xfrm>
+          <a:prstGeom prst="rect">
+            <a:avLst/>
+          </a:prstGeom>
+          <a:solidFill>
+            <a:srgbClr val="2D5A3D"/>
+          </a:solidFill>
+          <a:ln>
+            <a:noFill/>
+          </a:ln>
+        </p:spPr>
+        <p:style>
+          <a:lnRef idx="1">
+            <a:schemeClr val="accent1"/>
+          </a:lnRef>
+          <a:fillRef idx="3">
+            <a:schemeClr val="accent1"/>
+          </a:fillRef>
+          <a:effectRef idx="2">
+            <a:schemeClr val="accent1"/>
+          </a:effectRef>
+          <a:fontRef idx="minor">
+            <a:schemeClr val="lt1"/>
+          </a:fontRef>
+        </p:style>
+        <p:txBody>
+          <a:bodyPr rtlCol="0" anchor="ctr"/>
+          <a:lstStyle/>
+          <a:p>
+            <a:pPr algn="ctr"/>
           </a:p>
         </p:txBody>
       </p:sp>
@@ -6123,7 +6596,7 @@
             <a:avLst/>
           </a:prstGeom>
           <a:solidFill>
-            <a:srgbClr val="1B3A5C"/>
+            <a:srgbClr val="2D5A3D"/>
           </a:solidFill>
           <a:ln>
             <a:noFill/>
@@ -6195,7 +6668,7 @@
             <a:r>
               <a:rPr sz="1600" b="1">
                 <a:solidFill>
-                  <a:srgbClr val="1B3A5C"/>
+                  <a:srgbClr val="2D5A3D"/>
                 </a:solidFill>
                 <a:latin typeface="Microsoft YaHei"/>
               </a:rPr>
@@ -6443,6 +6916,49 @@
               </a:rPr>
               <a:t>企业应自查：是否有自产的应税消费品用于赠送或赞助的行为，核查“应交税金-消费税”科目及产成品科目贷方，直接对应管理费用、销售费用、营业外支出等科目，并结合产品移送情况，核实是否在消费税申报时视同销售，按同类产品的售价计提消费税。</a:t>
             </a:r>
+          </a:p>
+        </p:txBody>
+      </p:sp>
+      <p:sp>
+        <p:nvSpPr>
+          <p:cNvPr id="4" name="Rectangle 3"/>
+          <p:cNvSpPr/>
+          <p:nvPr/>
+        </p:nvSpPr>
+        <p:spPr>
+          <a:xfrm>
+            <a:off x="457200" y="6720840"/>
+            <a:ext cx="11277295" cy="27432"/>
+          </a:xfrm>
+          <a:prstGeom prst="rect">
+            <a:avLst/>
+          </a:prstGeom>
+          <a:solidFill>
+            <a:srgbClr val="2D5A3D"/>
+          </a:solidFill>
+          <a:ln>
+            <a:noFill/>
+          </a:ln>
+        </p:spPr>
+        <p:style>
+          <a:lnRef idx="1">
+            <a:schemeClr val="accent1"/>
+          </a:lnRef>
+          <a:fillRef idx="3">
+            <a:schemeClr val="accent1"/>
+          </a:fillRef>
+          <a:effectRef idx="2">
+            <a:schemeClr val="accent1"/>
+          </a:effectRef>
+          <a:fontRef idx="minor">
+            <a:schemeClr val="lt1"/>
+          </a:fontRef>
+        </p:style>
+        <p:txBody>
+          <a:bodyPr rtlCol="0" anchor="ctr"/>
+          <a:lstStyle/>
+          <a:p>
+            <a:pPr algn="ctr"/>
           </a:p>
         </p:txBody>
       </p:sp>
@@ -6479,7 +6995,7 @@
             <a:avLst/>
           </a:prstGeom>
           <a:solidFill>
-            <a:srgbClr val="1B3A5C"/>
+            <a:srgbClr val="2D5A3D"/>
           </a:solidFill>
           <a:ln>
             <a:noFill/>
@@ -6551,7 +7067,7 @@
             <a:r>
               <a:rPr sz="1600" b="1">
                 <a:solidFill>
-                  <a:srgbClr val="1B3A5C"/>
+                  <a:srgbClr val="2D5A3D"/>
                 </a:solidFill>
                 <a:latin typeface="Microsoft YaHei"/>
               </a:rPr>
@@ -6799,6 +7315,49 @@
               </a:rPr>
               <a:t>企业应自查是否有自产的应税消费品用于职工奖励或福利的行为，核查“应交税金-消费税”科目及产成品科目贷方，直接对应管理费用、销售费用、应付职工薪酬-福利费等科目，并结合产品移送情况，核实是否在消费税申报时视同销售，按同类产品的售价计提消费税。</a:t>
             </a:r>
+          </a:p>
+        </p:txBody>
+      </p:sp>
+      <p:sp>
+        <p:nvSpPr>
+          <p:cNvPr id="4" name="Rectangle 3"/>
+          <p:cNvSpPr/>
+          <p:nvPr/>
+        </p:nvSpPr>
+        <p:spPr>
+          <a:xfrm>
+            <a:off x="457200" y="6720840"/>
+            <a:ext cx="11277295" cy="27432"/>
+          </a:xfrm>
+          <a:prstGeom prst="rect">
+            <a:avLst/>
+          </a:prstGeom>
+          <a:solidFill>
+            <a:srgbClr val="2D5A3D"/>
+          </a:solidFill>
+          <a:ln>
+            <a:noFill/>
+          </a:ln>
+        </p:spPr>
+        <p:style>
+          <a:lnRef idx="1">
+            <a:schemeClr val="accent1"/>
+          </a:lnRef>
+          <a:fillRef idx="3">
+            <a:schemeClr val="accent1"/>
+          </a:fillRef>
+          <a:effectRef idx="2">
+            <a:schemeClr val="accent1"/>
+          </a:effectRef>
+          <a:fontRef idx="minor">
+            <a:schemeClr val="lt1"/>
+          </a:fontRef>
+        </p:style>
+        <p:txBody>
+          <a:bodyPr rtlCol="0" anchor="ctr"/>
+          <a:lstStyle/>
+          <a:p>
+            <a:pPr algn="ctr"/>
           </a:p>
         </p:txBody>
       </p:sp>
@@ -6835,7 +7394,7 @@
             <a:avLst/>
           </a:prstGeom>
           <a:solidFill>
-            <a:srgbClr val="1B3A5C"/>
+            <a:srgbClr val="2D5A3D"/>
           </a:solidFill>
           <a:ln>
             <a:noFill/>
@@ -6907,7 +7466,7 @@
             <a:r>
               <a:rPr sz="1600" b="1">
                 <a:solidFill>
-                  <a:srgbClr val="1B3A5C"/>
+                  <a:srgbClr val="2D5A3D"/>
                 </a:solidFill>
                 <a:latin typeface="Microsoft YaHei"/>
               </a:rPr>
@@ -7155,6 +7714,49 @@
               </a:rPr>
               <a:t>企业应自查是否有自产的应税消费品用于广告或业务宣传样品的行为，核查“应交税金-消费税”科目及产成品科目贷方，直接对应管理费用、销售费用等科目，并结合产品移送情况，核实是否在消费税申报时视同销售，按同类产品的售价计提消费税。</a:t>
             </a:r>
+          </a:p>
+        </p:txBody>
+      </p:sp>
+      <p:sp>
+        <p:nvSpPr>
+          <p:cNvPr id="4" name="Rectangle 3"/>
+          <p:cNvSpPr/>
+          <p:nvPr/>
+        </p:nvSpPr>
+        <p:spPr>
+          <a:xfrm>
+            <a:off x="457200" y="6720840"/>
+            <a:ext cx="11277295" cy="27432"/>
+          </a:xfrm>
+          <a:prstGeom prst="rect">
+            <a:avLst/>
+          </a:prstGeom>
+          <a:solidFill>
+            <a:srgbClr val="2D5A3D"/>
+          </a:solidFill>
+          <a:ln>
+            <a:noFill/>
+          </a:ln>
+        </p:spPr>
+        <p:style>
+          <a:lnRef idx="1">
+            <a:schemeClr val="accent1"/>
+          </a:lnRef>
+          <a:fillRef idx="3">
+            <a:schemeClr val="accent1"/>
+          </a:fillRef>
+          <a:effectRef idx="2">
+            <a:schemeClr val="accent1"/>
+          </a:effectRef>
+          <a:fontRef idx="minor">
+            <a:schemeClr val="lt1"/>
+          </a:fontRef>
+        </p:style>
+        <p:txBody>
+          <a:bodyPr rtlCol="0" anchor="ctr"/>
+          <a:lstStyle/>
+          <a:p>
+            <a:pPr algn="ctr"/>
           </a:p>
         </p:txBody>
       </p:sp>
@@ -7191,7 +7793,7 @@
             <a:avLst/>
           </a:prstGeom>
           <a:solidFill>
-            <a:srgbClr val="1B3A5C"/>
+            <a:srgbClr val="2D5A3D"/>
           </a:solidFill>
           <a:ln>
             <a:noFill/>
@@ -7263,7 +7865,7 @@
             <a:r>
               <a:rPr sz="1600" b="1">
                 <a:solidFill>
-                  <a:srgbClr val="1B3A5C"/>
+                  <a:srgbClr val="2D5A3D"/>
                 </a:solidFill>
                 <a:latin typeface="Microsoft YaHei"/>
               </a:rPr>
@@ -7511,6 +8113,49 @@
               </a:rPr>
               <a:t>企业应自查是否有自产的应税消费品用于投资入股的行为，核查“应交税金-消费税”科目及产成品科目贷方，直接对应长期股权投资科目，并结合产品移送情况，核实是否在消费税申报时视同销售，按同类产品的售价计提消费税。</a:t>
             </a:r>
+          </a:p>
+        </p:txBody>
+      </p:sp>
+      <p:sp>
+        <p:nvSpPr>
+          <p:cNvPr id="4" name="Rectangle 3"/>
+          <p:cNvSpPr/>
+          <p:nvPr/>
+        </p:nvSpPr>
+        <p:spPr>
+          <a:xfrm>
+            <a:off x="457200" y="6720840"/>
+            <a:ext cx="11277295" cy="27432"/>
+          </a:xfrm>
+          <a:prstGeom prst="rect">
+            <a:avLst/>
+          </a:prstGeom>
+          <a:solidFill>
+            <a:srgbClr val="2D5A3D"/>
+          </a:solidFill>
+          <a:ln>
+            <a:noFill/>
+          </a:ln>
+        </p:spPr>
+        <p:style>
+          <a:lnRef idx="1">
+            <a:schemeClr val="accent1"/>
+          </a:lnRef>
+          <a:fillRef idx="3">
+            <a:schemeClr val="accent1"/>
+          </a:fillRef>
+          <a:effectRef idx="2">
+            <a:schemeClr val="accent1"/>
+          </a:effectRef>
+          <a:fontRef idx="minor">
+            <a:schemeClr val="lt1"/>
+          </a:fontRef>
+        </p:style>
+        <p:txBody>
+          <a:bodyPr rtlCol="0" anchor="ctr"/>
+          <a:lstStyle/>
+          <a:p>
+            <a:pPr algn="ctr"/>
           </a:p>
         </p:txBody>
       </p:sp>
@@ -7547,7 +8192,7 @@
             <a:avLst/>
           </a:prstGeom>
           <a:solidFill>
-            <a:srgbClr val="1B3A5C"/>
+            <a:srgbClr val="2D5A3D"/>
           </a:solidFill>
           <a:ln>
             <a:noFill/>
@@ -7619,7 +8264,7 @@
             <a:r>
               <a:rPr sz="1600" b="1">
                 <a:solidFill>
-                  <a:srgbClr val="1B3A5C"/>
+                  <a:srgbClr val="2D5A3D"/>
                 </a:solidFill>
                 <a:latin typeface="Microsoft YaHei"/>
               </a:rPr>
@@ -7845,6 +8490,49 @@
               </a:rPr>
               <a:t>企业应自查是否有自产的应税消费品用于抵债的行为，核查“应交税金-消费税”科目及产成品科目贷方，直接对应“应付账款”“其他应付款”“应付股利”“应付利息”等科目，并结合产品移送情况，核实是否在消费税申报时视同销售，按同类产品的售价计提消费税。</a:t>
             </a:r>
+          </a:p>
+        </p:txBody>
+      </p:sp>
+      <p:sp>
+        <p:nvSpPr>
+          <p:cNvPr id="4" name="Rectangle 3"/>
+          <p:cNvSpPr/>
+          <p:nvPr/>
+        </p:nvSpPr>
+        <p:spPr>
+          <a:xfrm>
+            <a:off x="457200" y="6720840"/>
+            <a:ext cx="11277295" cy="27432"/>
+          </a:xfrm>
+          <a:prstGeom prst="rect">
+            <a:avLst/>
+          </a:prstGeom>
+          <a:solidFill>
+            <a:srgbClr val="2D5A3D"/>
+          </a:solidFill>
+          <a:ln>
+            <a:noFill/>
+          </a:ln>
+        </p:spPr>
+        <p:style>
+          <a:lnRef idx="1">
+            <a:schemeClr val="accent1"/>
+          </a:lnRef>
+          <a:fillRef idx="3">
+            <a:schemeClr val="accent1"/>
+          </a:fillRef>
+          <a:effectRef idx="2">
+            <a:schemeClr val="accent1"/>
+          </a:effectRef>
+          <a:fontRef idx="minor">
+            <a:schemeClr val="lt1"/>
+          </a:fontRef>
+        </p:style>
+        <p:txBody>
+          <a:bodyPr rtlCol="0" anchor="ctr"/>
+          <a:lstStyle/>
+          <a:p>
+            <a:pPr algn="ctr"/>
           </a:p>
         </p:txBody>
       </p:sp>
@@ -7881,7 +8569,7 @@
             <a:avLst/>
           </a:prstGeom>
           <a:solidFill>
-            <a:srgbClr val="1B3A5C"/>
+            <a:srgbClr val="2D5A3D"/>
           </a:solidFill>
           <a:ln>
             <a:noFill/>
@@ -7953,7 +8641,7 @@
             <a:r>
               <a:rPr sz="1600" b="1">
                 <a:solidFill>
-                  <a:srgbClr val="1B3A5C"/>
+                  <a:srgbClr val="2D5A3D"/>
                 </a:solidFill>
                 <a:latin typeface="Microsoft YaHei"/>
               </a:rPr>
@@ -8201,6 +8889,49 @@
               </a:rPr>
               <a:t>企业应自查是否有自产的应税消费品用于换取生产资料的行为，核查“应交税金-消费税”科目及产成品科目贷方，直接对应“原材料”“低值易耗品”“周转材料”“库存商品”等科目，并结合产品移送情况，核实是否在消费税申报时视同销售，按同类产品的售价计提消费税。</a:t>
             </a:r>
+          </a:p>
+        </p:txBody>
+      </p:sp>
+      <p:sp>
+        <p:nvSpPr>
+          <p:cNvPr id="4" name="Rectangle 3"/>
+          <p:cNvSpPr/>
+          <p:nvPr/>
+        </p:nvSpPr>
+        <p:spPr>
+          <a:xfrm>
+            <a:off x="457200" y="6720840"/>
+            <a:ext cx="11277295" cy="27432"/>
+          </a:xfrm>
+          <a:prstGeom prst="rect">
+            <a:avLst/>
+          </a:prstGeom>
+          <a:solidFill>
+            <a:srgbClr val="2D5A3D"/>
+          </a:solidFill>
+          <a:ln>
+            <a:noFill/>
+          </a:ln>
+        </p:spPr>
+        <p:style>
+          <a:lnRef idx="1">
+            <a:schemeClr val="accent1"/>
+          </a:lnRef>
+          <a:fillRef idx="3">
+            <a:schemeClr val="accent1"/>
+          </a:fillRef>
+          <a:effectRef idx="2">
+            <a:schemeClr val="accent1"/>
+          </a:effectRef>
+          <a:fontRef idx="minor">
+            <a:schemeClr val="lt1"/>
+          </a:fontRef>
+        </p:style>
+        <p:txBody>
+          <a:bodyPr rtlCol="0" anchor="ctr"/>
+          <a:lstStyle/>
+          <a:p>
+            <a:pPr algn="ctr"/>
           </a:p>
         </p:txBody>
       </p:sp>

--- a/ppts_output_v3/04_消费税风险指引.pptx
+++ b/ppts_output_v3/04_消费税风险指引.pptx
@@ -3181,6 +3181,7 @@
                 <a:solidFill>
                   <a:srgbClr val="FFFFFF"/>
                 </a:solidFill>
+                <a:latin typeface="Microsoft YaHei"/>
               </a:defRPr>
             </a:pPr>
             <a:r>
@@ -3259,6 +3260,7 @@
                 <a:solidFill>
                   <a:srgbClr val="CCCCCC"/>
                 </a:solidFill>
+                <a:latin typeface="Microsoft YaHei"/>
               </a:defRPr>
             </a:pPr>
             <a:r>
@@ -3294,6 +3296,7 @@
                 <a:solidFill>
                   <a:srgbClr val="AABBCC"/>
                 </a:solidFill>
+                <a:latin typeface="Microsoft YaHei"/>
               </a:defRPr>
             </a:pPr>
             <a:r>
@@ -3365,6 +3368,7 @@
                 <a:solidFill>
                   <a:srgbClr val="FFFFFF"/>
                 </a:solidFill>
+                <a:latin typeface="Microsoft YaHei"/>
               </a:rPr>
               <a:t>消费税风险指引  |  风险点 9</a:t>
             </a:r>
@@ -3742,6 +3746,7 @@
                 <a:solidFill>
                   <a:srgbClr val="FFFFFF"/>
                 </a:solidFill>
+                <a:latin typeface="Microsoft YaHei"/>
               </a:rPr>
               <a:t>消费税风险指引  |  风险点 10</a:t>
             </a:r>
@@ -4075,6 +4080,7 @@
                 <a:solidFill>
                   <a:srgbClr val="FFFFFF"/>
                 </a:solidFill>
+                <a:latin typeface="Microsoft YaHei"/>
               </a:rPr>
               <a:t>消费税风险指引  |  风险点 11</a:t>
             </a:r>
@@ -4430,6 +4436,7 @@
                 <a:solidFill>
                   <a:srgbClr val="FFFFFF"/>
                 </a:solidFill>
+                <a:latin typeface="Microsoft YaHei"/>
               </a:rPr>
               <a:t>消费税风险指引  |  风险点 12</a:t>
             </a:r>
@@ -4763,6 +4770,7 @@
                 <a:solidFill>
                   <a:srgbClr val="FFFFFF"/>
                 </a:solidFill>
+                <a:latin typeface="Microsoft YaHei"/>
               </a:rPr>
               <a:t>消费税风险指引  |  风险点 13</a:t>
             </a:r>
@@ -5118,6 +5126,7 @@
                 <a:solidFill>
                   <a:srgbClr val="FFFFFF"/>
                 </a:solidFill>
+                <a:latin typeface="Microsoft YaHei"/>
               </a:rPr>
               <a:t>消费税风险指引  |  风险点 14</a:t>
             </a:r>
@@ -5517,6 +5526,7 @@
                 <a:solidFill>
                   <a:srgbClr val="FFFFFF"/>
                 </a:solidFill>
+                <a:latin typeface="Microsoft YaHei"/>
               </a:rPr>
               <a:t>消费税风险指引  |  风险点 15</a:t>
             </a:r>
@@ -5894,6 +5904,7 @@
                 <a:solidFill>
                   <a:srgbClr val="FFFFFF"/>
                 </a:solidFill>
+                <a:latin typeface="Microsoft YaHei"/>
               </a:rPr>
               <a:t>消费税风险指引  |  风险点 1</a:t>
             </a:r>
@@ -6249,6 +6260,7 @@
                 <a:solidFill>
                   <a:srgbClr val="FFFFFF"/>
                 </a:solidFill>
+                <a:latin typeface="Microsoft YaHei"/>
               </a:rPr>
               <a:t>消费税风险指引  |  风险点 2</a:t>
             </a:r>
@@ -6626,6 +6638,7 @@
                 <a:solidFill>
                   <a:srgbClr val="FFFFFF"/>
                 </a:solidFill>
+                <a:latin typeface="Microsoft YaHei"/>
               </a:rPr>
               <a:t>消费税风险指引  |  风险点 3</a:t>
             </a:r>
@@ -7025,6 +7038,7 @@
                 <a:solidFill>
                   <a:srgbClr val="FFFFFF"/>
                 </a:solidFill>
+                <a:latin typeface="Microsoft YaHei"/>
               </a:rPr>
               <a:t>消费税风险指引  |  风险点 4</a:t>
             </a:r>
@@ -7424,6 +7438,7 @@
                 <a:solidFill>
                   <a:srgbClr val="FFFFFF"/>
                 </a:solidFill>
+                <a:latin typeface="Microsoft YaHei"/>
               </a:rPr>
               <a:t>消费税风险指引  |  风险点 5</a:t>
             </a:r>
@@ -7823,6 +7838,7 @@
                 <a:solidFill>
                   <a:srgbClr val="FFFFFF"/>
                 </a:solidFill>
+                <a:latin typeface="Microsoft YaHei"/>
               </a:rPr>
               <a:t>消费税风险指引  |  风险点 6</a:t>
             </a:r>
@@ -8222,6 +8238,7 @@
                 <a:solidFill>
                   <a:srgbClr val="FFFFFF"/>
                 </a:solidFill>
+                <a:latin typeface="Microsoft YaHei"/>
               </a:rPr>
               <a:t>消费税风险指引  |  风险点 7</a:t>
             </a:r>
@@ -8599,6 +8616,7 @@
                 <a:solidFill>
                   <a:srgbClr val="FFFFFF"/>
                 </a:solidFill>
+                <a:latin typeface="Microsoft YaHei"/>
               </a:rPr>
               <a:t>消费税风险指引  |  风险点 8</a:t>
             </a:r>
